--- a/Study material/Handling Missing Values in Machine Learning.pptx
+++ b/Study material/Handling Missing Values in Machine Learning.pptx
@@ -1,48 +1,48 @@
 
 <file path=ppt/presentation.xml><?xml version="1.0" encoding="utf-8"?>
-<p:presentation xmlns:a="http://schemas.openxmlformats.org/drawingml/2006/main" xmlns:r="http://schemas.openxmlformats.org/officeDocument/2006/relationships" xmlns:mc="http://schemas.openxmlformats.org/markup-compatibility/2006" xmlns:mv="urn:schemas-microsoft-com:mac:vml" xmlns:p="http://schemas.openxmlformats.org/presentationml/2006/main" xmlns:c="http://schemas.openxmlformats.org/drawingml/2006/chart" xmlns:dgm="http://schemas.openxmlformats.org/drawingml/2006/diagram" xmlns:o="urn:schemas-microsoft-com:office:office" xmlns:v="urn:schemas-microsoft-com:vml" xmlns:pvml="urn:schemas-microsoft-com:office:powerpoint" xmlns:com="http://schemas.openxmlformats.org/drawingml/2006/compatibility" xmlns:p14="http://schemas.microsoft.com/office/powerpoint/2010/main" xmlns:p15="http://schemas.microsoft.com/office/powerpoint/2012/main" xmlns:ahyp="http://schemas.microsoft.com/office/drawing/2018/hyperlinkcolor" autoCompressPictures="0" embedTrueTypeFonts="1" strictFirstAndLastChars="0" saveSubsetFonts="1">
+<p:presentation xmlns:a="http://schemas.openxmlformats.org/drawingml/2006/main" xmlns:r="http://schemas.openxmlformats.org/officeDocument/2006/relationships" xmlns:p="http://schemas.openxmlformats.org/presentationml/2006/main" strictFirstAndLastChars="0" embedTrueTypeFonts="1" saveSubsetFonts="1" autoCompressPictures="0">
   <p:sldMasterIdLst>
-    <p:sldMasterId id="2147483659" r:id="rId5"/>
+    <p:sldMasterId id="2147483659" r:id="rId1"/>
   </p:sldMasterIdLst>
   <p:notesMasterIdLst>
-    <p:notesMasterId r:id="rId6"/>
+    <p:notesMasterId r:id="rId16"/>
   </p:notesMasterIdLst>
   <p:sldIdLst>
-    <p:sldId id="256" r:id="rId7"/>
-    <p:sldId id="257" r:id="rId8"/>
-    <p:sldId id="258" r:id="rId9"/>
-    <p:sldId id="259" r:id="rId10"/>
-    <p:sldId id="260" r:id="rId11"/>
-    <p:sldId id="261" r:id="rId12"/>
-    <p:sldId id="262" r:id="rId13"/>
-    <p:sldId id="263" r:id="rId14"/>
-    <p:sldId id="264" r:id="rId15"/>
-    <p:sldId id="265" r:id="rId16"/>
-    <p:sldId id="266" r:id="rId17"/>
-    <p:sldId id="267" r:id="rId18"/>
-    <p:sldId id="268" r:id="rId19"/>
-    <p:sldId id="269" r:id="rId20"/>
+    <p:sldId id="256" r:id="rId2"/>
+    <p:sldId id="257" r:id="rId3"/>
+    <p:sldId id="258" r:id="rId4"/>
+    <p:sldId id="259" r:id="rId5"/>
+    <p:sldId id="260" r:id="rId6"/>
+    <p:sldId id="261" r:id="rId7"/>
+    <p:sldId id="262" r:id="rId8"/>
+    <p:sldId id="263" r:id="rId9"/>
+    <p:sldId id="264" r:id="rId10"/>
+    <p:sldId id="265" r:id="rId11"/>
+    <p:sldId id="266" r:id="rId12"/>
+    <p:sldId id="267" r:id="rId13"/>
+    <p:sldId id="268" r:id="rId14"/>
+    <p:sldId id="269" r:id="rId15"/>
   </p:sldIdLst>
-  <p:sldSz cy="5143500" cx="9144000"/>
+  <p:sldSz cx="9144000" cy="5143500" type="screen16x9"/>
   <p:notesSz cx="6858000" cy="9144000"/>
   <p:embeddedFontLst>
     <p:embeddedFont>
-      <p:font typeface="Nunito"/>
+      <p:font typeface="Roboto Mono" charset="0"/>
+      <p:regular r:id="rId17"/>
+      <p:bold r:id="rId18"/>
+      <p:italic r:id="rId19"/>
+      <p:boldItalic r:id="rId20"/>
+    </p:embeddedFont>
+    <p:embeddedFont>
+      <p:font typeface="Nunito" charset="0"/>
       <p:regular r:id="rId21"/>
       <p:bold r:id="rId22"/>
       <p:italic r:id="rId23"/>
       <p:boldItalic r:id="rId24"/>
     </p:embeddedFont>
-    <p:embeddedFont>
-      <p:font typeface="Roboto Mono"/>
-      <p:regular r:id="rId25"/>
-      <p:bold r:id="rId26"/>
-      <p:italic r:id="rId27"/>
-      <p:boldItalic r:id="rId28"/>
-    </p:embeddedFont>
   </p:embeddedFontLst>
   <p:defaultTextStyle>
-    <a:defPPr lvl="0" marR="0" rtl="0" algn="l">
+    <a:defPPr marR="0" lvl="0" algn="l" rtl="0">
       <a:lnSpc>
         <a:spcPct val="100000"/>
       </a:lnSpc>
@@ -53,7 +53,7 @@
         <a:spcPts val="0"/>
       </a:spcAft>
     </a:defPPr>
-    <a:lvl1pPr lvl="0" marR="0" rtl="0" algn="l">
+    <a:lvl1pPr marR="0" lvl="0" algn="l" rtl="0">
       <a:lnSpc>
         <a:spcPct val="100000"/>
       </a:lnSpc>
@@ -67,7 +67,7 @@
         <a:srgbClr val="000000"/>
       </a:buClr>
       <a:buFont typeface="Arial"/>
-      <a:defRPr b="0" i="0" sz="1400" u="none" cap="none" strike="noStrike">
+      <a:defRPr sz="1400" b="0" i="0" u="none" strike="noStrike" cap="none">
         <a:solidFill>
           <a:srgbClr val="000000"/>
         </a:solidFill>
@@ -77,7 +77,7 @@
         <a:sym typeface="Arial"/>
       </a:defRPr>
     </a:lvl1pPr>
-    <a:lvl2pPr lvl="1" marR="0" rtl="0" algn="l">
+    <a:lvl2pPr marR="0" lvl="1" algn="l" rtl="0">
       <a:lnSpc>
         <a:spcPct val="100000"/>
       </a:lnSpc>
@@ -91,7 +91,7 @@
         <a:srgbClr val="000000"/>
       </a:buClr>
       <a:buFont typeface="Arial"/>
-      <a:defRPr b="0" i="0" sz="1400" u="none" cap="none" strike="noStrike">
+      <a:defRPr sz="1400" b="0" i="0" u="none" strike="noStrike" cap="none">
         <a:solidFill>
           <a:srgbClr val="000000"/>
         </a:solidFill>
@@ -101,7 +101,7 @@
         <a:sym typeface="Arial"/>
       </a:defRPr>
     </a:lvl2pPr>
-    <a:lvl3pPr lvl="2" marR="0" rtl="0" algn="l">
+    <a:lvl3pPr marR="0" lvl="2" algn="l" rtl="0">
       <a:lnSpc>
         <a:spcPct val="100000"/>
       </a:lnSpc>
@@ -115,7 +115,7 @@
         <a:srgbClr val="000000"/>
       </a:buClr>
       <a:buFont typeface="Arial"/>
-      <a:defRPr b="0" i="0" sz="1400" u="none" cap="none" strike="noStrike">
+      <a:defRPr sz="1400" b="0" i="0" u="none" strike="noStrike" cap="none">
         <a:solidFill>
           <a:srgbClr val="000000"/>
         </a:solidFill>
@@ -125,7 +125,7 @@
         <a:sym typeface="Arial"/>
       </a:defRPr>
     </a:lvl3pPr>
-    <a:lvl4pPr lvl="3" marR="0" rtl="0" algn="l">
+    <a:lvl4pPr marR="0" lvl="3" algn="l" rtl="0">
       <a:lnSpc>
         <a:spcPct val="100000"/>
       </a:lnSpc>
@@ -139,7 +139,7 @@
         <a:srgbClr val="000000"/>
       </a:buClr>
       <a:buFont typeface="Arial"/>
-      <a:defRPr b="0" i="0" sz="1400" u="none" cap="none" strike="noStrike">
+      <a:defRPr sz="1400" b="0" i="0" u="none" strike="noStrike" cap="none">
         <a:solidFill>
           <a:srgbClr val="000000"/>
         </a:solidFill>
@@ -149,7 +149,7 @@
         <a:sym typeface="Arial"/>
       </a:defRPr>
     </a:lvl4pPr>
-    <a:lvl5pPr lvl="4" marR="0" rtl="0" algn="l">
+    <a:lvl5pPr marR="0" lvl="4" algn="l" rtl="0">
       <a:lnSpc>
         <a:spcPct val="100000"/>
       </a:lnSpc>
@@ -163,7 +163,7 @@
         <a:srgbClr val="000000"/>
       </a:buClr>
       <a:buFont typeface="Arial"/>
-      <a:defRPr b="0" i="0" sz="1400" u="none" cap="none" strike="noStrike">
+      <a:defRPr sz="1400" b="0" i="0" u="none" strike="noStrike" cap="none">
         <a:solidFill>
           <a:srgbClr val="000000"/>
         </a:solidFill>
@@ -173,7 +173,7 @@
         <a:sym typeface="Arial"/>
       </a:defRPr>
     </a:lvl5pPr>
-    <a:lvl6pPr lvl="5" marR="0" rtl="0" algn="l">
+    <a:lvl6pPr marR="0" lvl="5" algn="l" rtl="0">
       <a:lnSpc>
         <a:spcPct val="100000"/>
       </a:lnSpc>
@@ -187,7 +187,7 @@
         <a:srgbClr val="000000"/>
       </a:buClr>
       <a:buFont typeface="Arial"/>
-      <a:defRPr b="0" i="0" sz="1400" u="none" cap="none" strike="noStrike">
+      <a:defRPr sz="1400" b="0" i="0" u="none" strike="noStrike" cap="none">
         <a:solidFill>
           <a:srgbClr val="000000"/>
         </a:solidFill>
@@ -197,7 +197,7 @@
         <a:sym typeface="Arial"/>
       </a:defRPr>
     </a:lvl6pPr>
-    <a:lvl7pPr lvl="6" marR="0" rtl="0" algn="l">
+    <a:lvl7pPr marR="0" lvl="6" algn="l" rtl="0">
       <a:lnSpc>
         <a:spcPct val="100000"/>
       </a:lnSpc>
@@ -211,7 +211,7 @@
         <a:srgbClr val="000000"/>
       </a:buClr>
       <a:buFont typeface="Arial"/>
-      <a:defRPr b="0" i="0" sz="1400" u="none" cap="none" strike="noStrike">
+      <a:defRPr sz="1400" b="0" i="0" u="none" strike="noStrike" cap="none">
         <a:solidFill>
           <a:srgbClr val="000000"/>
         </a:solidFill>
@@ -221,7 +221,7 @@
         <a:sym typeface="Arial"/>
       </a:defRPr>
     </a:lvl7pPr>
-    <a:lvl8pPr lvl="7" marR="0" rtl="0" algn="l">
+    <a:lvl8pPr marR="0" lvl="7" algn="l" rtl="0">
       <a:lnSpc>
         <a:spcPct val="100000"/>
       </a:lnSpc>
@@ -235,7 +235,7 @@
         <a:srgbClr val="000000"/>
       </a:buClr>
       <a:buFont typeface="Arial"/>
-      <a:defRPr b="0" i="0" sz="1400" u="none" cap="none" strike="noStrike">
+      <a:defRPr sz="1400" b="0" i="0" u="none" strike="noStrike" cap="none">
         <a:solidFill>
           <a:srgbClr val="000000"/>
         </a:solidFill>
@@ -245,7 +245,7 @@
         <a:sym typeface="Arial"/>
       </a:defRPr>
     </a:lvl8pPr>
-    <a:lvl9pPr lvl="8" marR="0" rtl="0" algn="l">
+    <a:lvl9pPr marR="0" lvl="8" algn="l" rtl="0">
       <a:lnSpc>
         <a:spcPct val="100000"/>
       </a:lnSpc>
@@ -259,7 +259,7 @@
         <a:srgbClr val="000000"/>
       </a:buClr>
       <a:buFont typeface="Arial"/>
-      <a:defRPr b="0" i="0" sz="1400" u="none" cap="none" strike="noStrike">
+      <a:defRPr sz="1400" b="0" i="0" u="none" strike="noStrike" cap="none">
         <a:solidFill>
           <a:srgbClr val="000000"/>
         </a:solidFill>
@@ -272,7 +272,7 @@
   </p:defaultTextStyle>
   <p:extLst>
     <p:ext uri="{EFAFB233-063F-42B5-8137-9DF3F51BA10A}">
-      <p15:sldGuideLst>
+      <p15:sldGuideLst xmlns:ahyp="http://schemas.microsoft.com/office/drawing/2018/hyperlinkcolor" xmlns:p15="http://schemas.microsoft.com/office/powerpoint/2012/main" xmlns:p14="http://schemas.microsoft.com/office/powerpoint/2010/main" xmlns:com="http://schemas.openxmlformats.org/drawingml/2006/compatibility" xmlns:pvml="urn:schemas-microsoft-com:office:powerpoint" xmlns:v="urn:schemas-microsoft-com:vml" xmlns:o="urn:schemas-microsoft-com:office:office" xmlns:dgm="http://schemas.openxmlformats.org/drawingml/2006/diagram" xmlns:c="http://schemas.openxmlformats.org/drawingml/2006/chart" xmlns:mv="urn:schemas-microsoft-com:mac:vml" xmlns:mc="http://schemas.openxmlformats.org/markup-compatibility/2006" xmlns="">
         <p15:guide id="1" orient="horz" pos="1620">
           <p15:clr>
             <a:srgbClr val="747775"/>
@@ -290,11 +290,16 @@
 </file>
 
 <file path=ppt/notesMasters/notesMaster1.xml><?xml version="1.0" encoding="utf-8"?>
-<p:notesMaster xmlns:a="http://schemas.openxmlformats.org/drawingml/2006/main" xmlns:r="http://schemas.openxmlformats.org/officeDocument/2006/relationships" xmlns:mc="http://schemas.openxmlformats.org/markup-compatibility/2006" xmlns:mv="urn:schemas-microsoft-com:mac:vml" xmlns:p="http://schemas.openxmlformats.org/presentationml/2006/main" xmlns:c="http://schemas.openxmlformats.org/drawingml/2006/chart" xmlns:dgm="http://schemas.openxmlformats.org/drawingml/2006/diagram" xmlns:o="urn:schemas-microsoft-com:office:office" xmlns:v="urn:schemas-microsoft-com:vml" xmlns:pvml="urn:schemas-microsoft-com:office:powerpoint" xmlns:com="http://schemas.openxmlformats.org/drawingml/2006/compatibility" xmlns:p14="http://schemas.microsoft.com/office/powerpoint/2010/main" xmlns:p15="http://schemas.microsoft.com/office/powerpoint/2012/main" xmlns:ahyp="http://schemas.microsoft.com/office/drawing/2018/hyperlinkcolor">
+<p:notesMaster xmlns:a="http://schemas.openxmlformats.org/drawingml/2006/main" xmlns:r="http://schemas.openxmlformats.org/officeDocument/2006/relationships" xmlns:p="http://schemas.openxmlformats.org/presentationml/2006/main">
   <p:cSld>
+    <p:bg>
+      <p:bgRef idx="1001">
+        <a:schemeClr val="bg1"/>
+      </p:bgRef>
+    </p:bg>
     <p:spTree>
       <p:nvGrpSpPr>
-        <p:cNvPr id="2" name="Shape 2"/>
+        <p:cNvPr id="1" name="Shape 2"/>
         <p:cNvGrpSpPr/>
         <p:nvPr/>
       </p:nvGrpSpPr>
@@ -309,9 +314,11 @@
       <p:sp>
         <p:nvSpPr>
           <p:cNvPr id="3" name="Google Shape;3;n"/>
-          <p:cNvSpPr/>
+          <p:cNvSpPr>
+            <a:spLocks noGrp="1" noRot="1" noChangeAspect="1"/>
+          </p:cNvSpPr>
           <p:nvPr>
-            <p:ph idx="2" type="sldImg"/>
+            <p:ph type="sldImg" idx="2"/>
           </p:nvPr>
         </p:nvSpPr>
         <p:spPr>
@@ -320,9 +327,13 @@
             <a:ext cx="6096075" cy="3429000"/>
           </a:xfrm>
           <a:custGeom>
-            <a:rect b="b" l="l" r="r" t="t"/>
+            <a:avLst/>
+            <a:gdLst/>
+            <a:ahLst/>
+            <a:cxnLst/>
+            <a:rect l="l" t="t" r="r" b="b"/>
             <a:pathLst>
-              <a:path extrusionOk="0" h="120000" w="120000">
+              <a:path w="120000" h="120000" extrusionOk="0">
                 <a:moveTo>
                   <a:pt x="0" y="0"/>
                 </a:moveTo>
@@ -340,23 +351,25 @@
             </a:pathLst>
           </a:custGeom>
           <a:noFill/>
-          <a:ln cap="flat" cmpd="sng" w="9525">
+          <a:ln w="9525" cap="flat" cmpd="sng">
             <a:solidFill>
               <a:srgbClr val="000000"/>
             </a:solidFill>
             <a:prstDash val="solid"/>
             <a:round/>
-            <a:headEnd len="sm" w="sm" type="none"/>
-            <a:tailEnd len="sm" w="sm" type="none"/>
+            <a:headEnd type="none" w="sm" len="sm"/>
+            <a:tailEnd type="none" w="sm" len="sm"/>
           </a:ln>
         </p:spPr>
       </p:sp>
       <p:sp>
         <p:nvSpPr>
           <p:cNvPr id="4" name="Google Shape;4;n"/>
-          <p:cNvSpPr txBox="1"/>
+          <p:cNvSpPr txBox="1">
+            <a:spLocks noGrp="1"/>
+          </p:cNvSpPr>
           <p:nvPr>
-            <p:ph idx="1" type="body"/>
+            <p:ph type="body" idx="1"/>
           </p:nvPr>
         </p:nvSpPr>
         <p:spPr>
@@ -373,11 +386,11 @@
           </a:ln>
         </p:spPr>
         <p:txBody>
-          <a:bodyPr anchorCtr="0" anchor="t" bIns="91425" lIns="91425" spcFirstLastPara="1" rIns="91425" wrap="square" tIns="91425">
+          <a:bodyPr spcFirstLastPara="1" wrap="square" lIns="91425" tIns="91425" rIns="91425" bIns="91425" anchor="t" anchorCtr="0">
             <a:noAutofit/>
           </a:bodyPr>
           <a:lstStyle>
-            <a:lvl1pPr indent="-298450" lvl="0" marL="457200">
+            <a:lvl1pPr marL="457200" lvl="0" indent="-298450">
               <a:spcBef>
                 <a:spcPts val="0"/>
               </a:spcBef>
@@ -388,7 +401,7 @@
               <a:buChar char="●"/>
               <a:defRPr sz="1100"/>
             </a:lvl1pPr>
-            <a:lvl2pPr indent="-298450" lvl="1" marL="914400">
+            <a:lvl2pPr marL="914400" lvl="1" indent="-298450">
               <a:spcBef>
                 <a:spcPts val="0"/>
               </a:spcBef>
@@ -399,7 +412,7 @@
               <a:buChar char="○"/>
               <a:defRPr sz="1100"/>
             </a:lvl2pPr>
-            <a:lvl3pPr indent="-298450" lvl="2" marL="1371600">
+            <a:lvl3pPr marL="1371600" lvl="2" indent="-298450">
               <a:spcBef>
                 <a:spcPts val="0"/>
               </a:spcBef>
@@ -410,7 +423,7 @@
               <a:buChar char="■"/>
               <a:defRPr sz="1100"/>
             </a:lvl3pPr>
-            <a:lvl4pPr indent="-298450" lvl="3" marL="1828800">
+            <a:lvl4pPr marL="1828800" lvl="3" indent="-298450">
               <a:spcBef>
                 <a:spcPts val="0"/>
               </a:spcBef>
@@ -421,7 +434,7 @@
               <a:buChar char="●"/>
               <a:defRPr sz="1100"/>
             </a:lvl4pPr>
-            <a:lvl5pPr indent="-298450" lvl="4" marL="2286000">
+            <a:lvl5pPr marL="2286000" lvl="4" indent="-298450">
               <a:spcBef>
                 <a:spcPts val="0"/>
               </a:spcBef>
@@ -432,7 +445,7 @@
               <a:buChar char="○"/>
               <a:defRPr sz="1100"/>
             </a:lvl5pPr>
-            <a:lvl6pPr indent="-298450" lvl="5" marL="2743200">
+            <a:lvl6pPr marL="2743200" lvl="5" indent="-298450">
               <a:spcBef>
                 <a:spcPts val="0"/>
               </a:spcBef>
@@ -443,7 +456,7 @@
               <a:buChar char="■"/>
               <a:defRPr sz="1100"/>
             </a:lvl6pPr>
-            <a:lvl7pPr indent="-298450" lvl="6" marL="3200400">
+            <a:lvl7pPr marL="3200400" lvl="6" indent="-298450">
               <a:spcBef>
                 <a:spcPts val="0"/>
               </a:spcBef>
@@ -454,7 +467,7 @@
               <a:buChar char="●"/>
               <a:defRPr sz="1100"/>
             </a:lvl7pPr>
-            <a:lvl8pPr indent="-298450" lvl="7" marL="3657600">
+            <a:lvl8pPr marL="3657600" lvl="7" indent="-298450">
               <a:spcBef>
                 <a:spcPts val="0"/>
               </a:spcBef>
@@ -465,7 +478,7 @@
               <a:buChar char="○"/>
               <a:defRPr sz="1100"/>
             </a:lvl8pPr>
-            <a:lvl9pPr indent="-298450" lvl="8" marL="4114800">
+            <a:lvl9pPr marL="4114800" lvl="8" indent="-298450">
               <a:spcBef>
                 <a:spcPts val="0"/>
               </a:spcBef>
@@ -477,14 +490,21 @@
               <a:defRPr sz="1100"/>
             </a:lvl9pPr>
           </a:lstStyle>
-          <a:p/>
+          <a:p>
+            <a:endParaRPr/>
+          </a:p>
         </p:txBody>
       </p:sp>
     </p:spTree>
+    <p:extLst>
+      <p:ext uri="{BB962C8B-B14F-4D97-AF65-F5344CB8AC3E}">
+        <p14:creationId xmlns:p14="http://schemas.microsoft.com/office/powerpoint/2010/main" val="2396185451"/>
+      </p:ext>
+    </p:extLst>
   </p:cSld>
-  <p:clrMap accent1="accent1" accent2="accent2" accent3="accent3" accent4="accent4" accent5="accent5" accent6="accent6" bg1="lt1" bg2="dk2" tx1="dk1" tx2="lt2" folHlink="folHlink" hlink="hlink"/>
+  <p:clrMap bg1="lt1" tx1="dk1" bg2="dk2" tx2="lt2" accent1="accent1" accent2="accent2" accent3="accent3" accent4="accent4" accent5="accent5" accent6="accent6" hlink="hlink" folHlink="folHlink"/>
   <p:notesStyle>
-    <a:defPPr lvl="0" marR="0" rtl="0" algn="l">
+    <a:defPPr marR="0" lvl="0" algn="l" rtl="0">
       <a:lnSpc>
         <a:spcPct val="100000"/>
       </a:lnSpc>
@@ -495,7 +515,7 @@
         <a:spcPts val="0"/>
       </a:spcAft>
     </a:defPPr>
-    <a:lvl1pPr lvl="0" marR="0" rtl="0" algn="l">
+    <a:lvl1pPr marR="0" lvl="0" algn="l" rtl="0">
       <a:lnSpc>
         <a:spcPct val="100000"/>
       </a:lnSpc>
@@ -509,7 +529,7 @@
         <a:srgbClr val="000000"/>
       </a:buClr>
       <a:buFont typeface="Arial"/>
-      <a:defRPr b="0" i="0" sz="1400" u="none" cap="none" strike="noStrike">
+      <a:defRPr sz="1400" b="0" i="0" u="none" strike="noStrike" cap="none">
         <a:solidFill>
           <a:srgbClr val="000000"/>
         </a:solidFill>
@@ -519,7 +539,7 @@
         <a:sym typeface="Arial"/>
       </a:defRPr>
     </a:lvl1pPr>
-    <a:lvl2pPr lvl="1" marR="0" rtl="0" algn="l">
+    <a:lvl2pPr marR="0" lvl="1" algn="l" rtl="0">
       <a:lnSpc>
         <a:spcPct val="100000"/>
       </a:lnSpc>
@@ -533,7 +553,7 @@
         <a:srgbClr val="000000"/>
       </a:buClr>
       <a:buFont typeface="Arial"/>
-      <a:defRPr b="0" i="0" sz="1400" u="none" cap="none" strike="noStrike">
+      <a:defRPr sz="1400" b="0" i="0" u="none" strike="noStrike" cap="none">
         <a:solidFill>
           <a:srgbClr val="000000"/>
         </a:solidFill>
@@ -543,7 +563,7 @@
         <a:sym typeface="Arial"/>
       </a:defRPr>
     </a:lvl2pPr>
-    <a:lvl3pPr lvl="2" marR="0" rtl="0" algn="l">
+    <a:lvl3pPr marR="0" lvl="2" algn="l" rtl="0">
       <a:lnSpc>
         <a:spcPct val="100000"/>
       </a:lnSpc>
@@ -557,7 +577,7 @@
         <a:srgbClr val="000000"/>
       </a:buClr>
       <a:buFont typeface="Arial"/>
-      <a:defRPr b="0" i="0" sz="1400" u="none" cap="none" strike="noStrike">
+      <a:defRPr sz="1400" b="0" i="0" u="none" strike="noStrike" cap="none">
         <a:solidFill>
           <a:srgbClr val="000000"/>
         </a:solidFill>
@@ -567,7 +587,7 @@
         <a:sym typeface="Arial"/>
       </a:defRPr>
     </a:lvl3pPr>
-    <a:lvl4pPr lvl="3" marR="0" rtl="0" algn="l">
+    <a:lvl4pPr marR="0" lvl="3" algn="l" rtl="0">
       <a:lnSpc>
         <a:spcPct val="100000"/>
       </a:lnSpc>
@@ -581,7 +601,7 @@
         <a:srgbClr val="000000"/>
       </a:buClr>
       <a:buFont typeface="Arial"/>
-      <a:defRPr b="0" i="0" sz="1400" u="none" cap="none" strike="noStrike">
+      <a:defRPr sz="1400" b="0" i="0" u="none" strike="noStrike" cap="none">
         <a:solidFill>
           <a:srgbClr val="000000"/>
         </a:solidFill>
@@ -591,7 +611,7 @@
         <a:sym typeface="Arial"/>
       </a:defRPr>
     </a:lvl4pPr>
-    <a:lvl5pPr lvl="4" marR="0" rtl="0" algn="l">
+    <a:lvl5pPr marR="0" lvl="4" algn="l" rtl="0">
       <a:lnSpc>
         <a:spcPct val="100000"/>
       </a:lnSpc>
@@ -605,7 +625,7 @@
         <a:srgbClr val="000000"/>
       </a:buClr>
       <a:buFont typeface="Arial"/>
-      <a:defRPr b="0" i="0" sz="1400" u="none" cap="none" strike="noStrike">
+      <a:defRPr sz="1400" b="0" i="0" u="none" strike="noStrike" cap="none">
         <a:solidFill>
           <a:srgbClr val="000000"/>
         </a:solidFill>
@@ -615,7 +635,7 @@
         <a:sym typeface="Arial"/>
       </a:defRPr>
     </a:lvl5pPr>
-    <a:lvl6pPr lvl="5" marR="0" rtl="0" algn="l">
+    <a:lvl6pPr marR="0" lvl="5" algn="l" rtl="0">
       <a:lnSpc>
         <a:spcPct val="100000"/>
       </a:lnSpc>
@@ -629,7 +649,7 @@
         <a:srgbClr val="000000"/>
       </a:buClr>
       <a:buFont typeface="Arial"/>
-      <a:defRPr b="0" i="0" sz="1400" u="none" cap="none" strike="noStrike">
+      <a:defRPr sz="1400" b="0" i="0" u="none" strike="noStrike" cap="none">
         <a:solidFill>
           <a:srgbClr val="000000"/>
         </a:solidFill>
@@ -639,7 +659,7 @@
         <a:sym typeface="Arial"/>
       </a:defRPr>
     </a:lvl6pPr>
-    <a:lvl7pPr lvl="6" marR="0" rtl="0" algn="l">
+    <a:lvl7pPr marR="0" lvl="6" algn="l" rtl="0">
       <a:lnSpc>
         <a:spcPct val="100000"/>
       </a:lnSpc>
@@ -653,7 +673,7 @@
         <a:srgbClr val="000000"/>
       </a:buClr>
       <a:buFont typeface="Arial"/>
-      <a:defRPr b="0" i="0" sz="1400" u="none" cap="none" strike="noStrike">
+      <a:defRPr sz="1400" b="0" i="0" u="none" strike="noStrike" cap="none">
         <a:solidFill>
           <a:srgbClr val="000000"/>
         </a:solidFill>
@@ -663,7 +683,7 @@
         <a:sym typeface="Arial"/>
       </a:defRPr>
     </a:lvl7pPr>
-    <a:lvl8pPr lvl="7" marR="0" rtl="0" algn="l">
+    <a:lvl8pPr marR="0" lvl="7" algn="l" rtl="0">
       <a:lnSpc>
         <a:spcPct val="100000"/>
       </a:lnSpc>
@@ -677,7 +697,7 @@
         <a:srgbClr val="000000"/>
       </a:buClr>
       <a:buFont typeface="Arial"/>
-      <a:defRPr b="0" i="0" sz="1400" u="none" cap="none" strike="noStrike">
+      <a:defRPr sz="1400" b="0" i="0" u="none" strike="noStrike" cap="none">
         <a:solidFill>
           <a:srgbClr val="000000"/>
         </a:solidFill>
@@ -687,7 +707,7 @@
         <a:sym typeface="Arial"/>
       </a:defRPr>
     </a:lvl8pPr>
-    <a:lvl9pPr lvl="8" marR="0" rtl="0" algn="l">
+    <a:lvl9pPr marR="0" lvl="8" algn="l" rtl="0">
       <a:lnSpc>
         <a:spcPct val="100000"/>
       </a:lnSpc>
@@ -701,7 +721,7 @@
         <a:srgbClr val="000000"/>
       </a:buClr>
       <a:buFont typeface="Arial"/>
-      <a:defRPr b="0" i="0" sz="1400" u="none" cap="none" strike="noStrike">
+      <a:defRPr sz="1400" b="0" i="0" u="none" strike="noStrike" cap="none">
         <a:solidFill>
           <a:srgbClr val="000000"/>
         </a:solidFill>
@@ -716,11 +736,11 @@
 </file>
 
 <file path=ppt/notesSlides/notesSlide1.xml><?xml version="1.0" encoding="utf-8"?>
-<p:notes xmlns:a="http://schemas.openxmlformats.org/drawingml/2006/main" xmlns:r="http://schemas.openxmlformats.org/officeDocument/2006/relationships" xmlns:mc="http://schemas.openxmlformats.org/markup-compatibility/2006" xmlns:mv="urn:schemas-microsoft-com:mac:vml" xmlns:p="http://schemas.openxmlformats.org/presentationml/2006/main" xmlns:c="http://schemas.openxmlformats.org/drawingml/2006/chart" xmlns:dgm="http://schemas.openxmlformats.org/drawingml/2006/diagram" xmlns:o="urn:schemas-microsoft-com:office:office" xmlns:v="urn:schemas-microsoft-com:vml" xmlns:pvml="urn:schemas-microsoft-com:office:powerpoint" xmlns:com="http://schemas.openxmlformats.org/drawingml/2006/compatibility" xmlns:p14="http://schemas.microsoft.com/office/powerpoint/2010/main" xmlns:p15="http://schemas.microsoft.com/office/powerpoint/2012/main" xmlns:ahyp="http://schemas.microsoft.com/office/drawing/2018/hyperlinkcolor" showMasterPhAnim="0" showMasterSp="0">
+<p:notes xmlns:a="http://schemas.openxmlformats.org/drawingml/2006/main" xmlns:r="http://schemas.openxmlformats.org/officeDocument/2006/relationships" xmlns:p="http://schemas.openxmlformats.org/presentationml/2006/main" showMasterSp="0" showMasterPhAnim="0">
   <p:cSld>
     <p:spTree>
       <p:nvGrpSpPr>
-        <p:cNvPr id="50" name="Shape 50"/>
+        <p:cNvPr id="1" name="Shape 50"/>
         <p:cNvGrpSpPr/>
         <p:nvPr/>
       </p:nvGrpSpPr>
@@ -735,9 +755,11 @@
       <p:sp>
         <p:nvSpPr>
           <p:cNvPr id="51" name="Google Shape;51;p:notes"/>
-          <p:cNvSpPr/>
+          <p:cNvSpPr>
+            <a:spLocks noGrp="1" noRot="1" noChangeAspect="1"/>
+          </p:cNvSpPr>
           <p:nvPr>
-            <p:ph idx="2" type="sldImg"/>
+            <p:ph type="sldImg" idx="2"/>
           </p:nvPr>
         </p:nvSpPr>
         <p:spPr>
@@ -746,9 +768,13 @@
             <a:ext cx="6096075" cy="3429000"/>
           </a:xfrm>
           <a:custGeom>
-            <a:rect b="b" l="l" r="r" t="t"/>
+            <a:avLst/>
+            <a:gdLst/>
+            <a:ahLst/>
+            <a:cxnLst/>
+            <a:rect l="l" t="t" r="r" b="b"/>
             <a:pathLst>
-              <a:path extrusionOk="0" h="120000" w="120000">
+              <a:path w="120000" h="120000" extrusionOk="0">
                 <a:moveTo>
                   <a:pt x="0" y="0"/>
                 </a:moveTo>
@@ -770,9 +796,11 @@
       <p:sp>
         <p:nvSpPr>
           <p:cNvPr id="52" name="Google Shape;52;p:notes"/>
-          <p:cNvSpPr txBox="1"/>
+          <p:cNvSpPr txBox="1">
+            <a:spLocks noGrp="1"/>
+          </p:cNvSpPr>
           <p:nvPr>
-            <p:ph idx="1" type="body"/>
+            <p:ph type="body" idx="1"/>
           </p:nvPr>
         </p:nvSpPr>
         <p:spPr>
@@ -785,23 +813,20 @@
           </a:prstGeom>
         </p:spPr>
         <p:txBody>
-          <a:bodyPr anchorCtr="0" anchor="t" bIns="91425" lIns="91425" spcFirstLastPara="1" rIns="91425" wrap="square" tIns="91425">
+          <a:bodyPr spcFirstLastPara="1" wrap="square" lIns="91425" tIns="91425" rIns="91425" bIns="91425" anchor="t" anchorCtr="0">
             <a:noAutofit/>
           </a:bodyPr>
           <a:lstStyle/>
           <a:p>
-            <a:pPr indent="0" lvl="0" marL="0" rtl="0" algn="l">
-              <a:spcBef>
-                <a:spcPts val="0"/>
-              </a:spcBef>
-              <a:spcAft>
-                <a:spcPts val="0"/>
-              </a:spcAft>
-              <a:buNone/>
-            </a:pPr>
-            <a:r>
-              <a:t/>
-            </a:r>
+            <a:pPr marL="0" lvl="0" indent="0" algn="l" rtl="0">
+              <a:spcBef>
+                <a:spcPts val="0"/>
+              </a:spcBef>
+              <a:spcAft>
+                <a:spcPts val="0"/>
+              </a:spcAft>
+              <a:buNone/>
+            </a:pPr>
             <a:endParaRPr/>
           </a:p>
         </p:txBody>
@@ -815,11 +840,11 @@
 </file>
 
 <file path=ppt/notesSlides/notesSlide10.xml><?xml version="1.0" encoding="utf-8"?>
-<p:notes xmlns:a="http://schemas.openxmlformats.org/drawingml/2006/main" xmlns:r="http://schemas.openxmlformats.org/officeDocument/2006/relationships" xmlns:mc="http://schemas.openxmlformats.org/markup-compatibility/2006" xmlns:mv="urn:schemas-microsoft-com:mac:vml" xmlns:p="http://schemas.openxmlformats.org/presentationml/2006/main" xmlns:c="http://schemas.openxmlformats.org/drawingml/2006/chart" xmlns:dgm="http://schemas.openxmlformats.org/drawingml/2006/diagram" xmlns:o="urn:schemas-microsoft-com:office:office" xmlns:v="urn:schemas-microsoft-com:vml" xmlns:pvml="urn:schemas-microsoft-com:office:powerpoint" xmlns:com="http://schemas.openxmlformats.org/drawingml/2006/compatibility" xmlns:p14="http://schemas.microsoft.com/office/powerpoint/2010/main" xmlns:p15="http://schemas.microsoft.com/office/powerpoint/2012/main" xmlns:ahyp="http://schemas.microsoft.com/office/drawing/2018/hyperlinkcolor" showMasterPhAnim="0" showMasterSp="0">
+<p:notes xmlns:a="http://schemas.openxmlformats.org/drawingml/2006/main" xmlns:r="http://schemas.openxmlformats.org/officeDocument/2006/relationships" xmlns:p="http://schemas.openxmlformats.org/presentationml/2006/main" showMasterSp="0" showMasterPhAnim="0">
   <p:cSld>
     <p:spTree>
       <p:nvGrpSpPr>
-        <p:cNvPr id="106" name="Shape 106"/>
+        <p:cNvPr id="1" name="Shape 106"/>
         <p:cNvGrpSpPr/>
         <p:nvPr/>
       </p:nvGrpSpPr>
@@ -834,9 +859,11 @@
       <p:sp>
         <p:nvSpPr>
           <p:cNvPr id="107" name="Google Shape;107;g3eead58a7e8_0_27:notes"/>
-          <p:cNvSpPr/>
+          <p:cNvSpPr>
+            <a:spLocks noGrp="1" noRot="1" noChangeAspect="1"/>
+          </p:cNvSpPr>
           <p:nvPr>
-            <p:ph idx="2" type="sldImg"/>
+            <p:ph type="sldImg" idx="2"/>
           </p:nvPr>
         </p:nvSpPr>
         <p:spPr>
@@ -845,9 +872,13 @@
             <a:ext cx="6096000" cy="3429000"/>
           </a:xfrm>
           <a:custGeom>
-            <a:rect b="b" l="l" r="r" t="t"/>
+            <a:avLst/>
+            <a:gdLst/>
+            <a:ahLst/>
+            <a:cxnLst/>
+            <a:rect l="l" t="t" r="r" b="b"/>
             <a:pathLst>
-              <a:path extrusionOk="0" h="120000" w="120000">
+              <a:path w="120000" h="120000" extrusionOk="0">
                 <a:moveTo>
                   <a:pt x="0" y="0"/>
                 </a:moveTo>
@@ -869,9 +900,11 @@
       <p:sp>
         <p:nvSpPr>
           <p:cNvPr id="108" name="Google Shape;108;g3eead58a7e8_0_27:notes"/>
-          <p:cNvSpPr txBox="1"/>
+          <p:cNvSpPr txBox="1">
+            <a:spLocks noGrp="1"/>
+          </p:cNvSpPr>
           <p:nvPr>
-            <p:ph idx="1" type="body"/>
+            <p:ph type="body" idx="1"/>
           </p:nvPr>
         </p:nvSpPr>
         <p:spPr>
@@ -884,23 +917,20 @@
           </a:prstGeom>
         </p:spPr>
         <p:txBody>
-          <a:bodyPr anchorCtr="0" anchor="t" bIns="91425" lIns="91425" spcFirstLastPara="1" rIns="91425" wrap="square" tIns="91425">
+          <a:bodyPr spcFirstLastPara="1" wrap="square" lIns="91425" tIns="91425" rIns="91425" bIns="91425" anchor="t" anchorCtr="0">
             <a:noAutofit/>
           </a:bodyPr>
           <a:lstStyle/>
           <a:p>
-            <a:pPr indent="0" lvl="0" marL="0" rtl="0" algn="l">
-              <a:spcBef>
-                <a:spcPts val="0"/>
-              </a:spcBef>
-              <a:spcAft>
-                <a:spcPts val="0"/>
-              </a:spcAft>
-              <a:buNone/>
-            </a:pPr>
-            <a:r>
-              <a:t/>
-            </a:r>
+            <a:pPr marL="0" lvl="0" indent="0" algn="l" rtl="0">
+              <a:spcBef>
+                <a:spcPts val="0"/>
+              </a:spcBef>
+              <a:spcAft>
+                <a:spcPts val="0"/>
+              </a:spcAft>
+              <a:buNone/>
+            </a:pPr>
             <a:endParaRPr/>
           </a:p>
         </p:txBody>
@@ -914,11 +944,11 @@
 </file>
 
 <file path=ppt/notesSlides/notesSlide11.xml><?xml version="1.0" encoding="utf-8"?>
-<p:notes xmlns:a="http://schemas.openxmlformats.org/drawingml/2006/main" xmlns:r="http://schemas.openxmlformats.org/officeDocument/2006/relationships" xmlns:mc="http://schemas.openxmlformats.org/markup-compatibility/2006" xmlns:mv="urn:schemas-microsoft-com:mac:vml" xmlns:p="http://schemas.openxmlformats.org/presentationml/2006/main" xmlns:c="http://schemas.openxmlformats.org/drawingml/2006/chart" xmlns:dgm="http://schemas.openxmlformats.org/drawingml/2006/diagram" xmlns:o="urn:schemas-microsoft-com:office:office" xmlns:v="urn:schemas-microsoft-com:vml" xmlns:pvml="urn:schemas-microsoft-com:office:powerpoint" xmlns:com="http://schemas.openxmlformats.org/drawingml/2006/compatibility" xmlns:p14="http://schemas.microsoft.com/office/powerpoint/2010/main" xmlns:p15="http://schemas.microsoft.com/office/powerpoint/2012/main" xmlns:ahyp="http://schemas.microsoft.com/office/drawing/2018/hyperlinkcolor" showMasterPhAnim="0" showMasterSp="0">
+<p:notes xmlns:a="http://schemas.openxmlformats.org/drawingml/2006/main" xmlns:r="http://schemas.openxmlformats.org/officeDocument/2006/relationships" xmlns:p="http://schemas.openxmlformats.org/presentationml/2006/main" showMasterSp="0" showMasterPhAnim="0">
   <p:cSld>
     <p:spTree>
       <p:nvGrpSpPr>
-        <p:cNvPr id="111" name="Shape 111"/>
+        <p:cNvPr id="1" name="Shape 111"/>
         <p:cNvGrpSpPr/>
         <p:nvPr/>
       </p:nvGrpSpPr>
@@ -933,9 +963,11 @@
       <p:sp>
         <p:nvSpPr>
           <p:cNvPr id="112" name="Google Shape;112;g3eead58a7e8_0_30:notes"/>
-          <p:cNvSpPr/>
+          <p:cNvSpPr>
+            <a:spLocks noGrp="1" noRot="1" noChangeAspect="1"/>
+          </p:cNvSpPr>
           <p:nvPr>
-            <p:ph idx="2" type="sldImg"/>
+            <p:ph type="sldImg" idx="2"/>
           </p:nvPr>
         </p:nvSpPr>
         <p:spPr>
@@ -944,9 +976,13 @@
             <a:ext cx="6096000" cy="3429000"/>
           </a:xfrm>
           <a:custGeom>
-            <a:rect b="b" l="l" r="r" t="t"/>
+            <a:avLst/>
+            <a:gdLst/>
+            <a:ahLst/>
+            <a:cxnLst/>
+            <a:rect l="l" t="t" r="r" b="b"/>
             <a:pathLst>
-              <a:path extrusionOk="0" h="120000" w="120000">
+              <a:path w="120000" h="120000" extrusionOk="0">
                 <a:moveTo>
                   <a:pt x="0" y="0"/>
                 </a:moveTo>
@@ -968,9 +1004,11 @@
       <p:sp>
         <p:nvSpPr>
           <p:cNvPr id="113" name="Google Shape;113;g3eead58a7e8_0_30:notes"/>
-          <p:cNvSpPr txBox="1"/>
+          <p:cNvSpPr txBox="1">
+            <a:spLocks noGrp="1"/>
+          </p:cNvSpPr>
           <p:nvPr>
-            <p:ph idx="1" type="body"/>
+            <p:ph type="body" idx="1"/>
           </p:nvPr>
         </p:nvSpPr>
         <p:spPr>
@@ -983,23 +1021,20 @@
           </a:prstGeom>
         </p:spPr>
         <p:txBody>
-          <a:bodyPr anchorCtr="0" anchor="t" bIns="91425" lIns="91425" spcFirstLastPara="1" rIns="91425" wrap="square" tIns="91425">
+          <a:bodyPr spcFirstLastPara="1" wrap="square" lIns="91425" tIns="91425" rIns="91425" bIns="91425" anchor="t" anchorCtr="0">
             <a:noAutofit/>
           </a:bodyPr>
           <a:lstStyle/>
           <a:p>
-            <a:pPr indent="0" lvl="0" marL="0" rtl="0" algn="l">
-              <a:spcBef>
-                <a:spcPts val="0"/>
-              </a:spcBef>
-              <a:spcAft>
-                <a:spcPts val="0"/>
-              </a:spcAft>
-              <a:buNone/>
-            </a:pPr>
-            <a:r>
-              <a:t/>
-            </a:r>
+            <a:pPr marL="0" lvl="0" indent="0" algn="l" rtl="0">
+              <a:spcBef>
+                <a:spcPts val="0"/>
+              </a:spcBef>
+              <a:spcAft>
+                <a:spcPts val="0"/>
+              </a:spcAft>
+              <a:buNone/>
+            </a:pPr>
             <a:endParaRPr/>
           </a:p>
         </p:txBody>
@@ -1013,11 +1048,11 @@
 </file>
 
 <file path=ppt/notesSlides/notesSlide12.xml><?xml version="1.0" encoding="utf-8"?>
-<p:notes xmlns:a="http://schemas.openxmlformats.org/drawingml/2006/main" xmlns:r="http://schemas.openxmlformats.org/officeDocument/2006/relationships" xmlns:mc="http://schemas.openxmlformats.org/markup-compatibility/2006" xmlns:mv="urn:schemas-microsoft-com:mac:vml" xmlns:p="http://schemas.openxmlformats.org/presentationml/2006/main" xmlns:c="http://schemas.openxmlformats.org/drawingml/2006/chart" xmlns:dgm="http://schemas.openxmlformats.org/drawingml/2006/diagram" xmlns:o="urn:schemas-microsoft-com:office:office" xmlns:v="urn:schemas-microsoft-com:vml" xmlns:pvml="urn:schemas-microsoft-com:office:powerpoint" xmlns:com="http://schemas.openxmlformats.org/drawingml/2006/compatibility" xmlns:p14="http://schemas.microsoft.com/office/powerpoint/2010/main" xmlns:p15="http://schemas.microsoft.com/office/powerpoint/2012/main" xmlns:ahyp="http://schemas.microsoft.com/office/drawing/2018/hyperlinkcolor" showMasterPhAnim="0" showMasterSp="0">
+<p:notes xmlns:a="http://schemas.openxmlformats.org/drawingml/2006/main" xmlns:r="http://schemas.openxmlformats.org/officeDocument/2006/relationships" xmlns:p="http://schemas.openxmlformats.org/presentationml/2006/main" showMasterSp="0" showMasterPhAnim="0">
   <p:cSld>
     <p:spTree>
       <p:nvGrpSpPr>
-        <p:cNvPr id="118" name="Shape 118"/>
+        <p:cNvPr id="1" name="Shape 118"/>
         <p:cNvGrpSpPr/>
         <p:nvPr/>
       </p:nvGrpSpPr>
@@ -1032,9 +1067,11 @@
       <p:sp>
         <p:nvSpPr>
           <p:cNvPr id="119" name="Google Shape;119;g3eead58a7e8_0_102:notes"/>
-          <p:cNvSpPr/>
+          <p:cNvSpPr>
+            <a:spLocks noGrp="1" noRot="1" noChangeAspect="1"/>
+          </p:cNvSpPr>
           <p:nvPr>
-            <p:ph idx="2" type="sldImg"/>
+            <p:ph type="sldImg" idx="2"/>
           </p:nvPr>
         </p:nvSpPr>
         <p:spPr>
@@ -1043,9 +1080,13 @@
             <a:ext cx="6096000" cy="3429000"/>
           </a:xfrm>
           <a:custGeom>
-            <a:rect b="b" l="l" r="r" t="t"/>
+            <a:avLst/>
+            <a:gdLst/>
+            <a:ahLst/>
+            <a:cxnLst/>
+            <a:rect l="l" t="t" r="r" b="b"/>
             <a:pathLst>
-              <a:path extrusionOk="0" h="120000" w="120000">
+              <a:path w="120000" h="120000" extrusionOk="0">
                 <a:moveTo>
                   <a:pt x="0" y="0"/>
                 </a:moveTo>
@@ -1067,9 +1108,11 @@
       <p:sp>
         <p:nvSpPr>
           <p:cNvPr id="120" name="Google Shape;120;g3eead58a7e8_0_102:notes"/>
-          <p:cNvSpPr txBox="1"/>
+          <p:cNvSpPr txBox="1">
+            <a:spLocks noGrp="1"/>
+          </p:cNvSpPr>
           <p:nvPr>
-            <p:ph idx="1" type="body"/>
+            <p:ph type="body" idx="1"/>
           </p:nvPr>
         </p:nvSpPr>
         <p:spPr>
@@ -1082,23 +1125,20 @@
           </a:prstGeom>
         </p:spPr>
         <p:txBody>
-          <a:bodyPr anchorCtr="0" anchor="t" bIns="91425" lIns="91425" spcFirstLastPara="1" rIns="91425" wrap="square" tIns="91425">
+          <a:bodyPr spcFirstLastPara="1" wrap="square" lIns="91425" tIns="91425" rIns="91425" bIns="91425" anchor="t" anchorCtr="0">
             <a:noAutofit/>
           </a:bodyPr>
           <a:lstStyle/>
           <a:p>
-            <a:pPr indent="0" lvl="0" marL="0" rtl="0" algn="l">
-              <a:spcBef>
-                <a:spcPts val="0"/>
-              </a:spcBef>
-              <a:spcAft>
-                <a:spcPts val="0"/>
-              </a:spcAft>
-              <a:buNone/>
-            </a:pPr>
-            <a:r>
-              <a:t/>
-            </a:r>
+            <a:pPr marL="0" lvl="0" indent="0" algn="l" rtl="0">
+              <a:spcBef>
+                <a:spcPts val="0"/>
+              </a:spcBef>
+              <a:spcAft>
+                <a:spcPts val="0"/>
+              </a:spcAft>
+              <a:buNone/>
+            </a:pPr>
             <a:endParaRPr/>
           </a:p>
         </p:txBody>
@@ -1112,11 +1152,11 @@
 </file>
 
 <file path=ppt/notesSlides/notesSlide13.xml><?xml version="1.0" encoding="utf-8"?>
-<p:notes xmlns:a="http://schemas.openxmlformats.org/drawingml/2006/main" xmlns:r="http://schemas.openxmlformats.org/officeDocument/2006/relationships" xmlns:mc="http://schemas.openxmlformats.org/markup-compatibility/2006" xmlns:mv="urn:schemas-microsoft-com:mac:vml" xmlns:p="http://schemas.openxmlformats.org/presentationml/2006/main" xmlns:c="http://schemas.openxmlformats.org/drawingml/2006/chart" xmlns:dgm="http://schemas.openxmlformats.org/drawingml/2006/diagram" xmlns:o="urn:schemas-microsoft-com:office:office" xmlns:v="urn:schemas-microsoft-com:vml" xmlns:pvml="urn:schemas-microsoft-com:office:powerpoint" xmlns:com="http://schemas.openxmlformats.org/drawingml/2006/compatibility" xmlns:p14="http://schemas.microsoft.com/office/powerpoint/2010/main" xmlns:p15="http://schemas.microsoft.com/office/powerpoint/2012/main" xmlns:ahyp="http://schemas.microsoft.com/office/drawing/2018/hyperlinkcolor" showMasterPhAnim="0" showMasterSp="0">
+<p:notes xmlns:a="http://schemas.openxmlformats.org/drawingml/2006/main" xmlns:r="http://schemas.openxmlformats.org/officeDocument/2006/relationships" xmlns:p="http://schemas.openxmlformats.org/presentationml/2006/main" showMasterSp="0" showMasterPhAnim="0">
   <p:cSld>
     <p:spTree>
       <p:nvGrpSpPr>
-        <p:cNvPr id="123" name="Shape 123"/>
+        <p:cNvPr id="1" name="Shape 123"/>
         <p:cNvGrpSpPr/>
         <p:nvPr/>
       </p:nvGrpSpPr>
@@ -1131,20 +1171,26 @@
       <p:sp>
         <p:nvSpPr>
           <p:cNvPr id="124" name="Google Shape;124;g3eead58a7e8_0_107:notes"/>
-          <p:cNvSpPr/>
+          <p:cNvSpPr>
+            <a:spLocks noGrp="1" noRot="1" noChangeAspect="1"/>
+          </p:cNvSpPr>
           <p:nvPr>
-            <p:ph idx="2" type="sldImg"/>
+            <p:ph type="sldImg" idx="2"/>
           </p:nvPr>
         </p:nvSpPr>
         <p:spPr>
           <a:xfrm>
-            <a:off x="381300" y="685800"/>
+            <a:off x="381000" y="685800"/>
             <a:ext cx="6096000" cy="3429000"/>
           </a:xfrm>
           <a:custGeom>
-            <a:rect b="b" l="l" r="r" t="t"/>
+            <a:avLst/>
+            <a:gdLst/>
+            <a:ahLst/>
+            <a:cxnLst/>
+            <a:rect l="l" t="t" r="r" b="b"/>
             <a:pathLst>
-              <a:path extrusionOk="0" h="120000" w="120000">
+              <a:path w="120000" h="120000" extrusionOk="0">
                 <a:moveTo>
                   <a:pt x="0" y="0"/>
                 </a:moveTo>
@@ -1166,9 +1212,11 @@
       <p:sp>
         <p:nvSpPr>
           <p:cNvPr id="125" name="Google Shape;125;g3eead58a7e8_0_107:notes"/>
-          <p:cNvSpPr txBox="1"/>
+          <p:cNvSpPr txBox="1">
+            <a:spLocks noGrp="1"/>
+          </p:cNvSpPr>
           <p:nvPr>
-            <p:ph idx="1" type="body"/>
+            <p:ph type="body" idx="1"/>
           </p:nvPr>
         </p:nvSpPr>
         <p:spPr>
@@ -1181,23 +1229,20 @@
           </a:prstGeom>
         </p:spPr>
         <p:txBody>
-          <a:bodyPr anchorCtr="0" anchor="t" bIns="91425" lIns="91425" spcFirstLastPara="1" rIns="91425" wrap="square" tIns="91425">
+          <a:bodyPr spcFirstLastPara="1" wrap="square" lIns="91425" tIns="91425" rIns="91425" bIns="91425" anchor="t" anchorCtr="0">
             <a:noAutofit/>
           </a:bodyPr>
           <a:lstStyle/>
           <a:p>
-            <a:pPr indent="0" lvl="0" marL="0" rtl="0" algn="l">
-              <a:spcBef>
-                <a:spcPts val="0"/>
-              </a:spcBef>
-              <a:spcAft>
-                <a:spcPts val="0"/>
-              </a:spcAft>
-              <a:buNone/>
-            </a:pPr>
-            <a:r>
-              <a:t/>
-            </a:r>
+            <a:pPr marL="0" lvl="0" indent="0" algn="l" rtl="0">
+              <a:spcBef>
+                <a:spcPts val="0"/>
+              </a:spcBef>
+              <a:spcAft>
+                <a:spcPts val="0"/>
+              </a:spcAft>
+              <a:buNone/>
+            </a:pPr>
             <a:endParaRPr/>
           </a:p>
         </p:txBody>
@@ -1211,11 +1256,11 @@
 </file>
 
 <file path=ppt/notesSlides/notesSlide14.xml><?xml version="1.0" encoding="utf-8"?>
-<p:notes xmlns:a="http://schemas.openxmlformats.org/drawingml/2006/main" xmlns:r="http://schemas.openxmlformats.org/officeDocument/2006/relationships" xmlns:mc="http://schemas.openxmlformats.org/markup-compatibility/2006" xmlns:mv="urn:schemas-microsoft-com:mac:vml" xmlns:p="http://schemas.openxmlformats.org/presentationml/2006/main" xmlns:c="http://schemas.openxmlformats.org/drawingml/2006/chart" xmlns:dgm="http://schemas.openxmlformats.org/drawingml/2006/diagram" xmlns:o="urn:schemas-microsoft-com:office:office" xmlns:v="urn:schemas-microsoft-com:vml" xmlns:pvml="urn:schemas-microsoft-com:office:powerpoint" xmlns:com="http://schemas.openxmlformats.org/drawingml/2006/compatibility" xmlns:p14="http://schemas.microsoft.com/office/powerpoint/2010/main" xmlns:p15="http://schemas.microsoft.com/office/powerpoint/2012/main" xmlns:ahyp="http://schemas.microsoft.com/office/drawing/2018/hyperlinkcolor" showMasterPhAnim="0" showMasterSp="0">
+<p:notes xmlns:a="http://schemas.openxmlformats.org/drawingml/2006/main" xmlns:r="http://schemas.openxmlformats.org/officeDocument/2006/relationships" xmlns:p="http://schemas.openxmlformats.org/presentationml/2006/main" showMasterSp="0" showMasterPhAnim="0">
   <p:cSld>
     <p:spTree>
       <p:nvGrpSpPr>
-        <p:cNvPr id="131" name="Shape 131"/>
+        <p:cNvPr id="1" name="Shape 131"/>
         <p:cNvGrpSpPr/>
         <p:nvPr/>
       </p:nvGrpSpPr>
@@ -1230,9 +1275,11 @@
       <p:sp>
         <p:nvSpPr>
           <p:cNvPr id="132" name="Google Shape;132;g3eead58a7e8_0_110:notes"/>
-          <p:cNvSpPr/>
+          <p:cNvSpPr>
+            <a:spLocks noGrp="1" noRot="1" noChangeAspect="1"/>
+          </p:cNvSpPr>
           <p:nvPr>
-            <p:ph idx="2" type="sldImg"/>
+            <p:ph type="sldImg" idx="2"/>
           </p:nvPr>
         </p:nvSpPr>
         <p:spPr>
@@ -1241,9 +1288,13 @@
             <a:ext cx="6096000" cy="3429000"/>
           </a:xfrm>
           <a:custGeom>
-            <a:rect b="b" l="l" r="r" t="t"/>
+            <a:avLst/>
+            <a:gdLst/>
+            <a:ahLst/>
+            <a:cxnLst/>
+            <a:rect l="l" t="t" r="r" b="b"/>
             <a:pathLst>
-              <a:path extrusionOk="0" h="120000" w="120000">
+              <a:path w="120000" h="120000" extrusionOk="0">
                 <a:moveTo>
                   <a:pt x="0" y="0"/>
                 </a:moveTo>
@@ -1265,9 +1316,11 @@
       <p:sp>
         <p:nvSpPr>
           <p:cNvPr id="133" name="Google Shape;133;g3eead58a7e8_0_110:notes"/>
-          <p:cNvSpPr txBox="1"/>
+          <p:cNvSpPr txBox="1">
+            <a:spLocks noGrp="1"/>
+          </p:cNvSpPr>
           <p:nvPr>
-            <p:ph idx="1" type="body"/>
+            <p:ph type="body" idx="1"/>
           </p:nvPr>
         </p:nvSpPr>
         <p:spPr>
@@ -1280,23 +1333,20 @@
           </a:prstGeom>
         </p:spPr>
         <p:txBody>
-          <a:bodyPr anchorCtr="0" anchor="t" bIns="91425" lIns="91425" spcFirstLastPara="1" rIns="91425" wrap="square" tIns="91425">
+          <a:bodyPr spcFirstLastPara="1" wrap="square" lIns="91425" tIns="91425" rIns="91425" bIns="91425" anchor="t" anchorCtr="0">
             <a:noAutofit/>
           </a:bodyPr>
           <a:lstStyle/>
           <a:p>
-            <a:pPr indent="0" lvl="0" marL="0" rtl="0" algn="l">
-              <a:spcBef>
-                <a:spcPts val="0"/>
-              </a:spcBef>
-              <a:spcAft>
-                <a:spcPts val="0"/>
-              </a:spcAft>
-              <a:buNone/>
-            </a:pPr>
-            <a:r>
-              <a:t/>
-            </a:r>
+            <a:pPr marL="0" lvl="0" indent="0" algn="l" rtl="0">
+              <a:spcBef>
+                <a:spcPts val="0"/>
+              </a:spcBef>
+              <a:spcAft>
+                <a:spcPts val="0"/>
+              </a:spcAft>
+              <a:buNone/>
+            </a:pPr>
             <a:endParaRPr/>
           </a:p>
         </p:txBody>
@@ -1310,11 +1360,11 @@
 </file>
 
 <file path=ppt/notesSlides/notesSlide2.xml><?xml version="1.0" encoding="utf-8"?>
-<p:notes xmlns:a="http://schemas.openxmlformats.org/drawingml/2006/main" xmlns:r="http://schemas.openxmlformats.org/officeDocument/2006/relationships" xmlns:mc="http://schemas.openxmlformats.org/markup-compatibility/2006" xmlns:mv="urn:schemas-microsoft-com:mac:vml" xmlns:p="http://schemas.openxmlformats.org/presentationml/2006/main" xmlns:c="http://schemas.openxmlformats.org/drawingml/2006/chart" xmlns:dgm="http://schemas.openxmlformats.org/drawingml/2006/diagram" xmlns:o="urn:schemas-microsoft-com:office:office" xmlns:v="urn:schemas-microsoft-com:vml" xmlns:pvml="urn:schemas-microsoft-com:office:powerpoint" xmlns:com="http://schemas.openxmlformats.org/drawingml/2006/compatibility" xmlns:p14="http://schemas.microsoft.com/office/powerpoint/2010/main" xmlns:p15="http://schemas.microsoft.com/office/powerpoint/2012/main" xmlns:ahyp="http://schemas.microsoft.com/office/drawing/2018/hyperlinkcolor" showMasterPhAnim="0" showMasterSp="0">
+<p:notes xmlns:a="http://schemas.openxmlformats.org/drawingml/2006/main" xmlns:r="http://schemas.openxmlformats.org/officeDocument/2006/relationships" xmlns:p="http://schemas.openxmlformats.org/presentationml/2006/main" showMasterSp="0" showMasterPhAnim="0">
   <p:cSld>
     <p:spTree>
       <p:nvGrpSpPr>
-        <p:cNvPr id="55" name="Shape 55"/>
+        <p:cNvPr id="1" name="Shape 55"/>
         <p:cNvGrpSpPr/>
         <p:nvPr/>
       </p:nvGrpSpPr>
@@ -1329,20 +1379,26 @@
       <p:sp>
         <p:nvSpPr>
           <p:cNvPr id="56" name="Google Shape;56;g3eead58a7e8_0_1:notes"/>
-          <p:cNvSpPr/>
+          <p:cNvSpPr>
+            <a:spLocks noGrp="1" noRot="1" noChangeAspect="1"/>
+          </p:cNvSpPr>
           <p:nvPr>
-            <p:ph idx="2" type="sldImg"/>
+            <p:ph type="sldImg" idx="2"/>
           </p:nvPr>
         </p:nvSpPr>
         <p:spPr>
           <a:xfrm>
-            <a:off x="381300" y="685800"/>
+            <a:off x="381000" y="685800"/>
             <a:ext cx="6096000" cy="3429000"/>
           </a:xfrm>
           <a:custGeom>
-            <a:rect b="b" l="l" r="r" t="t"/>
+            <a:avLst/>
+            <a:gdLst/>
+            <a:ahLst/>
+            <a:cxnLst/>
+            <a:rect l="l" t="t" r="r" b="b"/>
             <a:pathLst>
-              <a:path extrusionOk="0" h="120000" w="120000">
+              <a:path w="120000" h="120000" extrusionOk="0">
                 <a:moveTo>
                   <a:pt x="0" y="0"/>
                 </a:moveTo>
@@ -1364,9 +1420,11 @@
       <p:sp>
         <p:nvSpPr>
           <p:cNvPr id="57" name="Google Shape;57;g3eead58a7e8_0_1:notes"/>
-          <p:cNvSpPr txBox="1"/>
+          <p:cNvSpPr txBox="1">
+            <a:spLocks noGrp="1"/>
+          </p:cNvSpPr>
           <p:nvPr>
-            <p:ph idx="1" type="body"/>
+            <p:ph type="body" idx="1"/>
           </p:nvPr>
         </p:nvSpPr>
         <p:spPr>
@@ -1379,23 +1437,20 @@
           </a:prstGeom>
         </p:spPr>
         <p:txBody>
-          <a:bodyPr anchorCtr="0" anchor="t" bIns="91425" lIns="91425" spcFirstLastPara="1" rIns="91425" wrap="square" tIns="91425">
+          <a:bodyPr spcFirstLastPara="1" wrap="square" lIns="91425" tIns="91425" rIns="91425" bIns="91425" anchor="t" anchorCtr="0">
             <a:noAutofit/>
           </a:bodyPr>
           <a:lstStyle/>
           <a:p>
-            <a:pPr indent="0" lvl="0" marL="0" rtl="0" algn="l">
-              <a:spcBef>
-                <a:spcPts val="0"/>
-              </a:spcBef>
-              <a:spcAft>
-                <a:spcPts val="0"/>
-              </a:spcAft>
-              <a:buNone/>
-            </a:pPr>
-            <a:r>
-              <a:t/>
-            </a:r>
+            <a:pPr marL="0" lvl="0" indent="0" algn="l" rtl="0">
+              <a:spcBef>
+                <a:spcPts val="0"/>
+              </a:spcBef>
+              <a:spcAft>
+                <a:spcPts val="0"/>
+              </a:spcAft>
+              <a:buNone/>
+            </a:pPr>
             <a:endParaRPr/>
           </a:p>
         </p:txBody>
@@ -1409,11 +1464,11 @@
 </file>
 
 <file path=ppt/notesSlides/notesSlide3.xml><?xml version="1.0" encoding="utf-8"?>
-<p:notes xmlns:a="http://schemas.openxmlformats.org/drawingml/2006/main" xmlns:r="http://schemas.openxmlformats.org/officeDocument/2006/relationships" xmlns:mc="http://schemas.openxmlformats.org/markup-compatibility/2006" xmlns:mv="urn:schemas-microsoft-com:mac:vml" xmlns:p="http://schemas.openxmlformats.org/presentationml/2006/main" xmlns:c="http://schemas.openxmlformats.org/drawingml/2006/chart" xmlns:dgm="http://schemas.openxmlformats.org/drawingml/2006/diagram" xmlns:o="urn:schemas-microsoft-com:office:office" xmlns:v="urn:schemas-microsoft-com:vml" xmlns:pvml="urn:schemas-microsoft-com:office:powerpoint" xmlns:com="http://schemas.openxmlformats.org/drawingml/2006/compatibility" xmlns:p14="http://schemas.microsoft.com/office/powerpoint/2010/main" xmlns:p15="http://schemas.microsoft.com/office/powerpoint/2012/main" xmlns:ahyp="http://schemas.microsoft.com/office/drawing/2018/hyperlinkcolor" showMasterPhAnim="0" showMasterSp="0">
+<p:notes xmlns:a="http://schemas.openxmlformats.org/drawingml/2006/main" xmlns:r="http://schemas.openxmlformats.org/officeDocument/2006/relationships" xmlns:p="http://schemas.openxmlformats.org/presentationml/2006/main" showMasterSp="0" showMasterPhAnim="0">
   <p:cSld>
     <p:spTree>
       <p:nvGrpSpPr>
-        <p:cNvPr id="61" name="Shape 61"/>
+        <p:cNvPr id="1" name="Shape 61"/>
         <p:cNvGrpSpPr/>
         <p:nvPr/>
       </p:nvGrpSpPr>
@@ -1428,20 +1483,26 @@
       <p:sp>
         <p:nvSpPr>
           <p:cNvPr id="62" name="Google Shape;62;g3eead58a7e8_0_6:notes"/>
-          <p:cNvSpPr/>
+          <p:cNvSpPr>
+            <a:spLocks noGrp="1" noRot="1" noChangeAspect="1"/>
+          </p:cNvSpPr>
           <p:nvPr>
-            <p:ph idx="2" type="sldImg"/>
+            <p:ph type="sldImg" idx="2"/>
           </p:nvPr>
         </p:nvSpPr>
         <p:spPr>
           <a:xfrm>
-            <a:off x="381300" y="685800"/>
+            <a:off x="381000" y="685800"/>
             <a:ext cx="6096000" cy="3429000"/>
           </a:xfrm>
           <a:custGeom>
-            <a:rect b="b" l="l" r="r" t="t"/>
+            <a:avLst/>
+            <a:gdLst/>
+            <a:ahLst/>
+            <a:cxnLst/>
+            <a:rect l="l" t="t" r="r" b="b"/>
             <a:pathLst>
-              <a:path extrusionOk="0" h="120000" w="120000">
+              <a:path w="120000" h="120000" extrusionOk="0">
                 <a:moveTo>
                   <a:pt x="0" y="0"/>
                 </a:moveTo>
@@ -1463,9 +1524,11 @@
       <p:sp>
         <p:nvSpPr>
           <p:cNvPr id="63" name="Google Shape;63;g3eead58a7e8_0_6:notes"/>
-          <p:cNvSpPr txBox="1"/>
+          <p:cNvSpPr txBox="1">
+            <a:spLocks noGrp="1"/>
+          </p:cNvSpPr>
           <p:nvPr>
-            <p:ph idx="1" type="body"/>
+            <p:ph type="body" idx="1"/>
           </p:nvPr>
         </p:nvSpPr>
         <p:spPr>
@@ -1478,23 +1541,20 @@
           </a:prstGeom>
         </p:spPr>
         <p:txBody>
-          <a:bodyPr anchorCtr="0" anchor="t" bIns="91425" lIns="91425" spcFirstLastPara="1" rIns="91425" wrap="square" tIns="91425">
+          <a:bodyPr spcFirstLastPara="1" wrap="square" lIns="91425" tIns="91425" rIns="91425" bIns="91425" anchor="t" anchorCtr="0">
             <a:noAutofit/>
           </a:bodyPr>
           <a:lstStyle/>
           <a:p>
-            <a:pPr indent="0" lvl="0" marL="0" rtl="0" algn="l">
-              <a:spcBef>
-                <a:spcPts val="0"/>
-              </a:spcBef>
-              <a:spcAft>
-                <a:spcPts val="0"/>
-              </a:spcAft>
-              <a:buNone/>
-            </a:pPr>
-            <a:r>
-              <a:t/>
-            </a:r>
+            <a:pPr marL="0" lvl="0" indent="0" algn="l" rtl="0">
+              <a:spcBef>
+                <a:spcPts val="0"/>
+              </a:spcBef>
+              <a:spcAft>
+                <a:spcPts val="0"/>
+              </a:spcAft>
+              <a:buNone/>
+            </a:pPr>
             <a:endParaRPr/>
           </a:p>
         </p:txBody>
@@ -1508,11 +1568,11 @@
 </file>
 
 <file path=ppt/notesSlides/notesSlide4.xml><?xml version="1.0" encoding="utf-8"?>
-<p:notes xmlns:a="http://schemas.openxmlformats.org/drawingml/2006/main" xmlns:r="http://schemas.openxmlformats.org/officeDocument/2006/relationships" xmlns:mc="http://schemas.openxmlformats.org/markup-compatibility/2006" xmlns:mv="urn:schemas-microsoft-com:mac:vml" xmlns:p="http://schemas.openxmlformats.org/presentationml/2006/main" xmlns:c="http://schemas.openxmlformats.org/drawingml/2006/chart" xmlns:dgm="http://schemas.openxmlformats.org/drawingml/2006/diagram" xmlns:o="urn:schemas-microsoft-com:office:office" xmlns:v="urn:schemas-microsoft-com:vml" xmlns:pvml="urn:schemas-microsoft-com:office:powerpoint" xmlns:com="http://schemas.openxmlformats.org/drawingml/2006/compatibility" xmlns:p14="http://schemas.microsoft.com/office/powerpoint/2010/main" xmlns:p15="http://schemas.microsoft.com/office/powerpoint/2012/main" xmlns:ahyp="http://schemas.microsoft.com/office/drawing/2018/hyperlinkcolor" showMasterPhAnim="0" showMasterSp="0">
+<p:notes xmlns:a="http://schemas.openxmlformats.org/drawingml/2006/main" xmlns:r="http://schemas.openxmlformats.org/officeDocument/2006/relationships" xmlns:p="http://schemas.openxmlformats.org/presentationml/2006/main" showMasterSp="0" showMasterPhAnim="0">
   <p:cSld>
     <p:spTree>
       <p:nvGrpSpPr>
-        <p:cNvPr id="66" name="Shape 66"/>
+        <p:cNvPr id="1" name="Shape 66"/>
         <p:cNvGrpSpPr/>
         <p:nvPr/>
       </p:nvGrpSpPr>
@@ -1527,9 +1587,11 @@
       <p:sp>
         <p:nvSpPr>
           <p:cNvPr id="67" name="Google Shape;67;g3eead58a7e8_0_9:notes"/>
-          <p:cNvSpPr/>
+          <p:cNvSpPr>
+            <a:spLocks noGrp="1" noRot="1" noChangeAspect="1"/>
+          </p:cNvSpPr>
           <p:nvPr>
-            <p:ph idx="2" type="sldImg"/>
+            <p:ph type="sldImg" idx="2"/>
           </p:nvPr>
         </p:nvSpPr>
         <p:spPr>
@@ -1538,9 +1600,13 @@
             <a:ext cx="6096000" cy="3429000"/>
           </a:xfrm>
           <a:custGeom>
-            <a:rect b="b" l="l" r="r" t="t"/>
+            <a:avLst/>
+            <a:gdLst/>
+            <a:ahLst/>
+            <a:cxnLst/>
+            <a:rect l="l" t="t" r="r" b="b"/>
             <a:pathLst>
-              <a:path extrusionOk="0" h="120000" w="120000">
+              <a:path w="120000" h="120000" extrusionOk="0">
                 <a:moveTo>
                   <a:pt x="0" y="0"/>
                 </a:moveTo>
@@ -1562,9 +1628,11 @@
       <p:sp>
         <p:nvSpPr>
           <p:cNvPr id="68" name="Google Shape;68;g3eead58a7e8_0_9:notes"/>
-          <p:cNvSpPr txBox="1"/>
+          <p:cNvSpPr txBox="1">
+            <a:spLocks noGrp="1"/>
+          </p:cNvSpPr>
           <p:nvPr>
-            <p:ph idx="1" type="body"/>
+            <p:ph type="body" idx="1"/>
           </p:nvPr>
         </p:nvSpPr>
         <p:spPr>
@@ -1577,23 +1645,20 @@
           </a:prstGeom>
         </p:spPr>
         <p:txBody>
-          <a:bodyPr anchorCtr="0" anchor="t" bIns="91425" lIns="91425" spcFirstLastPara="1" rIns="91425" wrap="square" tIns="91425">
+          <a:bodyPr spcFirstLastPara="1" wrap="square" lIns="91425" tIns="91425" rIns="91425" bIns="91425" anchor="t" anchorCtr="0">
             <a:noAutofit/>
           </a:bodyPr>
           <a:lstStyle/>
           <a:p>
-            <a:pPr indent="0" lvl="0" marL="0" rtl="0" algn="l">
-              <a:spcBef>
-                <a:spcPts val="0"/>
-              </a:spcBef>
-              <a:spcAft>
-                <a:spcPts val="0"/>
-              </a:spcAft>
-              <a:buNone/>
-            </a:pPr>
-            <a:r>
-              <a:t/>
-            </a:r>
+            <a:pPr marL="0" lvl="0" indent="0" algn="l" rtl="0">
+              <a:spcBef>
+                <a:spcPts val="0"/>
+              </a:spcBef>
+              <a:spcAft>
+                <a:spcPts val="0"/>
+              </a:spcAft>
+              <a:buNone/>
+            </a:pPr>
             <a:endParaRPr/>
           </a:p>
         </p:txBody>
@@ -1607,11 +1672,11 @@
 </file>
 
 <file path=ppt/notesSlides/notesSlide5.xml><?xml version="1.0" encoding="utf-8"?>
-<p:notes xmlns:a="http://schemas.openxmlformats.org/drawingml/2006/main" xmlns:r="http://schemas.openxmlformats.org/officeDocument/2006/relationships" xmlns:mc="http://schemas.openxmlformats.org/markup-compatibility/2006" xmlns:mv="urn:schemas-microsoft-com:mac:vml" xmlns:p="http://schemas.openxmlformats.org/presentationml/2006/main" xmlns:c="http://schemas.openxmlformats.org/drawingml/2006/chart" xmlns:dgm="http://schemas.openxmlformats.org/drawingml/2006/diagram" xmlns:o="urn:schemas-microsoft-com:office:office" xmlns:v="urn:schemas-microsoft-com:vml" xmlns:pvml="urn:schemas-microsoft-com:office:powerpoint" xmlns:com="http://schemas.openxmlformats.org/drawingml/2006/compatibility" xmlns:p14="http://schemas.microsoft.com/office/powerpoint/2010/main" xmlns:p15="http://schemas.microsoft.com/office/powerpoint/2012/main" xmlns:ahyp="http://schemas.microsoft.com/office/drawing/2018/hyperlinkcolor" showMasterPhAnim="0" showMasterSp="0">
+<p:notes xmlns:a="http://schemas.openxmlformats.org/drawingml/2006/main" xmlns:r="http://schemas.openxmlformats.org/officeDocument/2006/relationships" xmlns:p="http://schemas.openxmlformats.org/presentationml/2006/main" showMasterSp="0" showMasterPhAnim="0">
   <p:cSld>
     <p:spTree>
       <p:nvGrpSpPr>
-        <p:cNvPr id="71" name="Shape 71"/>
+        <p:cNvPr id="1" name="Shape 71"/>
         <p:cNvGrpSpPr/>
         <p:nvPr/>
       </p:nvGrpSpPr>
@@ -1626,9 +1691,11 @@
       <p:sp>
         <p:nvSpPr>
           <p:cNvPr id="72" name="Google Shape;72;g3eead58a7e8_0_12:notes"/>
-          <p:cNvSpPr/>
+          <p:cNvSpPr>
+            <a:spLocks noGrp="1" noRot="1" noChangeAspect="1"/>
+          </p:cNvSpPr>
           <p:nvPr>
-            <p:ph idx="2" type="sldImg"/>
+            <p:ph type="sldImg" idx="2"/>
           </p:nvPr>
         </p:nvSpPr>
         <p:spPr>
@@ -1637,9 +1704,13 @@
             <a:ext cx="6096000" cy="3429000"/>
           </a:xfrm>
           <a:custGeom>
-            <a:rect b="b" l="l" r="r" t="t"/>
+            <a:avLst/>
+            <a:gdLst/>
+            <a:ahLst/>
+            <a:cxnLst/>
+            <a:rect l="l" t="t" r="r" b="b"/>
             <a:pathLst>
-              <a:path extrusionOk="0" h="120000" w="120000">
+              <a:path w="120000" h="120000" extrusionOk="0">
                 <a:moveTo>
                   <a:pt x="0" y="0"/>
                 </a:moveTo>
@@ -1661,9 +1732,11 @@
       <p:sp>
         <p:nvSpPr>
           <p:cNvPr id="73" name="Google Shape;73;g3eead58a7e8_0_12:notes"/>
-          <p:cNvSpPr txBox="1"/>
+          <p:cNvSpPr txBox="1">
+            <a:spLocks noGrp="1"/>
+          </p:cNvSpPr>
           <p:nvPr>
-            <p:ph idx="1" type="body"/>
+            <p:ph type="body" idx="1"/>
           </p:nvPr>
         </p:nvSpPr>
         <p:spPr>
@@ -1676,23 +1749,20 @@
           </a:prstGeom>
         </p:spPr>
         <p:txBody>
-          <a:bodyPr anchorCtr="0" anchor="t" bIns="91425" lIns="91425" spcFirstLastPara="1" rIns="91425" wrap="square" tIns="91425">
+          <a:bodyPr spcFirstLastPara="1" wrap="square" lIns="91425" tIns="91425" rIns="91425" bIns="91425" anchor="t" anchorCtr="0">
             <a:noAutofit/>
           </a:bodyPr>
           <a:lstStyle/>
           <a:p>
-            <a:pPr indent="0" lvl="0" marL="0" rtl="0" algn="l">
-              <a:spcBef>
-                <a:spcPts val="0"/>
-              </a:spcBef>
-              <a:spcAft>
-                <a:spcPts val="0"/>
-              </a:spcAft>
-              <a:buNone/>
-            </a:pPr>
-            <a:r>
-              <a:t/>
-            </a:r>
+            <a:pPr marL="0" lvl="0" indent="0" algn="l" rtl="0">
+              <a:spcBef>
+                <a:spcPts val="0"/>
+              </a:spcBef>
+              <a:spcAft>
+                <a:spcPts val="0"/>
+              </a:spcAft>
+              <a:buNone/>
+            </a:pPr>
             <a:endParaRPr/>
           </a:p>
         </p:txBody>
@@ -1706,11 +1776,11 @@
 </file>
 
 <file path=ppt/notesSlides/notesSlide6.xml><?xml version="1.0" encoding="utf-8"?>
-<p:notes xmlns:a="http://schemas.openxmlformats.org/drawingml/2006/main" xmlns:r="http://schemas.openxmlformats.org/officeDocument/2006/relationships" xmlns:mc="http://schemas.openxmlformats.org/markup-compatibility/2006" xmlns:mv="urn:schemas-microsoft-com:mac:vml" xmlns:p="http://schemas.openxmlformats.org/presentationml/2006/main" xmlns:c="http://schemas.openxmlformats.org/drawingml/2006/chart" xmlns:dgm="http://schemas.openxmlformats.org/drawingml/2006/diagram" xmlns:o="urn:schemas-microsoft-com:office:office" xmlns:v="urn:schemas-microsoft-com:vml" xmlns:pvml="urn:schemas-microsoft-com:office:powerpoint" xmlns:com="http://schemas.openxmlformats.org/drawingml/2006/compatibility" xmlns:p14="http://schemas.microsoft.com/office/powerpoint/2010/main" xmlns:p15="http://schemas.microsoft.com/office/powerpoint/2012/main" xmlns:ahyp="http://schemas.microsoft.com/office/drawing/2018/hyperlinkcolor" showMasterPhAnim="0" showMasterSp="0">
+<p:notes xmlns:a="http://schemas.openxmlformats.org/drawingml/2006/main" xmlns:r="http://schemas.openxmlformats.org/officeDocument/2006/relationships" xmlns:p="http://schemas.openxmlformats.org/presentationml/2006/main" showMasterSp="0" showMasterPhAnim="0">
   <p:cSld>
     <p:spTree>
       <p:nvGrpSpPr>
-        <p:cNvPr id="76" name="Shape 76"/>
+        <p:cNvPr id="1" name="Shape 76"/>
         <p:cNvGrpSpPr/>
         <p:nvPr/>
       </p:nvGrpSpPr>
@@ -1725,9 +1795,11 @@
       <p:sp>
         <p:nvSpPr>
           <p:cNvPr id="77" name="Google Shape;77;g3eead58a7e8_0_15:notes"/>
-          <p:cNvSpPr/>
+          <p:cNvSpPr>
+            <a:spLocks noGrp="1" noRot="1" noChangeAspect="1"/>
+          </p:cNvSpPr>
           <p:nvPr>
-            <p:ph idx="2" type="sldImg"/>
+            <p:ph type="sldImg" idx="2"/>
           </p:nvPr>
         </p:nvSpPr>
         <p:spPr>
@@ -1736,9 +1808,13 @@
             <a:ext cx="6096000" cy="3429000"/>
           </a:xfrm>
           <a:custGeom>
-            <a:rect b="b" l="l" r="r" t="t"/>
+            <a:avLst/>
+            <a:gdLst/>
+            <a:ahLst/>
+            <a:cxnLst/>
+            <a:rect l="l" t="t" r="r" b="b"/>
             <a:pathLst>
-              <a:path extrusionOk="0" h="120000" w="120000">
+              <a:path w="120000" h="120000" extrusionOk="0">
                 <a:moveTo>
                   <a:pt x="0" y="0"/>
                 </a:moveTo>
@@ -1760,9 +1836,11 @@
       <p:sp>
         <p:nvSpPr>
           <p:cNvPr id="78" name="Google Shape;78;g3eead58a7e8_0_15:notes"/>
-          <p:cNvSpPr txBox="1"/>
+          <p:cNvSpPr txBox="1">
+            <a:spLocks noGrp="1"/>
+          </p:cNvSpPr>
           <p:nvPr>
-            <p:ph idx="1" type="body"/>
+            <p:ph type="body" idx="1"/>
           </p:nvPr>
         </p:nvSpPr>
         <p:spPr>
@@ -1775,23 +1853,20 @@
           </a:prstGeom>
         </p:spPr>
         <p:txBody>
-          <a:bodyPr anchorCtr="0" anchor="t" bIns="91425" lIns="91425" spcFirstLastPara="1" rIns="91425" wrap="square" tIns="91425">
+          <a:bodyPr spcFirstLastPara="1" wrap="square" lIns="91425" tIns="91425" rIns="91425" bIns="91425" anchor="t" anchorCtr="0">
             <a:noAutofit/>
           </a:bodyPr>
           <a:lstStyle/>
           <a:p>
-            <a:pPr indent="0" lvl="0" marL="0" rtl="0" algn="l">
-              <a:spcBef>
-                <a:spcPts val="0"/>
-              </a:spcBef>
-              <a:spcAft>
-                <a:spcPts val="0"/>
-              </a:spcAft>
-              <a:buNone/>
-            </a:pPr>
-            <a:r>
-              <a:t/>
-            </a:r>
+            <a:pPr marL="0" lvl="0" indent="0" algn="l" rtl="0">
+              <a:spcBef>
+                <a:spcPts val="0"/>
+              </a:spcBef>
+              <a:spcAft>
+                <a:spcPts val="0"/>
+              </a:spcAft>
+              <a:buNone/>
+            </a:pPr>
             <a:endParaRPr/>
           </a:p>
         </p:txBody>
@@ -1805,11 +1880,11 @@
 </file>
 
 <file path=ppt/notesSlides/notesSlide7.xml><?xml version="1.0" encoding="utf-8"?>
-<p:notes xmlns:a="http://schemas.openxmlformats.org/drawingml/2006/main" xmlns:r="http://schemas.openxmlformats.org/officeDocument/2006/relationships" xmlns:mc="http://schemas.openxmlformats.org/markup-compatibility/2006" xmlns:mv="urn:schemas-microsoft-com:mac:vml" xmlns:p="http://schemas.openxmlformats.org/presentationml/2006/main" xmlns:c="http://schemas.openxmlformats.org/drawingml/2006/chart" xmlns:dgm="http://schemas.openxmlformats.org/drawingml/2006/diagram" xmlns:o="urn:schemas-microsoft-com:office:office" xmlns:v="urn:schemas-microsoft-com:vml" xmlns:pvml="urn:schemas-microsoft-com:office:powerpoint" xmlns:com="http://schemas.openxmlformats.org/drawingml/2006/compatibility" xmlns:p14="http://schemas.microsoft.com/office/powerpoint/2010/main" xmlns:p15="http://schemas.microsoft.com/office/powerpoint/2012/main" xmlns:ahyp="http://schemas.microsoft.com/office/drawing/2018/hyperlinkcolor" showMasterPhAnim="0" showMasterSp="0">
+<p:notes xmlns:a="http://schemas.openxmlformats.org/drawingml/2006/main" xmlns:r="http://schemas.openxmlformats.org/officeDocument/2006/relationships" xmlns:p="http://schemas.openxmlformats.org/presentationml/2006/main" showMasterSp="0" showMasterPhAnim="0">
   <p:cSld>
     <p:spTree>
       <p:nvGrpSpPr>
-        <p:cNvPr id="82" name="Shape 82"/>
+        <p:cNvPr id="1" name="Shape 82"/>
         <p:cNvGrpSpPr/>
         <p:nvPr/>
       </p:nvGrpSpPr>
@@ -1824,9 +1899,11 @@
       <p:sp>
         <p:nvSpPr>
           <p:cNvPr id="83" name="Google Shape;83;g3eead58a7e8_0_18:notes"/>
-          <p:cNvSpPr/>
+          <p:cNvSpPr>
+            <a:spLocks noGrp="1" noRot="1" noChangeAspect="1"/>
+          </p:cNvSpPr>
           <p:nvPr>
-            <p:ph idx="2" type="sldImg"/>
+            <p:ph type="sldImg" idx="2"/>
           </p:nvPr>
         </p:nvSpPr>
         <p:spPr>
@@ -1835,9 +1912,13 @@
             <a:ext cx="6096000" cy="3429000"/>
           </a:xfrm>
           <a:custGeom>
-            <a:rect b="b" l="l" r="r" t="t"/>
+            <a:avLst/>
+            <a:gdLst/>
+            <a:ahLst/>
+            <a:cxnLst/>
+            <a:rect l="l" t="t" r="r" b="b"/>
             <a:pathLst>
-              <a:path extrusionOk="0" h="120000" w="120000">
+              <a:path w="120000" h="120000" extrusionOk="0">
                 <a:moveTo>
                   <a:pt x="0" y="0"/>
                 </a:moveTo>
@@ -1859,9 +1940,11 @@
       <p:sp>
         <p:nvSpPr>
           <p:cNvPr id="84" name="Google Shape;84;g3eead58a7e8_0_18:notes"/>
-          <p:cNvSpPr txBox="1"/>
+          <p:cNvSpPr txBox="1">
+            <a:spLocks noGrp="1"/>
+          </p:cNvSpPr>
           <p:nvPr>
-            <p:ph idx="1" type="body"/>
+            <p:ph type="body" idx="1"/>
           </p:nvPr>
         </p:nvSpPr>
         <p:spPr>
@@ -1874,23 +1957,20 @@
           </a:prstGeom>
         </p:spPr>
         <p:txBody>
-          <a:bodyPr anchorCtr="0" anchor="t" bIns="91425" lIns="91425" spcFirstLastPara="1" rIns="91425" wrap="square" tIns="91425">
+          <a:bodyPr spcFirstLastPara="1" wrap="square" lIns="91425" tIns="91425" rIns="91425" bIns="91425" anchor="t" anchorCtr="0">
             <a:noAutofit/>
           </a:bodyPr>
           <a:lstStyle/>
           <a:p>
-            <a:pPr indent="0" lvl="0" marL="0" rtl="0" algn="l">
-              <a:spcBef>
-                <a:spcPts val="0"/>
-              </a:spcBef>
-              <a:spcAft>
-                <a:spcPts val="0"/>
-              </a:spcAft>
-              <a:buNone/>
-            </a:pPr>
-            <a:r>
-              <a:t/>
-            </a:r>
+            <a:pPr marL="0" lvl="0" indent="0" algn="l" rtl="0">
+              <a:spcBef>
+                <a:spcPts val="0"/>
+              </a:spcBef>
+              <a:spcAft>
+                <a:spcPts val="0"/>
+              </a:spcAft>
+              <a:buNone/>
+            </a:pPr>
             <a:endParaRPr/>
           </a:p>
         </p:txBody>
@@ -1904,11 +1984,11 @@
 </file>
 
 <file path=ppt/notesSlides/notesSlide8.xml><?xml version="1.0" encoding="utf-8"?>
-<p:notes xmlns:a="http://schemas.openxmlformats.org/drawingml/2006/main" xmlns:r="http://schemas.openxmlformats.org/officeDocument/2006/relationships" xmlns:mc="http://schemas.openxmlformats.org/markup-compatibility/2006" xmlns:mv="urn:schemas-microsoft-com:mac:vml" xmlns:p="http://schemas.openxmlformats.org/presentationml/2006/main" xmlns:c="http://schemas.openxmlformats.org/drawingml/2006/chart" xmlns:dgm="http://schemas.openxmlformats.org/drawingml/2006/diagram" xmlns:o="urn:schemas-microsoft-com:office:office" xmlns:v="urn:schemas-microsoft-com:vml" xmlns:pvml="urn:schemas-microsoft-com:office:powerpoint" xmlns:com="http://schemas.openxmlformats.org/drawingml/2006/compatibility" xmlns:p14="http://schemas.microsoft.com/office/powerpoint/2010/main" xmlns:p15="http://schemas.microsoft.com/office/powerpoint/2012/main" xmlns:ahyp="http://schemas.microsoft.com/office/drawing/2018/hyperlinkcolor" showMasterPhAnim="0" showMasterSp="0">
+<p:notes xmlns:a="http://schemas.openxmlformats.org/drawingml/2006/main" xmlns:r="http://schemas.openxmlformats.org/officeDocument/2006/relationships" xmlns:p="http://schemas.openxmlformats.org/presentationml/2006/main" showMasterSp="0" showMasterPhAnim="0">
   <p:cSld>
     <p:spTree>
       <p:nvGrpSpPr>
-        <p:cNvPr id="89" name="Shape 89"/>
+        <p:cNvPr id="1" name="Shape 89"/>
         <p:cNvGrpSpPr/>
         <p:nvPr/>
       </p:nvGrpSpPr>
@@ -1923,20 +2003,26 @@
       <p:sp>
         <p:nvSpPr>
           <p:cNvPr id="90" name="Google Shape;90;g3eead58a7e8_0_21:notes"/>
-          <p:cNvSpPr/>
+          <p:cNvSpPr>
+            <a:spLocks noGrp="1" noRot="1" noChangeAspect="1"/>
+          </p:cNvSpPr>
           <p:nvPr>
-            <p:ph idx="2" type="sldImg"/>
+            <p:ph type="sldImg" idx="2"/>
           </p:nvPr>
         </p:nvSpPr>
         <p:spPr>
           <a:xfrm>
-            <a:off x="381300" y="685800"/>
+            <a:off x="381000" y="685800"/>
             <a:ext cx="6096000" cy="3429000"/>
           </a:xfrm>
           <a:custGeom>
-            <a:rect b="b" l="l" r="r" t="t"/>
+            <a:avLst/>
+            <a:gdLst/>
+            <a:ahLst/>
+            <a:cxnLst/>
+            <a:rect l="l" t="t" r="r" b="b"/>
             <a:pathLst>
-              <a:path extrusionOk="0" h="120000" w="120000">
+              <a:path w="120000" h="120000" extrusionOk="0">
                 <a:moveTo>
                   <a:pt x="0" y="0"/>
                 </a:moveTo>
@@ -1958,9 +2044,11 @@
       <p:sp>
         <p:nvSpPr>
           <p:cNvPr id="91" name="Google Shape;91;g3eead58a7e8_0_21:notes"/>
-          <p:cNvSpPr txBox="1"/>
+          <p:cNvSpPr txBox="1">
+            <a:spLocks noGrp="1"/>
+          </p:cNvSpPr>
           <p:nvPr>
-            <p:ph idx="1" type="body"/>
+            <p:ph type="body" idx="1"/>
           </p:nvPr>
         </p:nvSpPr>
         <p:spPr>
@@ -1973,23 +2061,20 @@
           </a:prstGeom>
         </p:spPr>
         <p:txBody>
-          <a:bodyPr anchorCtr="0" anchor="t" bIns="91425" lIns="91425" spcFirstLastPara="1" rIns="91425" wrap="square" tIns="91425">
+          <a:bodyPr spcFirstLastPara="1" wrap="square" lIns="91425" tIns="91425" rIns="91425" bIns="91425" anchor="t" anchorCtr="0">
             <a:noAutofit/>
           </a:bodyPr>
           <a:lstStyle/>
           <a:p>
-            <a:pPr indent="0" lvl="0" marL="0" rtl="0" algn="l">
-              <a:spcBef>
-                <a:spcPts val="0"/>
-              </a:spcBef>
-              <a:spcAft>
-                <a:spcPts val="0"/>
-              </a:spcAft>
-              <a:buNone/>
-            </a:pPr>
-            <a:r>
-              <a:t/>
-            </a:r>
+            <a:pPr marL="0" lvl="0" indent="0" algn="l" rtl="0">
+              <a:spcBef>
+                <a:spcPts val="0"/>
+              </a:spcBef>
+              <a:spcAft>
+                <a:spcPts val="0"/>
+              </a:spcAft>
+              <a:buNone/>
+            </a:pPr>
             <a:endParaRPr/>
           </a:p>
         </p:txBody>
@@ -2003,11 +2088,11 @@
 </file>
 
 <file path=ppt/notesSlides/notesSlide9.xml><?xml version="1.0" encoding="utf-8"?>
-<p:notes xmlns:a="http://schemas.openxmlformats.org/drawingml/2006/main" xmlns:r="http://schemas.openxmlformats.org/officeDocument/2006/relationships" xmlns:mc="http://schemas.openxmlformats.org/markup-compatibility/2006" xmlns:mv="urn:schemas-microsoft-com:mac:vml" xmlns:p="http://schemas.openxmlformats.org/presentationml/2006/main" xmlns:c="http://schemas.openxmlformats.org/drawingml/2006/chart" xmlns:dgm="http://schemas.openxmlformats.org/drawingml/2006/diagram" xmlns:o="urn:schemas-microsoft-com:office:office" xmlns:v="urn:schemas-microsoft-com:vml" xmlns:pvml="urn:schemas-microsoft-com:office:powerpoint" xmlns:com="http://schemas.openxmlformats.org/drawingml/2006/compatibility" xmlns:p14="http://schemas.microsoft.com/office/powerpoint/2010/main" xmlns:p15="http://schemas.microsoft.com/office/powerpoint/2012/main" xmlns:ahyp="http://schemas.microsoft.com/office/drawing/2018/hyperlinkcolor" showMasterPhAnim="0" showMasterSp="0">
+<p:notes xmlns:a="http://schemas.openxmlformats.org/drawingml/2006/main" xmlns:r="http://schemas.openxmlformats.org/officeDocument/2006/relationships" xmlns:p="http://schemas.openxmlformats.org/presentationml/2006/main" showMasterSp="0" showMasterPhAnim="0">
   <p:cSld>
     <p:spTree>
       <p:nvGrpSpPr>
-        <p:cNvPr id="98" name="Shape 98"/>
+        <p:cNvPr id="1" name="Shape 98"/>
         <p:cNvGrpSpPr/>
         <p:nvPr/>
       </p:nvGrpSpPr>
@@ -2022,20 +2107,26 @@
       <p:sp>
         <p:nvSpPr>
           <p:cNvPr id="99" name="Google Shape;99;g3eead58a7e8_0_24:notes"/>
-          <p:cNvSpPr/>
+          <p:cNvSpPr>
+            <a:spLocks noGrp="1" noRot="1" noChangeAspect="1"/>
+          </p:cNvSpPr>
           <p:nvPr>
-            <p:ph idx="2" type="sldImg"/>
+            <p:ph type="sldImg" idx="2"/>
           </p:nvPr>
         </p:nvSpPr>
         <p:spPr>
           <a:xfrm>
-            <a:off x="381300" y="685800"/>
+            <a:off x="381000" y="685800"/>
             <a:ext cx="6096000" cy="3429000"/>
           </a:xfrm>
           <a:custGeom>
-            <a:rect b="b" l="l" r="r" t="t"/>
+            <a:avLst/>
+            <a:gdLst/>
+            <a:ahLst/>
+            <a:cxnLst/>
+            <a:rect l="l" t="t" r="r" b="b"/>
             <a:pathLst>
-              <a:path extrusionOk="0" h="120000" w="120000">
+              <a:path w="120000" h="120000" extrusionOk="0">
                 <a:moveTo>
                   <a:pt x="0" y="0"/>
                 </a:moveTo>
@@ -2057,9 +2148,11 @@
       <p:sp>
         <p:nvSpPr>
           <p:cNvPr id="100" name="Google Shape;100;g3eead58a7e8_0_24:notes"/>
-          <p:cNvSpPr txBox="1"/>
+          <p:cNvSpPr txBox="1">
+            <a:spLocks noGrp="1"/>
+          </p:cNvSpPr>
           <p:nvPr>
-            <p:ph idx="1" type="body"/>
+            <p:ph type="body" idx="1"/>
           </p:nvPr>
         </p:nvSpPr>
         <p:spPr>
@@ -2072,23 +2165,20 @@
           </a:prstGeom>
         </p:spPr>
         <p:txBody>
-          <a:bodyPr anchorCtr="0" anchor="t" bIns="91425" lIns="91425" spcFirstLastPara="1" rIns="91425" wrap="square" tIns="91425">
+          <a:bodyPr spcFirstLastPara="1" wrap="square" lIns="91425" tIns="91425" rIns="91425" bIns="91425" anchor="t" anchorCtr="0">
             <a:noAutofit/>
           </a:bodyPr>
           <a:lstStyle/>
           <a:p>
-            <a:pPr indent="0" lvl="0" marL="0" rtl="0" algn="l">
-              <a:spcBef>
-                <a:spcPts val="0"/>
-              </a:spcBef>
-              <a:spcAft>
-                <a:spcPts val="0"/>
-              </a:spcAft>
-              <a:buNone/>
-            </a:pPr>
-            <a:r>
-              <a:t/>
-            </a:r>
+            <a:pPr marL="0" lvl="0" indent="0" algn="l" rtl="0">
+              <a:spcBef>
+                <a:spcPts val="0"/>
+              </a:spcBef>
+              <a:spcAft>
+                <a:spcPts val="0"/>
+              </a:spcAft>
+              <a:buNone/>
+            </a:pPr>
             <a:endParaRPr/>
           </a:p>
         </p:txBody>
@@ -2102,11 +2192,11 @@
 </file>
 
 <file path=ppt/slideLayouts/slideLayout1.xml><?xml version="1.0" encoding="utf-8"?>
-<p:sldLayout xmlns:a="http://schemas.openxmlformats.org/drawingml/2006/main" xmlns:r="http://schemas.openxmlformats.org/officeDocument/2006/relationships" xmlns:mc="http://schemas.openxmlformats.org/markup-compatibility/2006" xmlns:mv="urn:schemas-microsoft-com:mac:vml" xmlns:p="http://schemas.openxmlformats.org/presentationml/2006/main" xmlns:c="http://schemas.openxmlformats.org/drawingml/2006/chart" xmlns:dgm="http://schemas.openxmlformats.org/drawingml/2006/diagram" xmlns:o="urn:schemas-microsoft-com:office:office" xmlns:v="urn:schemas-microsoft-com:vml" xmlns:pvml="urn:schemas-microsoft-com:office:powerpoint" xmlns:com="http://schemas.openxmlformats.org/drawingml/2006/compatibility" xmlns:p14="http://schemas.microsoft.com/office/powerpoint/2010/main" xmlns:p15="http://schemas.microsoft.com/office/powerpoint/2012/main" xmlns:ahyp="http://schemas.microsoft.com/office/drawing/2018/hyperlinkcolor" matchingName="Title slide" type="title">
+<p:sldLayout xmlns:a="http://schemas.openxmlformats.org/drawingml/2006/main" xmlns:r="http://schemas.openxmlformats.org/officeDocument/2006/relationships" xmlns:p="http://schemas.openxmlformats.org/presentationml/2006/main" matchingName="Title slide" type="title">
   <p:cSld name="TITLE">
     <p:spTree>
       <p:nvGrpSpPr>
-        <p:cNvPr id="9" name="Shape 9"/>
+        <p:cNvPr id="1" name="Shape 9"/>
         <p:cNvGrpSpPr/>
         <p:nvPr/>
       </p:nvGrpSpPr>
@@ -2121,7 +2211,9 @@
       <p:sp>
         <p:nvSpPr>
           <p:cNvPr id="10" name="Google Shape;10;p2"/>
-          <p:cNvSpPr txBox="1"/>
+          <p:cNvSpPr txBox="1">
+            <a:spLocks noGrp="1"/>
+          </p:cNvSpPr>
           <p:nvPr>
             <p:ph type="ctrTitle"/>
           </p:nvPr>
@@ -2136,7 +2228,7 @@
           </a:prstGeom>
         </p:spPr>
         <p:txBody>
-          <a:bodyPr anchorCtr="0" anchor="b" bIns="91425" lIns="91425" spcFirstLastPara="1" rIns="91425" wrap="square" tIns="91425">
+          <a:bodyPr spcFirstLastPara="1" wrap="square" lIns="91425" tIns="91425" rIns="91425" bIns="91425" anchor="b" anchorCtr="0">
             <a:normAutofit/>
           </a:bodyPr>
           <a:lstStyle>
@@ -2240,15 +2332,19 @@
               <a:defRPr sz="5200"/>
             </a:lvl9pPr>
           </a:lstStyle>
-          <a:p/>
+          <a:p>
+            <a:endParaRPr/>
+          </a:p>
         </p:txBody>
       </p:sp>
       <p:sp>
         <p:nvSpPr>
           <p:cNvPr id="11" name="Google Shape;11;p2"/>
-          <p:cNvSpPr txBox="1"/>
+          <p:cNvSpPr txBox="1">
+            <a:spLocks noGrp="1"/>
+          </p:cNvSpPr>
           <p:nvPr>
-            <p:ph idx="1" type="subTitle"/>
+            <p:ph type="subTitle" idx="1"/>
           </p:nvPr>
         </p:nvSpPr>
         <p:spPr>
@@ -2261,7 +2357,7 @@
           </a:prstGeom>
         </p:spPr>
         <p:txBody>
-          <a:bodyPr anchorCtr="0" anchor="t" bIns="91425" lIns="91425" spcFirstLastPara="1" rIns="91425" wrap="square" tIns="91425">
+          <a:bodyPr spcFirstLastPara="1" wrap="square" lIns="91425" tIns="91425" rIns="91425" bIns="91425" anchor="t" anchorCtr="0">
             <a:normAutofit/>
           </a:bodyPr>
           <a:lstStyle>
@@ -2392,15 +2488,19 @@
               <a:defRPr sz="2800"/>
             </a:lvl9pPr>
           </a:lstStyle>
-          <a:p/>
+          <a:p>
+            <a:endParaRPr/>
+          </a:p>
         </p:txBody>
       </p:sp>
       <p:sp>
         <p:nvSpPr>
           <p:cNvPr id="12" name="Google Shape;12;p2"/>
-          <p:cNvSpPr txBox="1"/>
+          <p:cNvSpPr txBox="1">
+            <a:spLocks noGrp="1"/>
+          </p:cNvSpPr>
           <p:nvPr>
-            <p:ph idx="12" type="sldNum"/>
+            <p:ph type="sldNum" idx="12"/>
           </p:nvPr>
         </p:nvSpPr>
         <p:spPr>
@@ -2413,7 +2513,7 @@
           </a:prstGeom>
         </p:spPr>
         <p:txBody>
-          <a:bodyPr anchorCtr="0" anchor="ctr" bIns="91425" lIns="91425" spcFirstLastPara="1" rIns="91425" wrap="square" tIns="91425">
+          <a:bodyPr spcFirstLastPara="1" wrap="square" lIns="91425" tIns="91425" rIns="91425" bIns="91425" anchor="ctr" anchorCtr="0">
             <a:normAutofit/>
           </a:bodyPr>
           <a:lstStyle>
@@ -2455,7 +2555,7 @@
             </a:lvl9pPr>
           </a:lstStyle>
           <a:p>
-            <a:pPr indent="0" lvl="0" marL="0" rtl="0" algn="r">
+            <a:pPr marL="0" lvl="0" indent="0" algn="r" rtl="0">
               <a:spcBef>
                 <a:spcPts val="0"/>
               </a:spcBef>
@@ -2481,11 +2581,11 @@
 </file>
 
 <file path=ppt/slideLayouts/slideLayout10.xml><?xml version="1.0" encoding="utf-8"?>
-<p:sldLayout xmlns:a="http://schemas.openxmlformats.org/drawingml/2006/main" xmlns:r="http://schemas.openxmlformats.org/officeDocument/2006/relationships" xmlns:mc="http://schemas.openxmlformats.org/markup-compatibility/2006" xmlns:mv="urn:schemas-microsoft-com:mac:vml" xmlns:p="http://schemas.openxmlformats.org/presentationml/2006/main" xmlns:c="http://schemas.openxmlformats.org/drawingml/2006/chart" xmlns:dgm="http://schemas.openxmlformats.org/drawingml/2006/diagram" xmlns:o="urn:schemas-microsoft-com:office:office" xmlns:v="urn:schemas-microsoft-com:vml" xmlns:pvml="urn:schemas-microsoft-com:office:powerpoint" xmlns:com="http://schemas.openxmlformats.org/drawingml/2006/compatibility" xmlns:p14="http://schemas.microsoft.com/office/powerpoint/2010/main" xmlns:p15="http://schemas.microsoft.com/office/powerpoint/2012/main" xmlns:ahyp="http://schemas.microsoft.com/office/drawing/2018/hyperlinkcolor" matchingName="Big number">
+<p:sldLayout xmlns:a="http://schemas.openxmlformats.org/drawingml/2006/main" xmlns:r="http://schemas.openxmlformats.org/officeDocument/2006/relationships" xmlns:p="http://schemas.openxmlformats.org/presentationml/2006/main" matchingName="Big number">
   <p:cSld name="BIG_NUMBER">
     <p:spTree>
       <p:nvGrpSpPr>
-        <p:cNvPr id="44" name="Shape 44"/>
+        <p:cNvPr id="1" name="Shape 44"/>
         <p:cNvGrpSpPr/>
         <p:nvPr/>
       </p:nvGrpSpPr>
@@ -2500,9 +2600,11 @@
       <p:sp>
         <p:nvSpPr>
           <p:cNvPr id="45" name="Google Shape;45;p11"/>
-          <p:cNvSpPr txBox="1"/>
+          <p:cNvSpPr txBox="1">
+            <a:spLocks noGrp="1"/>
+          </p:cNvSpPr>
           <p:nvPr>
-            <p:ph hasCustomPrompt="1" type="title"/>
+            <p:ph type="title" hasCustomPrompt="1"/>
           </p:nvPr>
         </p:nvSpPr>
         <p:spPr>
@@ -2515,7 +2617,7 @@
           </a:prstGeom>
         </p:spPr>
         <p:txBody>
-          <a:bodyPr anchorCtr="0" anchor="b" bIns="91425" lIns="91425" spcFirstLastPara="1" rIns="91425" wrap="square" tIns="91425">
+          <a:bodyPr spcFirstLastPara="1" wrap="square" lIns="91425" tIns="91425" rIns="91425" bIns="91425" anchor="b" anchorCtr="0">
             <a:normAutofit/>
           </a:bodyPr>
           <a:lstStyle>
@@ -2629,9 +2731,11 @@
       <p:sp>
         <p:nvSpPr>
           <p:cNvPr id="46" name="Google Shape;46;p11"/>
-          <p:cNvSpPr txBox="1"/>
+          <p:cNvSpPr txBox="1">
+            <a:spLocks noGrp="1"/>
+          </p:cNvSpPr>
           <p:nvPr>
-            <p:ph idx="1" type="body"/>
+            <p:ph type="body" idx="1"/>
           </p:nvPr>
         </p:nvSpPr>
         <p:spPr>
@@ -2644,11 +2748,11 @@
           </a:prstGeom>
         </p:spPr>
         <p:txBody>
-          <a:bodyPr anchorCtr="0" anchor="t" bIns="91425" lIns="91425" spcFirstLastPara="1" rIns="91425" wrap="square" tIns="91425">
+          <a:bodyPr spcFirstLastPara="1" wrap="square" lIns="91425" tIns="91425" rIns="91425" bIns="91425" anchor="t" anchorCtr="0">
             <a:normAutofit/>
           </a:bodyPr>
           <a:lstStyle>
-            <a:lvl1pPr indent="-342900" lvl="0" marL="457200" algn="ctr">
+            <a:lvl1pPr marL="457200" lvl="0" indent="-342900" algn="ctr">
               <a:spcBef>
                 <a:spcPts val="0"/>
               </a:spcBef>
@@ -2659,7 +2763,7 @@
               <a:buChar char="●"/>
               <a:defRPr/>
             </a:lvl1pPr>
-            <a:lvl2pPr indent="-317500" lvl="1" marL="914400" algn="ctr">
+            <a:lvl2pPr marL="914400" lvl="1" indent="-317500" algn="ctr">
               <a:spcBef>
                 <a:spcPts val="0"/>
               </a:spcBef>
@@ -2670,7 +2774,7 @@
               <a:buChar char="○"/>
               <a:defRPr/>
             </a:lvl2pPr>
-            <a:lvl3pPr indent="-317500" lvl="2" marL="1371600" algn="ctr">
+            <a:lvl3pPr marL="1371600" lvl="2" indent="-317500" algn="ctr">
               <a:spcBef>
                 <a:spcPts val="0"/>
               </a:spcBef>
@@ -2681,7 +2785,7 @@
               <a:buChar char="■"/>
               <a:defRPr/>
             </a:lvl3pPr>
-            <a:lvl4pPr indent="-317500" lvl="3" marL="1828800" algn="ctr">
+            <a:lvl4pPr marL="1828800" lvl="3" indent="-317500" algn="ctr">
               <a:spcBef>
                 <a:spcPts val="0"/>
               </a:spcBef>
@@ -2692,7 +2796,7 @@
               <a:buChar char="●"/>
               <a:defRPr/>
             </a:lvl4pPr>
-            <a:lvl5pPr indent="-317500" lvl="4" marL="2286000" algn="ctr">
+            <a:lvl5pPr marL="2286000" lvl="4" indent="-317500" algn="ctr">
               <a:spcBef>
                 <a:spcPts val="0"/>
               </a:spcBef>
@@ -2703,7 +2807,7 @@
               <a:buChar char="○"/>
               <a:defRPr/>
             </a:lvl5pPr>
-            <a:lvl6pPr indent="-317500" lvl="5" marL="2743200" algn="ctr">
+            <a:lvl6pPr marL="2743200" lvl="5" indent="-317500" algn="ctr">
               <a:spcBef>
                 <a:spcPts val="0"/>
               </a:spcBef>
@@ -2714,7 +2818,7 @@
               <a:buChar char="■"/>
               <a:defRPr/>
             </a:lvl6pPr>
-            <a:lvl7pPr indent="-317500" lvl="6" marL="3200400" algn="ctr">
+            <a:lvl7pPr marL="3200400" lvl="6" indent="-317500" algn="ctr">
               <a:spcBef>
                 <a:spcPts val="0"/>
               </a:spcBef>
@@ -2725,7 +2829,7 @@
               <a:buChar char="●"/>
               <a:defRPr/>
             </a:lvl7pPr>
-            <a:lvl8pPr indent="-317500" lvl="7" marL="3657600" algn="ctr">
+            <a:lvl8pPr marL="3657600" lvl="7" indent="-317500" algn="ctr">
               <a:spcBef>
                 <a:spcPts val="0"/>
               </a:spcBef>
@@ -2736,7 +2840,7 @@
               <a:buChar char="○"/>
               <a:defRPr/>
             </a:lvl8pPr>
-            <a:lvl9pPr indent="-317500" lvl="8" marL="4114800" algn="ctr">
+            <a:lvl9pPr marL="4114800" lvl="8" indent="-317500" algn="ctr">
               <a:spcBef>
                 <a:spcPts val="0"/>
               </a:spcBef>
@@ -2748,15 +2852,19 @@
               <a:defRPr/>
             </a:lvl9pPr>
           </a:lstStyle>
-          <a:p/>
+          <a:p>
+            <a:endParaRPr/>
+          </a:p>
         </p:txBody>
       </p:sp>
       <p:sp>
         <p:nvSpPr>
           <p:cNvPr id="47" name="Google Shape;47;p11"/>
-          <p:cNvSpPr txBox="1"/>
+          <p:cNvSpPr txBox="1">
+            <a:spLocks noGrp="1"/>
+          </p:cNvSpPr>
           <p:nvPr>
-            <p:ph idx="12" type="sldNum"/>
+            <p:ph type="sldNum" idx="12"/>
           </p:nvPr>
         </p:nvSpPr>
         <p:spPr>
@@ -2769,7 +2877,7 @@
           </a:prstGeom>
         </p:spPr>
         <p:txBody>
-          <a:bodyPr anchorCtr="0" anchor="ctr" bIns="91425" lIns="91425" spcFirstLastPara="1" rIns="91425" wrap="square" tIns="91425">
+          <a:bodyPr spcFirstLastPara="1" wrap="square" lIns="91425" tIns="91425" rIns="91425" bIns="91425" anchor="ctr" anchorCtr="0">
             <a:normAutofit/>
           </a:bodyPr>
           <a:lstStyle>
@@ -2811,7 +2919,7 @@
             </a:lvl9pPr>
           </a:lstStyle>
           <a:p>
-            <a:pPr indent="0" lvl="0" marL="0" rtl="0" algn="r">
+            <a:pPr marL="0" lvl="0" indent="0" algn="r" rtl="0">
               <a:spcBef>
                 <a:spcPts val="0"/>
               </a:spcBef>
@@ -2837,11 +2945,11 @@
 </file>
 
 <file path=ppt/slideLayouts/slideLayout11.xml><?xml version="1.0" encoding="utf-8"?>
-<p:sldLayout xmlns:a="http://schemas.openxmlformats.org/drawingml/2006/main" xmlns:r="http://schemas.openxmlformats.org/officeDocument/2006/relationships" xmlns:mc="http://schemas.openxmlformats.org/markup-compatibility/2006" xmlns:mv="urn:schemas-microsoft-com:mac:vml" xmlns:p="http://schemas.openxmlformats.org/presentationml/2006/main" xmlns:c="http://schemas.openxmlformats.org/drawingml/2006/chart" xmlns:dgm="http://schemas.openxmlformats.org/drawingml/2006/diagram" xmlns:o="urn:schemas-microsoft-com:office:office" xmlns:v="urn:schemas-microsoft-com:vml" xmlns:pvml="urn:schemas-microsoft-com:office:powerpoint" xmlns:com="http://schemas.openxmlformats.org/drawingml/2006/compatibility" xmlns:p14="http://schemas.microsoft.com/office/powerpoint/2010/main" xmlns:p15="http://schemas.microsoft.com/office/powerpoint/2012/main" xmlns:ahyp="http://schemas.microsoft.com/office/drawing/2018/hyperlinkcolor" matchingName="Blank" type="blank">
+<p:sldLayout xmlns:a="http://schemas.openxmlformats.org/drawingml/2006/main" xmlns:r="http://schemas.openxmlformats.org/officeDocument/2006/relationships" xmlns:p="http://schemas.openxmlformats.org/presentationml/2006/main" matchingName="Blank" type="blank">
   <p:cSld name="BLANK">
     <p:spTree>
       <p:nvGrpSpPr>
-        <p:cNvPr id="48" name="Shape 48"/>
+        <p:cNvPr id="1" name="Shape 48"/>
         <p:cNvGrpSpPr/>
         <p:nvPr/>
       </p:nvGrpSpPr>
@@ -2856,9 +2964,11 @@
       <p:sp>
         <p:nvSpPr>
           <p:cNvPr id="49" name="Google Shape;49;p12"/>
-          <p:cNvSpPr txBox="1"/>
+          <p:cNvSpPr txBox="1">
+            <a:spLocks noGrp="1"/>
+          </p:cNvSpPr>
           <p:nvPr>
-            <p:ph idx="12" type="sldNum"/>
+            <p:ph type="sldNum" idx="12"/>
           </p:nvPr>
         </p:nvSpPr>
         <p:spPr>
@@ -2871,7 +2981,7 @@
           </a:prstGeom>
         </p:spPr>
         <p:txBody>
-          <a:bodyPr anchorCtr="0" anchor="ctr" bIns="91425" lIns="91425" spcFirstLastPara="1" rIns="91425" wrap="square" tIns="91425">
+          <a:bodyPr spcFirstLastPara="1" wrap="square" lIns="91425" tIns="91425" rIns="91425" bIns="91425" anchor="ctr" anchorCtr="0">
             <a:normAutofit/>
           </a:bodyPr>
           <a:lstStyle>
@@ -2913,7 +3023,7 @@
             </a:lvl9pPr>
           </a:lstStyle>
           <a:p>
-            <a:pPr indent="0" lvl="0" marL="0" rtl="0" algn="r">
+            <a:pPr marL="0" lvl="0" indent="0" algn="r" rtl="0">
               <a:spcBef>
                 <a:spcPts val="0"/>
               </a:spcBef>
@@ -2939,11 +3049,11 @@
 </file>
 
 <file path=ppt/slideLayouts/slideLayout2.xml><?xml version="1.0" encoding="utf-8"?>
-<p:sldLayout xmlns:a="http://schemas.openxmlformats.org/drawingml/2006/main" xmlns:r="http://schemas.openxmlformats.org/officeDocument/2006/relationships" xmlns:mc="http://schemas.openxmlformats.org/markup-compatibility/2006" xmlns:mv="urn:schemas-microsoft-com:mac:vml" xmlns:p="http://schemas.openxmlformats.org/presentationml/2006/main" xmlns:c="http://schemas.openxmlformats.org/drawingml/2006/chart" xmlns:dgm="http://schemas.openxmlformats.org/drawingml/2006/diagram" xmlns:o="urn:schemas-microsoft-com:office:office" xmlns:v="urn:schemas-microsoft-com:vml" xmlns:pvml="urn:schemas-microsoft-com:office:powerpoint" xmlns:com="http://schemas.openxmlformats.org/drawingml/2006/compatibility" xmlns:p14="http://schemas.microsoft.com/office/powerpoint/2010/main" xmlns:p15="http://schemas.microsoft.com/office/powerpoint/2012/main" xmlns:ahyp="http://schemas.microsoft.com/office/drawing/2018/hyperlinkcolor" matchingName="Section header" type="secHead">
+<p:sldLayout xmlns:a="http://schemas.openxmlformats.org/drawingml/2006/main" xmlns:r="http://schemas.openxmlformats.org/officeDocument/2006/relationships" xmlns:p="http://schemas.openxmlformats.org/presentationml/2006/main" matchingName="Section header" type="secHead">
   <p:cSld name="SECTION_HEADER">
     <p:spTree>
       <p:nvGrpSpPr>
-        <p:cNvPr id="13" name="Shape 13"/>
+        <p:cNvPr id="1" name="Shape 13"/>
         <p:cNvGrpSpPr/>
         <p:nvPr/>
       </p:nvGrpSpPr>
@@ -2958,7 +3068,9 @@
       <p:sp>
         <p:nvSpPr>
           <p:cNvPr id="14" name="Google Shape;14;p3"/>
-          <p:cNvSpPr txBox="1"/>
+          <p:cNvSpPr txBox="1">
+            <a:spLocks noGrp="1"/>
+          </p:cNvSpPr>
           <p:nvPr>
             <p:ph type="title"/>
           </p:nvPr>
@@ -2973,7 +3085,7 @@
           </a:prstGeom>
         </p:spPr>
         <p:txBody>
-          <a:bodyPr anchorCtr="0" anchor="ctr" bIns="91425" lIns="91425" spcFirstLastPara="1" rIns="91425" wrap="square" tIns="91425">
+          <a:bodyPr spcFirstLastPara="1" wrap="square" lIns="91425" tIns="91425" rIns="91425" bIns="91425" anchor="ctr" anchorCtr="0">
             <a:normAutofit/>
           </a:bodyPr>
           <a:lstStyle>
@@ -3077,15 +3189,19 @@
               <a:defRPr sz="3600"/>
             </a:lvl9pPr>
           </a:lstStyle>
-          <a:p/>
+          <a:p>
+            <a:endParaRPr/>
+          </a:p>
         </p:txBody>
       </p:sp>
       <p:sp>
         <p:nvSpPr>
           <p:cNvPr id="15" name="Google Shape;15;p3"/>
-          <p:cNvSpPr txBox="1"/>
+          <p:cNvSpPr txBox="1">
+            <a:spLocks noGrp="1"/>
+          </p:cNvSpPr>
           <p:nvPr>
-            <p:ph idx="12" type="sldNum"/>
+            <p:ph type="sldNum" idx="12"/>
           </p:nvPr>
         </p:nvSpPr>
         <p:spPr>
@@ -3098,7 +3214,7 @@
           </a:prstGeom>
         </p:spPr>
         <p:txBody>
-          <a:bodyPr anchorCtr="0" anchor="ctr" bIns="91425" lIns="91425" spcFirstLastPara="1" rIns="91425" wrap="square" tIns="91425">
+          <a:bodyPr spcFirstLastPara="1" wrap="square" lIns="91425" tIns="91425" rIns="91425" bIns="91425" anchor="ctr" anchorCtr="0">
             <a:normAutofit/>
           </a:bodyPr>
           <a:lstStyle>
@@ -3140,7 +3256,7 @@
             </a:lvl9pPr>
           </a:lstStyle>
           <a:p>
-            <a:pPr indent="0" lvl="0" marL="0" rtl="0" algn="r">
+            <a:pPr marL="0" lvl="0" indent="0" algn="r" rtl="0">
               <a:spcBef>
                 <a:spcPts val="0"/>
               </a:spcBef>
@@ -3166,11 +3282,11 @@
 </file>
 
 <file path=ppt/slideLayouts/slideLayout3.xml><?xml version="1.0" encoding="utf-8"?>
-<p:sldLayout xmlns:a="http://schemas.openxmlformats.org/drawingml/2006/main" xmlns:r="http://schemas.openxmlformats.org/officeDocument/2006/relationships" xmlns:mc="http://schemas.openxmlformats.org/markup-compatibility/2006" xmlns:mv="urn:schemas-microsoft-com:mac:vml" xmlns:p="http://schemas.openxmlformats.org/presentationml/2006/main" xmlns:c="http://schemas.openxmlformats.org/drawingml/2006/chart" xmlns:dgm="http://schemas.openxmlformats.org/drawingml/2006/diagram" xmlns:o="urn:schemas-microsoft-com:office:office" xmlns:v="urn:schemas-microsoft-com:vml" xmlns:pvml="urn:schemas-microsoft-com:office:powerpoint" xmlns:com="http://schemas.openxmlformats.org/drawingml/2006/compatibility" xmlns:p14="http://schemas.microsoft.com/office/powerpoint/2010/main" xmlns:p15="http://schemas.microsoft.com/office/powerpoint/2012/main" xmlns:ahyp="http://schemas.microsoft.com/office/drawing/2018/hyperlinkcolor" matchingName="Title and body" type="tx">
+<p:sldLayout xmlns:a="http://schemas.openxmlformats.org/drawingml/2006/main" xmlns:r="http://schemas.openxmlformats.org/officeDocument/2006/relationships" xmlns:p="http://schemas.openxmlformats.org/presentationml/2006/main" matchingName="Title and body" type="tx">
   <p:cSld name="TITLE_AND_BODY">
     <p:spTree>
       <p:nvGrpSpPr>
-        <p:cNvPr id="16" name="Shape 16"/>
+        <p:cNvPr id="1" name="Shape 16"/>
         <p:cNvGrpSpPr/>
         <p:nvPr/>
       </p:nvGrpSpPr>
@@ -3185,7 +3301,9 @@
       <p:sp>
         <p:nvSpPr>
           <p:cNvPr id="17" name="Google Shape;17;p4"/>
-          <p:cNvSpPr txBox="1"/>
+          <p:cNvSpPr txBox="1">
+            <a:spLocks noGrp="1"/>
+          </p:cNvSpPr>
           <p:nvPr>
             <p:ph type="title"/>
           </p:nvPr>
@@ -3200,7 +3318,7 @@
           </a:prstGeom>
         </p:spPr>
         <p:txBody>
-          <a:bodyPr anchorCtr="0" anchor="t" bIns="91425" lIns="91425" spcFirstLastPara="1" rIns="91425" wrap="square" tIns="91425">
+          <a:bodyPr spcFirstLastPara="1" wrap="square" lIns="91425" tIns="91425" rIns="91425" bIns="91425" anchor="t" anchorCtr="0">
             <a:normAutofit/>
           </a:bodyPr>
           <a:lstStyle>
@@ -3304,15 +3422,19 @@
               <a:defRPr/>
             </a:lvl9pPr>
           </a:lstStyle>
-          <a:p/>
+          <a:p>
+            <a:endParaRPr/>
+          </a:p>
         </p:txBody>
       </p:sp>
       <p:sp>
         <p:nvSpPr>
           <p:cNvPr id="18" name="Google Shape;18;p4"/>
-          <p:cNvSpPr txBox="1"/>
+          <p:cNvSpPr txBox="1">
+            <a:spLocks noGrp="1"/>
+          </p:cNvSpPr>
           <p:nvPr>
-            <p:ph idx="1" type="body"/>
+            <p:ph type="body" idx="1"/>
           </p:nvPr>
         </p:nvSpPr>
         <p:spPr>
@@ -3325,11 +3447,11 @@
           </a:prstGeom>
         </p:spPr>
         <p:txBody>
-          <a:bodyPr anchorCtr="0" anchor="t" bIns="91425" lIns="91425" spcFirstLastPara="1" rIns="91425" wrap="square" tIns="91425">
+          <a:bodyPr spcFirstLastPara="1" wrap="square" lIns="91425" tIns="91425" rIns="91425" bIns="91425" anchor="t" anchorCtr="0">
             <a:normAutofit/>
           </a:bodyPr>
           <a:lstStyle>
-            <a:lvl1pPr indent="-342900" lvl="0" marL="457200">
+            <a:lvl1pPr marL="457200" lvl="0" indent="-342900">
               <a:spcBef>
                 <a:spcPts val="0"/>
               </a:spcBef>
@@ -3340,7 +3462,7 @@
               <a:buChar char="●"/>
               <a:defRPr/>
             </a:lvl1pPr>
-            <a:lvl2pPr indent="-317500" lvl="1" marL="914400">
+            <a:lvl2pPr marL="914400" lvl="1" indent="-317500">
               <a:spcBef>
                 <a:spcPts val="0"/>
               </a:spcBef>
@@ -3351,7 +3473,7 @@
               <a:buChar char="○"/>
               <a:defRPr/>
             </a:lvl2pPr>
-            <a:lvl3pPr indent="-317500" lvl="2" marL="1371600">
+            <a:lvl3pPr marL="1371600" lvl="2" indent="-317500">
               <a:spcBef>
                 <a:spcPts val="0"/>
               </a:spcBef>
@@ -3362,7 +3484,7 @@
               <a:buChar char="■"/>
               <a:defRPr/>
             </a:lvl3pPr>
-            <a:lvl4pPr indent="-317500" lvl="3" marL="1828800">
+            <a:lvl4pPr marL="1828800" lvl="3" indent="-317500">
               <a:spcBef>
                 <a:spcPts val="0"/>
               </a:spcBef>
@@ -3373,7 +3495,7 @@
               <a:buChar char="●"/>
               <a:defRPr/>
             </a:lvl4pPr>
-            <a:lvl5pPr indent="-317500" lvl="4" marL="2286000">
+            <a:lvl5pPr marL="2286000" lvl="4" indent="-317500">
               <a:spcBef>
                 <a:spcPts val="0"/>
               </a:spcBef>
@@ -3384,7 +3506,7 @@
               <a:buChar char="○"/>
               <a:defRPr/>
             </a:lvl5pPr>
-            <a:lvl6pPr indent="-317500" lvl="5" marL="2743200">
+            <a:lvl6pPr marL="2743200" lvl="5" indent="-317500">
               <a:spcBef>
                 <a:spcPts val="0"/>
               </a:spcBef>
@@ -3395,7 +3517,7 @@
               <a:buChar char="■"/>
               <a:defRPr/>
             </a:lvl6pPr>
-            <a:lvl7pPr indent="-317500" lvl="6" marL="3200400">
+            <a:lvl7pPr marL="3200400" lvl="6" indent="-317500">
               <a:spcBef>
                 <a:spcPts val="0"/>
               </a:spcBef>
@@ -3406,7 +3528,7 @@
               <a:buChar char="●"/>
               <a:defRPr/>
             </a:lvl7pPr>
-            <a:lvl8pPr indent="-317500" lvl="7" marL="3657600">
+            <a:lvl8pPr marL="3657600" lvl="7" indent="-317500">
               <a:spcBef>
                 <a:spcPts val="0"/>
               </a:spcBef>
@@ -3417,7 +3539,7 @@
               <a:buChar char="○"/>
               <a:defRPr/>
             </a:lvl8pPr>
-            <a:lvl9pPr indent="-317500" lvl="8" marL="4114800">
+            <a:lvl9pPr marL="4114800" lvl="8" indent="-317500">
               <a:spcBef>
                 <a:spcPts val="0"/>
               </a:spcBef>
@@ -3429,15 +3551,19 @@
               <a:defRPr/>
             </a:lvl9pPr>
           </a:lstStyle>
-          <a:p/>
+          <a:p>
+            <a:endParaRPr/>
+          </a:p>
         </p:txBody>
       </p:sp>
       <p:sp>
         <p:nvSpPr>
           <p:cNvPr id="19" name="Google Shape;19;p4"/>
-          <p:cNvSpPr txBox="1"/>
+          <p:cNvSpPr txBox="1">
+            <a:spLocks noGrp="1"/>
+          </p:cNvSpPr>
           <p:nvPr>
-            <p:ph idx="12" type="sldNum"/>
+            <p:ph type="sldNum" idx="12"/>
           </p:nvPr>
         </p:nvSpPr>
         <p:spPr>
@@ -3450,7 +3576,7 @@
           </a:prstGeom>
         </p:spPr>
         <p:txBody>
-          <a:bodyPr anchorCtr="0" anchor="ctr" bIns="91425" lIns="91425" spcFirstLastPara="1" rIns="91425" wrap="square" tIns="91425">
+          <a:bodyPr spcFirstLastPara="1" wrap="square" lIns="91425" tIns="91425" rIns="91425" bIns="91425" anchor="ctr" anchorCtr="0">
             <a:normAutofit/>
           </a:bodyPr>
           <a:lstStyle>
@@ -3492,7 +3618,7 @@
             </a:lvl9pPr>
           </a:lstStyle>
           <a:p>
-            <a:pPr indent="0" lvl="0" marL="0" rtl="0" algn="r">
+            <a:pPr marL="0" lvl="0" indent="0" algn="r" rtl="0">
               <a:spcBef>
                 <a:spcPts val="0"/>
               </a:spcBef>
@@ -3518,11 +3644,11 @@
 </file>
 
 <file path=ppt/slideLayouts/slideLayout4.xml><?xml version="1.0" encoding="utf-8"?>
-<p:sldLayout xmlns:a="http://schemas.openxmlformats.org/drawingml/2006/main" xmlns:r="http://schemas.openxmlformats.org/officeDocument/2006/relationships" xmlns:mc="http://schemas.openxmlformats.org/markup-compatibility/2006" xmlns:mv="urn:schemas-microsoft-com:mac:vml" xmlns:p="http://schemas.openxmlformats.org/presentationml/2006/main" xmlns:c="http://schemas.openxmlformats.org/drawingml/2006/chart" xmlns:dgm="http://schemas.openxmlformats.org/drawingml/2006/diagram" xmlns:o="urn:schemas-microsoft-com:office:office" xmlns:v="urn:schemas-microsoft-com:vml" xmlns:pvml="urn:schemas-microsoft-com:office:powerpoint" xmlns:com="http://schemas.openxmlformats.org/drawingml/2006/compatibility" xmlns:p14="http://schemas.microsoft.com/office/powerpoint/2010/main" xmlns:p15="http://schemas.microsoft.com/office/powerpoint/2012/main" xmlns:ahyp="http://schemas.microsoft.com/office/drawing/2018/hyperlinkcolor" matchingName="Title and two columns" type="twoColTx">
+<p:sldLayout xmlns:a="http://schemas.openxmlformats.org/drawingml/2006/main" xmlns:r="http://schemas.openxmlformats.org/officeDocument/2006/relationships" xmlns:p="http://schemas.openxmlformats.org/presentationml/2006/main" matchingName="Title and two columns" type="twoColTx">
   <p:cSld name="TITLE_AND_TWO_COLUMNS">
     <p:spTree>
       <p:nvGrpSpPr>
-        <p:cNvPr id="20" name="Shape 20"/>
+        <p:cNvPr id="1" name="Shape 20"/>
         <p:cNvGrpSpPr/>
         <p:nvPr/>
       </p:nvGrpSpPr>
@@ -3537,7 +3663,9 @@
       <p:sp>
         <p:nvSpPr>
           <p:cNvPr id="21" name="Google Shape;21;p5"/>
-          <p:cNvSpPr txBox="1"/>
+          <p:cNvSpPr txBox="1">
+            <a:spLocks noGrp="1"/>
+          </p:cNvSpPr>
           <p:nvPr>
             <p:ph type="title"/>
           </p:nvPr>
@@ -3552,7 +3680,7 @@
           </a:prstGeom>
         </p:spPr>
         <p:txBody>
-          <a:bodyPr anchorCtr="0" anchor="t" bIns="91425" lIns="91425" spcFirstLastPara="1" rIns="91425" wrap="square" tIns="91425">
+          <a:bodyPr spcFirstLastPara="1" wrap="square" lIns="91425" tIns="91425" rIns="91425" bIns="91425" anchor="t" anchorCtr="0">
             <a:normAutofit/>
           </a:bodyPr>
           <a:lstStyle>
@@ -3656,15 +3784,19 @@
               <a:defRPr/>
             </a:lvl9pPr>
           </a:lstStyle>
-          <a:p/>
+          <a:p>
+            <a:endParaRPr/>
+          </a:p>
         </p:txBody>
       </p:sp>
       <p:sp>
         <p:nvSpPr>
           <p:cNvPr id="22" name="Google Shape;22;p5"/>
-          <p:cNvSpPr txBox="1"/>
+          <p:cNvSpPr txBox="1">
+            <a:spLocks noGrp="1"/>
+          </p:cNvSpPr>
           <p:nvPr>
-            <p:ph idx="1" type="body"/>
+            <p:ph type="body" idx="1"/>
           </p:nvPr>
         </p:nvSpPr>
         <p:spPr>
@@ -3677,11 +3809,11 @@
           </a:prstGeom>
         </p:spPr>
         <p:txBody>
-          <a:bodyPr anchorCtr="0" anchor="t" bIns="91425" lIns="91425" spcFirstLastPara="1" rIns="91425" wrap="square" tIns="91425">
+          <a:bodyPr spcFirstLastPara="1" wrap="square" lIns="91425" tIns="91425" rIns="91425" bIns="91425" anchor="t" anchorCtr="0">
             <a:normAutofit/>
           </a:bodyPr>
           <a:lstStyle>
-            <a:lvl1pPr indent="-317500" lvl="0" marL="457200">
+            <a:lvl1pPr marL="457200" lvl="0" indent="-317500">
               <a:spcBef>
                 <a:spcPts val="0"/>
               </a:spcBef>
@@ -3692,7 +3824,7 @@
               <a:buChar char="●"/>
               <a:defRPr sz="1400"/>
             </a:lvl1pPr>
-            <a:lvl2pPr indent="-304800" lvl="1" marL="914400">
+            <a:lvl2pPr marL="914400" lvl="1" indent="-304800">
               <a:spcBef>
                 <a:spcPts val="0"/>
               </a:spcBef>
@@ -3703,7 +3835,7 @@
               <a:buChar char="○"/>
               <a:defRPr sz="1200"/>
             </a:lvl2pPr>
-            <a:lvl3pPr indent="-304800" lvl="2" marL="1371600">
+            <a:lvl3pPr marL="1371600" lvl="2" indent="-304800">
               <a:spcBef>
                 <a:spcPts val="0"/>
               </a:spcBef>
@@ -3714,7 +3846,7 @@
               <a:buChar char="■"/>
               <a:defRPr sz="1200"/>
             </a:lvl3pPr>
-            <a:lvl4pPr indent="-304800" lvl="3" marL="1828800">
+            <a:lvl4pPr marL="1828800" lvl="3" indent="-304800">
               <a:spcBef>
                 <a:spcPts val="0"/>
               </a:spcBef>
@@ -3725,7 +3857,7 @@
               <a:buChar char="●"/>
               <a:defRPr sz="1200"/>
             </a:lvl4pPr>
-            <a:lvl5pPr indent="-304800" lvl="4" marL="2286000">
+            <a:lvl5pPr marL="2286000" lvl="4" indent="-304800">
               <a:spcBef>
                 <a:spcPts val="0"/>
               </a:spcBef>
@@ -3736,7 +3868,7 @@
               <a:buChar char="○"/>
               <a:defRPr sz="1200"/>
             </a:lvl5pPr>
-            <a:lvl6pPr indent="-304800" lvl="5" marL="2743200">
+            <a:lvl6pPr marL="2743200" lvl="5" indent="-304800">
               <a:spcBef>
                 <a:spcPts val="0"/>
               </a:spcBef>
@@ -3747,7 +3879,7 @@
               <a:buChar char="■"/>
               <a:defRPr sz="1200"/>
             </a:lvl6pPr>
-            <a:lvl7pPr indent="-304800" lvl="6" marL="3200400">
+            <a:lvl7pPr marL="3200400" lvl="6" indent="-304800">
               <a:spcBef>
                 <a:spcPts val="0"/>
               </a:spcBef>
@@ -3758,7 +3890,7 @@
               <a:buChar char="●"/>
               <a:defRPr sz="1200"/>
             </a:lvl7pPr>
-            <a:lvl8pPr indent="-304800" lvl="7" marL="3657600">
+            <a:lvl8pPr marL="3657600" lvl="7" indent="-304800">
               <a:spcBef>
                 <a:spcPts val="0"/>
               </a:spcBef>
@@ -3769,7 +3901,7 @@
               <a:buChar char="○"/>
               <a:defRPr sz="1200"/>
             </a:lvl8pPr>
-            <a:lvl9pPr indent="-304800" lvl="8" marL="4114800">
+            <a:lvl9pPr marL="4114800" lvl="8" indent="-304800">
               <a:spcBef>
                 <a:spcPts val="0"/>
               </a:spcBef>
@@ -3781,15 +3913,19 @@
               <a:defRPr sz="1200"/>
             </a:lvl9pPr>
           </a:lstStyle>
-          <a:p/>
+          <a:p>
+            <a:endParaRPr/>
+          </a:p>
         </p:txBody>
       </p:sp>
       <p:sp>
         <p:nvSpPr>
           <p:cNvPr id="23" name="Google Shape;23;p5"/>
-          <p:cNvSpPr txBox="1"/>
+          <p:cNvSpPr txBox="1">
+            <a:spLocks noGrp="1"/>
+          </p:cNvSpPr>
           <p:nvPr>
-            <p:ph idx="2" type="body"/>
+            <p:ph type="body" idx="2"/>
           </p:nvPr>
         </p:nvSpPr>
         <p:spPr>
@@ -3802,11 +3938,11 @@
           </a:prstGeom>
         </p:spPr>
         <p:txBody>
-          <a:bodyPr anchorCtr="0" anchor="t" bIns="91425" lIns="91425" spcFirstLastPara="1" rIns="91425" wrap="square" tIns="91425">
+          <a:bodyPr spcFirstLastPara="1" wrap="square" lIns="91425" tIns="91425" rIns="91425" bIns="91425" anchor="t" anchorCtr="0">
             <a:normAutofit/>
           </a:bodyPr>
           <a:lstStyle>
-            <a:lvl1pPr indent="-317500" lvl="0" marL="457200">
+            <a:lvl1pPr marL="457200" lvl="0" indent="-317500">
               <a:spcBef>
                 <a:spcPts val="0"/>
               </a:spcBef>
@@ -3817,7 +3953,7 @@
               <a:buChar char="●"/>
               <a:defRPr sz="1400"/>
             </a:lvl1pPr>
-            <a:lvl2pPr indent="-304800" lvl="1" marL="914400">
+            <a:lvl2pPr marL="914400" lvl="1" indent="-304800">
               <a:spcBef>
                 <a:spcPts val="0"/>
               </a:spcBef>
@@ -3828,7 +3964,7 @@
               <a:buChar char="○"/>
               <a:defRPr sz="1200"/>
             </a:lvl2pPr>
-            <a:lvl3pPr indent="-304800" lvl="2" marL="1371600">
+            <a:lvl3pPr marL="1371600" lvl="2" indent="-304800">
               <a:spcBef>
                 <a:spcPts val="0"/>
               </a:spcBef>
@@ -3839,7 +3975,7 @@
               <a:buChar char="■"/>
               <a:defRPr sz="1200"/>
             </a:lvl3pPr>
-            <a:lvl4pPr indent="-304800" lvl="3" marL="1828800">
+            <a:lvl4pPr marL="1828800" lvl="3" indent="-304800">
               <a:spcBef>
                 <a:spcPts val="0"/>
               </a:spcBef>
@@ -3850,7 +3986,7 @@
               <a:buChar char="●"/>
               <a:defRPr sz="1200"/>
             </a:lvl4pPr>
-            <a:lvl5pPr indent="-304800" lvl="4" marL="2286000">
+            <a:lvl5pPr marL="2286000" lvl="4" indent="-304800">
               <a:spcBef>
                 <a:spcPts val="0"/>
               </a:spcBef>
@@ -3861,7 +3997,7 @@
               <a:buChar char="○"/>
               <a:defRPr sz="1200"/>
             </a:lvl5pPr>
-            <a:lvl6pPr indent="-304800" lvl="5" marL="2743200">
+            <a:lvl6pPr marL="2743200" lvl="5" indent="-304800">
               <a:spcBef>
                 <a:spcPts val="0"/>
               </a:spcBef>
@@ -3872,7 +4008,7 @@
               <a:buChar char="■"/>
               <a:defRPr sz="1200"/>
             </a:lvl6pPr>
-            <a:lvl7pPr indent="-304800" lvl="6" marL="3200400">
+            <a:lvl7pPr marL="3200400" lvl="6" indent="-304800">
               <a:spcBef>
                 <a:spcPts val="0"/>
               </a:spcBef>
@@ -3883,7 +4019,7 @@
               <a:buChar char="●"/>
               <a:defRPr sz="1200"/>
             </a:lvl7pPr>
-            <a:lvl8pPr indent="-304800" lvl="7" marL="3657600">
+            <a:lvl8pPr marL="3657600" lvl="7" indent="-304800">
               <a:spcBef>
                 <a:spcPts val="0"/>
               </a:spcBef>
@@ -3894,7 +4030,7 @@
               <a:buChar char="○"/>
               <a:defRPr sz="1200"/>
             </a:lvl8pPr>
-            <a:lvl9pPr indent="-304800" lvl="8" marL="4114800">
+            <a:lvl9pPr marL="4114800" lvl="8" indent="-304800">
               <a:spcBef>
                 <a:spcPts val="0"/>
               </a:spcBef>
@@ -3906,15 +4042,19 @@
               <a:defRPr sz="1200"/>
             </a:lvl9pPr>
           </a:lstStyle>
-          <a:p/>
+          <a:p>
+            <a:endParaRPr/>
+          </a:p>
         </p:txBody>
       </p:sp>
       <p:sp>
         <p:nvSpPr>
           <p:cNvPr id="24" name="Google Shape;24;p5"/>
-          <p:cNvSpPr txBox="1"/>
+          <p:cNvSpPr txBox="1">
+            <a:spLocks noGrp="1"/>
+          </p:cNvSpPr>
           <p:nvPr>
-            <p:ph idx="12" type="sldNum"/>
+            <p:ph type="sldNum" idx="12"/>
           </p:nvPr>
         </p:nvSpPr>
         <p:spPr>
@@ -3927,7 +4067,7 @@
           </a:prstGeom>
         </p:spPr>
         <p:txBody>
-          <a:bodyPr anchorCtr="0" anchor="ctr" bIns="91425" lIns="91425" spcFirstLastPara="1" rIns="91425" wrap="square" tIns="91425">
+          <a:bodyPr spcFirstLastPara="1" wrap="square" lIns="91425" tIns="91425" rIns="91425" bIns="91425" anchor="ctr" anchorCtr="0">
             <a:normAutofit/>
           </a:bodyPr>
           <a:lstStyle>
@@ -3969,7 +4109,7 @@
             </a:lvl9pPr>
           </a:lstStyle>
           <a:p>
-            <a:pPr indent="0" lvl="0" marL="0" rtl="0" algn="r">
+            <a:pPr marL="0" lvl="0" indent="0" algn="r" rtl="0">
               <a:spcBef>
                 <a:spcPts val="0"/>
               </a:spcBef>
@@ -3995,11 +4135,11 @@
 </file>
 
 <file path=ppt/slideLayouts/slideLayout5.xml><?xml version="1.0" encoding="utf-8"?>
-<p:sldLayout xmlns:a="http://schemas.openxmlformats.org/drawingml/2006/main" xmlns:r="http://schemas.openxmlformats.org/officeDocument/2006/relationships" xmlns:mc="http://schemas.openxmlformats.org/markup-compatibility/2006" xmlns:mv="urn:schemas-microsoft-com:mac:vml" xmlns:p="http://schemas.openxmlformats.org/presentationml/2006/main" xmlns:c="http://schemas.openxmlformats.org/drawingml/2006/chart" xmlns:dgm="http://schemas.openxmlformats.org/drawingml/2006/diagram" xmlns:o="urn:schemas-microsoft-com:office:office" xmlns:v="urn:schemas-microsoft-com:vml" xmlns:pvml="urn:schemas-microsoft-com:office:powerpoint" xmlns:com="http://schemas.openxmlformats.org/drawingml/2006/compatibility" xmlns:p14="http://schemas.microsoft.com/office/powerpoint/2010/main" xmlns:p15="http://schemas.microsoft.com/office/powerpoint/2012/main" xmlns:ahyp="http://schemas.microsoft.com/office/drawing/2018/hyperlinkcolor" matchingName="Title only" type="titleOnly">
+<p:sldLayout xmlns:a="http://schemas.openxmlformats.org/drawingml/2006/main" xmlns:r="http://schemas.openxmlformats.org/officeDocument/2006/relationships" xmlns:p="http://schemas.openxmlformats.org/presentationml/2006/main" matchingName="Title only" type="titleOnly">
   <p:cSld name="TITLE_ONLY">
     <p:spTree>
       <p:nvGrpSpPr>
-        <p:cNvPr id="25" name="Shape 25"/>
+        <p:cNvPr id="1" name="Shape 25"/>
         <p:cNvGrpSpPr/>
         <p:nvPr/>
       </p:nvGrpSpPr>
@@ -4014,7 +4154,9 @@
       <p:sp>
         <p:nvSpPr>
           <p:cNvPr id="26" name="Google Shape;26;p6"/>
-          <p:cNvSpPr txBox="1"/>
+          <p:cNvSpPr txBox="1">
+            <a:spLocks noGrp="1"/>
+          </p:cNvSpPr>
           <p:nvPr>
             <p:ph type="title"/>
           </p:nvPr>
@@ -4029,7 +4171,7 @@
           </a:prstGeom>
         </p:spPr>
         <p:txBody>
-          <a:bodyPr anchorCtr="0" anchor="t" bIns="91425" lIns="91425" spcFirstLastPara="1" rIns="91425" wrap="square" tIns="91425">
+          <a:bodyPr spcFirstLastPara="1" wrap="square" lIns="91425" tIns="91425" rIns="91425" bIns="91425" anchor="t" anchorCtr="0">
             <a:normAutofit/>
           </a:bodyPr>
           <a:lstStyle>
@@ -4133,15 +4275,19 @@
               <a:defRPr/>
             </a:lvl9pPr>
           </a:lstStyle>
-          <a:p/>
+          <a:p>
+            <a:endParaRPr/>
+          </a:p>
         </p:txBody>
       </p:sp>
       <p:sp>
         <p:nvSpPr>
           <p:cNvPr id="27" name="Google Shape;27;p6"/>
-          <p:cNvSpPr txBox="1"/>
+          <p:cNvSpPr txBox="1">
+            <a:spLocks noGrp="1"/>
+          </p:cNvSpPr>
           <p:nvPr>
-            <p:ph idx="12" type="sldNum"/>
+            <p:ph type="sldNum" idx="12"/>
           </p:nvPr>
         </p:nvSpPr>
         <p:spPr>
@@ -4154,7 +4300,7 @@
           </a:prstGeom>
         </p:spPr>
         <p:txBody>
-          <a:bodyPr anchorCtr="0" anchor="ctr" bIns="91425" lIns="91425" spcFirstLastPara="1" rIns="91425" wrap="square" tIns="91425">
+          <a:bodyPr spcFirstLastPara="1" wrap="square" lIns="91425" tIns="91425" rIns="91425" bIns="91425" anchor="ctr" anchorCtr="0">
             <a:normAutofit/>
           </a:bodyPr>
           <a:lstStyle>
@@ -4196,7 +4342,7 @@
             </a:lvl9pPr>
           </a:lstStyle>
           <a:p>
-            <a:pPr indent="0" lvl="0" marL="0" rtl="0" algn="r">
+            <a:pPr marL="0" lvl="0" indent="0" algn="r" rtl="0">
               <a:spcBef>
                 <a:spcPts val="0"/>
               </a:spcBef>
@@ -4222,11 +4368,11 @@
 </file>
 
 <file path=ppt/slideLayouts/slideLayout6.xml><?xml version="1.0" encoding="utf-8"?>
-<p:sldLayout xmlns:a="http://schemas.openxmlformats.org/drawingml/2006/main" xmlns:r="http://schemas.openxmlformats.org/officeDocument/2006/relationships" xmlns:mc="http://schemas.openxmlformats.org/markup-compatibility/2006" xmlns:mv="urn:schemas-microsoft-com:mac:vml" xmlns:p="http://schemas.openxmlformats.org/presentationml/2006/main" xmlns:c="http://schemas.openxmlformats.org/drawingml/2006/chart" xmlns:dgm="http://schemas.openxmlformats.org/drawingml/2006/diagram" xmlns:o="urn:schemas-microsoft-com:office:office" xmlns:v="urn:schemas-microsoft-com:vml" xmlns:pvml="urn:schemas-microsoft-com:office:powerpoint" xmlns:com="http://schemas.openxmlformats.org/drawingml/2006/compatibility" xmlns:p14="http://schemas.microsoft.com/office/powerpoint/2010/main" xmlns:p15="http://schemas.microsoft.com/office/powerpoint/2012/main" xmlns:ahyp="http://schemas.microsoft.com/office/drawing/2018/hyperlinkcolor" matchingName="One column text">
+<p:sldLayout xmlns:a="http://schemas.openxmlformats.org/drawingml/2006/main" xmlns:r="http://schemas.openxmlformats.org/officeDocument/2006/relationships" xmlns:p="http://schemas.openxmlformats.org/presentationml/2006/main" matchingName="One column text">
   <p:cSld name="ONE_COLUMN_TEXT">
     <p:spTree>
       <p:nvGrpSpPr>
-        <p:cNvPr id="28" name="Shape 28"/>
+        <p:cNvPr id="1" name="Shape 28"/>
         <p:cNvGrpSpPr/>
         <p:nvPr/>
       </p:nvGrpSpPr>
@@ -4241,7 +4387,9 @@
       <p:sp>
         <p:nvSpPr>
           <p:cNvPr id="29" name="Google Shape;29;p7"/>
-          <p:cNvSpPr txBox="1"/>
+          <p:cNvSpPr txBox="1">
+            <a:spLocks noGrp="1"/>
+          </p:cNvSpPr>
           <p:nvPr>
             <p:ph type="title"/>
           </p:nvPr>
@@ -4256,7 +4404,7 @@
           </a:prstGeom>
         </p:spPr>
         <p:txBody>
-          <a:bodyPr anchorCtr="0" anchor="b" bIns="91425" lIns="91425" spcFirstLastPara="1" rIns="91425" wrap="square" tIns="91425">
+          <a:bodyPr spcFirstLastPara="1" wrap="square" lIns="91425" tIns="91425" rIns="91425" bIns="91425" anchor="b" anchorCtr="0">
             <a:normAutofit/>
           </a:bodyPr>
           <a:lstStyle>
@@ -4360,15 +4508,19 @@
               <a:defRPr sz="2400"/>
             </a:lvl9pPr>
           </a:lstStyle>
-          <a:p/>
+          <a:p>
+            <a:endParaRPr/>
+          </a:p>
         </p:txBody>
       </p:sp>
       <p:sp>
         <p:nvSpPr>
           <p:cNvPr id="30" name="Google Shape;30;p7"/>
-          <p:cNvSpPr txBox="1"/>
+          <p:cNvSpPr txBox="1">
+            <a:spLocks noGrp="1"/>
+          </p:cNvSpPr>
           <p:nvPr>
-            <p:ph idx="1" type="body"/>
+            <p:ph type="body" idx="1"/>
           </p:nvPr>
         </p:nvSpPr>
         <p:spPr>
@@ -4381,11 +4533,11 @@
           </a:prstGeom>
         </p:spPr>
         <p:txBody>
-          <a:bodyPr anchorCtr="0" anchor="t" bIns="91425" lIns="91425" spcFirstLastPara="1" rIns="91425" wrap="square" tIns="91425">
+          <a:bodyPr spcFirstLastPara="1" wrap="square" lIns="91425" tIns="91425" rIns="91425" bIns="91425" anchor="t" anchorCtr="0">
             <a:normAutofit/>
           </a:bodyPr>
           <a:lstStyle>
-            <a:lvl1pPr indent="-304800" lvl="0" marL="457200">
+            <a:lvl1pPr marL="457200" lvl="0" indent="-304800">
               <a:spcBef>
                 <a:spcPts val="0"/>
               </a:spcBef>
@@ -4396,7 +4548,7 @@
               <a:buChar char="●"/>
               <a:defRPr sz="1200"/>
             </a:lvl1pPr>
-            <a:lvl2pPr indent="-304800" lvl="1" marL="914400">
+            <a:lvl2pPr marL="914400" lvl="1" indent="-304800">
               <a:spcBef>
                 <a:spcPts val="0"/>
               </a:spcBef>
@@ -4407,7 +4559,7 @@
               <a:buChar char="○"/>
               <a:defRPr sz="1200"/>
             </a:lvl2pPr>
-            <a:lvl3pPr indent="-304800" lvl="2" marL="1371600">
+            <a:lvl3pPr marL="1371600" lvl="2" indent="-304800">
               <a:spcBef>
                 <a:spcPts val="0"/>
               </a:spcBef>
@@ -4418,7 +4570,7 @@
               <a:buChar char="■"/>
               <a:defRPr sz="1200"/>
             </a:lvl3pPr>
-            <a:lvl4pPr indent="-304800" lvl="3" marL="1828800">
+            <a:lvl4pPr marL="1828800" lvl="3" indent="-304800">
               <a:spcBef>
                 <a:spcPts val="0"/>
               </a:spcBef>
@@ -4429,7 +4581,7 @@
               <a:buChar char="●"/>
               <a:defRPr sz="1200"/>
             </a:lvl4pPr>
-            <a:lvl5pPr indent="-304800" lvl="4" marL="2286000">
+            <a:lvl5pPr marL="2286000" lvl="4" indent="-304800">
               <a:spcBef>
                 <a:spcPts val="0"/>
               </a:spcBef>
@@ -4440,7 +4592,7 @@
               <a:buChar char="○"/>
               <a:defRPr sz="1200"/>
             </a:lvl5pPr>
-            <a:lvl6pPr indent="-304800" lvl="5" marL="2743200">
+            <a:lvl6pPr marL="2743200" lvl="5" indent="-304800">
               <a:spcBef>
                 <a:spcPts val="0"/>
               </a:spcBef>
@@ -4451,7 +4603,7 @@
               <a:buChar char="■"/>
               <a:defRPr sz="1200"/>
             </a:lvl6pPr>
-            <a:lvl7pPr indent="-304800" lvl="6" marL="3200400">
+            <a:lvl7pPr marL="3200400" lvl="6" indent="-304800">
               <a:spcBef>
                 <a:spcPts val="0"/>
               </a:spcBef>
@@ -4462,7 +4614,7 @@
               <a:buChar char="●"/>
               <a:defRPr sz="1200"/>
             </a:lvl7pPr>
-            <a:lvl8pPr indent="-304800" lvl="7" marL="3657600">
+            <a:lvl8pPr marL="3657600" lvl="7" indent="-304800">
               <a:spcBef>
                 <a:spcPts val="0"/>
               </a:spcBef>
@@ -4473,7 +4625,7 @@
               <a:buChar char="○"/>
               <a:defRPr sz="1200"/>
             </a:lvl8pPr>
-            <a:lvl9pPr indent="-304800" lvl="8" marL="4114800">
+            <a:lvl9pPr marL="4114800" lvl="8" indent="-304800">
               <a:spcBef>
                 <a:spcPts val="0"/>
               </a:spcBef>
@@ -4485,15 +4637,19 @@
               <a:defRPr sz="1200"/>
             </a:lvl9pPr>
           </a:lstStyle>
-          <a:p/>
+          <a:p>
+            <a:endParaRPr/>
+          </a:p>
         </p:txBody>
       </p:sp>
       <p:sp>
         <p:nvSpPr>
           <p:cNvPr id="31" name="Google Shape;31;p7"/>
-          <p:cNvSpPr txBox="1"/>
+          <p:cNvSpPr txBox="1">
+            <a:spLocks noGrp="1"/>
+          </p:cNvSpPr>
           <p:nvPr>
-            <p:ph idx="12" type="sldNum"/>
+            <p:ph type="sldNum" idx="12"/>
           </p:nvPr>
         </p:nvSpPr>
         <p:spPr>
@@ -4506,7 +4662,7 @@
           </a:prstGeom>
         </p:spPr>
         <p:txBody>
-          <a:bodyPr anchorCtr="0" anchor="ctr" bIns="91425" lIns="91425" spcFirstLastPara="1" rIns="91425" wrap="square" tIns="91425">
+          <a:bodyPr spcFirstLastPara="1" wrap="square" lIns="91425" tIns="91425" rIns="91425" bIns="91425" anchor="ctr" anchorCtr="0">
             <a:normAutofit/>
           </a:bodyPr>
           <a:lstStyle>
@@ -4548,7 +4704,7 @@
             </a:lvl9pPr>
           </a:lstStyle>
           <a:p>
-            <a:pPr indent="0" lvl="0" marL="0" rtl="0" algn="r">
+            <a:pPr marL="0" lvl="0" indent="0" algn="r" rtl="0">
               <a:spcBef>
                 <a:spcPts val="0"/>
               </a:spcBef>
@@ -4574,11 +4730,11 @@
 </file>
 
 <file path=ppt/slideLayouts/slideLayout7.xml><?xml version="1.0" encoding="utf-8"?>
-<p:sldLayout xmlns:a="http://schemas.openxmlformats.org/drawingml/2006/main" xmlns:r="http://schemas.openxmlformats.org/officeDocument/2006/relationships" xmlns:mc="http://schemas.openxmlformats.org/markup-compatibility/2006" xmlns:mv="urn:schemas-microsoft-com:mac:vml" xmlns:p="http://schemas.openxmlformats.org/presentationml/2006/main" xmlns:c="http://schemas.openxmlformats.org/drawingml/2006/chart" xmlns:dgm="http://schemas.openxmlformats.org/drawingml/2006/diagram" xmlns:o="urn:schemas-microsoft-com:office:office" xmlns:v="urn:schemas-microsoft-com:vml" xmlns:pvml="urn:schemas-microsoft-com:office:powerpoint" xmlns:com="http://schemas.openxmlformats.org/drawingml/2006/compatibility" xmlns:p14="http://schemas.microsoft.com/office/powerpoint/2010/main" xmlns:p15="http://schemas.microsoft.com/office/powerpoint/2012/main" xmlns:ahyp="http://schemas.microsoft.com/office/drawing/2018/hyperlinkcolor" matchingName="Main point">
+<p:sldLayout xmlns:a="http://schemas.openxmlformats.org/drawingml/2006/main" xmlns:r="http://schemas.openxmlformats.org/officeDocument/2006/relationships" xmlns:p="http://schemas.openxmlformats.org/presentationml/2006/main" matchingName="Main point">
   <p:cSld name="MAIN_POINT">
     <p:spTree>
       <p:nvGrpSpPr>
-        <p:cNvPr id="32" name="Shape 32"/>
+        <p:cNvPr id="1" name="Shape 32"/>
         <p:cNvGrpSpPr/>
         <p:nvPr/>
       </p:nvGrpSpPr>
@@ -4593,7 +4749,9 @@
       <p:sp>
         <p:nvSpPr>
           <p:cNvPr id="33" name="Google Shape;33;p8"/>
-          <p:cNvSpPr txBox="1"/>
+          <p:cNvSpPr txBox="1">
+            <a:spLocks noGrp="1"/>
+          </p:cNvSpPr>
           <p:nvPr>
             <p:ph type="title"/>
           </p:nvPr>
@@ -4608,7 +4766,7 @@
           </a:prstGeom>
         </p:spPr>
         <p:txBody>
-          <a:bodyPr anchorCtr="0" anchor="ctr" bIns="91425" lIns="91425" spcFirstLastPara="1" rIns="91425" wrap="square" tIns="91425">
+          <a:bodyPr spcFirstLastPara="1" wrap="square" lIns="91425" tIns="91425" rIns="91425" bIns="91425" anchor="ctr" anchorCtr="0">
             <a:normAutofit/>
           </a:bodyPr>
           <a:lstStyle>
@@ -4712,15 +4870,19 @@
               <a:defRPr sz="4800"/>
             </a:lvl9pPr>
           </a:lstStyle>
-          <a:p/>
+          <a:p>
+            <a:endParaRPr/>
+          </a:p>
         </p:txBody>
       </p:sp>
       <p:sp>
         <p:nvSpPr>
           <p:cNvPr id="34" name="Google Shape;34;p8"/>
-          <p:cNvSpPr txBox="1"/>
+          <p:cNvSpPr txBox="1">
+            <a:spLocks noGrp="1"/>
+          </p:cNvSpPr>
           <p:nvPr>
-            <p:ph idx="12" type="sldNum"/>
+            <p:ph type="sldNum" idx="12"/>
           </p:nvPr>
         </p:nvSpPr>
         <p:spPr>
@@ -4733,7 +4895,7 @@
           </a:prstGeom>
         </p:spPr>
         <p:txBody>
-          <a:bodyPr anchorCtr="0" anchor="ctr" bIns="91425" lIns="91425" spcFirstLastPara="1" rIns="91425" wrap="square" tIns="91425">
+          <a:bodyPr spcFirstLastPara="1" wrap="square" lIns="91425" tIns="91425" rIns="91425" bIns="91425" anchor="ctr" anchorCtr="0">
             <a:normAutofit/>
           </a:bodyPr>
           <a:lstStyle>
@@ -4775,7 +4937,7 @@
             </a:lvl9pPr>
           </a:lstStyle>
           <a:p>
-            <a:pPr indent="0" lvl="0" marL="0" rtl="0" algn="r">
+            <a:pPr marL="0" lvl="0" indent="0" algn="r" rtl="0">
               <a:spcBef>
                 <a:spcPts val="0"/>
               </a:spcBef>
@@ -4801,11 +4963,11 @@
 </file>
 
 <file path=ppt/slideLayouts/slideLayout8.xml><?xml version="1.0" encoding="utf-8"?>
-<p:sldLayout xmlns:a="http://schemas.openxmlformats.org/drawingml/2006/main" xmlns:r="http://schemas.openxmlformats.org/officeDocument/2006/relationships" xmlns:mc="http://schemas.openxmlformats.org/markup-compatibility/2006" xmlns:mv="urn:schemas-microsoft-com:mac:vml" xmlns:p="http://schemas.openxmlformats.org/presentationml/2006/main" xmlns:c="http://schemas.openxmlformats.org/drawingml/2006/chart" xmlns:dgm="http://schemas.openxmlformats.org/drawingml/2006/diagram" xmlns:o="urn:schemas-microsoft-com:office:office" xmlns:v="urn:schemas-microsoft-com:vml" xmlns:pvml="urn:schemas-microsoft-com:office:powerpoint" xmlns:com="http://schemas.openxmlformats.org/drawingml/2006/compatibility" xmlns:p14="http://schemas.microsoft.com/office/powerpoint/2010/main" xmlns:p15="http://schemas.microsoft.com/office/powerpoint/2012/main" xmlns:ahyp="http://schemas.microsoft.com/office/drawing/2018/hyperlinkcolor" matchingName="Section title and description">
+<p:sldLayout xmlns:a="http://schemas.openxmlformats.org/drawingml/2006/main" xmlns:r="http://schemas.openxmlformats.org/officeDocument/2006/relationships" xmlns:p="http://schemas.openxmlformats.org/presentationml/2006/main" matchingName="Section title and description">
   <p:cSld name="SECTION_TITLE_AND_DESCRIPTION">
     <p:spTree>
       <p:nvGrpSpPr>
-        <p:cNvPr id="35" name="Shape 35"/>
+        <p:cNvPr id="1" name="Shape 35"/>
         <p:cNvGrpSpPr/>
         <p:nvPr/>
       </p:nvGrpSpPr>
@@ -4839,23 +5001,20 @@
           </a:ln>
         </p:spPr>
         <p:txBody>
-          <a:bodyPr anchorCtr="0" anchor="ctr" bIns="91425" lIns="91425" spcFirstLastPara="1" rIns="91425" wrap="square" tIns="91425">
+          <a:bodyPr spcFirstLastPara="1" wrap="square" lIns="91425" tIns="91425" rIns="91425" bIns="91425" anchor="ctr" anchorCtr="0">
             <a:noAutofit/>
           </a:bodyPr>
           <a:lstStyle/>
           <a:p>
-            <a:pPr indent="0" lvl="0" marL="0" rtl="0" algn="l">
-              <a:spcBef>
-                <a:spcPts val="0"/>
-              </a:spcBef>
-              <a:spcAft>
-                <a:spcPts val="0"/>
-              </a:spcAft>
-              <a:buNone/>
-            </a:pPr>
-            <a:r>
-              <a:t/>
-            </a:r>
+            <a:pPr marL="0" lvl="0" indent="0" algn="l" rtl="0">
+              <a:spcBef>
+                <a:spcPts val="0"/>
+              </a:spcBef>
+              <a:spcAft>
+                <a:spcPts val="0"/>
+              </a:spcAft>
+              <a:buNone/>
+            </a:pPr>
             <a:endParaRPr/>
           </a:p>
         </p:txBody>
@@ -4863,7 +5022,9 @@
       <p:sp>
         <p:nvSpPr>
           <p:cNvPr id="37" name="Google Shape;37;p9"/>
-          <p:cNvSpPr txBox="1"/>
+          <p:cNvSpPr txBox="1">
+            <a:spLocks noGrp="1"/>
+          </p:cNvSpPr>
           <p:nvPr>
             <p:ph type="title"/>
           </p:nvPr>
@@ -4878,7 +5039,7 @@
           </a:prstGeom>
         </p:spPr>
         <p:txBody>
-          <a:bodyPr anchorCtr="0" anchor="b" bIns="91425" lIns="91425" spcFirstLastPara="1" rIns="91425" wrap="square" tIns="91425">
+          <a:bodyPr spcFirstLastPara="1" wrap="square" lIns="91425" tIns="91425" rIns="91425" bIns="91425" anchor="b" anchorCtr="0">
             <a:normAutofit/>
           </a:bodyPr>
           <a:lstStyle>
@@ -4982,15 +5143,19 @@
               <a:defRPr sz="4200"/>
             </a:lvl9pPr>
           </a:lstStyle>
-          <a:p/>
+          <a:p>
+            <a:endParaRPr/>
+          </a:p>
         </p:txBody>
       </p:sp>
       <p:sp>
         <p:nvSpPr>
           <p:cNvPr id="38" name="Google Shape;38;p9"/>
-          <p:cNvSpPr txBox="1"/>
+          <p:cNvSpPr txBox="1">
+            <a:spLocks noGrp="1"/>
+          </p:cNvSpPr>
           <p:nvPr>
-            <p:ph idx="1" type="subTitle"/>
+            <p:ph type="subTitle" idx="1"/>
           </p:nvPr>
         </p:nvSpPr>
         <p:spPr>
@@ -5003,7 +5168,7 @@
           </a:prstGeom>
         </p:spPr>
         <p:txBody>
-          <a:bodyPr anchorCtr="0" anchor="t" bIns="91425" lIns="91425" spcFirstLastPara="1" rIns="91425" wrap="square" tIns="91425">
+          <a:bodyPr spcFirstLastPara="1" wrap="square" lIns="91425" tIns="91425" rIns="91425" bIns="91425" anchor="t" anchorCtr="0">
             <a:normAutofit/>
           </a:bodyPr>
           <a:lstStyle>
@@ -5134,15 +5299,19 @@
               <a:defRPr sz="2100"/>
             </a:lvl9pPr>
           </a:lstStyle>
-          <a:p/>
+          <a:p>
+            <a:endParaRPr/>
+          </a:p>
         </p:txBody>
       </p:sp>
       <p:sp>
         <p:nvSpPr>
           <p:cNvPr id="39" name="Google Shape;39;p9"/>
-          <p:cNvSpPr txBox="1"/>
+          <p:cNvSpPr txBox="1">
+            <a:spLocks noGrp="1"/>
+          </p:cNvSpPr>
           <p:nvPr>
-            <p:ph idx="2" type="body"/>
+            <p:ph type="body" idx="2"/>
           </p:nvPr>
         </p:nvSpPr>
         <p:spPr>
@@ -5155,11 +5324,11 @@
           </a:prstGeom>
         </p:spPr>
         <p:txBody>
-          <a:bodyPr anchorCtr="0" anchor="ctr" bIns="91425" lIns="91425" spcFirstLastPara="1" rIns="91425" wrap="square" tIns="91425">
+          <a:bodyPr spcFirstLastPara="1" wrap="square" lIns="91425" tIns="91425" rIns="91425" bIns="91425" anchor="ctr" anchorCtr="0">
             <a:normAutofit/>
           </a:bodyPr>
           <a:lstStyle>
-            <a:lvl1pPr indent="-342900" lvl="0" marL="457200">
+            <a:lvl1pPr marL="457200" lvl="0" indent="-342900">
               <a:spcBef>
                 <a:spcPts val="0"/>
               </a:spcBef>
@@ -5170,7 +5339,7 @@
               <a:buChar char="●"/>
               <a:defRPr/>
             </a:lvl1pPr>
-            <a:lvl2pPr indent="-317500" lvl="1" marL="914400">
+            <a:lvl2pPr marL="914400" lvl="1" indent="-317500">
               <a:spcBef>
                 <a:spcPts val="0"/>
               </a:spcBef>
@@ -5181,7 +5350,7 @@
               <a:buChar char="○"/>
               <a:defRPr/>
             </a:lvl2pPr>
-            <a:lvl3pPr indent="-317500" lvl="2" marL="1371600">
+            <a:lvl3pPr marL="1371600" lvl="2" indent="-317500">
               <a:spcBef>
                 <a:spcPts val="0"/>
               </a:spcBef>
@@ -5192,7 +5361,7 @@
               <a:buChar char="■"/>
               <a:defRPr/>
             </a:lvl3pPr>
-            <a:lvl4pPr indent="-317500" lvl="3" marL="1828800">
+            <a:lvl4pPr marL="1828800" lvl="3" indent="-317500">
               <a:spcBef>
                 <a:spcPts val="0"/>
               </a:spcBef>
@@ -5203,7 +5372,7 @@
               <a:buChar char="●"/>
               <a:defRPr/>
             </a:lvl4pPr>
-            <a:lvl5pPr indent="-317500" lvl="4" marL="2286000">
+            <a:lvl5pPr marL="2286000" lvl="4" indent="-317500">
               <a:spcBef>
                 <a:spcPts val="0"/>
               </a:spcBef>
@@ -5214,7 +5383,7 @@
               <a:buChar char="○"/>
               <a:defRPr/>
             </a:lvl5pPr>
-            <a:lvl6pPr indent="-317500" lvl="5" marL="2743200">
+            <a:lvl6pPr marL="2743200" lvl="5" indent="-317500">
               <a:spcBef>
                 <a:spcPts val="0"/>
               </a:spcBef>
@@ -5225,7 +5394,7 @@
               <a:buChar char="■"/>
               <a:defRPr/>
             </a:lvl6pPr>
-            <a:lvl7pPr indent="-317500" lvl="6" marL="3200400">
+            <a:lvl7pPr marL="3200400" lvl="6" indent="-317500">
               <a:spcBef>
                 <a:spcPts val="0"/>
               </a:spcBef>
@@ -5236,7 +5405,7 @@
               <a:buChar char="●"/>
               <a:defRPr/>
             </a:lvl7pPr>
-            <a:lvl8pPr indent="-317500" lvl="7" marL="3657600">
+            <a:lvl8pPr marL="3657600" lvl="7" indent="-317500">
               <a:spcBef>
                 <a:spcPts val="0"/>
               </a:spcBef>
@@ -5247,7 +5416,7 @@
               <a:buChar char="○"/>
               <a:defRPr/>
             </a:lvl8pPr>
-            <a:lvl9pPr indent="-317500" lvl="8" marL="4114800">
+            <a:lvl9pPr marL="4114800" lvl="8" indent="-317500">
               <a:spcBef>
                 <a:spcPts val="0"/>
               </a:spcBef>
@@ -5259,15 +5428,19 @@
               <a:defRPr/>
             </a:lvl9pPr>
           </a:lstStyle>
-          <a:p/>
+          <a:p>
+            <a:endParaRPr/>
+          </a:p>
         </p:txBody>
       </p:sp>
       <p:sp>
         <p:nvSpPr>
           <p:cNvPr id="40" name="Google Shape;40;p9"/>
-          <p:cNvSpPr txBox="1"/>
+          <p:cNvSpPr txBox="1">
+            <a:spLocks noGrp="1"/>
+          </p:cNvSpPr>
           <p:nvPr>
-            <p:ph idx="12" type="sldNum"/>
+            <p:ph type="sldNum" idx="12"/>
           </p:nvPr>
         </p:nvSpPr>
         <p:spPr>
@@ -5280,7 +5453,7 @@
           </a:prstGeom>
         </p:spPr>
         <p:txBody>
-          <a:bodyPr anchorCtr="0" anchor="ctr" bIns="91425" lIns="91425" spcFirstLastPara="1" rIns="91425" wrap="square" tIns="91425">
+          <a:bodyPr spcFirstLastPara="1" wrap="square" lIns="91425" tIns="91425" rIns="91425" bIns="91425" anchor="ctr" anchorCtr="0">
             <a:normAutofit/>
           </a:bodyPr>
           <a:lstStyle>
@@ -5322,7 +5495,7 @@
             </a:lvl9pPr>
           </a:lstStyle>
           <a:p>
-            <a:pPr indent="0" lvl="0" marL="0" rtl="0" algn="r">
+            <a:pPr marL="0" lvl="0" indent="0" algn="r" rtl="0">
               <a:spcBef>
                 <a:spcPts val="0"/>
               </a:spcBef>
@@ -5348,11 +5521,11 @@
 </file>
 
 <file path=ppt/slideLayouts/slideLayout9.xml><?xml version="1.0" encoding="utf-8"?>
-<p:sldLayout xmlns:a="http://schemas.openxmlformats.org/drawingml/2006/main" xmlns:r="http://schemas.openxmlformats.org/officeDocument/2006/relationships" xmlns:mc="http://schemas.openxmlformats.org/markup-compatibility/2006" xmlns:mv="urn:schemas-microsoft-com:mac:vml" xmlns:p="http://schemas.openxmlformats.org/presentationml/2006/main" xmlns:c="http://schemas.openxmlformats.org/drawingml/2006/chart" xmlns:dgm="http://schemas.openxmlformats.org/drawingml/2006/diagram" xmlns:o="urn:schemas-microsoft-com:office:office" xmlns:v="urn:schemas-microsoft-com:vml" xmlns:pvml="urn:schemas-microsoft-com:office:powerpoint" xmlns:com="http://schemas.openxmlformats.org/drawingml/2006/compatibility" xmlns:p14="http://schemas.microsoft.com/office/powerpoint/2010/main" xmlns:p15="http://schemas.microsoft.com/office/powerpoint/2012/main" xmlns:ahyp="http://schemas.microsoft.com/office/drawing/2018/hyperlinkcolor" matchingName="Caption">
+<p:sldLayout xmlns:a="http://schemas.openxmlformats.org/drawingml/2006/main" xmlns:r="http://schemas.openxmlformats.org/officeDocument/2006/relationships" xmlns:p="http://schemas.openxmlformats.org/presentationml/2006/main" matchingName="Caption">
   <p:cSld name="CAPTION_ONLY">
     <p:spTree>
       <p:nvGrpSpPr>
-        <p:cNvPr id="41" name="Shape 41"/>
+        <p:cNvPr id="1" name="Shape 41"/>
         <p:cNvGrpSpPr/>
         <p:nvPr/>
       </p:nvGrpSpPr>
@@ -5367,9 +5540,11 @@
       <p:sp>
         <p:nvSpPr>
           <p:cNvPr id="42" name="Google Shape;42;p10"/>
-          <p:cNvSpPr txBox="1"/>
+          <p:cNvSpPr txBox="1">
+            <a:spLocks noGrp="1"/>
+          </p:cNvSpPr>
           <p:nvPr>
-            <p:ph idx="1" type="body"/>
+            <p:ph type="body" idx="1"/>
           </p:nvPr>
         </p:nvSpPr>
         <p:spPr>
@@ -5382,11 +5557,11 @@
           </a:prstGeom>
         </p:spPr>
         <p:txBody>
-          <a:bodyPr anchorCtr="0" anchor="ctr" bIns="91425" lIns="91425" spcFirstLastPara="1" rIns="91425" wrap="square" tIns="91425">
+          <a:bodyPr spcFirstLastPara="1" wrap="square" lIns="91425" tIns="91425" rIns="91425" bIns="91425" anchor="ctr" anchorCtr="0">
             <a:normAutofit/>
           </a:bodyPr>
           <a:lstStyle>
-            <a:lvl1pPr indent="-228600" lvl="0" marL="457200">
+            <a:lvl1pPr marL="457200" lvl="0" indent="-228600">
               <a:lnSpc>
                 <a:spcPct val="100000"/>
               </a:lnSpc>
@@ -5401,15 +5576,19 @@
               <a:defRPr/>
             </a:lvl1pPr>
           </a:lstStyle>
-          <a:p/>
+          <a:p>
+            <a:endParaRPr/>
+          </a:p>
         </p:txBody>
       </p:sp>
       <p:sp>
         <p:nvSpPr>
           <p:cNvPr id="43" name="Google Shape;43;p10"/>
-          <p:cNvSpPr txBox="1"/>
+          <p:cNvSpPr txBox="1">
+            <a:spLocks noGrp="1"/>
+          </p:cNvSpPr>
           <p:nvPr>
-            <p:ph idx="12" type="sldNum"/>
+            <p:ph type="sldNum" idx="12"/>
           </p:nvPr>
         </p:nvSpPr>
         <p:spPr>
@@ -5422,7 +5601,7 @@
           </a:prstGeom>
         </p:spPr>
         <p:txBody>
-          <a:bodyPr anchorCtr="0" anchor="ctr" bIns="91425" lIns="91425" spcFirstLastPara="1" rIns="91425" wrap="square" tIns="91425">
+          <a:bodyPr spcFirstLastPara="1" wrap="square" lIns="91425" tIns="91425" rIns="91425" bIns="91425" anchor="ctr" anchorCtr="0">
             <a:normAutofit/>
           </a:bodyPr>
           <a:lstStyle>
@@ -5464,7 +5643,7 @@
             </a:lvl9pPr>
           </a:lstStyle>
           <a:p>
-            <a:pPr indent="0" lvl="0" marL="0" rtl="0" algn="r">
+            <a:pPr marL="0" lvl="0" indent="0" algn="r" rtl="0">
               <a:spcBef>
                 <a:spcPts val="0"/>
               </a:spcBef>
@@ -5490,18 +5669,19 @@
 </file>
 
 <file path=ppt/slideMasters/slideMaster1.xml><?xml version="1.0" encoding="utf-8"?>
-<p:sldMaster xmlns:a="http://schemas.openxmlformats.org/drawingml/2006/main" xmlns:r="http://schemas.openxmlformats.org/officeDocument/2006/relationships" xmlns:mc="http://schemas.openxmlformats.org/markup-compatibility/2006" xmlns:mv="urn:schemas-microsoft-com:mac:vml" xmlns:p="http://schemas.openxmlformats.org/presentationml/2006/main" xmlns:c="http://schemas.openxmlformats.org/drawingml/2006/chart" xmlns:dgm="http://schemas.openxmlformats.org/drawingml/2006/diagram" xmlns:o="urn:schemas-microsoft-com:office:office" xmlns:v="urn:schemas-microsoft-com:vml" xmlns:pvml="urn:schemas-microsoft-com:office:powerpoint" xmlns:com="http://schemas.openxmlformats.org/drawingml/2006/compatibility" xmlns:p14="http://schemas.microsoft.com/office/powerpoint/2010/main" xmlns:p15="http://schemas.microsoft.com/office/powerpoint/2012/main" xmlns:ahyp="http://schemas.microsoft.com/office/drawing/2018/hyperlinkcolor">
+<p:sldMaster xmlns:a="http://schemas.openxmlformats.org/drawingml/2006/main" xmlns:r="http://schemas.openxmlformats.org/officeDocument/2006/relationships" xmlns:p="http://schemas.openxmlformats.org/presentationml/2006/main">
   <p:cSld name="simple-light-2">
     <p:bg>
       <p:bgPr>
         <a:solidFill>
           <a:schemeClr val="lt1"/>
         </a:solidFill>
+        <a:effectLst/>
       </p:bgPr>
     </p:bg>
     <p:spTree>
       <p:nvGrpSpPr>
-        <p:cNvPr id="5" name="Shape 5"/>
+        <p:cNvPr id="1" name="Shape 5"/>
         <p:cNvGrpSpPr/>
         <p:nvPr/>
       </p:nvGrpSpPr>
@@ -5516,7 +5696,9 @@
       <p:sp>
         <p:nvSpPr>
           <p:cNvPr id="6" name="Google Shape;6;p1"/>
-          <p:cNvSpPr txBox="1"/>
+          <p:cNvSpPr txBox="1">
+            <a:spLocks noGrp="1"/>
+          </p:cNvSpPr>
           <p:nvPr>
             <p:ph type="title"/>
           </p:nvPr>
@@ -5535,7 +5717,7 @@
           </a:ln>
         </p:spPr>
         <p:txBody>
-          <a:bodyPr anchorCtr="0" anchor="t" bIns="91425" lIns="91425" spcFirstLastPara="1" rIns="91425" wrap="square" tIns="91425">
+          <a:bodyPr spcFirstLastPara="1" wrap="square" lIns="91425" tIns="91425" rIns="91425" bIns="91425" anchor="t" anchorCtr="0">
             <a:normAutofit/>
           </a:bodyPr>
           <a:lstStyle>
@@ -5702,15 +5884,19 @@
               </a:defRPr>
             </a:lvl9pPr>
           </a:lstStyle>
-          <a:p/>
+          <a:p>
+            <a:endParaRPr/>
+          </a:p>
         </p:txBody>
       </p:sp>
       <p:sp>
         <p:nvSpPr>
           <p:cNvPr id="7" name="Google Shape;7;p1"/>
-          <p:cNvSpPr txBox="1"/>
+          <p:cNvSpPr txBox="1">
+            <a:spLocks noGrp="1"/>
+          </p:cNvSpPr>
           <p:nvPr>
-            <p:ph idx="1" type="body"/>
+            <p:ph type="body" idx="1"/>
           </p:nvPr>
         </p:nvSpPr>
         <p:spPr>
@@ -5727,11 +5913,11 @@
           </a:ln>
         </p:spPr>
         <p:txBody>
-          <a:bodyPr anchorCtr="0" anchor="t" bIns="91425" lIns="91425" spcFirstLastPara="1" rIns="91425" wrap="square" tIns="91425">
+          <a:bodyPr spcFirstLastPara="1" wrap="square" lIns="91425" tIns="91425" rIns="91425" bIns="91425" anchor="t" anchorCtr="0">
             <a:normAutofit/>
           </a:bodyPr>
           <a:lstStyle>
-            <a:lvl1pPr indent="-342900" lvl="0" marL="457200">
+            <a:lvl1pPr marL="457200" lvl="0" indent="-342900">
               <a:lnSpc>
                 <a:spcPct val="115000"/>
               </a:lnSpc>
@@ -5752,7 +5938,7 @@
                 </a:solidFill>
               </a:defRPr>
             </a:lvl1pPr>
-            <a:lvl2pPr indent="-317500" lvl="1" marL="914400">
+            <a:lvl2pPr marL="914400" lvl="1" indent="-317500">
               <a:lnSpc>
                 <a:spcPct val="115000"/>
               </a:lnSpc>
@@ -5773,7 +5959,7 @@
                 </a:solidFill>
               </a:defRPr>
             </a:lvl2pPr>
-            <a:lvl3pPr indent="-317500" lvl="2" marL="1371600">
+            <a:lvl3pPr marL="1371600" lvl="2" indent="-317500">
               <a:lnSpc>
                 <a:spcPct val="115000"/>
               </a:lnSpc>
@@ -5794,7 +5980,7 @@
                 </a:solidFill>
               </a:defRPr>
             </a:lvl3pPr>
-            <a:lvl4pPr indent="-317500" lvl="3" marL="1828800">
+            <a:lvl4pPr marL="1828800" lvl="3" indent="-317500">
               <a:lnSpc>
                 <a:spcPct val="115000"/>
               </a:lnSpc>
@@ -5815,7 +6001,7 @@
                 </a:solidFill>
               </a:defRPr>
             </a:lvl4pPr>
-            <a:lvl5pPr indent="-317500" lvl="4" marL="2286000">
+            <a:lvl5pPr marL="2286000" lvl="4" indent="-317500">
               <a:lnSpc>
                 <a:spcPct val="115000"/>
               </a:lnSpc>
@@ -5836,7 +6022,7 @@
                 </a:solidFill>
               </a:defRPr>
             </a:lvl5pPr>
-            <a:lvl6pPr indent="-317500" lvl="5" marL="2743200">
+            <a:lvl6pPr marL="2743200" lvl="5" indent="-317500">
               <a:lnSpc>
                 <a:spcPct val="115000"/>
               </a:lnSpc>
@@ -5857,7 +6043,7 @@
                 </a:solidFill>
               </a:defRPr>
             </a:lvl6pPr>
-            <a:lvl7pPr indent="-317500" lvl="6" marL="3200400">
+            <a:lvl7pPr marL="3200400" lvl="6" indent="-317500">
               <a:lnSpc>
                 <a:spcPct val="115000"/>
               </a:lnSpc>
@@ -5878,7 +6064,7 @@
                 </a:solidFill>
               </a:defRPr>
             </a:lvl7pPr>
-            <a:lvl8pPr indent="-317500" lvl="7" marL="3657600">
+            <a:lvl8pPr marL="3657600" lvl="7" indent="-317500">
               <a:lnSpc>
                 <a:spcPct val="115000"/>
               </a:lnSpc>
@@ -5899,7 +6085,7 @@
                 </a:solidFill>
               </a:defRPr>
             </a:lvl8pPr>
-            <a:lvl9pPr indent="-317500" lvl="8" marL="4114800">
+            <a:lvl9pPr marL="4114800" lvl="8" indent="-317500">
               <a:lnSpc>
                 <a:spcPct val="115000"/>
               </a:lnSpc>
@@ -5921,15 +6107,19 @@
               </a:defRPr>
             </a:lvl9pPr>
           </a:lstStyle>
-          <a:p/>
+          <a:p>
+            <a:endParaRPr/>
+          </a:p>
         </p:txBody>
       </p:sp>
       <p:sp>
         <p:nvSpPr>
           <p:cNvPr id="8" name="Google Shape;8;p1"/>
-          <p:cNvSpPr txBox="1"/>
+          <p:cNvSpPr txBox="1">
+            <a:spLocks noGrp="1"/>
+          </p:cNvSpPr>
           <p:nvPr>
-            <p:ph idx="12" type="sldNum"/>
+            <p:ph type="sldNum" idx="12"/>
           </p:nvPr>
         </p:nvSpPr>
         <p:spPr>
@@ -5946,7 +6136,7 @@
           </a:ln>
         </p:spPr>
         <p:txBody>
-          <a:bodyPr anchorCtr="0" anchor="ctr" bIns="91425" lIns="91425" spcFirstLastPara="1" rIns="91425" wrap="square" tIns="91425">
+          <a:bodyPr spcFirstLastPara="1" wrap="square" lIns="91425" tIns="91425" rIns="91425" bIns="91425" anchor="ctr" anchorCtr="0">
             <a:normAutofit/>
           </a:bodyPr>
           <a:lstStyle>
@@ -6024,7 +6214,7 @@
             </a:lvl9pPr>
           </a:lstStyle>
           <a:p>
-            <a:pPr indent="0" lvl="0" marL="0" rtl="0" algn="r">
+            <a:pPr marL="0" lvl="0" indent="0" algn="r" rtl="0">
               <a:spcBef>
                 <a:spcPts val="0"/>
               </a:spcBef>
@@ -6043,7 +6233,7 @@
       </p:sp>
     </p:spTree>
   </p:cSld>
-  <p:clrMap accent1="accent1" accent2="accent2" accent3="accent3" accent4="accent4" accent5="accent5" accent6="accent6" bg1="lt1" bg2="dk2" tx1="dk1" tx2="lt2" folHlink="folHlink" hlink="hlink"/>
+  <p:clrMap bg1="lt1" tx1="dk1" bg2="dk2" tx2="lt2" accent1="accent1" accent2="accent2" accent3="accent3" accent4="accent4" accent5="accent5" accent6="accent6" hlink="hlink" folHlink="folHlink"/>
   <p:sldLayoutIdLst>
     <p:sldLayoutId id="2147483648" r:id="rId1"/>
     <p:sldLayoutId id="2147483649" r:id="rId2"/>
@@ -6057,10 +6247,10 @@
     <p:sldLayoutId id="2147483657" r:id="rId10"/>
     <p:sldLayoutId id="2147483658" r:id="rId11"/>
   </p:sldLayoutIdLst>
-  <p:hf dt="0" ftr="0" hdr="0" sldNum="0"/>
+  <p:hf sldNum="0" hdr="0" ftr="0" dt="0"/>
   <p:txStyles>
     <p:titleStyle>
-      <a:defPPr lvl="0" marR="0" rtl="0" algn="l">
+      <a:defPPr marR="0" lvl="0" algn="l" rtl="0">
         <a:lnSpc>
           <a:spcPct val="100000"/>
         </a:lnSpc>
@@ -6071,7 +6261,7 @@
           <a:spcPts val="0"/>
         </a:spcAft>
       </a:defPPr>
-      <a:lvl1pPr lvl="0" marR="0" rtl="0" algn="l">
+      <a:lvl1pPr marR="0" lvl="0" algn="l" rtl="0">
         <a:lnSpc>
           <a:spcPct val="100000"/>
         </a:lnSpc>
@@ -6085,7 +6275,7 @@
           <a:srgbClr val="000000"/>
         </a:buClr>
         <a:buFont typeface="Arial"/>
-        <a:defRPr b="0" i="0" sz="1400" u="none" cap="none" strike="noStrike">
+        <a:defRPr sz="1400" b="0" i="0" u="none" strike="noStrike" cap="none">
           <a:solidFill>
             <a:srgbClr val="000000"/>
           </a:solidFill>
@@ -6095,7 +6285,7 @@
           <a:sym typeface="Arial"/>
         </a:defRPr>
       </a:lvl1pPr>
-      <a:lvl2pPr lvl="1" marR="0" rtl="0" algn="l">
+      <a:lvl2pPr marR="0" lvl="1" algn="l" rtl="0">
         <a:lnSpc>
           <a:spcPct val="100000"/>
         </a:lnSpc>
@@ -6109,7 +6299,7 @@
           <a:srgbClr val="000000"/>
         </a:buClr>
         <a:buFont typeface="Arial"/>
-        <a:defRPr b="0" i="0" sz="1400" u="none" cap="none" strike="noStrike">
+        <a:defRPr sz="1400" b="0" i="0" u="none" strike="noStrike" cap="none">
           <a:solidFill>
             <a:srgbClr val="000000"/>
           </a:solidFill>
@@ -6119,7 +6309,7 @@
           <a:sym typeface="Arial"/>
         </a:defRPr>
       </a:lvl2pPr>
-      <a:lvl3pPr lvl="2" marR="0" rtl="0" algn="l">
+      <a:lvl3pPr marR="0" lvl="2" algn="l" rtl="0">
         <a:lnSpc>
           <a:spcPct val="100000"/>
         </a:lnSpc>
@@ -6133,7 +6323,7 @@
           <a:srgbClr val="000000"/>
         </a:buClr>
         <a:buFont typeface="Arial"/>
-        <a:defRPr b="0" i="0" sz="1400" u="none" cap="none" strike="noStrike">
+        <a:defRPr sz="1400" b="0" i="0" u="none" strike="noStrike" cap="none">
           <a:solidFill>
             <a:srgbClr val="000000"/>
           </a:solidFill>
@@ -6143,7 +6333,7 @@
           <a:sym typeface="Arial"/>
         </a:defRPr>
       </a:lvl3pPr>
-      <a:lvl4pPr lvl="3" marR="0" rtl="0" algn="l">
+      <a:lvl4pPr marR="0" lvl="3" algn="l" rtl="0">
         <a:lnSpc>
           <a:spcPct val="100000"/>
         </a:lnSpc>
@@ -6157,7 +6347,7 @@
           <a:srgbClr val="000000"/>
         </a:buClr>
         <a:buFont typeface="Arial"/>
-        <a:defRPr b="0" i="0" sz="1400" u="none" cap="none" strike="noStrike">
+        <a:defRPr sz="1400" b="0" i="0" u="none" strike="noStrike" cap="none">
           <a:solidFill>
             <a:srgbClr val="000000"/>
           </a:solidFill>
@@ -6167,7 +6357,7 @@
           <a:sym typeface="Arial"/>
         </a:defRPr>
       </a:lvl4pPr>
-      <a:lvl5pPr lvl="4" marR="0" rtl="0" algn="l">
+      <a:lvl5pPr marR="0" lvl="4" algn="l" rtl="0">
         <a:lnSpc>
           <a:spcPct val="100000"/>
         </a:lnSpc>
@@ -6181,7 +6371,7 @@
           <a:srgbClr val="000000"/>
         </a:buClr>
         <a:buFont typeface="Arial"/>
-        <a:defRPr b="0" i="0" sz="1400" u="none" cap="none" strike="noStrike">
+        <a:defRPr sz="1400" b="0" i="0" u="none" strike="noStrike" cap="none">
           <a:solidFill>
             <a:srgbClr val="000000"/>
           </a:solidFill>
@@ -6191,7 +6381,7 @@
           <a:sym typeface="Arial"/>
         </a:defRPr>
       </a:lvl5pPr>
-      <a:lvl6pPr lvl="5" marR="0" rtl="0" algn="l">
+      <a:lvl6pPr marR="0" lvl="5" algn="l" rtl="0">
         <a:lnSpc>
           <a:spcPct val="100000"/>
         </a:lnSpc>
@@ -6205,7 +6395,7 @@
           <a:srgbClr val="000000"/>
         </a:buClr>
         <a:buFont typeface="Arial"/>
-        <a:defRPr b="0" i="0" sz="1400" u="none" cap="none" strike="noStrike">
+        <a:defRPr sz="1400" b="0" i="0" u="none" strike="noStrike" cap="none">
           <a:solidFill>
             <a:srgbClr val="000000"/>
           </a:solidFill>
@@ -6215,7 +6405,7 @@
           <a:sym typeface="Arial"/>
         </a:defRPr>
       </a:lvl6pPr>
-      <a:lvl7pPr lvl="6" marR="0" rtl="0" algn="l">
+      <a:lvl7pPr marR="0" lvl="6" algn="l" rtl="0">
         <a:lnSpc>
           <a:spcPct val="100000"/>
         </a:lnSpc>
@@ -6229,7 +6419,7 @@
           <a:srgbClr val="000000"/>
         </a:buClr>
         <a:buFont typeface="Arial"/>
-        <a:defRPr b="0" i="0" sz="1400" u="none" cap="none" strike="noStrike">
+        <a:defRPr sz="1400" b="0" i="0" u="none" strike="noStrike" cap="none">
           <a:solidFill>
             <a:srgbClr val="000000"/>
           </a:solidFill>
@@ -6239,7 +6429,7 @@
           <a:sym typeface="Arial"/>
         </a:defRPr>
       </a:lvl7pPr>
-      <a:lvl8pPr lvl="7" marR="0" rtl="0" algn="l">
+      <a:lvl8pPr marR="0" lvl="7" algn="l" rtl="0">
         <a:lnSpc>
           <a:spcPct val="100000"/>
         </a:lnSpc>
@@ -6253,7 +6443,7 @@
           <a:srgbClr val="000000"/>
         </a:buClr>
         <a:buFont typeface="Arial"/>
-        <a:defRPr b="0" i="0" sz="1400" u="none" cap="none" strike="noStrike">
+        <a:defRPr sz="1400" b="0" i="0" u="none" strike="noStrike" cap="none">
           <a:solidFill>
             <a:srgbClr val="000000"/>
           </a:solidFill>
@@ -6263,7 +6453,7 @@
           <a:sym typeface="Arial"/>
         </a:defRPr>
       </a:lvl8pPr>
-      <a:lvl9pPr lvl="8" marR="0" rtl="0" algn="l">
+      <a:lvl9pPr marR="0" lvl="8" algn="l" rtl="0">
         <a:lnSpc>
           <a:spcPct val="100000"/>
         </a:lnSpc>
@@ -6277,7 +6467,7 @@
           <a:srgbClr val="000000"/>
         </a:buClr>
         <a:buFont typeface="Arial"/>
-        <a:defRPr b="0" i="0" sz="1400" u="none" cap="none" strike="noStrike">
+        <a:defRPr sz="1400" b="0" i="0" u="none" strike="noStrike" cap="none">
           <a:solidFill>
             <a:srgbClr val="000000"/>
           </a:solidFill>
@@ -6289,7 +6479,7 @@
       </a:lvl9pPr>
     </p:titleStyle>
     <p:bodyStyle>
-      <a:defPPr lvl="0" marR="0" rtl="0" algn="l">
+      <a:defPPr marR="0" lvl="0" algn="l" rtl="0">
         <a:lnSpc>
           <a:spcPct val="100000"/>
         </a:lnSpc>
@@ -6300,7 +6490,7 @@
           <a:spcPts val="0"/>
         </a:spcAft>
       </a:defPPr>
-      <a:lvl1pPr lvl="0" marR="0" rtl="0" algn="l">
+      <a:lvl1pPr marR="0" lvl="0" algn="l" rtl="0">
         <a:lnSpc>
           <a:spcPct val="100000"/>
         </a:lnSpc>
@@ -6314,7 +6504,7 @@
           <a:srgbClr val="000000"/>
         </a:buClr>
         <a:buFont typeface="Arial"/>
-        <a:defRPr b="0" i="0" sz="1400" u="none" cap="none" strike="noStrike">
+        <a:defRPr sz="1400" b="0" i="0" u="none" strike="noStrike" cap="none">
           <a:solidFill>
             <a:srgbClr val="000000"/>
           </a:solidFill>
@@ -6324,7 +6514,7 @@
           <a:sym typeface="Arial"/>
         </a:defRPr>
       </a:lvl1pPr>
-      <a:lvl2pPr lvl="1" marR="0" rtl="0" algn="l">
+      <a:lvl2pPr marR="0" lvl="1" algn="l" rtl="0">
         <a:lnSpc>
           <a:spcPct val="100000"/>
         </a:lnSpc>
@@ -6338,7 +6528,7 @@
           <a:srgbClr val="000000"/>
         </a:buClr>
         <a:buFont typeface="Arial"/>
-        <a:defRPr b="0" i="0" sz="1400" u="none" cap="none" strike="noStrike">
+        <a:defRPr sz="1400" b="0" i="0" u="none" strike="noStrike" cap="none">
           <a:solidFill>
             <a:srgbClr val="000000"/>
           </a:solidFill>
@@ -6348,7 +6538,7 @@
           <a:sym typeface="Arial"/>
         </a:defRPr>
       </a:lvl2pPr>
-      <a:lvl3pPr lvl="2" marR="0" rtl="0" algn="l">
+      <a:lvl3pPr marR="0" lvl="2" algn="l" rtl="0">
         <a:lnSpc>
           <a:spcPct val="100000"/>
         </a:lnSpc>
@@ -6362,7 +6552,7 @@
           <a:srgbClr val="000000"/>
         </a:buClr>
         <a:buFont typeface="Arial"/>
-        <a:defRPr b="0" i="0" sz="1400" u="none" cap="none" strike="noStrike">
+        <a:defRPr sz="1400" b="0" i="0" u="none" strike="noStrike" cap="none">
           <a:solidFill>
             <a:srgbClr val="000000"/>
           </a:solidFill>
@@ -6372,7 +6562,7 @@
           <a:sym typeface="Arial"/>
         </a:defRPr>
       </a:lvl3pPr>
-      <a:lvl4pPr lvl="3" marR="0" rtl="0" algn="l">
+      <a:lvl4pPr marR="0" lvl="3" algn="l" rtl="0">
         <a:lnSpc>
           <a:spcPct val="100000"/>
         </a:lnSpc>
@@ -6386,7 +6576,7 @@
           <a:srgbClr val="000000"/>
         </a:buClr>
         <a:buFont typeface="Arial"/>
-        <a:defRPr b="0" i="0" sz="1400" u="none" cap="none" strike="noStrike">
+        <a:defRPr sz="1400" b="0" i="0" u="none" strike="noStrike" cap="none">
           <a:solidFill>
             <a:srgbClr val="000000"/>
           </a:solidFill>
@@ -6396,7 +6586,7 @@
           <a:sym typeface="Arial"/>
         </a:defRPr>
       </a:lvl4pPr>
-      <a:lvl5pPr lvl="4" marR="0" rtl="0" algn="l">
+      <a:lvl5pPr marR="0" lvl="4" algn="l" rtl="0">
         <a:lnSpc>
           <a:spcPct val="100000"/>
         </a:lnSpc>
@@ -6410,7 +6600,7 @@
           <a:srgbClr val="000000"/>
         </a:buClr>
         <a:buFont typeface="Arial"/>
-        <a:defRPr b="0" i="0" sz="1400" u="none" cap="none" strike="noStrike">
+        <a:defRPr sz="1400" b="0" i="0" u="none" strike="noStrike" cap="none">
           <a:solidFill>
             <a:srgbClr val="000000"/>
           </a:solidFill>
@@ -6420,7 +6610,7 @@
           <a:sym typeface="Arial"/>
         </a:defRPr>
       </a:lvl5pPr>
-      <a:lvl6pPr lvl="5" marR="0" rtl="0" algn="l">
+      <a:lvl6pPr marR="0" lvl="5" algn="l" rtl="0">
         <a:lnSpc>
           <a:spcPct val="100000"/>
         </a:lnSpc>
@@ -6434,7 +6624,7 @@
           <a:srgbClr val="000000"/>
         </a:buClr>
         <a:buFont typeface="Arial"/>
-        <a:defRPr b="0" i="0" sz="1400" u="none" cap="none" strike="noStrike">
+        <a:defRPr sz="1400" b="0" i="0" u="none" strike="noStrike" cap="none">
           <a:solidFill>
             <a:srgbClr val="000000"/>
           </a:solidFill>
@@ -6444,7 +6634,7 @@
           <a:sym typeface="Arial"/>
         </a:defRPr>
       </a:lvl6pPr>
-      <a:lvl7pPr lvl="6" marR="0" rtl="0" algn="l">
+      <a:lvl7pPr marR="0" lvl="6" algn="l" rtl="0">
         <a:lnSpc>
           <a:spcPct val="100000"/>
         </a:lnSpc>
@@ -6458,7 +6648,7 @@
           <a:srgbClr val="000000"/>
         </a:buClr>
         <a:buFont typeface="Arial"/>
-        <a:defRPr b="0" i="0" sz="1400" u="none" cap="none" strike="noStrike">
+        <a:defRPr sz="1400" b="0" i="0" u="none" strike="noStrike" cap="none">
           <a:solidFill>
             <a:srgbClr val="000000"/>
           </a:solidFill>
@@ -6468,7 +6658,7 @@
           <a:sym typeface="Arial"/>
         </a:defRPr>
       </a:lvl7pPr>
-      <a:lvl8pPr lvl="7" marR="0" rtl="0" algn="l">
+      <a:lvl8pPr marR="0" lvl="7" algn="l" rtl="0">
         <a:lnSpc>
           <a:spcPct val="100000"/>
         </a:lnSpc>
@@ -6482,7 +6672,7 @@
           <a:srgbClr val="000000"/>
         </a:buClr>
         <a:buFont typeface="Arial"/>
-        <a:defRPr b="0" i="0" sz="1400" u="none" cap="none" strike="noStrike">
+        <a:defRPr sz="1400" b="0" i="0" u="none" strike="noStrike" cap="none">
           <a:solidFill>
             <a:srgbClr val="000000"/>
           </a:solidFill>
@@ -6492,7 +6682,7 @@
           <a:sym typeface="Arial"/>
         </a:defRPr>
       </a:lvl8pPr>
-      <a:lvl9pPr lvl="8" marR="0" rtl="0" algn="l">
+      <a:lvl9pPr marR="0" lvl="8" algn="l" rtl="0">
         <a:lnSpc>
           <a:spcPct val="100000"/>
         </a:lnSpc>
@@ -6506,7 +6696,7 @@
           <a:srgbClr val="000000"/>
         </a:buClr>
         <a:buFont typeface="Arial"/>
-        <a:defRPr b="0" i="0" sz="1400" u="none" cap="none" strike="noStrike">
+        <a:defRPr sz="1400" b="0" i="0" u="none" strike="noStrike" cap="none">
           <a:solidFill>
             <a:srgbClr val="000000"/>
           </a:solidFill>
@@ -6518,7 +6708,7 @@
       </a:lvl9pPr>
     </p:bodyStyle>
     <p:otherStyle>
-      <a:defPPr lvl="0" marR="0" rtl="0" algn="l">
+      <a:defPPr marR="0" lvl="0" algn="l" rtl="0">
         <a:lnSpc>
           <a:spcPct val="100000"/>
         </a:lnSpc>
@@ -6529,7 +6719,7 @@
           <a:spcPts val="0"/>
         </a:spcAft>
       </a:defPPr>
-      <a:lvl1pPr lvl="0" marR="0" rtl="0" algn="l">
+      <a:lvl1pPr marR="0" lvl="0" algn="l" rtl="0">
         <a:lnSpc>
           <a:spcPct val="100000"/>
         </a:lnSpc>
@@ -6543,7 +6733,7 @@
           <a:srgbClr val="000000"/>
         </a:buClr>
         <a:buFont typeface="Arial"/>
-        <a:defRPr b="0" i="0" sz="1400" u="none" cap="none" strike="noStrike">
+        <a:defRPr sz="1400" b="0" i="0" u="none" strike="noStrike" cap="none">
           <a:solidFill>
             <a:srgbClr val="000000"/>
           </a:solidFill>
@@ -6553,7 +6743,7 @@
           <a:sym typeface="Arial"/>
         </a:defRPr>
       </a:lvl1pPr>
-      <a:lvl2pPr lvl="1" marR="0" rtl="0" algn="l">
+      <a:lvl2pPr marR="0" lvl="1" algn="l" rtl="0">
         <a:lnSpc>
           <a:spcPct val="100000"/>
         </a:lnSpc>
@@ -6567,7 +6757,7 @@
           <a:srgbClr val="000000"/>
         </a:buClr>
         <a:buFont typeface="Arial"/>
-        <a:defRPr b="0" i="0" sz="1400" u="none" cap="none" strike="noStrike">
+        <a:defRPr sz="1400" b="0" i="0" u="none" strike="noStrike" cap="none">
           <a:solidFill>
             <a:srgbClr val="000000"/>
           </a:solidFill>
@@ -6577,7 +6767,7 @@
           <a:sym typeface="Arial"/>
         </a:defRPr>
       </a:lvl2pPr>
-      <a:lvl3pPr lvl="2" marR="0" rtl="0" algn="l">
+      <a:lvl3pPr marR="0" lvl="2" algn="l" rtl="0">
         <a:lnSpc>
           <a:spcPct val="100000"/>
         </a:lnSpc>
@@ -6591,7 +6781,7 @@
           <a:srgbClr val="000000"/>
         </a:buClr>
         <a:buFont typeface="Arial"/>
-        <a:defRPr b="0" i="0" sz="1400" u="none" cap="none" strike="noStrike">
+        <a:defRPr sz="1400" b="0" i="0" u="none" strike="noStrike" cap="none">
           <a:solidFill>
             <a:srgbClr val="000000"/>
           </a:solidFill>
@@ -6601,7 +6791,7 @@
           <a:sym typeface="Arial"/>
         </a:defRPr>
       </a:lvl3pPr>
-      <a:lvl4pPr lvl="3" marR="0" rtl="0" algn="l">
+      <a:lvl4pPr marR="0" lvl="3" algn="l" rtl="0">
         <a:lnSpc>
           <a:spcPct val="100000"/>
         </a:lnSpc>
@@ -6615,7 +6805,7 @@
           <a:srgbClr val="000000"/>
         </a:buClr>
         <a:buFont typeface="Arial"/>
-        <a:defRPr b="0" i="0" sz="1400" u="none" cap="none" strike="noStrike">
+        <a:defRPr sz="1400" b="0" i="0" u="none" strike="noStrike" cap="none">
           <a:solidFill>
             <a:srgbClr val="000000"/>
           </a:solidFill>
@@ -6625,7 +6815,7 @@
           <a:sym typeface="Arial"/>
         </a:defRPr>
       </a:lvl4pPr>
-      <a:lvl5pPr lvl="4" marR="0" rtl="0" algn="l">
+      <a:lvl5pPr marR="0" lvl="4" algn="l" rtl="0">
         <a:lnSpc>
           <a:spcPct val="100000"/>
         </a:lnSpc>
@@ -6639,7 +6829,7 @@
           <a:srgbClr val="000000"/>
         </a:buClr>
         <a:buFont typeface="Arial"/>
-        <a:defRPr b="0" i="0" sz="1400" u="none" cap="none" strike="noStrike">
+        <a:defRPr sz="1400" b="0" i="0" u="none" strike="noStrike" cap="none">
           <a:solidFill>
             <a:srgbClr val="000000"/>
           </a:solidFill>
@@ -6649,7 +6839,7 @@
           <a:sym typeface="Arial"/>
         </a:defRPr>
       </a:lvl5pPr>
-      <a:lvl6pPr lvl="5" marR="0" rtl="0" algn="l">
+      <a:lvl6pPr marR="0" lvl="5" algn="l" rtl="0">
         <a:lnSpc>
           <a:spcPct val="100000"/>
         </a:lnSpc>
@@ -6663,7 +6853,7 @@
           <a:srgbClr val="000000"/>
         </a:buClr>
         <a:buFont typeface="Arial"/>
-        <a:defRPr b="0" i="0" sz="1400" u="none" cap="none" strike="noStrike">
+        <a:defRPr sz="1400" b="0" i="0" u="none" strike="noStrike" cap="none">
           <a:solidFill>
             <a:srgbClr val="000000"/>
           </a:solidFill>
@@ -6673,7 +6863,7 @@
           <a:sym typeface="Arial"/>
         </a:defRPr>
       </a:lvl6pPr>
-      <a:lvl7pPr lvl="6" marR="0" rtl="0" algn="l">
+      <a:lvl7pPr marR="0" lvl="6" algn="l" rtl="0">
         <a:lnSpc>
           <a:spcPct val="100000"/>
         </a:lnSpc>
@@ -6687,7 +6877,7 @@
           <a:srgbClr val="000000"/>
         </a:buClr>
         <a:buFont typeface="Arial"/>
-        <a:defRPr b="0" i="0" sz="1400" u="none" cap="none" strike="noStrike">
+        <a:defRPr sz="1400" b="0" i="0" u="none" strike="noStrike" cap="none">
           <a:solidFill>
             <a:srgbClr val="000000"/>
           </a:solidFill>
@@ -6697,7 +6887,7 @@
           <a:sym typeface="Arial"/>
         </a:defRPr>
       </a:lvl7pPr>
-      <a:lvl8pPr lvl="7" marR="0" rtl="0" algn="l">
+      <a:lvl8pPr marR="0" lvl="7" algn="l" rtl="0">
         <a:lnSpc>
           <a:spcPct val="100000"/>
         </a:lnSpc>
@@ -6711,7 +6901,7 @@
           <a:srgbClr val="000000"/>
         </a:buClr>
         <a:buFont typeface="Arial"/>
-        <a:defRPr b="0" i="0" sz="1400" u="none" cap="none" strike="noStrike">
+        <a:defRPr sz="1400" b="0" i="0" u="none" strike="noStrike" cap="none">
           <a:solidFill>
             <a:srgbClr val="000000"/>
           </a:solidFill>
@@ -6721,7 +6911,7 @@
           <a:sym typeface="Arial"/>
         </a:defRPr>
       </a:lvl8pPr>
-      <a:lvl9pPr lvl="8" marR="0" rtl="0" algn="l">
+      <a:lvl9pPr marR="0" lvl="8" algn="l" rtl="0">
         <a:lnSpc>
           <a:spcPct val="100000"/>
         </a:lnSpc>
@@ -6735,7 +6925,7 @@
           <a:srgbClr val="000000"/>
         </a:buClr>
         <a:buFont typeface="Arial"/>
-        <a:defRPr b="0" i="0" sz="1400" u="none" cap="none" strike="noStrike">
+        <a:defRPr sz="1400" b="0" i="0" u="none" strike="noStrike" cap="none">
           <a:solidFill>
             <a:srgbClr val="000000"/>
           </a:solidFill>
@@ -6751,11 +6941,11 @@
 </file>
 
 <file path=ppt/slides/slide1.xml><?xml version="1.0" encoding="utf-8"?>
-<p:sld xmlns:a="http://schemas.openxmlformats.org/drawingml/2006/main" xmlns:r="http://schemas.openxmlformats.org/officeDocument/2006/relationships" xmlns:mc="http://schemas.openxmlformats.org/markup-compatibility/2006" xmlns:mv="urn:schemas-microsoft-com:mac:vml" xmlns:p="http://schemas.openxmlformats.org/presentationml/2006/main" xmlns:c="http://schemas.openxmlformats.org/drawingml/2006/chart" xmlns:dgm="http://schemas.openxmlformats.org/drawingml/2006/diagram" xmlns:o="urn:schemas-microsoft-com:office:office" xmlns:v="urn:schemas-microsoft-com:vml" xmlns:pvml="urn:schemas-microsoft-com:office:powerpoint" xmlns:com="http://schemas.openxmlformats.org/drawingml/2006/compatibility" xmlns:p14="http://schemas.microsoft.com/office/powerpoint/2010/main" xmlns:p15="http://schemas.microsoft.com/office/powerpoint/2012/main" xmlns:ahyp="http://schemas.microsoft.com/office/drawing/2018/hyperlinkcolor">
+<p:sld xmlns:a="http://schemas.openxmlformats.org/drawingml/2006/main" xmlns:r="http://schemas.openxmlformats.org/officeDocument/2006/relationships" xmlns:p="http://schemas.openxmlformats.org/presentationml/2006/main">
   <p:cSld>
     <p:spTree>
       <p:nvGrpSpPr>
-        <p:cNvPr id="53" name="Shape 53"/>
+        <p:cNvPr id="1" name="Shape 53"/>
         <p:cNvGrpSpPr/>
         <p:nvPr/>
       </p:nvGrpSpPr>
@@ -6770,7 +6960,9 @@
       <p:sp>
         <p:nvSpPr>
           <p:cNvPr id="54" name="Google Shape;54;p13"/>
-          <p:cNvSpPr txBox="1"/>
+          <p:cNvSpPr txBox="1">
+            <a:spLocks noGrp="1"/>
+          </p:cNvSpPr>
           <p:nvPr>
             <p:ph type="ctrTitle"/>
           </p:nvPr>
@@ -6785,12 +6977,12 @@
           </a:prstGeom>
         </p:spPr>
         <p:txBody>
-          <a:bodyPr anchorCtr="0" anchor="b" bIns="91425" lIns="91425" spcFirstLastPara="1" rIns="91425" wrap="square" tIns="91425">
-            <a:normAutofit fontScale="90000"/>
+          <a:bodyPr spcFirstLastPara="1" wrap="square" lIns="91425" tIns="91425" rIns="91425" bIns="91425" anchor="b" anchorCtr="0">
+            <a:normAutofit/>
           </a:bodyPr>
           <a:lstStyle/>
           <a:p>
-            <a:pPr indent="0" lvl="0" marL="0" rtl="0" algn="l">
+            <a:pPr marL="0" lvl="0" indent="0" algn="l" rtl="0">
               <a:lnSpc>
                 <a:spcPct val="125000"/>
               </a:lnSpc>
@@ -6808,7 +7000,7 @@
               <a:buNone/>
             </a:pPr>
             <a:r>
-              <a:rPr b="1" lang="en" sz="3322">
+              <a:rPr lang="en" sz="3322" b="1">
                 <a:solidFill>
                   <a:srgbClr val="273239"/>
                 </a:solidFill>
@@ -6818,7 +7010,7 @@
               </a:rPr>
               <a:t>Handling Missing Values in Machine Learning</a:t>
             </a:r>
-            <a:endParaRPr b="1" sz="3322">
+            <a:endParaRPr sz="3322" b="1">
               <a:solidFill>
                 <a:srgbClr val="273239"/>
               </a:solidFill>
@@ -6828,18 +7020,15 @@
             </a:endParaRPr>
           </a:p>
           <a:p>
-            <a:pPr indent="0" lvl="0" marL="0" rtl="0" algn="ctr">
-              <a:spcBef>
-                <a:spcPts val="0"/>
-              </a:spcBef>
-              <a:spcAft>
-                <a:spcPts val="0"/>
-              </a:spcAft>
-              <a:buNone/>
-            </a:pPr>
-            <a:r>
-              <a:t/>
-            </a:r>
+            <a:pPr marL="0" lvl="0" indent="0" algn="ctr" rtl="0">
+              <a:spcBef>
+                <a:spcPts val="0"/>
+              </a:spcBef>
+              <a:spcAft>
+                <a:spcPts val="0"/>
+              </a:spcAft>
+              <a:buNone/>
+            </a:pPr>
             <a:endParaRPr/>
           </a:p>
         </p:txBody>
@@ -6853,11 +7042,11 @@
 </file>
 
 <file path=ppt/slides/slide10.xml><?xml version="1.0" encoding="utf-8"?>
-<p:sld xmlns:a="http://schemas.openxmlformats.org/drawingml/2006/main" xmlns:r="http://schemas.openxmlformats.org/officeDocument/2006/relationships" xmlns:mc="http://schemas.openxmlformats.org/markup-compatibility/2006" xmlns:mv="urn:schemas-microsoft-com:mac:vml" xmlns:p="http://schemas.openxmlformats.org/presentationml/2006/main" xmlns:c="http://schemas.openxmlformats.org/drawingml/2006/chart" xmlns:dgm="http://schemas.openxmlformats.org/drawingml/2006/diagram" xmlns:o="urn:schemas-microsoft-com:office:office" xmlns:v="urn:schemas-microsoft-com:vml" xmlns:pvml="urn:schemas-microsoft-com:office:powerpoint" xmlns:com="http://schemas.openxmlformats.org/drawingml/2006/compatibility" xmlns:p14="http://schemas.microsoft.com/office/powerpoint/2010/main" xmlns:p15="http://schemas.microsoft.com/office/powerpoint/2012/main" xmlns:ahyp="http://schemas.microsoft.com/office/drawing/2018/hyperlinkcolor">
+<p:sld xmlns:a="http://schemas.openxmlformats.org/drawingml/2006/main" xmlns:r="http://schemas.openxmlformats.org/officeDocument/2006/relationships" xmlns:p="http://schemas.openxmlformats.org/presentationml/2006/main">
   <p:cSld>
     <p:spTree>
       <p:nvGrpSpPr>
-        <p:cNvPr id="109" name="Shape 109"/>
+        <p:cNvPr id="1" name="Shape 109"/>
         <p:cNvGrpSpPr/>
         <p:nvPr/>
       </p:nvGrpSpPr>
@@ -6889,12 +7078,12 @@
           </a:ln>
         </p:spPr>
         <p:txBody>
-          <a:bodyPr anchorCtr="0" anchor="t" bIns="91425" lIns="91425" spcFirstLastPara="1" rIns="91425" wrap="square" tIns="91425">
+          <a:bodyPr spcFirstLastPara="1" wrap="square" lIns="91425" tIns="91425" rIns="91425" bIns="91425" anchor="t" anchorCtr="0">
             <a:spAutoFit/>
           </a:bodyPr>
           <a:lstStyle/>
           <a:p>
-            <a:pPr indent="0" lvl="0" marL="0" rtl="0" algn="l">
+            <a:pPr marL="0" lvl="0" indent="0" algn="l" rtl="0">
               <a:lnSpc>
                 <a:spcPct val="115000"/>
               </a:lnSpc>
@@ -6907,7 +7096,7 @@
               <a:buNone/>
             </a:pPr>
             <a:r>
-              <a:rPr b="1" lang="en">
+              <a:rPr lang="en" b="1">
                 <a:solidFill>
                   <a:schemeClr val="dk1"/>
                 </a:solidFill>
@@ -6923,7 +7112,7 @@
               <a:t> In this example, different imputation methods are applied to manage missing values in the </a:t>
             </a:r>
             <a:r>
-              <a:rPr b="1" lang="en">
+              <a:rPr lang="en" b="1">
                 <a:solidFill>
                   <a:schemeClr val="dk1"/>
                 </a:solidFill>
@@ -6965,7 +7154,7 @@
             </a:endParaRPr>
           </a:p>
           <a:p>
-            <a:pPr indent="-317500" lvl="0" marL="457200" rtl="0" algn="l">
+            <a:pPr marL="457200" lvl="0" indent="-317500" algn="l" rtl="0">
               <a:lnSpc>
                 <a:spcPct val="115000"/>
               </a:lnSpc>
@@ -7002,7 +7191,7 @@
               <a:t>: Replaces missing values in the </a:t>
             </a:r>
             <a:r>
-              <a:rPr b="1" lang="en">
+              <a:rPr lang="en" b="1">
                 <a:solidFill>
                   <a:schemeClr val="dk1"/>
                 </a:solidFill>
@@ -7024,7 +7213,7 @@
             </a:endParaRPr>
           </a:p>
           <a:p>
-            <a:pPr indent="-317500" lvl="0" marL="457200" rtl="0" algn="l">
+            <a:pPr marL="457200" lvl="0" indent="-317500" algn="l" rtl="0">
               <a:lnSpc>
                 <a:spcPct val="115000"/>
               </a:lnSpc>
@@ -7061,7 +7250,7 @@
               <a:t>: Replaces missing values in the </a:t>
             </a:r>
             <a:r>
-              <a:rPr b="1" lang="en">
+              <a:rPr lang="en" b="1">
                 <a:solidFill>
                   <a:schemeClr val="dk1"/>
                 </a:solidFill>
@@ -7083,7 +7272,7 @@
             </a:endParaRPr>
           </a:p>
           <a:p>
-            <a:pPr indent="-317500" lvl="0" marL="457200" rtl="0" algn="l">
+            <a:pPr marL="457200" lvl="0" indent="-317500" algn="l" rtl="0">
               <a:lnSpc>
                 <a:spcPct val="115000"/>
               </a:lnSpc>
@@ -7120,7 +7309,7 @@
               <a:t>: Replaces missing values in the </a:t>
             </a:r>
             <a:r>
-              <a:rPr b="1" lang="en">
+              <a:rPr lang="en" b="1">
                 <a:solidFill>
                   <a:schemeClr val="dk1"/>
                 </a:solidFill>
@@ -7142,7 +7331,7 @@
             </a:endParaRPr>
           </a:p>
           <a:p>
-            <a:pPr indent="-317500" lvl="0" marL="457200" rtl="0" algn="l">
+            <a:pPr marL="457200" lvl="0" indent="-317500" algn="l" rtl="0">
               <a:lnSpc>
                 <a:spcPct val="115000"/>
               </a:lnSpc>
@@ -7185,7 +7374,7 @@
             </a:endParaRPr>
           </a:p>
           <a:p>
-            <a:pPr indent="0" lvl="0" marL="0" rtl="0" algn="l">
+            <a:pPr marL="0" lvl="0" indent="0" algn="l" rtl="0">
               <a:lnSpc>
                 <a:spcPct val="115000"/>
               </a:lnSpc>
@@ -7198,7 +7387,7 @@
               <a:buNone/>
             </a:pPr>
             <a:r>
-              <a:rPr b="1" lang="en">
+              <a:rPr lang="en" b="1">
                 <a:solidFill>
                   <a:schemeClr val="dk1"/>
                 </a:solidFill>
@@ -7220,7 +7409,7 @@
             </a:endParaRPr>
           </a:p>
           <a:p>
-            <a:pPr indent="0" lvl="0" marL="0" rtl="0" algn="l">
+            <a:pPr marL="0" lvl="0" indent="0" algn="l" rtl="0">
               <a:lnSpc>
                 <a:spcPct val="115000"/>
               </a:lnSpc>
@@ -7233,7 +7422,7 @@
               <a:buNone/>
             </a:pPr>
             <a:r>
-              <a:rPr b="1" lang="en">
+              <a:rPr lang="en" b="1">
                 <a:solidFill>
                   <a:schemeClr val="dk1"/>
                 </a:solidFill>
@@ -7255,7 +7444,7 @@
             </a:endParaRPr>
           </a:p>
           <a:p>
-            <a:pPr indent="0" lvl="0" marL="0" rtl="0" algn="l">
+            <a:pPr marL="0" lvl="0" indent="0" algn="l" rtl="0">
               <a:lnSpc>
                 <a:spcPct val="115000"/>
               </a:lnSpc>
@@ -7268,21 +7457,21 @@
               <a:buNone/>
             </a:pPr>
             <a:r>
-              <a:rPr b="1" lang="en" sz="1600">
+              <a:rPr lang="en" sz="1600" b="1">
                 <a:solidFill>
                   <a:schemeClr val="dk1"/>
                 </a:solidFill>
               </a:rPr>
               <a:t>2. Forward Fill and Backward Fill</a:t>
             </a:r>
-            <a:endParaRPr b="1" sz="1600">
+            <a:endParaRPr sz="1600" b="1">
               <a:solidFill>
                 <a:schemeClr val="dk1"/>
               </a:solidFill>
             </a:endParaRPr>
           </a:p>
           <a:p>
-            <a:pPr indent="0" lvl="0" marL="0" rtl="0" algn="l">
+            <a:pPr marL="0" lvl="0" indent="0" algn="l" rtl="0">
               <a:lnSpc>
                 <a:spcPct val="115000"/>
               </a:lnSpc>
@@ -7319,11 +7508,11 @@
 </file>
 
 <file path=ppt/slides/slide11.xml><?xml version="1.0" encoding="utf-8"?>
-<p:sld xmlns:a="http://schemas.openxmlformats.org/drawingml/2006/main" xmlns:r="http://schemas.openxmlformats.org/officeDocument/2006/relationships" xmlns:mc="http://schemas.openxmlformats.org/markup-compatibility/2006" xmlns:mv="urn:schemas-microsoft-com:mac:vml" xmlns:p="http://schemas.openxmlformats.org/presentationml/2006/main" xmlns:c="http://schemas.openxmlformats.org/drawingml/2006/chart" xmlns:dgm="http://schemas.openxmlformats.org/drawingml/2006/diagram" xmlns:o="urn:schemas-microsoft-com:office:office" xmlns:v="urn:schemas-microsoft-com:vml" xmlns:pvml="urn:schemas-microsoft-com:office:powerpoint" xmlns:com="http://schemas.openxmlformats.org/drawingml/2006/compatibility" xmlns:p14="http://schemas.microsoft.com/office/powerpoint/2010/main" xmlns:p15="http://schemas.microsoft.com/office/powerpoint/2012/main" xmlns:ahyp="http://schemas.microsoft.com/office/drawing/2018/hyperlinkcolor">
+<p:sld xmlns:a="http://schemas.openxmlformats.org/drawingml/2006/main" xmlns:r="http://schemas.openxmlformats.org/officeDocument/2006/relationships" xmlns:p="http://schemas.openxmlformats.org/presentationml/2006/main">
   <p:cSld>
     <p:spTree>
       <p:nvGrpSpPr>
-        <p:cNvPr id="114" name="Shape 114"/>
+        <p:cNvPr id="1" name="Shape 114"/>
         <p:cNvGrpSpPr/>
         <p:nvPr/>
       </p:nvGrpSpPr>
@@ -7350,23 +7539,23 @@
             <a:avLst/>
           </a:prstGeom>
           <a:noFill/>
-          <a:ln cap="flat" cmpd="sng" w="9525">
+          <a:ln w="9525" cap="flat" cmpd="sng">
             <a:solidFill>
               <a:schemeClr val="accent4"/>
             </a:solidFill>
             <a:prstDash val="solid"/>
             <a:round/>
-            <a:headEnd len="sm" w="sm" type="none"/>
-            <a:tailEnd len="sm" w="sm" type="none"/>
+            <a:headEnd type="none" w="sm" len="sm"/>
+            <a:tailEnd type="none" w="sm" len="sm"/>
           </a:ln>
         </p:spPr>
         <p:txBody>
-          <a:bodyPr anchorCtr="0" anchor="t" bIns="91425" lIns="91425" spcFirstLastPara="1" rIns="91425" wrap="square" tIns="91425">
+          <a:bodyPr spcFirstLastPara="1" wrap="square" lIns="91425" tIns="91425" rIns="91425" bIns="91425" anchor="t" anchorCtr="0">
             <a:spAutoFit/>
           </a:bodyPr>
           <a:lstStyle/>
           <a:p>
-            <a:pPr indent="0" lvl="0" marL="0" rtl="0" algn="l">
+            <a:pPr marL="0" lvl="0" indent="0" algn="l" rtl="0">
               <a:spcBef>
                 <a:spcPts val="0"/>
               </a:spcBef>
@@ -7390,7 +7579,7 @@
             </a:endParaRPr>
           </a:p>
           <a:p>
-            <a:pPr indent="0" lvl="0" marL="0" rtl="0" algn="l">
+            <a:pPr marL="0" lvl="0" indent="0" algn="l" rtl="0">
               <a:spcBef>
                 <a:spcPts val="0"/>
               </a:spcBef>
@@ -7414,18 +7603,15 @@
             </a:endParaRPr>
           </a:p>
           <a:p>
-            <a:pPr indent="0" lvl="0" marL="0" rtl="0" algn="l">
-              <a:spcBef>
-                <a:spcPts val="0"/>
-              </a:spcBef>
-              <a:spcAft>
-                <a:spcPts val="0"/>
-              </a:spcAft>
-              <a:buNone/>
-            </a:pPr>
-            <a:r>
-              <a:t/>
-            </a:r>
+            <a:pPr marL="0" lvl="0" indent="0" algn="l" rtl="0">
+              <a:spcBef>
+                <a:spcPts val="0"/>
+              </a:spcBef>
+              <a:spcAft>
+                <a:spcPts val="0"/>
+              </a:spcAft>
+              <a:buNone/>
+            </a:pPr>
             <a:endParaRPr>
               <a:solidFill>
                 <a:srgbClr val="9900FF"/>
@@ -7433,7 +7619,7 @@
             </a:endParaRPr>
           </a:p>
           <a:p>
-            <a:pPr indent="0" lvl="0" marL="0" rtl="0" algn="l">
+            <a:pPr marL="0" lvl="0" indent="0" algn="l" rtl="0">
               <a:spcBef>
                 <a:spcPts val="0"/>
               </a:spcBef>
@@ -7457,7 +7643,7 @@
             </a:endParaRPr>
           </a:p>
           <a:p>
-            <a:pPr indent="0" lvl="0" marL="0" rtl="0" algn="l">
+            <a:pPr marL="0" lvl="0" indent="0" algn="l" rtl="0">
               <a:spcBef>
                 <a:spcPts val="0"/>
               </a:spcBef>
@@ -7481,18 +7667,15 @@
             </a:endParaRPr>
           </a:p>
           <a:p>
-            <a:pPr indent="0" lvl="0" marL="0" rtl="0" algn="l">
-              <a:spcBef>
-                <a:spcPts val="0"/>
-              </a:spcBef>
-              <a:spcAft>
-                <a:spcPts val="0"/>
-              </a:spcAft>
-              <a:buNone/>
-            </a:pPr>
-            <a:r>
-              <a:t/>
-            </a:r>
+            <a:pPr marL="0" lvl="0" indent="0" algn="l" rtl="0">
+              <a:spcBef>
+                <a:spcPts val="0"/>
+              </a:spcBef>
+              <a:spcAft>
+                <a:spcPts val="0"/>
+              </a:spcAft>
+              <a:buNone/>
+            </a:pPr>
             <a:endParaRPr>
               <a:solidFill>
                 <a:srgbClr val="9900FF"/>
@@ -7500,7 +7683,7 @@
             </a:endParaRPr>
           </a:p>
           <a:p>
-            <a:pPr indent="0" lvl="0" marL="0" rtl="0" algn="l">
+            <a:pPr marL="0" lvl="0" indent="0" algn="l" rtl="0">
               <a:spcBef>
                 <a:spcPts val="0"/>
               </a:spcBef>
@@ -7524,7 +7707,7 @@
             </a:endParaRPr>
           </a:p>
           <a:p>
-            <a:pPr indent="0" lvl="0" marL="0" rtl="0" algn="l">
+            <a:pPr marL="0" lvl="0" indent="0" algn="l" rtl="0">
               <a:spcBef>
                 <a:spcPts val="0"/>
               </a:spcBef>
@@ -7572,14 +7755,14 @@
             <a:avLst/>
           </a:prstGeom>
           <a:noFill/>
-          <a:ln cap="flat" cmpd="sng" w="9525">
+          <a:ln w="9525" cap="flat" cmpd="sng">
             <a:solidFill>
               <a:schemeClr val="dk1"/>
             </a:solidFill>
             <a:prstDash val="solid"/>
             <a:round/>
-            <a:headEnd len="sm" w="sm" type="none"/>
-            <a:tailEnd len="sm" w="sm" type="none"/>
+            <a:headEnd type="none" w="sm" len="sm"/>
+            <a:tailEnd type="none" w="sm" len="sm"/>
           </a:ln>
         </p:spPr>
       </p:pic>
@@ -7603,12 +7786,12 @@
           </a:ln>
         </p:spPr>
         <p:txBody>
-          <a:bodyPr anchorCtr="0" anchor="t" bIns="91425" lIns="91425" spcFirstLastPara="1" rIns="91425" wrap="square" tIns="91425">
+          <a:bodyPr spcFirstLastPara="1" wrap="square" lIns="91425" tIns="91425" rIns="91425" bIns="91425" anchor="t" anchorCtr="0">
             <a:spAutoFit/>
           </a:bodyPr>
           <a:lstStyle/>
           <a:p>
-            <a:pPr indent="0" lvl="0" marL="0" rtl="0" algn="l">
+            <a:pPr marL="0" lvl="0" indent="0" algn="l" rtl="0">
               <a:lnSpc>
                 <a:spcPct val="120000"/>
               </a:lnSpc>
@@ -7621,7 +7804,7 @@
               <a:buNone/>
             </a:pPr>
             <a:r>
-              <a:rPr b="1" lang="en" sz="1350">
+              <a:rPr lang="en" sz="1350" b="1">
                 <a:solidFill>
                   <a:srgbClr val="273239"/>
                 </a:solidFill>
@@ -7635,7 +7818,7 @@
               </a:rPr>
               <a:t>Output:</a:t>
             </a:r>
-            <a:endParaRPr b="1" sz="1350">
+            <a:endParaRPr sz="1350" b="1">
               <a:solidFill>
                 <a:srgbClr val="273239"/>
               </a:solidFill>
@@ -7649,7 +7832,7 @@
             </a:endParaRPr>
           </a:p>
           <a:p>
-            <a:pPr indent="0" lvl="0" marL="0" rtl="0" algn="l">
+            <a:pPr marL="0" lvl="0" indent="0" algn="l" rtl="0">
               <a:lnSpc>
                 <a:spcPct val="115000"/>
               </a:lnSpc>
@@ -7661,9 +7844,6 @@
               </a:spcAft>
               <a:buNone/>
             </a:pPr>
-            <a:r>
-              <a:t/>
-            </a:r>
             <a:endParaRPr sz="1100">
               <a:solidFill>
                 <a:schemeClr val="dk1"/>
@@ -7681,11 +7861,11 @@
 </file>
 
 <file path=ppt/slides/slide12.xml><?xml version="1.0" encoding="utf-8"?>
-<p:sld xmlns:a="http://schemas.openxmlformats.org/drawingml/2006/main" xmlns:r="http://schemas.openxmlformats.org/officeDocument/2006/relationships" xmlns:mc="http://schemas.openxmlformats.org/markup-compatibility/2006" xmlns:mv="urn:schemas-microsoft-com:mac:vml" xmlns:p="http://schemas.openxmlformats.org/presentationml/2006/main" xmlns:c="http://schemas.openxmlformats.org/drawingml/2006/chart" xmlns:dgm="http://schemas.openxmlformats.org/drawingml/2006/diagram" xmlns:o="urn:schemas-microsoft-com:office:office" xmlns:v="urn:schemas-microsoft-com:vml" xmlns:pvml="urn:schemas-microsoft-com:office:powerpoint" xmlns:com="http://schemas.openxmlformats.org/drawingml/2006/compatibility" xmlns:p14="http://schemas.microsoft.com/office/powerpoint/2010/main" xmlns:p15="http://schemas.microsoft.com/office/powerpoint/2012/main" xmlns:ahyp="http://schemas.microsoft.com/office/drawing/2018/hyperlinkcolor">
+<p:sld xmlns:a="http://schemas.openxmlformats.org/drawingml/2006/main" xmlns:r="http://schemas.openxmlformats.org/officeDocument/2006/relationships" xmlns:p="http://schemas.openxmlformats.org/presentationml/2006/main">
   <p:cSld>
     <p:spTree>
       <p:nvGrpSpPr>
-        <p:cNvPr id="121" name="Shape 121"/>
+        <p:cNvPr id="1" name="Shape 121"/>
         <p:cNvGrpSpPr/>
         <p:nvPr/>
       </p:nvGrpSpPr>
@@ -7717,12 +7897,12 @@
           </a:ln>
         </p:spPr>
         <p:txBody>
-          <a:bodyPr anchorCtr="0" anchor="t" bIns="91425" lIns="91425" spcFirstLastPara="1" rIns="91425" wrap="square" tIns="91425">
+          <a:bodyPr spcFirstLastPara="1" wrap="square" lIns="91425" tIns="91425" rIns="91425" bIns="91425" anchor="t" anchorCtr="0">
             <a:spAutoFit/>
           </a:bodyPr>
           <a:lstStyle/>
           <a:p>
-            <a:pPr indent="0" lvl="0" marL="0" rtl="0" algn="l">
+            <a:pPr marL="0" lvl="0" indent="0" algn="l" rtl="0">
               <a:lnSpc>
                 <a:spcPct val="115000"/>
               </a:lnSpc>
@@ -7735,7 +7915,7 @@
               <a:buNone/>
             </a:pPr>
             <a:r>
-              <a:rPr b="1" lang="en" sz="1300">
+              <a:rPr lang="en" sz="1300" b="1">
                 <a:solidFill>
                   <a:schemeClr val="dk1"/>
                 </a:solidFill>
@@ -7797,7 +7977,7 @@
             </a:endParaRPr>
           </a:p>
           <a:p>
-            <a:pPr indent="-311150" lvl="0" marL="457200" rtl="0" algn="l">
+            <a:pPr marL="457200" lvl="0" indent="-311150" algn="l" rtl="0">
               <a:lnSpc>
                 <a:spcPct val="115000"/>
               </a:lnSpc>
@@ -7834,7 +8014,7 @@
               <a:t>: Applies the forward fill approach to the </a:t>
             </a:r>
             <a:r>
-              <a:rPr b="1" lang="en" sz="1300">
+              <a:rPr lang="en" sz="1300" b="1">
                 <a:solidFill>
                   <a:schemeClr val="dk1"/>
                 </a:solidFill>
@@ -7856,7 +8036,7 @@
             </a:endParaRPr>
           </a:p>
           <a:p>
-            <a:pPr indent="-311150" lvl="0" marL="457200" rtl="0" algn="l">
+            <a:pPr marL="457200" lvl="0" indent="-311150" algn="l" rtl="0">
               <a:lnSpc>
                 <a:spcPct val="115000"/>
               </a:lnSpc>
@@ -7893,7 +8073,7 @@
               <a:t>: Applies the backward fill approach to the </a:t>
             </a:r>
             <a:r>
-              <a:rPr b="1" lang="en" sz="1300">
+              <a:rPr lang="en" sz="1300" b="1">
                 <a:solidFill>
                   <a:schemeClr val="dk1"/>
                 </a:solidFill>
@@ -7915,7 +8095,7 @@
             </a:endParaRPr>
           </a:p>
           <a:p>
-            <a:pPr indent="0" lvl="0" marL="0" rtl="0" algn="l">
+            <a:pPr marL="0" lvl="0" indent="0" algn="l" rtl="0">
               <a:lnSpc>
                 <a:spcPct val="115000"/>
               </a:lnSpc>
@@ -7928,7 +8108,7 @@
               <a:buNone/>
             </a:pPr>
             <a:r>
-              <a:rPr b="1" lang="en" sz="1300">
+              <a:rPr lang="en" sz="1300" b="1">
                 <a:solidFill>
                   <a:schemeClr val="dk1"/>
                 </a:solidFill>
@@ -7950,7 +8130,7 @@
             </a:endParaRPr>
           </a:p>
           <a:p>
-            <a:pPr indent="0" lvl="0" marL="0" rtl="0" algn="l">
+            <a:pPr marL="0" lvl="0" indent="0" algn="l" rtl="0">
               <a:lnSpc>
                 <a:spcPct val="115000"/>
               </a:lnSpc>
@@ -7963,7 +8143,7 @@
               <a:buNone/>
             </a:pPr>
             <a:r>
-              <a:rPr b="1" lang="en" sz="1300">
+              <a:rPr lang="en" sz="1300" b="1">
                 <a:solidFill>
                   <a:schemeClr val="dk1"/>
                 </a:solidFill>
@@ -7985,7 +8165,7 @@
             </a:endParaRPr>
           </a:p>
           <a:p>
-            <a:pPr indent="0" lvl="0" marL="0" rtl="0" algn="l">
+            <a:pPr marL="0" lvl="0" indent="0" algn="l" rtl="0">
               <a:lnSpc>
                 <a:spcPct val="115000"/>
               </a:lnSpc>
@@ -7998,21 +8178,21 @@
               <a:buNone/>
             </a:pPr>
             <a:r>
-              <a:rPr b="1" lang="en" sz="1300">
+              <a:rPr lang="en" sz="1300" b="1">
                 <a:solidFill>
                   <a:schemeClr val="dk1"/>
                 </a:solidFill>
               </a:rPr>
               <a:t>Note:</a:t>
             </a:r>
-            <a:endParaRPr b="1" sz="1300">
+            <a:endParaRPr sz="1300" b="1">
               <a:solidFill>
                 <a:schemeClr val="dk1"/>
               </a:solidFill>
             </a:endParaRPr>
           </a:p>
           <a:p>
-            <a:pPr indent="-311150" lvl="0" marL="457200" rtl="0" algn="l">
+            <a:pPr marL="457200" lvl="0" indent="-311150" algn="l" rtl="0">
               <a:lnSpc>
                 <a:spcPct val="115000"/>
               </a:lnSpc>
@@ -8029,7 +8209,7 @@
               <a:buChar char="●"/>
             </a:pPr>
             <a:r>
-              <a:rPr b="1" lang="en" sz="1300">
+              <a:rPr lang="en" sz="1300" b="1">
                 <a:solidFill>
                   <a:schemeClr val="dk1"/>
                 </a:solidFill>
@@ -8051,7 +8231,7 @@
             </a:endParaRPr>
           </a:p>
           <a:p>
-            <a:pPr indent="-311150" lvl="0" marL="457200" rtl="0" algn="l">
+            <a:pPr marL="457200" lvl="0" indent="-311150" algn="l" rtl="0">
               <a:lnSpc>
                 <a:spcPct val="115000"/>
               </a:lnSpc>
@@ -8068,7 +8248,7 @@
               <a:buChar char="●"/>
             </a:pPr>
             <a:r>
-              <a:rPr b="1" lang="en" sz="1300">
+              <a:rPr lang="en" sz="1300" b="1">
                 <a:solidFill>
                   <a:schemeClr val="dk1"/>
                 </a:solidFill>
@@ -8090,7 +8270,7 @@
             </a:endParaRPr>
           </a:p>
           <a:p>
-            <a:pPr indent="0" lvl="0" marL="0" rtl="0" algn="l">
+            <a:pPr marL="0" lvl="0" indent="0" algn="l" rtl="0">
               <a:lnSpc>
                 <a:spcPct val="115000"/>
               </a:lnSpc>
@@ -8103,21 +8283,21 @@
               <a:buNone/>
             </a:pPr>
             <a:r>
-              <a:rPr b="1" lang="en" sz="1500">
+              <a:rPr lang="en" sz="1500" b="1">
                 <a:solidFill>
                   <a:schemeClr val="dk1"/>
                 </a:solidFill>
               </a:rPr>
               <a:t>3. Interpolation Methods</a:t>
             </a:r>
-            <a:endParaRPr b="1" sz="1500">
+            <a:endParaRPr sz="1500" b="1">
               <a:solidFill>
                 <a:schemeClr val="dk1"/>
               </a:solidFill>
             </a:endParaRPr>
           </a:p>
           <a:p>
-            <a:pPr indent="0" lvl="0" marL="0" rtl="0" algn="l">
+            <a:pPr marL="0" lvl="0" indent="0" algn="l" rtl="0">
               <a:lnSpc>
                 <a:spcPct val="115000"/>
               </a:lnSpc>
@@ -8154,11 +8334,11 @@
 </file>
 
 <file path=ppt/slides/slide13.xml><?xml version="1.0" encoding="utf-8"?>
-<p:sld xmlns:a="http://schemas.openxmlformats.org/drawingml/2006/main" xmlns:r="http://schemas.openxmlformats.org/officeDocument/2006/relationships" xmlns:mc="http://schemas.openxmlformats.org/markup-compatibility/2006" xmlns:mv="urn:schemas-microsoft-com:mac:vml" xmlns:p="http://schemas.openxmlformats.org/presentationml/2006/main" xmlns:c="http://schemas.openxmlformats.org/drawingml/2006/chart" xmlns:dgm="http://schemas.openxmlformats.org/drawingml/2006/diagram" xmlns:o="urn:schemas-microsoft-com:office:office" xmlns:v="urn:schemas-microsoft-com:vml" xmlns:pvml="urn:schemas-microsoft-com:office:powerpoint" xmlns:com="http://schemas.openxmlformats.org/drawingml/2006/compatibility" xmlns:p14="http://schemas.microsoft.com/office/powerpoint/2010/main" xmlns:p15="http://schemas.microsoft.com/office/powerpoint/2012/main" xmlns:ahyp="http://schemas.microsoft.com/office/drawing/2018/hyperlinkcolor">
+<p:sld xmlns:a="http://schemas.openxmlformats.org/drawingml/2006/main" xmlns:r="http://schemas.openxmlformats.org/officeDocument/2006/relationships" xmlns:p="http://schemas.openxmlformats.org/presentationml/2006/main">
   <p:cSld>
     <p:spTree>
       <p:nvGrpSpPr>
-        <p:cNvPr id="126" name="Shape 126"/>
+        <p:cNvPr id="1" name="Shape 126"/>
         <p:cNvGrpSpPr/>
         <p:nvPr/>
       </p:nvGrpSpPr>
@@ -8185,23 +8365,23 @@
             <a:avLst/>
           </a:prstGeom>
           <a:noFill/>
-          <a:ln cap="flat" cmpd="sng" w="9525">
+          <a:ln w="9525" cap="flat" cmpd="sng">
             <a:solidFill>
               <a:schemeClr val="lt1"/>
             </a:solidFill>
             <a:prstDash val="solid"/>
             <a:round/>
-            <a:headEnd len="sm" w="sm" type="none"/>
-            <a:tailEnd len="sm" w="sm" type="none"/>
+            <a:headEnd type="none" w="sm" len="sm"/>
+            <a:tailEnd type="none" w="sm" len="sm"/>
           </a:ln>
         </p:spPr>
         <p:txBody>
-          <a:bodyPr anchorCtr="0" anchor="t" bIns="91425" lIns="91425" spcFirstLastPara="1" rIns="91425" wrap="square" tIns="91425">
+          <a:bodyPr spcFirstLastPara="1" wrap="square" lIns="91425" tIns="91425" rIns="91425" bIns="91425" anchor="t" anchorCtr="0">
             <a:spAutoFit/>
           </a:bodyPr>
           <a:lstStyle/>
           <a:p>
-            <a:pPr indent="0" lvl="0" marL="0" rtl="0" algn="l">
+            <a:pPr marL="0" lvl="0" indent="0" algn="l" rtl="0">
               <a:spcBef>
                 <a:spcPts val="0"/>
               </a:spcBef>
@@ -8225,7 +8405,7 @@
             </a:endParaRPr>
           </a:p>
           <a:p>
-            <a:pPr indent="0" lvl="0" marL="0" rtl="0" algn="l">
+            <a:pPr marL="0" lvl="0" indent="0" algn="l" rtl="0">
               <a:spcBef>
                 <a:spcPts val="0"/>
               </a:spcBef>
@@ -8249,18 +8429,15 @@
             </a:endParaRPr>
           </a:p>
           <a:p>
-            <a:pPr indent="0" lvl="0" marL="0" rtl="0" algn="l">
-              <a:spcBef>
-                <a:spcPts val="0"/>
-              </a:spcBef>
-              <a:spcAft>
-                <a:spcPts val="0"/>
-              </a:spcAft>
-              <a:buNone/>
-            </a:pPr>
-            <a:r>
-              <a:t/>
-            </a:r>
+            <a:pPr marL="0" lvl="0" indent="0" algn="l" rtl="0">
+              <a:spcBef>
+                <a:spcPts val="0"/>
+              </a:spcBef>
+              <a:spcAft>
+                <a:spcPts val="0"/>
+              </a:spcAft>
+              <a:buNone/>
+            </a:pPr>
             <a:endParaRPr>
               <a:solidFill>
                 <a:srgbClr val="9900FF"/>
@@ -8268,7 +8445,7 @@
             </a:endParaRPr>
           </a:p>
           <a:p>
-            <a:pPr indent="0" lvl="0" marL="0" rtl="0" algn="l">
+            <a:pPr marL="0" lvl="0" indent="0" algn="l" rtl="0">
               <a:spcBef>
                 <a:spcPts val="0"/>
               </a:spcBef>
@@ -8292,7 +8469,7 @@
             </a:endParaRPr>
           </a:p>
           <a:p>
-            <a:pPr indent="0" lvl="0" marL="0" rtl="0" algn="l">
+            <a:pPr marL="0" lvl="0" indent="0" algn="l" rtl="0">
               <a:spcBef>
                 <a:spcPts val="0"/>
               </a:spcBef>
@@ -8316,18 +8493,15 @@
             </a:endParaRPr>
           </a:p>
           <a:p>
-            <a:pPr indent="0" lvl="0" marL="0" rtl="0" algn="l">
-              <a:spcBef>
-                <a:spcPts val="0"/>
-              </a:spcBef>
-              <a:spcAft>
-                <a:spcPts val="0"/>
-              </a:spcAft>
-              <a:buNone/>
-            </a:pPr>
-            <a:r>
-              <a:t/>
-            </a:r>
+            <a:pPr marL="0" lvl="0" indent="0" algn="l" rtl="0">
+              <a:spcBef>
+                <a:spcPts val="0"/>
+              </a:spcBef>
+              <a:spcAft>
+                <a:spcPts val="0"/>
+              </a:spcAft>
+              <a:buNone/>
+            </a:pPr>
             <a:endParaRPr>
               <a:solidFill>
                 <a:srgbClr val="9900FF"/>
@@ -8335,7 +8509,7 @@
             </a:endParaRPr>
           </a:p>
           <a:p>
-            <a:pPr indent="0" lvl="0" marL="0" rtl="0" algn="l">
+            <a:pPr marL="0" lvl="0" indent="0" algn="l" rtl="0">
               <a:spcBef>
                 <a:spcPts val="0"/>
               </a:spcBef>
@@ -8359,7 +8533,7 @@
             </a:endParaRPr>
           </a:p>
           <a:p>
-            <a:pPr indent="0" lvl="0" marL="0" rtl="0" algn="l">
+            <a:pPr marL="0" lvl="0" indent="0" algn="l" rtl="0">
               <a:spcBef>
                 <a:spcPts val="0"/>
               </a:spcBef>
@@ -8400,21 +8574,21 @@
         </p:blipFill>
         <p:spPr>
           <a:xfrm>
-            <a:off x="2794063" y="1524000"/>
+            <a:off x="2841874" y="932329"/>
             <a:ext cx="2085975" cy="3619500"/>
           </a:xfrm>
           <a:prstGeom prst="rect">
             <a:avLst/>
           </a:prstGeom>
           <a:noFill/>
-          <a:ln cap="flat" cmpd="sng" w="9525">
+          <a:ln w="9525" cap="flat" cmpd="sng">
             <a:solidFill>
               <a:schemeClr val="dk1"/>
             </a:solidFill>
             <a:prstDash val="solid"/>
             <a:round/>
-            <a:headEnd len="sm" w="sm" type="none"/>
-            <a:tailEnd len="sm" w="sm" type="none"/>
+            <a:headEnd type="none" w="sm" len="sm"/>
+            <a:tailEnd type="none" w="sm" len="sm"/>
           </a:ln>
         </p:spPr>
       </p:pic>
@@ -8438,12 +8612,12 @@
           </a:ln>
         </p:spPr>
         <p:txBody>
-          <a:bodyPr anchorCtr="0" anchor="t" bIns="91425" lIns="91425" spcFirstLastPara="1" rIns="91425" wrap="square" tIns="91425">
+          <a:bodyPr spcFirstLastPara="1" wrap="square" lIns="91425" tIns="91425" rIns="91425" bIns="91425" anchor="t" anchorCtr="0">
             <a:spAutoFit/>
           </a:bodyPr>
           <a:lstStyle/>
           <a:p>
-            <a:pPr indent="0" lvl="0" marL="0" rtl="0" algn="l">
+            <a:pPr marL="0" lvl="0" indent="0" algn="l" rtl="0">
               <a:lnSpc>
                 <a:spcPct val="120000"/>
               </a:lnSpc>
@@ -8455,23 +8629,20 @@
               </a:spcAft>
               <a:buNone/>
             </a:pPr>
-            <a:r>
-              <a:t/>
-            </a:r>
             <a:endParaRPr/>
           </a:p>
           <a:p>
-            <a:pPr indent="0" lvl="0" marL="0" rtl="0" algn="l">
-              <a:spcBef>
-                <a:spcPts val="0"/>
-              </a:spcBef>
-              <a:spcAft>
-                <a:spcPts val="0"/>
-              </a:spcAft>
-              <a:buNone/>
-            </a:pPr>
-            <a:r>
-              <a:rPr b="1" lang="en" sz="1350">
+            <a:pPr marL="0" lvl="0" indent="0" algn="l" rtl="0">
+              <a:spcBef>
+                <a:spcPts val="0"/>
+              </a:spcBef>
+              <a:spcAft>
+                <a:spcPts val="0"/>
+              </a:spcAft>
+              <a:buNone/>
+            </a:pPr>
+            <a:r>
+              <a:rPr lang="en" sz="1350" b="1">
                 <a:solidFill>
                   <a:srgbClr val="273239"/>
                 </a:solidFill>
@@ -8517,12 +8688,12 @@
           </a:ln>
         </p:spPr>
         <p:txBody>
-          <a:bodyPr anchorCtr="0" anchor="t" bIns="91425" lIns="91425" spcFirstLastPara="1" rIns="91425" wrap="square" tIns="91425">
+          <a:bodyPr spcFirstLastPara="1" wrap="square" lIns="91425" tIns="91425" rIns="91425" bIns="91425" anchor="t" anchorCtr="0">
             <a:spAutoFit/>
           </a:bodyPr>
           <a:lstStyle/>
           <a:p>
-            <a:pPr indent="0" lvl="0" marL="0" rtl="0" algn="l">
+            <a:pPr marL="0" lvl="0" indent="0" algn="l" rtl="0">
               <a:lnSpc>
                 <a:spcPct val="115000"/>
               </a:lnSpc>
@@ -8535,7 +8706,7 @@
               <a:buNone/>
             </a:pPr>
             <a:r>
-              <a:rPr b="1" lang="en" sz="1100">
+              <a:rPr lang="en" sz="1050" b="1" dirty="0">
                 <a:solidFill>
                   <a:schemeClr val="dk1"/>
                 </a:solidFill>
@@ -8543,7 +8714,7 @@
               <a:t>Explanation:</a:t>
             </a:r>
             <a:r>
-              <a:rPr lang="en" sz="1100">
+              <a:rPr lang="en" sz="1050" dirty="0">
                 <a:solidFill>
                   <a:schemeClr val="dk1"/>
                 </a:solidFill>
@@ -8551,7 +8722,7 @@
               <a:t> The </a:t>
             </a:r>
             <a:r>
-              <a:rPr lang="en" sz="1100">
+              <a:rPr lang="en" sz="1050" dirty="0">
                 <a:solidFill>
                   <a:srgbClr val="188038"/>
                 </a:solidFill>
@@ -8563,7 +8734,7 @@
               <a:t>interpolate()</a:t>
             </a:r>
             <a:r>
-              <a:rPr lang="en" sz="1100">
+              <a:rPr lang="en" sz="1050" dirty="0">
                 <a:solidFill>
                   <a:schemeClr val="dk1"/>
                 </a:solidFill>
@@ -8571,7 +8742,7 @@
               <a:t> function in Pandas can estimate missing values using different interpolation techniques, such as </a:t>
             </a:r>
             <a:r>
-              <a:rPr b="1" lang="en" sz="1100">
+              <a:rPr lang="en" sz="1050" b="1" dirty="0">
                 <a:solidFill>
                   <a:schemeClr val="dk1"/>
                 </a:solidFill>
@@ -8579,7 +8750,7 @@
               <a:t>linear</a:t>
             </a:r>
             <a:r>
-              <a:rPr lang="en" sz="1100">
+              <a:rPr lang="en" sz="1050" dirty="0">
                 <a:solidFill>
                   <a:schemeClr val="dk1"/>
                 </a:solidFill>
@@ -8587,7 +8758,7 @@
               <a:t> and </a:t>
             </a:r>
             <a:r>
-              <a:rPr b="1" lang="en" sz="1100">
+              <a:rPr lang="en" sz="1050" b="1" dirty="0">
                 <a:solidFill>
                   <a:schemeClr val="dk1"/>
                 </a:solidFill>
@@ -8595,21 +8766,21 @@
               <a:t>quadratic</a:t>
             </a:r>
             <a:r>
-              <a:rPr lang="en" sz="1100">
+              <a:rPr lang="en" sz="1050" dirty="0">
                 <a:solidFill>
                   <a:schemeClr val="dk1"/>
                 </a:solidFill>
               </a:rPr>
               <a:t> interpolation.</a:t>
             </a:r>
-            <a:endParaRPr sz="1100">
+            <a:endParaRPr sz="1050" dirty="0">
               <a:solidFill>
                 <a:schemeClr val="dk1"/>
               </a:solidFill>
             </a:endParaRPr>
           </a:p>
           <a:p>
-            <a:pPr indent="-298450" lvl="0" marL="457200" rtl="0" algn="l">
+            <a:pPr marL="457200" lvl="0" indent="-298450" algn="l" rtl="0">
               <a:lnSpc>
                 <a:spcPct val="115000"/>
               </a:lnSpc>
@@ -8626,7 +8797,7 @@
               <a:buChar char="●"/>
             </a:pPr>
             <a:r>
-              <a:rPr lang="en" sz="1100">
+              <a:rPr lang="en" sz="1050" dirty="0">
                 <a:solidFill>
                   <a:srgbClr val="188038"/>
                 </a:solidFill>
@@ -8638,7 +8809,7 @@
               <a:t>df['Marks'].interpolate(method='linear')</a:t>
             </a:r>
             <a:r>
-              <a:rPr lang="en" sz="1100">
+              <a:rPr lang="en" sz="1050" dirty="0">
                 <a:solidFill>
                   <a:schemeClr val="dk1"/>
                 </a:solidFill>
@@ -8646,7 +8817,7 @@
               <a:t>: Applies linear interpolation to the </a:t>
             </a:r>
             <a:r>
-              <a:rPr b="1" lang="en" sz="1100">
+              <a:rPr lang="en" sz="1050" b="1" dirty="0">
                 <a:solidFill>
                   <a:schemeClr val="dk1"/>
                 </a:solidFill>
@@ -8654,21 +8825,21 @@
               <a:t>'Marks'</a:t>
             </a:r>
             <a:r>
-              <a:rPr lang="en" sz="1100">
+              <a:rPr lang="en" sz="1050" dirty="0">
                 <a:solidFill>
                   <a:schemeClr val="dk1"/>
                 </a:solidFill>
               </a:rPr>
               <a:t> column by estimating missing values based on a straight-line relationship between neighboring data points.</a:t>
             </a:r>
-            <a:endParaRPr sz="1100">
+            <a:endParaRPr sz="1050" dirty="0">
               <a:solidFill>
                 <a:schemeClr val="dk1"/>
               </a:solidFill>
             </a:endParaRPr>
           </a:p>
           <a:p>
-            <a:pPr indent="-298450" lvl="0" marL="457200" rtl="0" algn="l">
+            <a:pPr marL="457200" lvl="0" indent="-298450" algn="l" rtl="0">
               <a:lnSpc>
                 <a:spcPct val="115000"/>
               </a:lnSpc>
@@ -8685,7 +8856,7 @@
               <a:buChar char="●"/>
             </a:pPr>
             <a:r>
-              <a:rPr lang="en" sz="1100">
+              <a:rPr lang="en" sz="1050" dirty="0">
                 <a:solidFill>
                   <a:srgbClr val="188038"/>
                 </a:solidFill>
@@ -8697,7 +8868,7 @@
               <a:t>df['Marks'].interpolate(method='quadratic')</a:t>
             </a:r>
             <a:r>
-              <a:rPr lang="en" sz="1100">
+              <a:rPr lang="en" sz="1050" dirty="0">
                 <a:solidFill>
                   <a:schemeClr val="dk1"/>
                 </a:solidFill>
@@ -8705,7 +8876,7 @@
               <a:t>: Applies quadratic interpolation to the </a:t>
             </a:r>
             <a:r>
-              <a:rPr b="1" lang="en" sz="1100">
+              <a:rPr lang="en" sz="1050" b="1" dirty="0">
                 <a:solidFill>
                   <a:schemeClr val="dk1"/>
                 </a:solidFill>
@@ -8713,21 +8884,21 @@
               <a:t>'Marks'</a:t>
             </a:r>
             <a:r>
-              <a:rPr lang="en" sz="1100">
+              <a:rPr lang="en" sz="1050" dirty="0">
                 <a:solidFill>
                   <a:schemeClr val="dk1"/>
                 </a:solidFill>
               </a:rPr>
               <a:t> column by estimating missing values using a quadratic curve fitted to surrounding observations.</a:t>
             </a:r>
-            <a:endParaRPr sz="1100">
+            <a:endParaRPr sz="1050" dirty="0">
               <a:solidFill>
                 <a:schemeClr val="dk1"/>
               </a:solidFill>
             </a:endParaRPr>
           </a:p>
           <a:p>
-            <a:pPr indent="0" lvl="0" marL="0" rtl="0" algn="l">
+            <a:pPr marL="0" lvl="0" indent="0" algn="l" rtl="0">
               <a:lnSpc>
                 <a:spcPct val="115000"/>
               </a:lnSpc>
@@ -8740,7 +8911,7 @@
               <a:buNone/>
             </a:pPr>
             <a:r>
-              <a:rPr b="1" lang="en" sz="1100">
+              <a:rPr lang="en" sz="1050" b="1" dirty="0">
                 <a:solidFill>
                   <a:schemeClr val="dk1"/>
                 </a:solidFill>
@@ -8748,21 +8919,21 @@
               <a:t>Advantages:</a:t>
             </a:r>
             <a:r>
-              <a:rPr lang="en" sz="1100">
+              <a:rPr lang="en" sz="1050" dirty="0">
                 <a:solidFill>
                   <a:schemeClr val="dk1"/>
                 </a:solidFill>
               </a:rPr>
               <a:t> Effectively follows data trends and helps maintain relationships among values.</a:t>
             </a:r>
-            <a:endParaRPr sz="1100">
+            <a:endParaRPr sz="1050" dirty="0">
               <a:solidFill>
                 <a:schemeClr val="dk1"/>
               </a:solidFill>
             </a:endParaRPr>
           </a:p>
           <a:p>
-            <a:pPr indent="0" lvl="0" marL="0" rtl="0" algn="l">
+            <a:pPr marL="0" lvl="0" indent="0" algn="l" rtl="0">
               <a:lnSpc>
                 <a:spcPct val="115000"/>
               </a:lnSpc>
@@ -8775,7 +8946,7 @@
               <a:buNone/>
             </a:pPr>
             <a:r>
-              <a:rPr b="1" lang="en" sz="1100">
+              <a:rPr lang="en" sz="1050" b="1" dirty="0">
                 <a:solidFill>
                   <a:schemeClr val="dk1"/>
                 </a:solidFill>
@@ -8783,7 +8954,7 @@
               <a:t>Disadvantages:</a:t>
             </a:r>
             <a:r>
-              <a:rPr lang="en" sz="1100">
+              <a:rPr lang="en" sz="1050" dirty="0">
                 <a:solidFill>
                   <a:schemeClr val="dk1"/>
                 </a:solidFill>
@@ -8791,28 +8962,28 @@
               <a:t> Relies on assumptions about the underlying pattern (such as linear or quadratic behavior) and can be more difficult to implement and interpret.</a:t>
             </a:r>
             <a:br>
-              <a:rPr lang="en" sz="1100">
+              <a:rPr lang="en" sz="1050" dirty="0">
                 <a:solidFill>
                   <a:schemeClr val="dk1"/>
                 </a:solidFill>
               </a:rPr>
             </a:br>
             <a:r>
-              <a:rPr b="1" lang="en" sz="1100">
+              <a:rPr lang="en" sz="1050" b="1" dirty="0">
                 <a:solidFill>
                   <a:schemeClr val="dk1"/>
                 </a:solidFill>
               </a:rPr>
               <a:t>Note:</a:t>
             </a:r>
-            <a:endParaRPr b="1" sz="1100">
+            <a:endParaRPr sz="1050" b="1" dirty="0">
               <a:solidFill>
                 <a:schemeClr val="dk1"/>
               </a:solidFill>
             </a:endParaRPr>
           </a:p>
           <a:p>
-            <a:pPr indent="-298450" lvl="0" marL="457200" rtl="0" algn="l">
+            <a:pPr marL="457200" lvl="0" indent="-298450" algn="l" rtl="0">
               <a:lnSpc>
                 <a:spcPct val="115000"/>
               </a:lnSpc>
@@ -8829,7 +9000,7 @@
               <a:buChar char="●"/>
             </a:pPr>
             <a:r>
-              <a:rPr b="1" lang="en" sz="1100">
+              <a:rPr lang="en" sz="1050" b="1" dirty="0">
                 <a:solidFill>
                   <a:schemeClr val="dk1"/>
                 </a:solidFill>
@@ -8837,21 +9008,21 @@
               <a:t>Linear Interpolation:</a:t>
             </a:r>
             <a:r>
-              <a:rPr lang="en" sz="1100">
+              <a:rPr lang="en" sz="1050" dirty="0">
                 <a:solidFill>
                   <a:schemeClr val="dk1"/>
                 </a:solidFill>
               </a:rPr>
               <a:t> Estimates missing values by assuming a straight-line connection between adjacent known values.</a:t>
             </a:r>
-            <a:endParaRPr sz="1100">
+            <a:endParaRPr sz="1050" dirty="0">
               <a:solidFill>
                 <a:schemeClr val="dk1"/>
               </a:solidFill>
             </a:endParaRPr>
           </a:p>
           <a:p>
-            <a:pPr indent="-298450" lvl="0" marL="457200" rtl="0" algn="l">
+            <a:pPr marL="457200" lvl="0" indent="-298450" algn="l" rtl="0">
               <a:lnSpc>
                 <a:spcPct val="115000"/>
               </a:lnSpc>
@@ -8868,7 +9039,7 @@
               <a:buChar char="●"/>
             </a:pPr>
             <a:r>
-              <a:rPr b="1" lang="en" sz="1100">
+              <a:rPr lang="en" sz="1050" b="1" dirty="0">
                 <a:solidFill>
                   <a:schemeClr val="dk1"/>
                 </a:solidFill>
@@ -8876,14 +9047,14 @@
               <a:t>Quadratic Interpolation:</a:t>
             </a:r>
             <a:r>
-              <a:rPr lang="en" sz="1100">
+              <a:rPr lang="en" sz="1050" dirty="0">
                 <a:solidFill>
                   <a:schemeClr val="dk1"/>
                 </a:solidFill>
               </a:rPr>
               <a:t> Estimates missing values by fitting a quadratic curve through nearby known observations.</a:t>
             </a:r>
-            <a:endParaRPr sz="1100">
+            <a:endParaRPr sz="1050" dirty="0">
               <a:solidFill>
                 <a:schemeClr val="dk1"/>
               </a:solidFill>
@@ -8900,11 +9071,11 @@
 </file>
 
 <file path=ppt/slides/slide14.xml><?xml version="1.0" encoding="utf-8"?>
-<p:sld xmlns:a="http://schemas.openxmlformats.org/drawingml/2006/main" xmlns:r="http://schemas.openxmlformats.org/officeDocument/2006/relationships" xmlns:mc="http://schemas.openxmlformats.org/markup-compatibility/2006" xmlns:mv="urn:schemas-microsoft-com:mac:vml" xmlns:p="http://schemas.openxmlformats.org/presentationml/2006/main" xmlns:c="http://schemas.openxmlformats.org/drawingml/2006/chart" xmlns:dgm="http://schemas.openxmlformats.org/drawingml/2006/diagram" xmlns:o="urn:schemas-microsoft-com:office:office" xmlns:v="urn:schemas-microsoft-com:vml" xmlns:pvml="urn:schemas-microsoft-com:office:powerpoint" xmlns:com="http://schemas.openxmlformats.org/drawingml/2006/compatibility" xmlns:p14="http://schemas.microsoft.com/office/powerpoint/2010/main" xmlns:p15="http://schemas.microsoft.com/office/powerpoint/2012/main" xmlns:ahyp="http://schemas.microsoft.com/office/drawing/2018/hyperlinkcolor">
+<p:sld xmlns:a="http://schemas.openxmlformats.org/drawingml/2006/main" xmlns:r="http://schemas.openxmlformats.org/officeDocument/2006/relationships" xmlns:p="http://schemas.openxmlformats.org/presentationml/2006/main">
   <p:cSld>
     <p:spTree>
       <p:nvGrpSpPr>
-        <p:cNvPr id="134" name="Shape 134"/>
+        <p:cNvPr id="1" name="Shape 134"/>
         <p:cNvGrpSpPr/>
         <p:nvPr/>
       </p:nvGrpSpPr>
@@ -8936,12 +9107,12 @@
           </a:ln>
         </p:spPr>
         <p:txBody>
-          <a:bodyPr anchorCtr="0" anchor="t" bIns="91425" lIns="91425" spcFirstLastPara="1" rIns="91425" wrap="square" tIns="91425">
+          <a:bodyPr spcFirstLastPara="1" wrap="square" lIns="91425" tIns="91425" rIns="91425" bIns="91425" anchor="t" anchorCtr="0">
             <a:spAutoFit/>
           </a:bodyPr>
           <a:lstStyle/>
           <a:p>
-            <a:pPr indent="0" lvl="0" marL="0" rtl="0" algn="l">
+            <a:pPr marL="0" lvl="0" indent="0" algn="l" rtl="0">
               <a:lnSpc>
                 <a:spcPct val="115000"/>
               </a:lnSpc>
@@ -8954,21 +9125,21 @@
               <a:buNone/>
             </a:pPr>
             <a:r>
-              <a:rPr b="1" lang="en" sz="1600">
+              <a:rPr lang="en" sz="1600" b="1">
                 <a:solidFill>
                   <a:schemeClr val="dk1"/>
                 </a:solidFill>
               </a:rPr>
               <a:t>Impact of Handling Missing Values</a:t>
             </a:r>
-            <a:endParaRPr b="1" sz="1600">
+            <a:endParaRPr sz="1600" b="1">
               <a:solidFill>
                 <a:schemeClr val="dk1"/>
               </a:solidFill>
             </a:endParaRPr>
           </a:p>
           <a:p>
-            <a:pPr indent="0" lvl="0" marL="0" rtl="0" algn="l">
+            <a:pPr marL="0" lvl="0" indent="0" algn="l" rtl="0">
               <a:lnSpc>
                 <a:spcPct val="115000"/>
               </a:lnSpc>
@@ -8995,7 +9166,7 @@
             </a:endParaRPr>
           </a:p>
           <a:p>
-            <a:pPr indent="-317500" lvl="0" marL="457200" rtl="0" algn="l">
+            <a:pPr marL="457200" lvl="0" indent="-317500" algn="l" rtl="0">
               <a:lnSpc>
                 <a:spcPct val="115000"/>
               </a:lnSpc>
@@ -9012,7 +9183,7 @@
               <a:buChar char="●"/>
             </a:pPr>
             <a:r>
-              <a:rPr b="1" lang="en">
+              <a:rPr lang="en" b="1">
                 <a:solidFill>
                   <a:schemeClr val="dk1"/>
                 </a:solidFill>
@@ -9034,7 +9205,7 @@
             </a:endParaRPr>
           </a:p>
           <a:p>
-            <a:pPr indent="-317500" lvl="0" marL="457200" rtl="0" algn="l">
+            <a:pPr marL="457200" lvl="0" indent="-317500" algn="l" rtl="0">
               <a:lnSpc>
                 <a:spcPct val="115000"/>
               </a:lnSpc>
@@ -9051,7 +9222,7 @@
               <a:buChar char="●"/>
             </a:pPr>
             <a:r>
-              <a:rPr b="1" lang="en">
+              <a:rPr lang="en" b="1">
                 <a:solidFill>
                   <a:schemeClr val="dk1"/>
                 </a:solidFill>
@@ -9073,7 +9244,7 @@
             </a:endParaRPr>
           </a:p>
           <a:p>
-            <a:pPr indent="-317500" lvl="0" marL="457200" rtl="0" algn="l">
+            <a:pPr marL="457200" lvl="0" indent="-317500" algn="l" rtl="0">
               <a:lnSpc>
                 <a:spcPct val="115000"/>
               </a:lnSpc>
@@ -9090,7 +9261,7 @@
               <a:buChar char="●"/>
             </a:pPr>
             <a:r>
-              <a:rPr b="1" lang="en">
+              <a:rPr lang="en" b="1">
                 <a:solidFill>
                   <a:schemeClr val="dk1"/>
                 </a:solidFill>
@@ -9112,7 +9283,7 @@
             </a:endParaRPr>
           </a:p>
           <a:p>
-            <a:pPr indent="-317500" lvl="0" marL="457200" rtl="0" algn="l">
+            <a:pPr marL="457200" lvl="0" indent="-317500" algn="l" rtl="0">
               <a:lnSpc>
                 <a:spcPct val="115000"/>
               </a:lnSpc>
@@ -9129,7 +9300,7 @@
               <a:buChar char="●"/>
             </a:pPr>
             <a:r>
-              <a:rPr b="1" lang="en">
+              <a:rPr lang="en" b="1">
                 <a:solidFill>
                   <a:schemeClr val="dk1"/>
                 </a:solidFill>
@@ -9161,11 +9332,11 @@
 </file>
 
 <file path=ppt/slides/slide2.xml><?xml version="1.0" encoding="utf-8"?>
-<p:sld xmlns:a="http://schemas.openxmlformats.org/drawingml/2006/main" xmlns:r="http://schemas.openxmlformats.org/officeDocument/2006/relationships" xmlns:mc="http://schemas.openxmlformats.org/markup-compatibility/2006" xmlns:mv="urn:schemas-microsoft-com:mac:vml" xmlns:p="http://schemas.openxmlformats.org/presentationml/2006/main" xmlns:c="http://schemas.openxmlformats.org/drawingml/2006/chart" xmlns:dgm="http://schemas.openxmlformats.org/drawingml/2006/diagram" xmlns:o="urn:schemas-microsoft-com:office:office" xmlns:v="urn:schemas-microsoft-com:vml" xmlns:pvml="urn:schemas-microsoft-com:office:powerpoint" xmlns:com="http://schemas.openxmlformats.org/drawingml/2006/compatibility" xmlns:p14="http://schemas.microsoft.com/office/powerpoint/2010/main" xmlns:p15="http://schemas.microsoft.com/office/powerpoint/2012/main" xmlns:ahyp="http://schemas.microsoft.com/office/drawing/2018/hyperlinkcolor">
+<p:sld xmlns:a="http://schemas.openxmlformats.org/drawingml/2006/main" xmlns:r="http://schemas.openxmlformats.org/officeDocument/2006/relationships" xmlns:p="http://schemas.openxmlformats.org/presentationml/2006/main">
   <p:cSld>
     <p:spTree>
       <p:nvGrpSpPr>
-        <p:cNvPr id="58" name="Shape 58"/>
+        <p:cNvPr id="1" name="Shape 58"/>
         <p:cNvGrpSpPr/>
         <p:nvPr/>
       </p:nvGrpSpPr>
@@ -9197,12 +9368,12 @@
           </a:ln>
         </p:spPr>
         <p:txBody>
-          <a:bodyPr anchorCtr="0" anchor="t" bIns="91425" lIns="91425" spcFirstLastPara="1" rIns="91425" wrap="square" tIns="91425">
+          <a:bodyPr spcFirstLastPara="1" wrap="square" lIns="91425" tIns="91425" rIns="91425" bIns="91425" anchor="t" anchorCtr="0">
             <a:spAutoFit/>
           </a:bodyPr>
           <a:lstStyle/>
           <a:p>
-            <a:pPr indent="0" lvl="0" marL="0" rtl="0" algn="l">
+            <a:pPr marL="0" lvl="0" indent="0" algn="l" rtl="0">
               <a:lnSpc>
                 <a:spcPct val="115000"/>
               </a:lnSpc>
@@ -9221,7 +9392,7 @@
             <a:endParaRPr/>
           </a:p>
           <a:p>
-            <a:pPr indent="-298450" lvl="0" marL="457200" rtl="0" algn="l">
+            <a:pPr marL="457200" lvl="0" indent="-298450" algn="l" rtl="0">
               <a:lnSpc>
                 <a:spcPct val="115000"/>
               </a:lnSpc>
@@ -9244,7 +9415,7 @@
             <a:endParaRPr/>
           </a:p>
           <a:p>
-            <a:pPr indent="-298450" lvl="0" marL="457200" rtl="0" algn="l">
+            <a:pPr marL="457200" lvl="0" indent="-298450" algn="l" rtl="0">
               <a:lnSpc>
                 <a:spcPct val="115000"/>
               </a:lnSpc>
@@ -9267,7 +9438,7 @@
             <a:endParaRPr/>
           </a:p>
           <a:p>
-            <a:pPr indent="-298450" lvl="0" marL="457200" rtl="0" algn="l">
+            <a:pPr marL="457200" lvl="0" indent="-298450" algn="l" rtl="0">
               <a:lnSpc>
                 <a:spcPct val="115000"/>
               </a:lnSpc>
@@ -9290,7 +9461,7 @@
             <a:endParaRPr/>
           </a:p>
           <a:p>
-            <a:pPr indent="-298450" lvl="0" marL="457200" rtl="0" algn="l">
+            <a:pPr marL="457200" lvl="0" indent="-298450" algn="l" rtl="0">
               <a:lnSpc>
                 <a:spcPct val="115000"/>
               </a:lnSpc>
@@ -9330,21 +9501,21 @@
         </p:blipFill>
         <p:spPr>
           <a:xfrm>
-            <a:off x="1774200" y="2092986"/>
-            <a:ext cx="5595600" cy="2797800"/>
+            <a:off x="1924424" y="2145552"/>
+            <a:ext cx="5445376" cy="2745233"/>
           </a:xfrm>
           <a:prstGeom prst="rect">
             <a:avLst/>
           </a:prstGeom>
           <a:noFill/>
-          <a:ln cap="flat" cmpd="sng" w="28575">
+          <a:ln w="28575" cap="flat" cmpd="sng">
             <a:solidFill>
               <a:schemeClr val="accent5"/>
             </a:solidFill>
             <a:prstDash val="solid"/>
             <a:round/>
-            <a:headEnd len="sm" w="sm" type="none"/>
-            <a:tailEnd len="sm" w="sm" type="none"/>
+            <a:headEnd type="none" w="sm" len="sm"/>
+            <a:tailEnd type="none" w="sm" len="sm"/>
           </a:ln>
         </p:spPr>
       </p:pic>
@@ -9353,15 +9524,22 @@
   <p:clrMapOvr>
     <a:masterClrMapping/>
   </p:clrMapOvr>
+  <p:timing>
+    <p:tnLst>
+      <p:par>
+        <p:cTn id="1" dur="indefinite" restart="never" nodeType="tmRoot"/>
+      </p:par>
+    </p:tnLst>
+  </p:timing>
 </p:sld>
 </file>
 
 <file path=ppt/slides/slide3.xml><?xml version="1.0" encoding="utf-8"?>
-<p:sld xmlns:a="http://schemas.openxmlformats.org/drawingml/2006/main" xmlns:r="http://schemas.openxmlformats.org/officeDocument/2006/relationships" xmlns:mc="http://schemas.openxmlformats.org/markup-compatibility/2006" xmlns:mv="urn:schemas-microsoft-com:mac:vml" xmlns:p="http://schemas.openxmlformats.org/presentationml/2006/main" xmlns:c="http://schemas.openxmlformats.org/drawingml/2006/chart" xmlns:dgm="http://schemas.openxmlformats.org/drawingml/2006/diagram" xmlns:o="urn:schemas-microsoft-com:office:office" xmlns:v="urn:schemas-microsoft-com:vml" xmlns:pvml="urn:schemas-microsoft-com:office:powerpoint" xmlns:com="http://schemas.openxmlformats.org/drawingml/2006/compatibility" xmlns:p14="http://schemas.microsoft.com/office/powerpoint/2010/main" xmlns:p15="http://schemas.microsoft.com/office/powerpoint/2012/main" xmlns:ahyp="http://schemas.microsoft.com/office/drawing/2018/hyperlinkcolor">
+<p:sld xmlns:a="http://schemas.openxmlformats.org/drawingml/2006/main" xmlns:r="http://schemas.openxmlformats.org/officeDocument/2006/relationships" xmlns:p="http://schemas.openxmlformats.org/presentationml/2006/main">
   <p:cSld>
     <p:spTree>
       <p:nvGrpSpPr>
-        <p:cNvPr id="64" name="Shape 64"/>
+        <p:cNvPr id="1" name="Shape 64"/>
         <p:cNvGrpSpPr/>
         <p:nvPr/>
       </p:nvGrpSpPr>
@@ -9382,7 +9560,7 @@
         <p:spPr>
           <a:xfrm>
             <a:off x="0" y="0"/>
-            <a:ext cx="9219300" cy="4992000"/>
+            <a:ext cx="9219300" cy="5278851"/>
           </a:xfrm>
           <a:prstGeom prst="rect">
             <a:avLst/>
@@ -9393,12 +9571,12 @@
           </a:ln>
         </p:spPr>
         <p:txBody>
-          <a:bodyPr anchorCtr="0" anchor="t" bIns="91425" lIns="91425" spcFirstLastPara="1" rIns="91425" wrap="square" tIns="91425">
+          <a:bodyPr spcFirstLastPara="1" wrap="square" lIns="91425" tIns="91425" rIns="91425" bIns="91425" anchor="t" anchorCtr="0">
             <a:spAutoFit/>
           </a:bodyPr>
           <a:lstStyle/>
           <a:p>
-            <a:pPr indent="0" lvl="0" marL="0" rtl="0" algn="l">
+            <a:pPr marL="0" lvl="0" indent="0" algn="l" rtl="0">
               <a:lnSpc>
                 <a:spcPct val="115000"/>
               </a:lnSpc>
@@ -9411,21 +9589,21 @@
               <a:buNone/>
             </a:pPr>
             <a:r>
-              <a:rPr b="1" lang="en" sz="1300" u="sng">
+              <a:rPr lang="en" sz="1100" b="1" u="sng" dirty="0">
                 <a:solidFill>
                   <a:schemeClr val="dk1"/>
                 </a:solidFill>
               </a:rPr>
               <a:t>Missing Values</a:t>
             </a:r>
-            <a:endParaRPr b="1" sz="1300" u="sng">
+            <a:endParaRPr sz="1100" b="1" u="sng" dirty="0">
               <a:solidFill>
                 <a:schemeClr val="dk1"/>
               </a:solidFill>
             </a:endParaRPr>
           </a:p>
           <a:p>
-            <a:pPr indent="0" lvl="0" marL="0" rtl="0" algn="l">
+            <a:pPr marL="0" lvl="0" indent="0" algn="l" rtl="0">
               <a:lnSpc>
                 <a:spcPct val="115000"/>
               </a:lnSpc>
@@ -9438,21 +9616,21 @@
               <a:buNone/>
             </a:pPr>
             <a:r>
-              <a:rPr b="1" lang="en" sz="1100">
+              <a:rPr lang="en" sz="1100" b="1" dirty="0">
                 <a:solidFill>
                   <a:schemeClr val="dk1"/>
                 </a:solidFill>
               </a:rPr>
               <a:t>Causes of Missing Data in a Dataset</a:t>
             </a:r>
-            <a:endParaRPr b="1" sz="1100">
+            <a:endParaRPr sz="1100" b="1" dirty="0">
               <a:solidFill>
                 <a:schemeClr val="dk1"/>
               </a:solidFill>
             </a:endParaRPr>
           </a:p>
           <a:p>
-            <a:pPr indent="0" lvl="0" marL="0" rtl="0" algn="l">
+            <a:pPr marL="0" lvl="0" indent="0" algn="l" rtl="0">
               <a:lnSpc>
                 <a:spcPct val="115000"/>
               </a:lnSpc>
@@ -9465,21 +9643,21 @@
               <a:buNone/>
             </a:pPr>
             <a:r>
-              <a:rPr lang="en" sz="1100">
+              <a:rPr lang="en" sz="1100" dirty="0">
                 <a:solidFill>
                   <a:schemeClr val="dk1"/>
                 </a:solidFill>
               </a:rPr>
               <a:t>Missing data can arise for a variety of reasons, and recognizing the underlying cause is essential for choosing the most suitable treatment approach. Some common causes include:</a:t>
             </a:r>
-            <a:endParaRPr sz="1100">
+            <a:endParaRPr sz="1100" dirty="0">
               <a:solidFill>
                 <a:schemeClr val="dk1"/>
               </a:solidFill>
             </a:endParaRPr>
           </a:p>
           <a:p>
-            <a:pPr indent="-298450" lvl="0" marL="457200" rtl="0" algn="l">
+            <a:pPr marL="457200" lvl="0" indent="-298450" algn="l" rtl="0">
               <a:lnSpc>
                 <a:spcPct val="115000"/>
               </a:lnSpc>
@@ -9496,7 +9674,7 @@
               <a:buChar char="●"/>
             </a:pPr>
             <a:r>
-              <a:rPr b="1" lang="en" sz="1100">
+              <a:rPr lang="en" sz="1100" b="1" dirty="0">
                 <a:solidFill>
                   <a:schemeClr val="dk1"/>
                 </a:solidFill>
@@ -9504,21 +9682,21 @@
               <a:t>System failures:</a:t>
             </a:r>
             <a:r>
-              <a:rPr lang="en" sz="1100">
+              <a:rPr lang="en" sz="1100" dirty="0">
                 <a:solidFill>
                   <a:schemeClr val="dk1"/>
                 </a:solidFill>
               </a:rPr>
               <a:t> Problems during data collection, storage, or transmission may result in missing records.</a:t>
             </a:r>
-            <a:endParaRPr sz="1100">
+            <a:endParaRPr sz="1100" dirty="0">
               <a:solidFill>
                 <a:schemeClr val="dk1"/>
               </a:solidFill>
             </a:endParaRPr>
           </a:p>
           <a:p>
-            <a:pPr indent="-298450" lvl="0" marL="457200" rtl="0" algn="l">
+            <a:pPr marL="457200" lvl="0" indent="-298450" algn="l" rtl="0">
               <a:lnSpc>
                 <a:spcPct val="115000"/>
               </a:lnSpc>
@@ -9535,7 +9713,7 @@
               <a:buChar char="●"/>
             </a:pPr>
             <a:r>
-              <a:rPr b="1" lang="en" sz="1100">
+              <a:rPr lang="en" sz="1100" b="1" dirty="0">
                 <a:solidFill>
                   <a:schemeClr val="dk1"/>
                 </a:solidFill>
@@ -9543,21 +9721,21 @@
               <a:t>Manual mistakes:</a:t>
             </a:r>
             <a:r>
-              <a:rPr lang="en" sz="1100">
+              <a:rPr lang="en" sz="1100" dirty="0">
                 <a:solidFill>
                   <a:schemeClr val="dk1"/>
                 </a:solidFill>
               </a:rPr>
               <a:t> Data entry errors or omissions made by users or operators.</a:t>
             </a:r>
-            <a:endParaRPr sz="1100">
+            <a:endParaRPr sz="1100" dirty="0">
               <a:solidFill>
                 <a:schemeClr val="dk1"/>
               </a:solidFill>
             </a:endParaRPr>
           </a:p>
           <a:p>
-            <a:pPr indent="-298450" lvl="0" marL="457200" rtl="0" algn="l">
+            <a:pPr marL="457200" lvl="0" indent="-298450" algn="l" rtl="0">
               <a:lnSpc>
                 <a:spcPct val="115000"/>
               </a:lnSpc>
@@ -9574,7 +9752,7 @@
               <a:buChar char="●"/>
             </a:pPr>
             <a:r>
-              <a:rPr b="1" lang="en" sz="1100">
+              <a:rPr lang="en" sz="1100" b="1" dirty="0">
                 <a:solidFill>
                   <a:schemeClr val="dk1"/>
                 </a:solidFill>
@@ -9582,21 +9760,21 @@
               <a:t>Confidentiality restrictions:</a:t>
             </a:r>
             <a:r>
-              <a:rPr lang="en" sz="1100">
+              <a:rPr lang="en" sz="1100" dirty="0">
                 <a:solidFill>
                   <a:schemeClr val="dk1"/>
                 </a:solidFill>
               </a:rPr>
               <a:t> Certain sensitive details may be intentionally withheld to protect privacy.</a:t>
             </a:r>
-            <a:endParaRPr sz="1100">
+            <a:endParaRPr sz="1100" dirty="0">
               <a:solidFill>
                 <a:schemeClr val="dk1"/>
               </a:solidFill>
             </a:endParaRPr>
           </a:p>
           <a:p>
-            <a:pPr indent="-298450" lvl="0" marL="457200" rtl="0" algn="l">
+            <a:pPr marL="457200" lvl="0" indent="-298450" algn="l" rtl="0">
               <a:lnSpc>
                 <a:spcPct val="115000"/>
               </a:lnSpc>
@@ -9613,7 +9791,7 @@
               <a:buChar char="●"/>
             </a:pPr>
             <a:r>
-              <a:rPr b="1" lang="en" sz="1100">
+              <a:rPr lang="en" sz="1100" b="1" dirty="0">
                 <a:solidFill>
                   <a:schemeClr val="dk1"/>
                 </a:solidFill>
@@ -9621,21 +9799,21 @@
               <a:t>Processing and integration errors:</a:t>
             </a:r>
             <a:r>
-              <a:rPr lang="en" sz="1100">
+              <a:rPr lang="en" sz="1100" dirty="0">
                 <a:solidFill>
                   <a:schemeClr val="dk1"/>
                 </a:solidFill>
               </a:rPr>
               <a:t> Missing values introduced while cleaning, transforming, or merging datasets.</a:t>
             </a:r>
-            <a:endParaRPr sz="1100">
+            <a:endParaRPr sz="1100" dirty="0">
               <a:solidFill>
                 <a:schemeClr val="dk1"/>
               </a:solidFill>
             </a:endParaRPr>
           </a:p>
           <a:p>
-            <a:pPr indent="0" lvl="0" marL="0" rtl="0" algn="l">
+            <a:pPr marL="0" lvl="0" indent="0" algn="l" rtl="0">
               <a:lnSpc>
                 <a:spcPct val="115000"/>
               </a:lnSpc>
@@ -9648,21 +9826,21 @@
               <a:buNone/>
             </a:pPr>
             <a:r>
-              <a:rPr lang="en" sz="1100">
+              <a:rPr lang="en" sz="1100" dirty="0">
                 <a:solidFill>
                   <a:schemeClr val="dk1"/>
                 </a:solidFill>
               </a:rPr>
               <a:t>Understanding why values are absent helps determine their effect on data quality, identify possible biases, and decide whether techniques such as imputation or record deletion are appropriate.</a:t>
             </a:r>
-            <a:endParaRPr sz="1100">
+            <a:endParaRPr sz="1100" dirty="0">
               <a:solidFill>
                 <a:schemeClr val="dk1"/>
               </a:solidFill>
             </a:endParaRPr>
           </a:p>
           <a:p>
-            <a:pPr indent="0" lvl="0" marL="0" rtl="0" algn="l">
+            <a:pPr marL="0" lvl="0" indent="0" algn="l" rtl="0">
               <a:lnSpc>
                 <a:spcPct val="115000"/>
               </a:lnSpc>
@@ -9675,21 +9853,21 @@
               <a:buNone/>
             </a:pPr>
             <a:r>
-              <a:rPr b="1" lang="en" sz="1300" u="sng">
+              <a:rPr lang="en" sz="1100" b="1" u="sng" dirty="0">
                 <a:solidFill>
                   <a:schemeClr val="dk1"/>
                 </a:solidFill>
               </a:rPr>
               <a:t>Categories of Missing Values</a:t>
             </a:r>
-            <a:endParaRPr b="1" sz="1300" u="sng">
+            <a:endParaRPr sz="1100" b="1" u="sng" dirty="0">
               <a:solidFill>
                 <a:schemeClr val="dk1"/>
               </a:solidFill>
             </a:endParaRPr>
           </a:p>
           <a:p>
-            <a:pPr indent="0" lvl="0" marL="0" rtl="0" algn="l">
+            <a:pPr marL="0" lvl="0" indent="0" algn="l" rtl="0">
               <a:lnSpc>
                 <a:spcPct val="115000"/>
               </a:lnSpc>
@@ -9702,7 +9880,7 @@
               <a:buNone/>
             </a:pPr>
             <a:r>
-              <a:rPr b="1" lang="en" sz="1100">
+              <a:rPr lang="en" sz="1100" b="1" dirty="0">
                 <a:solidFill>
                   <a:schemeClr val="dk1"/>
                 </a:solidFill>
@@ -9710,28 +9888,28 @@
               <a:t>MCAR (Missing Completely at Random)</a:t>
             </a:r>
             <a:br>
-              <a:rPr b="1" lang="en" sz="1100">
+              <a:rPr lang="en" sz="1100" b="1" dirty="0">
                 <a:solidFill>
                   <a:schemeClr val="dk1"/>
                 </a:solidFill>
               </a:rPr>
             </a:br>
             <a:r>
-              <a:rPr lang="en" sz="1100">
+              <a:rPr lang="en" sz="1100" dirty="0">
                 <a:solidFill>
                   <a:schemeClr val="dk1"/>
                 </a:solidFill>
               </a:rPr>
               <a:t> The occurrence of missing values is entirely random and has no relationship with any observed or unobserved variable in the dataset.</a:t>
             </a:r>
-            <a:endParaRPr sz="1100">
+            <a:endParaRPr sz="1100" dirty="0">
               <a:solidFill>
                 <a:schemeClr val="dk1"/>
               </a:solidFill>
             </a:endParaRPr>
           </a:p>
           <a:p>
-            <a:pPr indent="0" lvl="0" marL="0" rtl="0" algn="l">
+            <a:pPr marL="0" lvl="0" indent="0" algn="l" rtl="0">
               <a:lnSpc>
                 <a:spcPct val="115000"/>
               </a:lnSpc>
@@ -9744,7 +9922,7 @@
               <a:buNone/>
             </a:pPr>
             <a:r>
-              <a:rPr b="1" lang="en" sz="1100">
+              <a:rPr lang="en" sz="1100" b="1" dirty="0">
                 <a:solidFill>
                   <a:schemeClr val="dk1"/>
                 </a:solidFill>
@@ -9752,28 +9930,28 @@
               <a:t>MAR (Missing at Random)</a:t>
             </a:r>
             <a:br>
-              <a:rPr b="1" lang="en" sz="1100">
+              <a:rPr lang="en" sz="1100" b="1" dirty="0">
                 <a:solidFill>
                   <a:schemeClr val="dk1"/>
                 </a:solidFill>
               </a:rPr>
             </a:br>
             <a:r>
-              <a:rPr lang="en" sz="1100">
+              <a:rPr lang="en" sz="1100" dirty="0">
                 <a:solidFill>
                   <a:schemeClr val="dk1"/>
                 </a:solidFill>
               </a:rPr>
               <a:t> The missingness is associated with other available variables in the dataset but not with the missing value itself.</a:t>
             </a:r>
-            <a:endParaRPr sz="1100">
+            <a:endParaRPr sz="1100" dirty="0">
               <a:solidFill>
                 <a:schemeClr val="dk1"/>
               </a:solidFill>
             </a:endParaRPr>
           </a:p>
           <a:p>
-            <a:pPr indent="0" lvl="0" marL="0" rtl="0" algn="l">
+            <a:pPr marL="0" lvl="0" indent="0" algn="l" rtl="0">
               <a:lnSpc>
                 <a:spcPct val="115000"/>
               </a:lnSpc>
@@ -9786,7 +9964,7 @@
               <a:buNone/>
             </a:pPr>
             <a:r>
-              <a:rPr b="1" lang="en" sz="1100">
+              <a:rPr lang="en" sz="1100" b="1" dirty="0">
                 <a:solidFill>
                   <a:schemeClr val="dk1"/>
                 </a:solidFill>
@@ -9794,21 +9972,21 @@
               <a:t>MNAR (Missing Not at Random)</a:t>
             </a:r>
             <a:br>
-              <a:rPr b="1" lang="en" sz="1100">
+              <a:rPr lang="en" sz="1100" b="1" dirty="0">
                 <a:solidFill>
                   <a:schemeClr val="dk1"/>
                 </a:solidFill>
               </a:rPr>
             </a:br>
             <a:r>
-              <a:rPr lang="en" sz="1100">
+              <a:rPr lang="en" sz="1100" dirty="0">
                 <a:solidFill>
                   <a:schemeClr val="dk1"/>
                 </a:solidFill>
               </a:rPr>
               <a:t> The probability of a value being missing is directly linked to the missing value. For example, individuals with very high salaries may choose not to disclose their income.</a:t>
             </a:r>
-            <a:endParaRPr sz="1100">
+            <a:endParaRPr sz="1100" dirty="0">
               <a:solidFill>
                 <a:schemeClr val="dk1"/>
               </a:solidFill>
@@ -9821,15 +9999,22 @@
   <p:clrMapOvr>
     <a:masterClrMapping/>
   </p:clrMapOvr>
+  <p:timing>
+    <p:tnLst>
+      <p:par>
+        <p:cTn id="1" dur="indefinite" restart="never" nodeType="tmRoot"/>
+      </p:par>
+    </p:tnLst>
+  </p:timing>
 </p:sld>
 </file>
 
 <file path=ppt/slides/slide4.xml><?xml version="1.0" encoding="utf-8"?>
-<p:sld xmlns:a="http://schemas.openxmlformats.org/drawingml/2006/main" xmlns:r="http://schemas.openxmlformats.org/officeDocument/2006/relationships" xmlns:mc="http://schemas.openxmlformats.org/markup-compatibility/2006" xmlns:mv="urn:schemas-microsoft-com:mac:vml" xmlns:p="http://schemas.openxmlformats.org/presentationml/2006/main" xmlns:c="http://schemas.openxmlformats.org/drawingml/2006/chart" xmlns:dgm="http://schemas.openxmlformats.org/drawingml/2006/diagram" xmlns:o="urn:schemas-microsoft-com:office:office" xmlns:v="urn:schemas-microsoft-com:vml" xmlns:pvml="urn:schemas-microsoft-com:office:powerpoint" xmlns:com="http://schemas.openxmlformats.org/drawingml/2006/compatibility" xmlns:p14="http://schemas.microsoft.com/office/powerpoint/2010/main" xmlns:p15="http://schemas.microsoft.com/office/powerpoint/2012/main" xmlns:ahyp="http://schemas.microsoft.com/office/drawing/2018/hyperlinkcolor">
+<p:sld xmlns:a="http://schemas.openxmlformats.org/drawingml/2006/main" xmlns:r="http://schemas.openxmlformats.org/officeDocument/2006/relationships" xmlns:p="http://schemas.openxmlformats.org/presentationml/2006/main">
   <p:cSld>
     <p:spTree>
       <p:nvGrpSpPr>
-        <p:cNvPr id="69" name="Shape 69"/>
+        <p:cNvPr id="1" name="Shape 69"/>
         <p:cNvGrpSpPr/>
         <p:nvPr/>
       </p:nvGrpSpPr>
@@ -9861,12 +10046,12 @@
           </a:ln>
         </p:spPr>
         <p:txBody>
-          <a:bodyPr anchorCtr="0" anchor="t" bIns="91425" lIns="91425" spcFirstLastPara="1" rIns="91425" wrap="square" tIns="91425">
+          <a:bodyPr spcFirstLastPara="1" wrap="square" lIns="91425" tIns="91425" rIns="91425" bIns="91425" anchor="t" anchorCtr="0">
             <a:spAutoFit/>
           </a:bodyPr>
           <a:lstStyle/>
           <a:p>
-            <a:pPr indent="0" lvl="0" marL="0" rtl="0" algn="l">
+            <a:pPr marL="0" lvl="0" indent="0" algn="l" rtl="0">
               <a:lnSpc>
                 <a:spcPct val="115000"/>
               </a:lnSpc>
@@ -9879,21 +10064,21 @@
               <a:buNone/>
             </a:pPr>
             <a:r>
-              <a:rPr b="1" lang="en" sz="1800">
+              <a:rPr lang="en" sz="1800" b="1">
                 <a:solidFill>
                   <a:schemeClr val="dk1"/>
                 </a:solidFill>
               </a:rPr>
               <a:t>Methods for Identifying Missing Data</a:t>
             </a:r>
-            <a:endParaRPr b="1" sz="1800">
+            <a:endParaRPr sz="1800" b="1">
               <a:solidFill>
                 <a:schemeClr val="dk1"/>
               </a:solidFill>
             </a:endParaRPr>
           </a:p>
           <a:p>
-            <a:pPr indent="0" lvl="0" marL="0" rtl="0" algn="l">
+            <a:pPr marL="0" lvl="0" indent="0" algn="l" rtl="0">
               <a:lnSpc>
                 <a:spcPct val="115000"/>
               </a:lnSpc>
@@ -9920,6 +10105,14 @@
                 </a:solidFill>
               </a:rPr>
             </a:br>
+            <a:r>
+              <a:rPr lang="en" sz="1600">
+                <a:solidFill>
+                  <a:schemeClr val="dk1"/>
+                </a:solidFill>
+              </a:rPr>
+              <a:t/>
+            </a:r>
             <a:br>
               <a:rPr lang="en" sz="1600">
                 <a:solidFill>
@@ -9948,15 +10141,22 @@
   <p:clrMapOvr>
     <a:masterClrMapping/>
   </p:clrMapOvr>
+  <p:timing>
+    <p:tnLst>
+      <p:par>
+        <p:cTn id="1" dur="indefinite" restart="never" nodeType="tmRoot"/>
+      </p:par>
+    </p:tnLst>
+  </p:timing>
 </p:sld>
 </file>
 
 <file path=ppt/slides/slide5.xml><?xml version="1.0" encoding="utf-8"?>
-<p:sld xmlns:a="http://schemas.openxmlformats.org/drawingml/2006/main" xmlns:r="http://schemas.openxmlformats.org/officeDocument/2006/relationships" xmlns:mc="http://schemas.openxmlformats.org/markup-compatibility/2006" xmlns:mv="urn:schemas-microsoft-com:mac:vml" xmlns:p="http://schemas.openxmlformats.org/presentationml/2006/main" xmlns:c="http://schemas.openxmlformats.org/drawingml/2006/chart" xmlns:dgm="http://schemas.openxmlformats.org/drawingml/2006/diagram" xmlns:o="urn:schemas-microsoft-com:office:office" xmlns:v="urn:schemas-microsoft-com:vml" xmlns:pvml="urn:schemas-microsoft-com:office:powerpoint" xmlns:com="http://schemas.openxmlformats.org/drawingml/2006/compatibility" xmlns:p14="http://schemas.microsoft.com/office/powerpoint/2010/main" xmlns:p15="http://schemas.microsoft.com/office/powerpoint/2012/main" xmlns:ahyp="http://schemas.microsoft.com/office/drawing/2018/hyperlinkcolor">
+<p:sld xmlns:a="http://schemas.openxmlformats.org/drawingml/2006/main" xmlns:r="http://schemas.openxmlformats.org/officeDocument/2006/relationships" xmlns:p="http://schemas.openxmlformats.org/presentationml/2006/main">
   <p:cSld>
     <p:spTree>
       <p:nvGrpSpPr>
-        <p:cNvPr id="74" name="Shape 74"/>
+        <p:cNvPr id="1" name="Shape 74"/>
         <p:cNvGrpSpPr/>
         <p:nvPr/>
       </p:nvGrpSpPr>
@@ -9976,7 +10176,7 @@
         </p:nvGraphicFramePr>
         <p:xfrm>
           <a:off x="1078825" y="133350"/>
-          <a:ext cx="3000000" cy="3000000"/>
+          <a:ext cx="7111150" cy="4617200"/>
         </p:xfrm>
         <a:graphic>
           <a:graphicData uri="http://schemas.openxmlformats.org/drawingml/2006/table">
@@ -9997,7 +10197,7 @@
                     <a:bodyPr/>
                     <a:lstStyle/>
                     <a:p>
-                      <a:pPr indent="0" lvl="0" marL="0" rtl="0" algn="ctr">
+                      <a:pPr marL="0" lvl="0" indent="0" algn="ctr" rtl="0">
                         <a:lnSpc>
                           <a:spcPct val="120000"/>
                         </a:lnSpc>
@@ -10038,42 +10238,42 @@
                       </a:endParaRPr>
                     </a:p>
                   </a:txBody>
-                  <a:tcPr marT="133350" marB="133350" marR="95250" marL="95250" anchor="ctr">
-                    <a:lnL cap="flat" cmpd="sng" w="6350">
+                  <a:tcPr marL="95250" marR="95250" marT="133350" marB="133350" anchor="ctr">
+                    <a:lnL w="6350" cap="flat" cmpd="sng">
                       <a:solidFill>
                         <a:schemeClr val="dk1"/>
                       </a:solidFill>
                       <a:prstDash val="solid"/>
                       <a:round/>
-                      <a:headEnd len="sm" w="sm" type="none"/>
-                      <a:tailEnd len="sm" w="sm" type="none"/>
+                      <a:headEnd type="none" w="sm" len="sm"/>
+                      <a:tailEnd type="none" w="sm" len="sm"/>
                     </a:lnL>
-                    <a:lnR cap="flat" cmpd="sng" w="6350">
+                    <a:lnR w="6350" cap="flat" cmpd="sng">
                       <a:solidFill>
                         <a:schemeClr val="dk1"/>
                       </a:solidFill>
                       <a:prstDash val="solid"/>
                       <a:round/>
-                      <a:headEnd len="sm" w="sm" type="none"/>
-                      <a:tailEnd len="sm" w="sm" type="none"/>
+                      <a:headEnd type="none" w="sm" len="sm"/>
+                      <a:tailEnd type="none" w="sm" len="sm"/>
                     </a:lnR>
-                    <a:lnT cap="flat" cmpd="sng" w="6350">
+                    <a:lnT w="6350" cap="flat" cmpd="sng">
                       <a:solidFill>
                         <a:schemeClr val="dk1"/>
                       </a:solidFill>
                       <a:prstDash val="solid"/>
                       <a:round/>
-                      <a:headEnd len="sm" w="sm" type="none"/>
-                      <a:tailEnd len="sm" w="sm" type="none"/>
+                      <a:headEnd type="none" w="sm" len="sm"/>
+                      <a:tailEnd type="none" w="sm" len="sm"/>
                     </a:lnT>
-                    <a:lnB cap="flat" cmpd="sng" w="6350">
+                    <a:lnB w="6350" cap="flat" cmpd="sng">
                       <a:solidFill>
                         <a:schemeClr val="dk1"/>
                       </a:solidFill>
                       <a:prstDash val="solid"/>
                       <a:round/>
-                      <a:headEnd len="sm" w="sm" type="none"/>
-                      <a:tailEnd len="sm" w="sm" type="none"/>
+                      <a:headEnd type="none" w="sm" len="sm"/>
+                      <a:tailEnd type="none" w="sm" len="sm"/>
                     </a:lnB>
                   </a:tcPr>
                 </a:tc>
@@ -10082,7 +10282,7 @@
                     <a:bodyPr/>
                     <a:lstStyle/>
                     <a:p>
-                      <a:pPr indent="0" lvl="0" marL="0" rtl="0" algn="ctr">
+                      <a:pPr marL="0" lvl="0" indent="0" algn="ctr" rtl="0">
                         <a:lnSpc>
                           <a:spcPct val="120000"/>
                         </a:lnSpc>
@@ -10123,42 +10323,42 @@
                       </a:endParaRPr>
                     </a:p>
                   </a:txBody>
-                  <a:tcPr marT="133350" marB="133350" marR="95250" marL="95250" anchor="ctr">
-                    <a:lnL cap="flat" cmpd="sng" w="6350">
+                  <a:tcPr marL="95250" marR="95250" marT="133350" marB="133350" anchor="ctr">
+                    <a:lnL w="6350" cap="flat" cmpd="sng">
                       <a:solidFill>
                         <a:schemeClr val="dk1"/>
                       </a:solidFill>
                       <a:prstDash val="solid"/>
                       <a:round/>
-                      <a:headEnd len="sm" w="sm" type="none"/>
-                      <a:tailEnd len="sm" w="sm" type="none"/>
+                      <a:headEnd type="none" w="sm" len="sm"/>
+                      <a:tailEnd type="none" w="sm" len="sm"/>
                     </a:lnL>
-                    <a:lnR cap="flat" cmpd="sng" w="6350">
+                    <a:lnR w="6350" cap="flat" cmpd="sng">
                       <a:solidFill>
                         <a:schemeClr val="dk1"/>
                       </a:solidFill>
                       <a:prstDash val="solid"/>
                       <a:round/>
-                      <a:headEnd len="sm" w="sm" type="none"/>
-                      <a:tailEnd len="sm" w="sm" type="none"/>
+                      <a:headEnd type="none" w="sm" len="sm"/>
+                      <a:tailEnd type="none" w="sm" len="sm"/>
                     </a:lnR>
-                    <a:lnT cap="flat" cmpd="sng" w="6350">
+                    <a:lnT w="6350" cap="flat" cmpd="sng">
                       <a:solidFill>
                         <a:schemeClr val="dk1"/>
                       </a:solidFill>
                       <a:prstDash val="solid"/>
                       <a:round/>
-                      <a:headEnd len="sm" w="sm" type="none"/>
-                      <a:tailEnd len="sm" w="sm" type="none"/>
+                      <a:headEnd type="none" w="sm" len="sm"/>
+                      <a:tailEnd type="none" w="sm" len="sm"/>
                     </a:lnT>
-                    <a:lnB cap="flat" cmpd="sng" w="6350">
+                    <a:lnB w="6350" cap="flat" cmpd="sng">
                       <a:solidFill>
                         <a:schemeClr val="dk1"/>
                       </a:solidFill>
                       <a:prstDash val="solid"/>
                       <a:round/>
-                      <a:headEnd len="sm" w="sm" type="none"/>
-                      <a:tailEnd len="sm" w="sm" type="none"/>
+                      <a:headEnd type="none" w="sm" len="sm"/>
+                      <a:tailEnd type="none" w="sm" len="sm"/>
                     </a:lnB>
                   </a:tcPr>
                 </a:tc>
@@ -10169,7 +10369,7 @@
                     <a:bodyPr/>
                     <a:lstStyle/>
                     <a:p>
-                      <a:pPr indent="0" lvl="0" marL="0" rtl="0" algn="ctr">
+                      <a:pPr marL="0" lvl="0" indent="0" algn="ctr" rtl="0">
                         <a:lnSpc>
                           <a:spcPct val="120000"/>
                         </a:lnSpc>
@@ -10210,42 +10410,42 @@
                       </a:endParaRPr>
                     </a:p>
                   </a:txBody>
-                  <a:tcPr marT="133350" marB="133350" marR="95250" marL="95250" anchor="ctr">
-                    <a:lnL cap="flat" cmpd="sng" w="6350">
+                  <a:tcPr marL="95250" marR="95250" marT="133350" marB="133350" anchor="ctr">
+                    <a:lnL w="6350" cap="flat" cmpd="sng">
                       <a:solidFill>
                         <a:schemeClr val="dk1"/>
                       </a:solidFill>
                       <a:prstDash val="solid"/>
                       <a:round/>
-                      <a:headEnd len="sm" w="sm" type="none"/>
-                      <a:tailEnd len="sm" w="sm" type="none"/>
+                      <a:headEnd type="none" w="sm" len="sm"/>
+                      <a:tailEnd type="none" w="sm" len="sm"/>
                     </a:lnL>
-                    <a:lnR cap="flat" cmpd="sng" w="6350">
+                    <a:lnR w="6350" cap="flat" cmpd="sng">
                       <a:solidFill>
                         <a:schemeClr val="dk1"/>
                       </a:solidFill>
                       <a:prstDash val="solid"/>
                       <a:round/>
-                      <a:headEnd len="sm" w="sm" type="none"/>
-                      <a:tailEnd len="sm" w="sm" type="none"/>
+                      <a:headEnd type="none" w="sm" len="sm"/>
+                      <a:tailEnd type="none" w="sm" len="sm"/>
                     </a:lnR>
-                    <a:lnT cap="flat" cmpd="sng" w="6350">
+                    <a:lnT w="6350" cap="flat" cmpd="sng">
                       <a:solidFill>
                         <a:schemeClr val="dk1"/>
                       </a:solidFill>
                       <a:prstDash val="solid"/>
                       <a:round/>
-                      <a:headEnd len="sm" w="sm" type="none"/>
-                      <a:tailEnd len="sm" w="sm" type="none"/>
+                      <a:headEnd type="none" w="sm" len="sm"/>
+                      <a:tailEnd type="none" w="sm" len="sm"/>
                     </a:lnT>
-                    <a:lnB cap="flat" cmpd="sng" w="6350">
+                    <a:lnB w="6350" cap="flat" cmpd="sng">
                       <a:solidFill>
                         <a:schemeClr val="dk1"/>
                       </a:solidFill>
                       <a:prstDash val="solid"/>
                       <a:round/>
-                      <a:headEnd len="sm" w="sm" type="none"/>
-                      <a:tailEnd len="sm" w="sm" type="none"/>
+                      <a:headEnd type="none" w="sm" len="sm"/>
+                      <a:tailEnd type="none" w="sm" len="sm"/>
                     </a:lnB>
                   </a:tcPr>
                 </a:tc>
@@ -10254,7 +10454,7 @@
                     <a:bodyPr/>
                     <a:lstStyle/>
                     <a:p>
-                      <a:pPr indent="0" lvl="0" marL="0" rtl="0" algn="ctr">
+                      <a:pPr marL="0" lvl="0" indent="0" algn="ctr" rtl="0">
                         <a:lnSpc>
                           <a:spcPct val="120000"/>
                         </a:lnSpc>
@@ -10295,42 +10495,42 @@
                       </a:endParaRPr>
                     </a:p>
                   </a:txBody>
-                  <a:tcPr marT="133350" marB="133350" marR="95250" marL="95250" anchor="ctr">
-                    <a:lnL cap="flat" cmpd="sng" w="6350">
+                  <a:tcPr marL="95250" marR="95250" marT="133350" marB="133350" anchor="ctr">
+                    <a:lnL w="6350" cap="flat" cmpd="sng">
                       <a:solidFill>
                         <a:schemeClr val="dk1"/>
                       </a:solidFill>
                       <a:prstDash val="solid"/>
                       <a:round/>
-                      <a:headEnd len="sm" w="sm" type="none"/>
-                      <a:tailEnd len="sm" w="sm" type="none"/>
+                      <a:headEnd type="none" w="sm" len="sm"/>
+                      <a:tailEnd type="none" w="sm" len="sm"/>
                     </a:lnL>
-                    <a:lnR cap="flat" cmpd="sng" w="6350">
+                    <a:lnR w="6350" cap="flat" cmpd="sng">
                       <a:solidFill>
                         <a:schemeClr val="dk1"/>
                       </a:solidFill>
                       <a:prstDash val="solid"/>
                       <a:round/>
-                      <a:headEnd len="sm" w="sm" type="none"/>
-                      <a:tailEnd len="sm" w="sm" type="none"/>
+                      <a:headEnd type="none" w="sm" len="sm"/>
+                      <a:tailEnd type="none" w="sm" len="sm"/>
                     </a:lnR>
-                    <a:lnT cap="flat" cmpd="sng" w="6350">
+                    <a:lnT w="6350" cap="flat" cmpd="sng">
                       <a:solidFill>
                         <a:schemeClr val="dk1"/>
                       </a:solidFill>
                       <a:prstDash val="solid"/>
                       <a:round/>
-                      <a:headEnd len="sm" w="sm" type="none"/>
-                      <a:tailEnd len="sm" w="sm" type="none"/>
+                      <a:headEnd type="none" w="sm" len="sm"/>
+                      <a:tailEnd type="none" w="sm" len="sm"/>
                     </a:lnT>
-                    <a:lnB cap="flat" cmpd="sng" w="6350">
+                    <a:lnB w="6350" cap="flat" cmpd="sng">
                       <a:solidFill>
                         <a:schemeClr val="dk1"/>
                       </a:solidFill>
                       <a:prstDash val="solid"/>
                       <a:round/>
-                      <a:headEnd len="sm" w="sm" type="none"/>
-                      <a:tailEnd len="sm" w="sm" type="none"/>
+                      <a:headEnd type="none" w="sm" len="sm"/>
+                      <a:tailEnd type="none" w="sm" len="sm"/>
                     </a:lnB>
                   </a:tcPr>
                 </a:tc>
@@ -10341,7 +10541,7 @@
                     <a:bodyPr/>
                     <a:lstStyle/>
                     <a:p>
-                      <a:pPr indent="0" lvl="0" marL="0" rtl="0" algn="ctr">
+                      <a:pPr marL="0" lvl="0" indent="0" algn="ctr" rtl="0">
                         <a:lnSpc>
                           <a:spcPct val="120000"/>
                         </a:lnSpc>
@@ -10382,42 +10582,42 @@
                       </a:endParaRPr>
                     </a:p>
                   </a:txBody>
-                  <a:tcPr marT="133350" marB="133350" marR="95250" marL="95250" anchor="ctr">
-                    <a:lnL cap="flat" cmpd="sng" w="6350">
+                  <a:tcPr marL="95250" marR="95250" marT="133350" marB="133350" anchor="ctr">
+                    <a:lnL w="6350" cap="flat" cmpd="sng">
                       <a:solidFill>
                         <a:schemeClr val="dk1"/>
                       </a:solidFill>
                       <a:prstDash val="solid"/>
                       <a:round/>
-                      <a:headEnd len="sm" w="sm" type="none"/>
-                      <a:tailEnd len="sm" w="sm" type="none"/>
+                      <a:headEnd type="none" w="sm" len="sm"/>
+                      <a:tailEnd type="none" w="sm" len="sm"/>
                     </a:lnL>
-                    <a:lnR cap="flat" cmpd="sng" w="6350">
+                    <a:lnR w="6350" cap="flat" cmpd="sng">
                       <a:solidFill>
                         <a:schemeClr val="dk1"/>
                       </a:solidFill>
                       <a:prstDash val="solid"/>
                       <a:round/>
-                      <a:headEnd len="sm" w="sm" type="none"/>
-                      <a:tailEnd len="sm" w="sm" type="none"/>
+                      <a:headEnd type="none" w="sm" len="sm"/>
+                      <a:tailEnd type="none" w="sm" len="sm"/>
                     </a:lnR>
-                    <a:lnT cap="flat" cmpd="sng" w="6350">
+                    <a:lnT w="6350" cap="flat" cmpd="sng">
                       <a:solidFill>
                         <a:schemeClr val="dk1"/>
                       </a:solidFill>
                       <a:prstDash val="solid"/>
                       <a:round/>
-                      <a:headEnd len="sm" w="sm" type="none"/>
-                      <a:tailEnd len="sm" w="sm" type="none"/>
+                      <a:headEnd type="none" w="sm" len="sm"/>
+                      <a:tailEnd type="none" w="sm" len="sm"/>
                     </a:lnT>
-                    <a:lnB cap="flat" cmpd="sng" w="6350">
+                    <a:lnB w="6350" cap="flat" cmpd="sng">
                       <a:solidFill>
                         <a:schemeClr val="dk1"/>
                       </a:solidFill>
                       <a:prstDash val="solid"/>
                       <a:round/>
-                      <a:headEnd len="sm" w="sm" type="none"/>
-                      <a:tailEnd len="sm" w="sm" type="none"/>
+                      <a:headEnd type="none" w="sm" len="sm"/>
+                      <a:tailEnd type="none" w="sm" len="sm"/>
                     </a:lnB>
                   </a:tcPr>
                 </a:tc>
@@ -10426,7 +10626,7 @@
                     <a:bodyPr/>
                     <a:lstStyle/>
                     <a:p>
-                      <a:pPr indent="0" lvl="0" marL="0" rtl="0" algn="ctr">
+                      <a:pPr marL="0" lvl="0" indent="0" algn="ctr" rtl="0">
                         <a:lnSpc>
                           <a:spcPct val="120000"/>
                         </a:lnSpc>
@@ -10467,42 +10667,42 @@
                       </a:endParaRPr>
                     </a:p>
                   </a:txBody>
-                  <a:tcPr marT="133350" marB="133350" marR="95250" marL="95250" anchor="ctr">
-                    <a:lnL cap="flat" cmpd="sng" w="6350">
+                  <a:tcPr marL="95250" marR="95250" marT="133350" marB="133350" anchor="ctr">
+                    <a:lnL w="6350" cap="flat" cmpd="sng">
                       <a:solidFill>
                         <a:schemeClr val="dk1"/>
                       </a:solidFill>
                       <a:prstDash val="solid"/>
                       <a:round/>
-                      <a:headEnd len="sm" w="sm" type="none"/>
-                      <a:tailEnd len="sm" w="sm" type="none"/>
+                      <a:headEnd type="none" w="sm" len="sm"/>
+                      <a:tailEnd type="none" w="sm" len="sm"/>
                     </a:lnL>
-                    <a:lnR cap="flat" cmpd="sng" w="6350">
+                    <a:lnR w="6350" cap="flat" cmpd="sng">
                       <a:solidFill>
                         <a:schemeClr val="dk1"/>
                       </a:solidFill>
                       <a:prstDash val="solid"/>
                       <a:round/>
-                      <a:headEnd len="sm" w="sm" type="none"/>
-                      <a:tailEnd len="sm" w="sm" type="none"/>
+                      <a:headEnd type="none" w="sm" len="sm"/>
+                      <a:tailEnd type="none" w="sm" len="sm"/>
                     </a:lnR>
-                    <a:lnT cap="flat" cmpd="sng" w="6350">
+                    <a:lnT w="6350" cap="flat" cmpd="sng">
                       <a:solidFill>
                         <a:schemeClr val="dk1"/>
                       </a:solidFill>
                       <a:prstDash val="solid"/>
                       <a:round/>
-                      <a:headEnd len="sm" w="sm" type="none"/>
-                      <a:tailEnd len="sm" w="sm" type="none"/>
+                      <a:headEnd type="none" w="sm" len="sm"/>
+                      <a:tailEnd type="none" w="sm" len="sm"/>
                     </a:lnT>
-                    <a:lnB cap="flat" cmpd="sng" w="6350">
+                    <a:lnB w="6350" cap="flat" cmpd="sng">
                       <a:solidFill>
                         <a:schemeClr val="dk1"/>
                       </a:solidFill>
                       <a:prstDash val="solid"/>
                       <a:round/>
-                      <a:headEnd len="sm" w="sm" type="none"/>
-                      <a:tailEnd len="sm" w="sm" type="none"/>
+                      <a:headEnd type="none" w="sm" len="sm"/>
+                      <a:tailEnd type="none" w="sm" len="sm"/>
                     </a:lnB>
                   </a:tcPr>
                 </a:tc>
@@ -10513,7 +10713,7 @@
                     <a:bodyPr/>
                     <a:lstStyle/>
                     <a:p>
-                      <a:pPr indent="0" lvl="0" marL="0" rtl="0" algn="ctr">
+                      <a:pPr marL="0" lvl="0" indent="0" algn="ctr" rtl="0">
                         <a:lnSpc>
                           <a:spcPct val="120000"/>
                         </a:lnSpc>
@@ -10554,42 +10754,42 @@
                       </a:endParaRPr>
                     </a:p>
                   </a:txBody>
-                  <a:tcPr marT="133350" marB="133350" marR="95250" marL="95250" anchor="ctr">
-                    <a:lnL cap="flat" cmpd="sng" w="6350">
+                  <a:tcPr marL="95250" marR="95250" marT="133350" marB="133350" anchor="ctr">
+                    <a:lnL w="6350" cap="flat" cmpd="sng">
                       <a:solidFill>
                         <a:schemeClr val="dk1"/>
                       </a:solidFill>
                       <a:prstDash val="solid"/>
                       <a:round/>
-                      <a:headEnd len="sm" w="sm" type="none"/>
-                      <a:tailEnd len="sm" w="sm" type="none"/>
+                      <a:headEnd type="none" w="sm" len="sm"/>
+                      <a:tailEnd type="none" w="sm" len="sm"/>
                     </a:lnL>
-                    <a:lnR cap="flat" cmpd="sng" w="6350">
+                    <a:lnR w="6350" cap="flat" cmpd="sng">
                       <a:solidFill>
                         <a:schemeClr val="dk1"/>
                       </a:solidFill>
                       <a:prstDash val="solid"/>
                       <a:round/>
-                      <a:headEnd len="sm" w="sm" type="none"/>
-                      <a:tailEnd len="sm" w="sm" type="none"/>
+                      <a:headEnd type="none" w="sm" len="sm"/>
+                      <a:tailEnd type="none" w="sm" len="sm"/>
                     </a:lnR>
-                    <a:lnT cap="flat" cmpd="sng" w="6350">
+                    <a:lnT w="6350" cap="flat" cmpd="sng">
                       <a:solidFill>
                         <a:schemeClr val="dk1"/>
                       </a:solidFill>
                       <a:prstDash val="solid"/>
                       <a:round/>
-                      <a:headEnd len="sm" w="sm" type="none"/>
-                      <a:tailEnd len="sm" w="sm" type="none"/>
+                      <a:headEnd type="none" w="sm" len="sm"/>
+                      <a:tailEnd type="none" w="sm" len="sm"/>
                     </a:lnT>
-                    <a:lnB cap="flat" cmpd="sng" w="6350">
+                    <a:lnB w="6350" cap="flat" cmpd="sng">
                       <a:solidFill>
                         <a:schemeClr val="dk1"/>
                       </a:solidFill>
                       <a:prstDash val="solid"/>
                       <a:round/>
-                      <a:headEnd len="sm" w="sm" type="none"/>
-                      <a:tailEnd len="sm" w="sm" type="none"/>
+                      <a:headEnd type="none" w="sm" len="sm"/>
+                      <a:tailEnd type="none" w="sm" len="sm"/>
                     </a:lnB>
                   </a:tcPr>
                 </a:tc>
@@ -10598,7 +10798,7 @@
                     <a:bodyPr/>
                     <a:lstStyle/>
                     <a:p>
-                      <a:pPr indent="0" lvl="0" marL="0" rtl="0" algn="ctr">
+                      <a:pPr marL="0" lvl="0" indent="0" algn="ctr" rtl="0">
                         <a:lnSpc>
                           <a:spcPct val="120000"/>
                         </a:lnSpc>
@@ -10639,42 +10839,42 @@
                       </a:endParaRPr>
                     </a:p>
                   </a:txBody>
-                  <a:tcPr marT="133350" marB="133350" marR="95250" marL="95250" anchor="ctr">
-                    <a:lnL cap="flat" cmpd="sng" w="6350">
+                  <a:tcPr marL="95250" marR="95250" marT="133350" marB="133350" anchor="ctr">
+                    <a:lnL w="6350" cap="flat" cmpd="sng">
                       <a:solidFill>
                         <a:schemeClr val="dk1"/>
                       </a:solidFill>
                       <a:prstDash val="solid"/>
                       <a:round/>
-                      <a:headEnd len="sm" w="sm" type="none"/>
-                      <a:tailEnd len="sm" w="sm" type="none"/>
+                      <a:headEnd type="none" w="sm" len="sm"/>
+                      <a:tailEnd type="none" w="sm" len="sm"/>
                     </a:lnL>
-                    <a:lnR cap="flat" cmpd="sng" w="6350">
+                    <a:lnR w="6350" cap="flat" cmpd="sng">
                       <a:solidFill>
                         <a:schemeClr val="dk1"/>
                       </a:solidFill>
                       <a:prstDash val="solid"/>
                       <a:round/>
-                      <a:headEnd len="sm" w="sm" type="none"/>
-                      <a:tailEnd len="sm" w="sm" type="none"/>
+                      <a:headEnd type="none" w="sm" len="sm"/>
+                      <a:tailEnd type="none" w="sm" len="sm"/>
                     </a:lnR>
-                    <a:lnT cap="flat" cmpd="sng" w="6350">
+                    <a:lnT w="6350" cap="flat" cmpd="sng">
                       <a:solidFill>
                         <a:schemeClr val="dk1"/>
                       </a:solidFill>
                       <a:prstDash val="solid"/>
                       <a:round/>
-                      <a:headEnd len="sm" w="sm" type="none"/>
-                      <a:tailEnd len="sm" w="sm" type="none"/>
+                      <a:headEnd type="none" w="sm" len="sm"/>
+                      <a:tailEnd type="none" w="sm" len="sm"/>
                     </a:lnT>
-                    <a:lnB cap="flat" cmpd="sng" w="6350">
+                    <a:lnB w="6350" cap="flat" cmpd="sng">
                       <a:solidFill>
                         <a:schemeClr val="dk1"/>
                       </a:solidFill>
                       <a:prstDash val="solid"/>
                       <a:round/>
-                      <a:headEnd len="sm" w="sm" type="none"/>
-                      <a:tailEnd len="sm" w="sm" type="none"/>
+                      <a:headEnd type="none" w="sm" len="sm"/>
+                      <a:tailEnd type="none" w="sm" len="sm"/>
                     </a:lnB>
                   </a:tcPr>
                 </a:tc>
@@ -10685,7 +10885,7 @@
                     <a:bodyPr/>
                     <a:lstStyle/>
                     <a:p>
-                      <a:pPr indent="0" lvl="0" marL="0" rtl="0" algn="ctr">
+                      <a:pPr marL="0" lvl="0" indent="0" algn="ctr" rtl="0">
                         <a:lnSpc>
                           <a:spcPct val="120000"/>
                         </a:lnSpc>
@@ -10726,42 +10926,42 @@
                       </a:endParaRPr>
                     </a:p>
                   </a:txBody>
-                  <a:tcPr marT="133350" marB="133350" marR="95250" marL="95250" anchor="ctr">
-                    <a:lnL cap="flat" cmpd="sng" w="6350">
+                  <a:tcPr marL="95250" marR="95250" marT="133350" marB="133350" anchor="ctr">
+                    <a:lnL w="6350" cap="flat" cmpd="sng">
                       <a:solidFill>
                         <a:schemeClr val="dk1"/>
                       </a:solidFill>
                       <a:prstDash val="solid"/>
                       <a:round/>
-                      <a:headEnd len="sm" w="sm" type="none"/>
-                      <a:tailEnd len="sm" w="sm" type="none"/>
+                      <a:headEnd type="none" w="sm" len="sm"/>
+                      <a:tailEnd type="none" w="sm" len="sm"/>
                     </a:lnL>
-                    <a:lnR cap="flat" cmpd="sng" w="6350">
+                    <a:lnR w="6350" cap="flat" cmpd="sng">
                       <a:solidFill>
                         <a:schemeClr val="dk1"/>
                       </a:solidFill>
                       <a:prstDash val="solid"/>
                       <a:round/>
-                      <a:headEnd len="sm" w="sm" type="none"/>
-                      <a:tailEnd len="sm" w="sm" type="none"/>
+                      <a:headEnd type="none" w="sm" len="sm"/>
+                      <a:tailEnd type="none" w="sm" len="sm"/>
                     </a:lnR>
-                    <a:lnT cap="flat" cmpd="sng" w="6350">
+                    <a:lnT w="6350" cap="flat" cmpd="sng">
                       <a:solidFill>
                         <a:schemeClr val="dk1"/>
                       </a:solidFill>
                       <a:prstDash val="solid"/>
                       <a:round/>
-                      <a:headEnd len="sm" w="sm" type="none"/>
-                      <a:tailEnd len="sm" w="sm" type="none"/>
+                      <a:headEnd type="none" w="sm" len="sm"/>
+                      <a:tailEnd type="none" w="sm" len="sm"/>
                     </a:lnT>
-                    <a:lnB cap="flat" cmpd="sng" w="6350">
+                    <a:lnB w="6350" cap="flat" cmpd="sng">
                       <a:solidFill>
                         <a:schemeClr val="dk1"/>
                       </a:solidFill>
                       <a:prstDash val="solid"/>
                       <a:round/>
-                      <a:headEnd len="sm" w="sm" type="none"/>
-                      <a:tailEnd len="sm" w="sm" type="none"/>
+                      <a:headEnd type="none" w="sm" len="sm"/>
+                      <a:tailEnd type="none" w="sm" len="sm"/>
                     </a:lnB>
                   </a:tcPr>
                 </a:tc>
@@ -10770,7 +10970,7 @@
                     <a:bodyPr/>
                     <a:lstStyle/>
                     <a:p>
-                      <a:pPr indent="0" lvl="0" marL="0" rtl="0" algn="ctr">
+                      <a:pPr marL="0" lvl="0" indent="0" algn="ctr" rtl="0">
                         <a:lnSpc>
                           <a:spcPct val="120000"/>
                         </a:lnSpc>
@@ -10811,42 +11011,42 @@
                       </a:endParaRPr>
                     </a:p>
                   </a:txBody>
-                  <a:tcPr marT="133350" marB="133350" marR="95250" marL="95250" anchor="ctr">
-                    <a:lnL cap="flat" cmpd="sng" w="6350">
+                  <a:tcPr marL="95250" marR="95250" marT="133350" marB="133350" anchor="ctr">
+                    <a:lnL w="6350" cap="flat" cmpd="sng">
                       <a:solidFill>
                         <a:schemeClr val="dk1"/>
                       </a:solidFill>
                       <a:prstDash val="solid"/>
                       <a:round/>
-                      <a:headEnd len="sm" w="sm" type="none"/>
-                      <a:tailEnd len="sm" w="sm" type="none"/>
+                      <a:headEnd type="none" w="sm" len="sm"/>
+                      <a:tailEnd type="none" w="sm" len="sm"/>
                     </a:lnL>
-                    <a:lnR cap="flat" cmpd="sng" w="6350">
+                    <a:lnR w="6350" cap="flat" cmpd="sng">
                       <a:solidFill>
                         <a:schemeClr val="dk1"/>
                       </a:solidFill>
                       <a:prstDash val="solid"/>
                       <a:round/>
-                      <a:headEnd len="sm" w="sm" type="none"/>
-                      <a:tailEnd len="sm" w="sm" type="none"/>
+                      <a:headEnd type="none" w="sm" len="sm"/>
+                      <a:tailEnd type="none" w="sm" len="sm"/>
                     </a:lnR>
-                    <a:lnT cap="flat" cmpd="sng" w="6350">
+                    <a:lnT w="6350" cap="flat" cmpd="sng">
                       <a:solidFill>
                         <a:schemeClr val="dk1"/>
                       </a:solidFill>
                       <a:prstDash val="solid"/>
                       <a:round/>
-                      <a:headEnd len="sm" w="sm" type="none"/>
-                      <a:tailEnd len="sm" w="sm" type="none"/>
+                      <a:headEnd type="none" w="sm" len="sm"/>
+                      <a:tailEnd type="none" w="sm" len="sm"/>
                     </a:lnT>
-                    <a:lnB cap="flat" cmpd="sng" w="6350">
+                    <a:lnB w="6350" cap="flat" cmpd="sng">
                       <a:solidFill>
                         <a:schemeClr val="dk1"/>
                       </a:solidFill>
                       <a:prstDash val="solid"/>
                       <a:round/>
-                      <a:headEnd len="sm" w="sm" type="none"/>
-                      <a:tailEnd len="sm" w="sm" type="none"/>
+                      <a:headEnd type="none" w="sm" len="sm"/>
+                      <a:tailEnd type="none" w="sm" len="sm"/>
                     </a:lnB>
                   </a:tcPr>
                 </a:tc>
@@ -10857,7 +11057,7 @@
                     <a:bodyPr/>
                     <a:lstStyle/>
                     <a:p>
-                      <a:pPr indent="0" lvl="0" marL="0" rtl="0" algn="ctr">
+                      <a:pPr marL="0" lvl="0" indent="0" algn="ctr" rtl="0">
                         <a:lnSpc>
                           <a:spcPct val="120000"/>
                         </a:lnSpc>
@@ -10898,42 +11098,42 @@
                       </a:endParaRPr>
                     </a:p>
                   </a:txBody>
-                  <a:tcPr marT="133350" marB="133350" marR="95250" marL="95250" anchor="ctr">
-                    <a:lnL cap="flat" cmpd="sng" w="6350">
+                  <a:tcPr marL="95250" marR="95250" marT="133350" marB="133350" anchor="ctr">
+                    <a:lnL w="6350" cap="flat" cmpd="sng">
                       <a:solidFill>
                         <a:schemeClr val="dk1"/>
                       </a:solidFill>
                       <a:prstDash val="solid"/>
                       <a:round/>
-                      <a:headEnd len="sm" w="sm" type="none"/>
-                      <a:tailEnd len="sm" w="sm" type="none"/>
+                      <a:headEnd type="none" w="sm" len="sm"/>
+                      <a:tailEnd type="none" w="sm" len="sm"/>
                     </a:lnL>
-                    <a:lnR cap="flat" cmpd="sng" w="6350">
+                    <a:lnR w="6350" cap="flat" cmpd="sng">
                       <a:solidFill>
                         <a:schemeClr val="dk1"/>
                       </a:solidFill>
                       <a:prstDash val="solid"/>
                       <a:round/>
-                      <a:headEnd len="sm" w="sm" type="none"/>
-                      <a:tailEnd len="sm" w="sm" type="none"/>
+                      <a:headEnd type="none" w="sm" len="sm"/>
+                      <a:tailEnd type="none" w="sm" len="sm"/>
                     </a:lnR>
-                    <a:lnT cap="flat" cmpd="sng" w="6350">
+                    <a:lnT w="6350" cap="flat" cmpd="sng">
                       <a:solidFill>
                         <a:schemeClr val="dk1"/>
                       </a:solidFill>
                       <a:prstDash val="solid"/>
                       <a:round/>
-                      <a:headEnd len="sm" w="sm" type="none"/>
-                      <a:tailEnd len="sm" w="sm" type="none"/>
+                      <a:headEnd type="none" w="sm" len="sm"/>
+                      <a:tailEnd type="none" w="sm" len="sm"/>
                     </a:lnT>
-                    <a:lnB cap="flat" cmpd="sng" w="6350">
+                    <a:lnB w="6350" cap="flat" cmpd="sng">
                       <a:solidFill>
                         <a:schemeClr val="dk1"/>
                       </a:solidFill>
                       <a:prstDash val="solid"/>
                       <a:round/>
-                      <a:headEnd len="sm" w="sm" type="none"/>
-                      <a:tailEnd len="sm" w="sm" type="none"/>
+                      <a:headEnd type="none" w="sm" len="sm"/>
+                      <a:tailEnd type="none" w="sm" len="sm"/>
                     </a:lnB>
                   </a:tcPr>
                 </a:tc>
@@ -10942,7 +11142,7 @@
                     <a:bodyPr/>
                     <a:lstStyle/>
                     <a:p>
-                      <a:pPr indent="0" lvl="0" marL="0" rtl="0" algn="ctr">
+                      <a:pPr marL="0" lvl="0" indent="0" algn="ctr" rtl="0">
                         <a:lnSpc>
                           <a:spcPct val="120000"/>
                         </a:lnSpc>
@@ -10983,42 +11183,42 @@
                       </a:endParaRPr>
                     </a:p>
                   </a:txBody>
-                  <a:tcPr marT="133350" marB="133350" marR="95250" marL="95250" anchor="ctr">
-                    <a:lnL cap="flat" cmpd="sng" w="6350">
+                  <a:tcPr marL="95250" marR="95250" marT="133350" marB="133350" anchor="ctr">
+                    <a:lnL w="6350" cap="flat" cmpd="sng">
                       <a:solidFill>
                         <a:schemeClr val="dk1"/>
                       </a:solidFill>
                       <a:prstDash val="solid"/>
                       <a:round/>
-                      <a:headEnd len="sm" w="sm" type="none"/>
-                      <a:tailEnd len="sm" w="sm" type="none"/>
+                      <a:headEnd type="none" w="sm" len="sm"/>
+                      <a:tailEnd type="none" w="sm" len="sm"/>
                     </a:lnL>
-                    <a:lnR cap="flat" cmpd="sng" w="6350">
+                    <a:lnR w="6350" cap="flat" cmpd="sng">
                       <a:solidFill>
                         <a:schemeClr val="dk1"/>
                       </a:solidFill>
                       <a:prstDash val="solid"/>
                       <a:round/>
-                      <a:headEnd len="sm" w="sm" type="none"/>
-                      <a:tailEnd len="sm" w="sm" type="none"/>
+                      <a:headEnd type="none" w="sm" len="sm"/>
+                      <a:tailEnd type="none" w="sm" len="sm"/>
                     </a:lnR>
-                    <a:lnT cap="flat" cmpd="sng" w="6350">
+                    <a:lnT w="6350" cap="flat" cmpd="sng">
                       <a:solidFill>
                         <a:schemeClr val="dk1"/>
                       </a:solidFill>
                       <a:prstDash val="solid"/>
                       <a:round/>
-                      <a:headEnd len="sm" w="sm" type="none"/>
-                      <a:tailEnd len="sm" w="sm" type="none"/>
+                      <a:headEnd type="none" w="sm" len="sm"/>
+                      <a:tailEnd type="none" w="sm" len="sm"/>
                     </a:lnT>
-                    <a:lnB cap="flat" cmpd="sng" w="6350">
+                    <a:lnB w="6350" cap="flat" cmpd="sng">
                       <a:solidFill>
                         <a:schemeClr val="dk1"/>
                       </a:solidFill>
                       <a:prstDash val="solid"/>
                       <a:round/>
-                      <a:headEnd len="sm" w="sm" type="none"/>
-                      <a:tailEnd len="sm" w="sm" type="none"/>
+                      <a:headEnd type="none" w="sm" len="sm"/>
+                      <a:tailEnd type="none" w="sm" len="sm"/>
                     </a:lnB>
                   </a:tcPr>
                 </a:tc>
@@ -11029,7 +11229,7 @@
                     <a:bodyPr/>
                     <a:lstStyle/>
                     <a:p>
-                      <a:pPr indent="0" lvl="0" marL="0" rtl="0" algn="ctr">
+                      <a:pPr marL="0" lvl="0" indent="0" algn="ctr" rtl="0">
                         <a:lnSpc>
                           <a:spcPct val="120000"/>
                         </a:lnSpc>
@@ -11070,42 +11270,42 @@
                       </a:endParaRPr>
                     </a:p>
                   </a:txBody>
-                  <a:tcPr marT="133350" marB="133350" marR="95250" marL="95250" anchor="ctr">
-                    <a:lnL cap="flat" cmpd="sng" w="6350">
+                  <a:tcPr marL="95250" marR="95250" marT="133350" marB="133350" anchor="ctr">
+                    <a:lnL w="6350" cap="flat" cmpd="sng">
                       <a:solidFill>
                         <a:schemeClr val="dk1"/>
                       </a:solidFill>
                       <a:prstDash val="solid"/>
                       <a:round/>
-                      <a:headEnd len="sm" w="sm" type="none"/>
-                      <a:tailEnd len="sm" w="sm" type="none"/>
+                      <a:headEnd type="none" w="sm" len="sm"/>
+                      <a:tailEnd type="none" w="sm" len="sm"/>
                     </a:lnL>
-                    <a:lnR cap="flat" cmpd="sng" w="6350">
+                    <a:lnR w="6350" cap="flat" cmpd="sng">
                       <a:solidFill>
                         <a:schemeClr val="dk1"/>
                       </a:solidFill>
                       <a:prstDash val="solid"/>
                       <a:round/>
-                      <a:headEnd len="sm" w="sm" type="none"/>
-                      <a:tailEnd len="sm" w="sm" type="none"/>
+                      <a:headEnd type="none" w="sm" len="sm"/>
+                      <a:tailEnd type="none" w="sm" len="sm"/>
                     </a:lnR>
-                    <a:lnT cap="flat" cmpd="sng" w="6350">
+                    <a:lnT w="6350" cap="flat" cmpd="sng">
                       <a:solidFill>
                         <a:schemeClr val="dk1"/>
                       </a:solidFill>
                       <a:prstDash val="solid"/>
                       <a:round/>
-                      <a:headEnd len="sm" w="sm" type="none"/>
-                      <a:tailEnd len="sm" w="sm" type="none"/>
+                      <a:headEnd type="none" w="sm" len="sm"/>
+                      <a:tailEnd type="none" w="sm" len="sm"/>
                     </a:lnT>
-                    <a:lnB cap="flat" cmpd="sng" w="6350">
+                    <a:lnB w="6350" cap="flat" cmpd="sng">
                       <a:solidFill>
                         <a:schemeClr val="dk1"/>
                       </a:solidFill>
                       <a:prstDash val="solid"/>
                       <a:round/>
-                      <a:headEnd len="sm" w="sm" type="none"/>
-                      <a:tailEnd len="sm" w="sm" type="none"/>
+                      <a:headEnd type="none" w="sm" len="sm"/>
+                      <a:tailEnd type="none" w="sm" len="sm"/>
                     </a:lnB>
                   </a:tcPr>
                 </a:tc>
@@ -11114,7 +11314,7 @@
                     <a:bodyPr/>
                     <a:lstStyle/>
                     <a:p>
-                      <a:pPr indent="0" lvl="0" marL="0" rtl="0" algn="ctr">
+                      <a:pPr marL="0" lvl="0" indent="0" algn="ctr" rtl="0">
                         <a:lnSpc>
                           <a:spcPct val="120000"/>
                         </a:lnSpc>
@@ -11155,42 +11355,42 @@
                       </a:endParaRPr>
                     </a:p>
                   </a:txBody>
-                  <a:tcPr marT="133350" marB="133350" marR="95250" marL="95250" anchor="ctr">
-                    <a:lnL cap="flat" cmpd="sng" w="6350">
+                  <a:tcPr marL="95250" marR="95250" marT="133350" marB="133350" anchor="ctr">
+                    <a:lnL w="6350" cap="flat" cmpd="sng">
                       <a:solidFill>
                         <a:schemeClr val="dk1"/>
                       </a:solidFill>
                       <a:prstDash val="solid"/>
                       <a:round/>
-                      <a:headEnd len="sm" w="sm" type="none"/>
-                      <a:tailEnd len="sm" w="sm" type="none"/>
+                      <a:headEnd type="none" w="sm" len="sm"/>
+                      <a:tailEnd type="none" w="sm" len="sm"/>
                     </a:lnL>
-                    <a:lnR cap="flat" cmpd="sng" w="6350">
+                    <a:lnR w="6350" cap="flat" cmpd="sng">
                       <a:solidFill>
                         <a:schemeClr val="dk1"/>
                       </a:solidFill>
                       <a:prstDash val="solid"/>
                       <a:round/>
-                      <a:headEnd len="sm" w="sm" type="none"/>
-                      <a:tailEnd len="sm" w="sm" type="none"/>
+                      <a:headEnd type="none" w="sm" len="sm"/>
+                      <a:tailEnd type="none" w="sm" len="sm"/>
                     </a:lnR>
-                    <a:lnT cap="flat" cmpd="sng" w="6350">
+                    <a:lnT w="6350" cap="flat" cmpd="sng">
                       <a:solidFill>
                         <a:schemeClr val="dk1"/>
                       </a:solidFill>
                       <a:prstDash val="solid"/>
                       <a:round/>
-                      <a:headEnd len="sm" w="sm" type="none"/>
-                      <a:tailEnd len="sm" w="sm" type="none"/>
+                      <a:headEnd type="none" w="sm" len="sm"/>
+                      <a:tailEnd type="none" w="sm" len="sm"/>
                     </a:lnT>
-                    <a:lnB cap="flat" cmpd="sng" w="6350">
+                    <a:lnB w="6350" cap="flat" cmpd="sng">
                       <a:solidFill>
                         <a:schemeClr val="dk1"/>
                       </a:solidFill>
                       <a:prstDash val="solid"/>
                       <a:round/>
-                      <a:headEnd len="sm" w="sm" type="none"/>
-                      <a:tailEnd len="sm" w="sm" type="none"/>
+                      <a:headEnd type="none" w="sm" len="sm"/>
+                      <a:tailEnd type="none" w="sm" len="sm"/>
                     </a:lnB>
                   </a:tcPr>
                 </a:tc>
@@ -11201,7 +11401,7 @@
                     <a:bodyPr/>
                     <a:lstStyle/>
                     <a:p>
-                      <a:pPr indent="0" lvl="0" marL="0" rtl="0" algn="ctr">
+                      <a:pPr marL="0" lvl="0" indent="0" algn="ctr" rtl="0">
                         <a:lnSpc>
                           <a:spcPct val="120000"/>
                         </a:lnSpc>
@@ -11242,42 +11442,42 @@
                       </a:endParaRPr>
                     </a:p>
                   </a:txBody>
-                  <a:tcPr marT="133350" marB="133350" marR="95250" marL="95250" anchor="ctr">
-                    <a:lnL cap="flat" cmpd="sng" w="6350">
+                  <a:tcPr marL="95250" marR="95250" marT="133350" marB="133350" anchor="ctr">
+                    <a:lnL w="6350" cap="flat" cmpd="sng">
                       <a:solidFill>
                         <a:schemeClr val="dk1"/>
                       </a:solidFill>
                       <a:prstDash val="solid"/>
                       <a:round/>
-                      <a:headEnd len="sm" w="sm" type="none"/>
-                      <a:tailEnd len="sm" w="sm" type="none"/>
+                      <a:headEnd type="none" w="sm" len="sm"/>
+                      <a:tailEnd type="none" w="sm" len="sm"/>
                     </a:lnL>
-                    <a:lnR cap="flat" cmpd="sng" w="6350">
+                    <a:lnR w="6350" cap="flat" cmpd="sng">
                       <a:solidFill>
                         <a:schemeClr val="dk1"/>
                       </a:solidFill>
                       <a:prstDash val="solid"/>
                       <a:round/>
-                      <a:headEnd len="sm" w="sm" type="none"/>
-                      <a:tailEnd len="sm" w="sm" type="none"/>
+                      <a:headEnd type="none" w="sm" len="sm"/>
+                      <a:tailEnd type="none" w="sm" len="sm"/>
                     </a:lnR>
-                    <a:lnT cap="flat" cmpd="sng" w="6350">
+                    <a:lnT w="6350" cap="flat" cmpd="sng">
                       <a:solidFill>
                         <a:schemeClr val="dk1"/>
                       </a:solidFill>
                       <a:prstDash val="solid"/>
                       <a:round/>
-                      <a:headEnd len="sm" w="sm" type="none"/>
-                      <a:tailEnd len="sm" w="sm" type="none"/>
+                      <a:headEnd type="none" w="sm" len="sm"/>
+                      <a:tailEnd type="none" w="sm" len="sm"/>
                     </a:lnT>
-                    <a:lnB cap="flat" cmpd="sng" w="6350">
+                    <a:lnB w="6350" cap="flat" cmpd="sng">
                       <a:solidFill>
                         <a:schemeClr val="dk1"/>
                       </a:solidFill>
                       <a:prstDash val="solid"/>
                       <a:round/>
-                      <a:headEnd len="sm" w="sm" type="none"/>
-                      <a:tailEnd len="sm" w="sm" type="none"/>
+                      <a:headEnd type="none" w="sm" len="sm"/>
+                      <a:tailEnd type="none" w="sm" len="sm"/>
                     </a:lnB>
                   </a:tcPr>
                 </a:tc>
@@ -11286,7 +11486,7 @@
                     <a:bodyPr/>
                     <a:lstStyle/>
                     <a:p>
-                      <a:pPr indent="0" lvl="0" marL="0" rtl="0" algn="ctr">
+                      <a:pPr marL="0" lvl="0" indent="0" algn="ctr" rtl="0">
                         <a:lnSpc>
                           <a:spcPct val="120000"/>
                         </a:lnSpc>
@@ -11327,42 +11527,42 @@
                       </a:endParaRPr>
                     </a:p>
                   </a:txBody>
-                  <a:tcPr marT="133350" marB="133350" marR="95250" marL="95250" anchor="ctr">
-                    <a:lnL cap="flat" cmpd="sng" w="6350">
+                  <a:tcPr marL="95250" marR="95250" marT="133350" marB="133350" anchor="ctr">
+                    <a:lnL w="6350" cap="flat" cmpd="sng">
                       <a:solidFill>
                         <a:schemeClr val="dk1"/>
                       </a:solidFill>
                       <a:prstDash val="solid"/>
                       <a:round/>
-                      <a:headEnd len="sm" w="sm" type="none"/>
-                      <a:tailEnd len="sm" w="sm" type="none"/>
+                      <a:headEnd type="none" w="sm" len="sm"/>
+                      <a:tailEnd type="none" w="sm" len="sm"/>
                     </a:lnL>
-                    <a:lnR cap="flat" cmpd="sng" w="6350">
+                    <a:lnR w="6350" cap="flat" cmpd="sng">
                       <a:solidFill>
                         <a:schemeClr val="dk1"/>
                       </a:solidFill>
                       <a:prstDash val="solid"/>
                       <a:round/>
-                      <a:headEnd len="sm" w="sm" type="none"/>
-                      <a:tailEnd len="sm" w="sm" type="none"/>
+                      <a:headEnd type="none" w="sm" len="sm"/>
+                      <a:tailEnd type="none" w="sm" len="sm"/>
                     </a:lnR>
-                    <a:lnT cap="flat" cmpd="sng" w="6350">
+                    <a:lnT w="6350" cap="flat" cmpd="sng">
                       <a:solidFill>
                         <a:schemeClr val="dk1"/>
                       </a:solidFill>
                       <a:prstDash val="solid"/>
                       <a:round/>
-                      <a:headEnd len="sm" w="sm" type="none"/>
-                      <a:tailEnd len="sm" w="sm" type="none"/>
+                      <a:headEnd type="none" w="sm" len="sm"/>
+                      <a:tailEnd type="none" w="sm" len="sm"/>
                     </a:lnT>
-                    <a:lnB cap="flat" cmpd="sng" w="6350">
+                    <a:lnB w="6350" cap="flat" cmpd="sng">
                       <a:solidFill>
                         <a:schemeClr val="dk1"/>
                       </a:solidFill>
                       <a:prstDash val="solid"/>
                       <a:round/>
-                      <a:headEnd len="sm" w="sm" type="none"/>
-                      <a:tailEnd len="sm" w="sm" type="none"/>
+                      <a:headEnd type="none" w="sm" len="sm"/>
+                      <a:tailEnd type="none" w="sm" len="sm"/>
                     </a:lnB>
                   </a:tcPr>
                 </a:tc>
@@ -11373,7 +11573,7 @@
                     <a:bodyPr/>
                     <a:lstStyle/>
                     <a:p>
-                      <a:pPr indent="0" lvl="0" marL="0" rtl="0" algn="ctr">
+                      <a:pPr marL="0" lvl="0" indent="0" algn="ctr" rtl="0">
                         <a:lnSpc>
                           <a:spcPct val="120000"/>
                         </a:lnSpc>
@@ -11414,42 +11614,42 @@
                       </a:endParaRPr>
                     </a:p>
                   </a:txBody>
-                  <a:tcPr marT="133350" marB="133350" marR="95250" marL="95250" anchor="ctr">
-                    <a:lnL cap="flat" cmpd="sng" w="6350">
+                  <a:tcPr marL="95250" marR="95250" marT="133350" marB="133350" anchor="ctr">
+                    <a:lnL w="6350" cap="flat" cmpd="sng">
                       <a:solidFill>
                         <a:schemeClr val="dk1"/>
                       </a:solidFill>
                       <a:prstDash val="solid"/>
                       <a:round/>
-                      <a:headEnd len="sm" w="sm" type="none"/>
-                      <a:tailEnd len="sm" w="sm" type="none"/>
+                      <a:headEnd type="none" w="sm" len="sm"/>
+                      <a:tailEnd type="none" w="sm" len="sm"/>
                     </a:lnL>
-                    <a:lnR cap="flat" cmpd="sng" w="6350">
+                    <a:lnR w="6350" cap="flat" cmpd="sng">
                       <a:solidFill>
                         <a:schemeClr val="dk1"/>
                       </a:solidFill>
                       <a:prstDash val="solid"/>
                       <a:round/>
-                      <a:headEnd len="sm" w="sm" type="none"/>
-                      <a:tailEnd len="sm" w="sm" type="none"/>
+                      <a:headEnd type="none" w="sm" len="sm"/>
+                      <a:tailEnd type="none" w="sm" len="sm"/>
                     </a:lnR>
-                    <a:lnT cap="flat" cmpd="sng" w="6350">
+                    <a:lnT w="6350" cap="flat" cmpd="sng">
                       <a:solidFill>
                         <a:schemeClr val="dk1"/>
                       </a:solidFill>
                       <a:prstDash val="solid"/>
                       <a:round/>
-                      <a:headEnd len="sm" w="sm" type="none"/>
-                      <a:tailEnd len="sm" w="sm" type="none"/>
+                      <a:headEnd type="none" w="sm" len="sm"/>
+                      <a:tailEnd type="none" w="sm" len="sm"/>
                     </a:lnT>
-                    <a:lnB cap="flat" cmpd="sng" w="6350">
+                    <a:lnB w="6350" cap="flat" cmpd="sng">
                       <a:solidFill>
                         <a:schemeClr val="dk1"/>
                       </a:solidFill>
                       <a:prstDash val="solid"/>
                       <a:round/>
-                      <a:headEnd len="sm" w="sm" type="none"/>
-                      <a:tailEnd len="sm" w="sm" type="none"/>
+                      <a:headEnd type="none" w="sm" len="sm"/>
+                      <a:tailEnd type="none" w="sm" len="sm"/>
                     </a:lnB>
                   </a:tcPr>
                 </a:tc>
@@ -11458,7 +11658,7 @@
                     <a:bodyPr/>
                     <a:lstStyle/>
                     <a:p>
-                      <a:pPr indent="0" lvl="0" marL="0" rtl="0" algn="ctr">
+                      <a:pPr marL="0" lvl="0" indent="0" algn="ctr" rtl="0">
                         <a:lnSpc>
                           <a:spcPct val="120000"/>
                         </a:lnSpc>
@@ -11499,42 +11699,42 @@
                       </a:endParaRPr>
                     </a:p>
                   </a:txBody>
-                  <a:tcPr marT="133350" marB="133350" marR="95250" marL="95250" anchor="ctr">
-                    <a:lnL cap="flat" cmpd="sng" w="6350">
+                  <a:tcPr marL="95250" marR="95250" marT="133350" marB="133350" anchor="ctr">
+                    <a:lnL w="6350" cap="flat" cmpd="sng">
                       <a:solidFill>
                         <a:schemeClr val="dk1"/>
                       </a:solidFill>
                       <a:prstDash val="solid"/>
                       <a:round/>
-                      <a:headEnd len="sm" w="sm" type="none"/>
-                      <a:tailEnd len="sm" w="sm" type="none"/>
+                      <a:headEnd type="none" w="sm" len="sm"/>
+                      <a:tailEnd type="none" w="sm" len="sm"/>
                     </a:lnL>
-                    <a:lnR cap="flat" cmpd="sng" w="6350">
+                    <a:lnR w="6350" cap="flat" cmpd="sng">
                       <a:solidFill>
                         <a:schemeClr val="dk1"/>
                       </a:solidFill>
                       <a:prstDash val="solid"/>
                       <a:round/>
-                      <a:headEnd len="sm" w="sm" type="none"/>
-                      <a:tailEnd len="sm" w="sm" type="none"/>
+                      <a:headEnd type="none" w="sm" len="sm"/>
+                      <a:tailEnd type="none" w="sm" len="sm"/>
                     </a:lnR>
-                    <a:lnT cap="flat" cmpd="sng" w="6350">
+                    <a:lnT w="6350" cap="flat" cmpd="sng">
                       <a:solidFill>
                         <a:schemeClr val="dk1"/>
                       </a:solidFill>
                       <a:prstDash val="solid"/>
                       <a:round/>
-                      <a:headEnd len="sm" w="sm" type="none"/>
-                      <a:tailEnd len="sm" w="sm" type="none"/>
+                      <a:headEnd type="none" w="sm" len="sm"/>
+                      <a:tailEnd type="none" w="sm" len="sm"/>
                     </a:lnT>
-                    <a:lnB cap="flat" cmpd="sng" w="6350">
+                    <a:lnB w="6350" cap="flat" cmpd="sng">
                       <a:solidFill>
                         <a:schemeClr val="dk1"/>
                       </a:solidFill>
                       <a:prstDash val="solid"/>
                       <a:round/>
-                      <a:headEnd len="sm" w="sm" type="none"/>
-                      <a:tailEnd len="sm" w="sm" type="none"/>
+                      <a:headEnd type="none" w="sm" len="sm"/>
+                      <a:tailEnd type="none" w="sm" len="sm"/>
                     </a:lnB>
                   </a:tcPr>
                 </a:tc>
@@ -11548,15 +11748,22 @@
   <p:clrMapOvr>
     <a:masterClrMapping/>
   </p:clrMapOvr>
+  <p:timing>
+    <p:tnLst>
+      <p:par>
+        <p:cTn id="1" dur="indefinite" restart="never" nodeType="tmRoot"/>
+      </p:par>
+    </p:tnLst>
+  </p:timing>
 </p:sld>
 </file>
 
 <file path=ppt/slides/slide6.xml><?xml version="1.0" encoding="utf-8"?>
-<p:sld xmlns:a="http://schemas.openxmlformats.org/drawingml/2006/main" xmlns:r="http://schemas.openxmlformats.org/officeDocument/2006/relationships" xmlns:mc="http://schemas.openxmlformats.org/markup-compatibility/2006" xmlns:mv="urn:schemas-microsoft-com:mac:vml" xmlns:p="http://schemas.openxmlformats.org/presentationml/2006/main" xmlns:c="http://schemas.openxmlformats.org/drawingml/2006/chart" xmlns:dgm="http://schemas.openxmlformats.org/drawingml/2006/diagram" xmlns:o="urn:schemas-microsoft-com:office:office" xmlns:v="urn:schemas-microsoft-com:vml" xmlns:pvml="urn:schemas-microsoft-com:office:powerpoint" xmlns:com="http://schemas.openxmlformats.org/drawingml/2006/compatibility" xmlns:p14="http://schemas.microsoft.com/office/powerpoint/2010/main" xmlns:p15="http://schemas.microsoft.com/office/powerpoint/2012/main" xmlns:ahyp="http://schemas.microsoft.com/office/drawing/2018/hyperlinkcolor">
+<p:sld xmlns:a="http://schemas.openxmlformats.org/drawingml/2006/main" xmlns:r="http://schemas.openxmlformats.org/officeDocument/2006/relationships" xmlns:p="http://schemas.openxmlformats.org/presentationml/2006/main">
   <p:cSld>
     <p:spTree>
       <p:nvGrpSpPr>
-        <p:cNvPr id="79" name="Shape 79"/>
+        <p:cNvPr id="1" name="Shape 79"/>
         <p:cNvGrpSpPr/>
         <p:nvPr/>
       </p:nvGrpSpPr>
@@ -11588,12 +11795,12 @@
           </a:ln>
         </p:spPr>
         <p:txBody>
-          <a:bodyPr anchorCtr="0" anchor="t" bIns="91425" lIns="91425" spcFirstLastPara="1" rIns="91425" wrap="square" tIns="91425">
+          <a:bodyPr spcFirstLastPara="1" wrap="square" lIns="91425" tIns="91425" rIns="91425" bIns="91425" anchor="t" anchorCtr="0">
             <a:spAutoFit/>
           </a:bodyPr>
           <a:lstStyle/>
           <a:p>
-            <a:pPr indent="0" lvl="0" marL="0" rtl="0" algn="l">
+            <a:pPr marL="0" lvl="0" indent="0" algn="l" rtl="0">
               <a:lnSpc>
                 <a:spcPct val="115000"/>
               </a:lnSpc>
@@ -11606,21 +11813,21 @@
               <a:buNone/>
             </a:pPr>
             <a:r>
-              <a:rPr b="1" lang="en" sz="1300">
+              <a:rPr lang="en" sz="1300" b="1">
                 <a:solidFill>
                   <a:schemeClr val="dk1"/>
                 </a:solidFill>
               </a:rPr>
               <a:t>Representation of Missing Values in Datasets</a:t>
             </a:r>
-            <a:endParaRPr b="1" sz="1300">
+            <a:endParaRPr sz="1300" b="1">
               <a:solidFill>
                 <a:schemeClr val="dk1"/>
               </a:solidFill>
             </a:endParaRPr>
           </a:p>
           <a:p>
-            <a:pPr indent="0" lvl="0" marL="0" rtl="0" algn="l">
+            <a:pPr marL="0" lvl="0" indent="0" algn="l" rtl="0">
               <a:lnSpc>
                 <a:spcPct val="115000"/>
               </a:lnSpc>
@@ -11647,7 +11854,7 @@
             </a:endParaRPr>
           </a:p>
           <a:p>
-            <a:pPr indent="0" lvl="0" marL="0" rtl="0" algn="l">
+            <a:pPr marL="0" lvl="0" indent="0" algn="l" rtl="0">
               <a:lnSpc>
                 <a:spcPct val="115000"/>
               </a:lnSpc>
@@ -11660,21 +11867,21 @@
               <a:buNone/>
             </a:pPr>
             <a:r>
-              <a:rPr b="1" lang="en" sz="1100">
+              <a:rPr lang="en" sz="1100" b="1">
                 <a:solidFill>
                   <a:schemeClr val="dk1"/>
                 </a:solidFill>
               </a:rPr>
               <a:t>Common forms of missing value representation include:</a:t>
             </a:r>
-            <a:endParaRPr b="1" sz="1100">
+            <a:endParaRPr sz="1100" b="1">
               <a:solidFill>
                 <a:schemeClr val="dk1"/>
               </a:solidFill>
             </a:endParaRPr>
           </a:p>
           <a:p>
-            <a:pPr indent="-298450" lvl="0" marL="457200" rtl="0" algn="l">
+            <a:pPr marL="457200" lvl="0" indent="-298450" algn="l" rtl="0">
               <a:lnSpc>
                 <a:spcPct val="115000"/>
               </a:lnSpc>
@@ -11691,7 +11898,7 @@
               <a:buChar char="●"/>
             </a:pPr>
             <a:r>
-              <a:rPr b="1" lang="en" sz="1100">
+              <a:rPr lang="en" sz="1100" b="1">
                 <a:solidFill>
                   <a:schemeClr val="dk1"/>
                 </a:solidFill>
@@ -11713,7 +11920,7 @@
             </a:endParaRPr>
           </a:p>
           <a:p>
-            <a:pPr indent="-298450" lvl="0" marL="457200" rtl="0" algn="l">
+            <a:pPr marL="457200" lvl="0" indent="-298450" algn="l" rtl="0">
               <a:lnSpc>
                 <a:spcPct val="115000"/>
               </a:lnSpc>
@@ -11730,7 +11937,7 @@
               <a:buChar char="●"/>
             </a:pPr>
             <a:r>
-              <a:rPr b="1" lang="en" sz="1100">
+              <a:rPr lang="en" sz="1100" b="1">
                 <a:solidFill>
                   <a:schemeClr val="dk1"/>
                 </a:solidFill>
@@ -11832,7 +12039,7 @@
             </a:endParaRPr>
           </a:p>
           <a:p>
-            <a:pPr indent="-298450" lvl="0" marL="457200" rtl="0" algn="l">
+            <a:pPr marL="457200" lvl="0" indent="-298450" algn="l" rtl="0">
               <a:lnSpc>
                 <a:spcPct val="115000"/>
               </a:lnSpc>
@@ -11849,7 +12056,7 @@
               <a:buChar char="●"/>
             </a:pPr>
             <a:r>
-              <a:rPr b="1" lang="en" sz="1100">
+              <a:rPr lang="en" sz="1100" b="1">
                 <a:solidFill>
                   <a:schemeClr val="dk1"/>
                 </a:solidFill>
@@ -11911,7 +12118,7 @@
             </a:endParaRPr>
           </a:p>
           <a:p>
-            <a:pPr indent="0" lvl="0" marL="0" rtl="0" algn="l">
+            <a:pPr marL="0" lvl="0" indent="0" algn="l" rtl="0">
               <a:lnSpc>
                 <a:spcPct val="115000"/>
               </a:lnSpc>
@@ -11924,21 +12131,21 @@
               <a:buNone/>
             </a:pPr>
             <a:r>
-              <a:rPr b="1" lang="en" sz="1300">
+              <a:rPr lang="en" sz="1300" b="1">
                 <a:solidFill>
                   <a:schemeClr val="dk1"/>
                 </a:solidFill>
               </a:rPr>
               <a:t>Techniques for Managing Missing Values in Data Analysis</a:t>
             </a:r>
-            <a:endParaRPr b="1" sz="1300">
+            <a:endParaRPr sz="1300" b="1">
               <a:solidFill>
                 <a:schemeClr val="dk1"/>
               </a:solidFill>
             </a:endParaRPr>
           </a:p>
           <a:p>
-            <a:pPr indent="0" lvl="0" marL="0" rtl="0" algn="l">
+            <a:pPr marL="0" lvl="0" indent="0" algn="l" rtl="0">
               <a:lnSpc>
                 <a:spcPct val="115000"/>
               </a:lnSpc>
@@ -11965,7 +12172,7 @@
             </a:endParaRPr>
           </a:p>
           <a:p>
-            <a:pPr indent="0" lvl="0" marL="0" rtl="0" algn="l">
+            <a:pPr marL="0" lvl="0" indent="0" algn="l" rtl="0">
               <a:lnSpc>
                 <a:spcPct val="115000"/>
               </a:lnSpc>
@@ -12013,12 +12220,12 @@
           </a:ln>
         </p:spPr>
         <p:txBody>
-          <a:bodyPr anchorCtr="0" anchor="t" bIns="91425" lIns="91425" spcFirstLastPara="1" rIns="91425" wrap="square" tIns="91425">
+          <a:bodyPr spcFirstLastPara="1" wrap="square" lIns="91425" tIns="91425" rIns="91425" bIns="91425" anchor="t" anchorCtr="0">
             <a:spAutoFit/>
           </a:bodyPr>
           <a:lstStyle/>
           <a:p>
-            <a:pPr indent="0" lvl="0" marL="0" rtl="0" algn="l">
+            <a:pPr marL="0" lvl="0" indent="0" algn="l" rtl="0">
               <a:lnSpc>
                 <a:spcPct val="115000"/>
               </a:lnSpc>
@@ -12031,21 +12238,21 @@
               <a:buNone/>
             </a:pPr>
             <a:r>
-              <a:rPr b="1" lang="en" sz="1300">
+              <a:rPr lang="en" sz="1300" b="1">
                 <a:solidFill>
                   <a:schemeClr val="dk1"/>
                 </a:solidFill>
               </a:rPr>
               <a:t>Creating a Sample DataFrame</a:t>
             </a:r>
-            <a:endParaRPr b="1" sz="1300">
+            <a:endParaRPr sz="1300" b="1">
               <a:solidFill>
                 <a:schemeClr val="dk1"/>
               </a:solidFill>
             </a:endParaRPr>
           </a:p>
           <a:p>
-            <a:pPr indent="0" lvl="0" marL="0" rtl="0" algn="l">
+            <a:pPr marL="0" lvl="0" indent="0" algn="l" rtl="0">
               <a:lnSpc>
                 <a:spcPct val="115000"/>
               </a:lnSpc>
@@ -12066,7 +12273,7 @@
               <a:t>For this example, we will use the </a:t>
             </a:r>
             <a:r>
-              <a:rPr b="1" lang="en" sz="1100">
+              <a:rPr lang="en" sz="1100" b="1">
                 <a:solidFill>
                   <a:schemeClr val="dk1"/>
                 </a:solidFill>
@@ -12082,7 +12289,7 @@
               <a:t> and </a:t>
             </a:r>
             <a:r>
-              <a:rPr b="1" lang="en" sz="1100">
+              <a:rPr lang="en" sz="1100" b="1">
                 <a:solidFill>
                   <a:schemeClr val="dk1"/>
                 </a:solidFill>
@@ -12110,15 +12317,22 @@
   <p:clrMapOvr>
     <a:masterClrMapping/>
   </p:clrMapOvr>
+  <p:timing>
+    <p:tnLst>
+      <p:par>
+        <p:cTn id="1" dur="indefinite" restart="never" nodeType="tmRoot"/>
+      </p:par>
+    </p:tnLst>
+  </p:timing>
 </p:sld>
 </file>
 
 <file path=ppt/slides/slide7.xml><?xml version="1.0" encoding="utf-8"?>
-<p:sld xmlns:a="http://schemas.openxmlformats.org/drawingml/2006/main" xmlns:r="http://schemas.openxmlformats.org/officeDocument/2006/relationships" xmlns:mc="http://schemas.openxmlformats.org/markup-compatibility/2006" xmlns:mv="urn:schemas-microsoft-com:mac:vml" xmlns:p="http://schemas.openxmlformats.org/presentationml/2006/main" xmlns:c="http://schemas.openxmlformats.org/drawingml/2006/chart" xmlns:dgm="http://schemas.openxmlformats.org/drawingml/2006/diagram" xmlns:o="urn:schemas-microsoft-com:office:office" xmlns:v="urn:schemas-microsoft-com:vml" xmlns:pvml="urn:schemas-microsoft-com:office:powerpoint" xmlns:com="http://schemas.openxmlformats.org/drawingml/2006/compatibility" xmlns:p14="http://schemas.microsoft.com/office/powerpoint/2010/main" xmlns:p15="http://schemas.microsoft.com/office/powerpoint/2012/main" xmlns:ahyp="http://schemas.microsoft.com/office/drawing/2018/hyperlinkcolor">
+<p:sld xmlns:a="http://schemas.openxmlformats.org/drawingml/2006/main" xmlns:r="http://schemas.openxmlformats.org/officeDocument/2006/relationships" xmlns:p="http://schemas.openxmlformats.org/presentationml/2006/main">
   <p:cSld>
     <p:spTree>
       <p:nvGrpSpPr>
-        <p:cNvPr id="85" name="Shape 85"/>
+        <p:cNvPr id="1" name="Shape 85"/>
         <p:cNvGrpSpPr/>
         <p:nvPr/>
       </p:nvGrpSpPr>
@@ -12145,414 +12359,408 @@
             <a:avLst/>
           </a:prstGeom>
           <a:noFill/>
-          <a:ln cap="flat" cmpd="sng" w="19050">
+          <a:ln w="19050" cap="flat" cmpd="sng">
             <a:solidFill>
               <a:schemeClr val="lt1"/>
             </a:solidFill>
             <a:prstDash val="solid"/>
             <a:round/>
-            <a:headEnd len="sm" w="sm" type="none"/>
-            <a:tailEnd len="sm" w="sm" type="none"/>
+            <a:headEnd type="none" w="sm" len="sm"/>
+            <a:tailEnd type="none" w="sm" len="sm"/>
           </a:ln>
         </p:spPr>
         <p:txBody>
-          <a:bodyPr anchorCtr="0" anchor="t" bIns="91425" lIns="91425" spcFirstLastPara="1" rIns="91425" wrap="square" tIns="91425">
+          <a:bodyPr spcFirstLastPara="1" wrap="square" lIns="91425" tIns="91425" rIns="91425" bIns="91425" anchor="t" anchorCtr="0">
             <a:spAutoFit/>
           </a:bodyPr>
           <a:lstStyle/>
           <a:p>
-            <a:pPr indent="0" lvl="0" marL="0" rtl="0" algn="l">
-              <a:spcBef>
-                <a:spcPts val="0"/>
-              </a:spcBef>
-              <a:spcAft>
-                <a:spcPts val="0"/>
-              </a:spcAft>
-              <a:buNone/>
-            </a:pPr>
-            <a:r>
-              <a:rPr lang="en">
+            <a:pPr marL="0" lvl="0" indent="0" algn="l" rtl="0">
+              <a:spcBef>
+                <a:spcPts val="0"/>
+              </a:spcBef>
+              <a:spcAft>
+                <a:spcPts val="0"/>
+              </a:spcAft>
+              <a:buNone/>
+            </a:pPr>
+            <a:r>
+              <a:rPr lang="en" dirty="0">
                 <a:solidFill>
                   <a:srgbClr val="9900FF"/>
                 </a:solidFill>
               </a:rPr>
               <a:t>import pandas as pd</a:t>
             </a:r>
-            <a:endParaRPr>
+            <a:endParaRPr dirty="0">
               <a:solidFill>
                 <a:srgbClr val="9900FF"/>
               </a:solidFill>
             </a:endParaRPr>
           </a:p>
           <a:p>
-            <a:pPr indent="0" lvl="0" marL="0" rtl="0" algn="l">
-              <a:spcBef>
-                <a:spcPts val="0"/>
-              </a:spcBef>
-              <a:spcAft>
-                <a:spcPts val="0"/>
-              </a:spcAft>
-              <a:buNone/>
-            </a:pPr>
-            <a:r>
-              <a:rPr lang="en">
+            <a:pPr marL="0" lvl="0" indent="0" algn="l" rtl="0">
+              <a:spcBef>
+                <a:spcPts val="0"/>
+              </a:spcBef>
+              <a:spcAft>
+                <a:spcPts val="0"/>
+              </a:spcAft>
+              <a:buNone/>
+            </a:pPr>
+            <a:r>
+              <a:rPr lang="en" dirty="0">
                 <a:solidFill>
                   <a:srgbClr val="9900FF"/>
                 </a:solidFill>
               </a:rPr>
               <a:t>import numpy as np</a:t>
             </a:r>
-            <a:endParaRPr>
+            <a:endParaRPr dirty="0">
               <a:solidFill>
                 <a:srgbClr val="9900FF"/>
               </a:solidFill>
             </a:endParaRPr>
           </a:p>
           <a:p>
-            <a:pPr indent="0" lvl="0" marL="0" rtl="0" algn="l">
-              <a:spcBef>
-                <a:spcPts val="0"/>
-              </a:spcBef>
-              <a:spcAft>
-                <a:spcPts val="0"/>
-              </a:spcAft>
-              <a:buNone/>
-            </a:pPr>
-            <a:r>
-              <a:t/>
-            </a:r>
-            <a:endParaRPr>
+            <a:pPr marL="0" lvl="0" indent="0" algn="l" rtl="0">
+              <a:spcBef>
+                <a:spcPts val="0"/>
+              </a:spcBef>
+              <a:spcAft>
+                <a:spcPts val="0"/>
+              </a:spcAft>
+              <a:buNone/>
+            </a:pPr>
+            <a:endParaRPr dirty="0">
               <a:solidFill>
                 <a:srgbClr val="9900FF"/>
               </a:solidFill>
             </a:endParaRPr>
           </a:p>
           <a:p>
-            <a:pPr indent="0" lvl="0" marL="0" rtl="0" algn="l">
-              <a:spcBef>
-                <a:spcPts val="0"/>
-              </a:spcBef>
-              <a:spcAft>
-                <a:spcPts val="0"/>
-              </a:spcAft>
-              <a:buNone/>
-            </a:pPr>
-            <a:r>
-              <a:rPr lang="en">
+            <a:pPr marL="0" lvl="0" indent="0" algn="l" rtl="0">
+              <a:spcBef>
+                <a:spcPts val="0"/>
+              </a:spcBef>
+              <a:spcAft>
+                <a:spcPts val="0"/>
+              </a:spcAft>
+              <a:buNone/>
+            </a:pPr>
+            <a:r>
+              <a:rPr lang="en" dirty="0">
                 <a:solidFill>
                   <a:srgbClr val="9900FF"/>
                 </a:solidFill>
               </a:rPr>
               <a:t>data = {</a:t>
             </a:r>
-            <a:endParaRPr>
+            <a:endParaRPr dirty="0">
               <a:solidFill>
                 <a:srgbClr val="9900FF"/>
               </a:solidFill>
             </a:endParaRPr>
           </a:p>
           <a:p>
-            <a:pPr indent="0" lvl="0" marL="0" rtl="0" algn="l">
-              <a:spcBef>
-                <a:spcPts val="0"/>
-              </a:spcBef>
-              <a:spcAft>
-                <a:spcPts val="0"/>
-              </a:spcAft>
-              <a:buNone/>
-            </a:pPr>
-            <a:r>
-              <a:rPr lang="en">
+            <a:pPr marL="0" lvl="0" indent="0" algn="l" rtl="0">
+              <a:spcBef>
+                <a:spcPts val="0"/>
+              </a:spcBef>
+              <a:spcAft>
+                <a:spcPts val="0"/>
+              </a:spcAft>
+              <a:buNone/>
+            </a:pPr>
+            <a:r>
+              <a:rPr lang="en" dirty="0">
                 <a:solidFill>
                   <a:srgbClr val="9900FF"/>
                 </a:solidFill>
               </a:rPr>
               <a:t>'School ID': [101, 102, 103, np.nan, 105, 106, 107, 108],</a:t>
             </a:r>
-            <a:endParaRPr>
+            <a:endParaRPr dirty="0">
               <a:solidFill>
                 <a:srgbClr val="9900FF"/>
               </a:solidFill>
             </a:endParaRPr>
           </a:p>
           <a:p>
-            <a:pPr indent="0" lvl="0" marL="0" rtl="0" algn="l">
-              <a:spcBef>
-                <a:spcPts val="0"/>
-              </a:spcBef>
-              <a:spcAft>
-                <a:spcPts val="0"/>
-              </a:spcAft>
-              <a:buNone/>
-            </a:pPr>
-            <a:r>
-              <a:rPr lang="en">
+            <a:pPr marL="0" lvl="0" indent="0" algn="l" rtl="0">
+              <a:spcBef>
+                <a:spcPts val="0"/>
+              </a:spcBef>
+              <a:spcAft>
+                <a:spcPts val="0"/>
+              </a:spcAft>
+              <a:buNone/>
+            </a:pPr>
+            <a:r>
+              <a:rPr lang="en" dirty="0">
                 <a:solidFill>
                   <a:srgbClr val="9900FF"/>
                 </a:solidFill>
               </a:rPr>
               <a:t>'Name': ['A', 'B', 'C', 'D', 'E', 'F', 'G', 'H'],</a:t>
             </a:r>
-            <a:endParaRPr>
+            <a:endParaRPr dirty="0">
               <a:solidFill>
                 <a:srgbClr val="9900FF"/>
               </a:solidFill>
             </a:endParaRPr>
           </a:p>
           <a:p>
-            <a:pPr indent="0" lvl="0" marL="0" rtl="0" algn="l">
-              <a:spcBef>
-                <a:spcPts val="0"/>
-              </a:spcBef>
-              <a:spcAft>
-                <a:spcPts val="0"/>
-              </a:spcAft>
-              <a:buNone/>
-            </a:pPr>
-            <a:r>
-              <a:rPr lang="en">
+            <a:pPr marL="0" lvl="0" indent="0" algn="l" rtl="0">
+              <a:spcBef>
+                <a:spcPts val="0"/>
+              </a:spcBef>
+              <a:spcAft>
+                <a:spcPts val="0"/>
+              </a:spcAft>
+              <a:buNone/>
+            </a:pPr>
+            <a:r>
+              <a:rPr lang="en" dirty="0">
                 <a:solidFill>
                   <a:srgbClr val="9900FF"/>
                 </a:solidFill>
               </a:rPr>
               <a:t>'Address': ['123 Main St', '456 Oak Ave', '789 Pine Ln', '101 Elm St', np.nan, '222 Maple Rd', '444 Cedar Blvd', '555 Birch Dr'],</a:t>
             </a:r>
-            <a:endParaRPr>
+            <a:endParaRPr dirty="0">
               <a:solidFill>
                 <a:srgbClr val="9900FF"/>
               </a:solidFill>
             </a:endParaRPr>
           </a:p>
           <a:p>
-            <a:pPr indent="0" lvl="0" marL="0" rtl="0" algn="l">
-              <a:spcBef>
-                <a:spcPts val="0"/>
-              </a:spcBef>
-              <a:spcAft>
-                <a:spcPts val="0"/>
-              </a:spcAft>
-              <a:buNone/>
-            </a:pPr>
-            <a:r>
-              <a:rPr lang="en">
+            <a:pPr marL="0" lvl="0" indent="0" algn="l" rtl="0">
+              <a:spcBef>
+                <a:spcPts val="0"/>
+              </a:spcBef>
+              <a:spcAft>
+                <a:spcPts val="0"/>
+              </a:spcAft>
+              <a:buNone/>
+            </a:pPr>
+            <a:r>
+              <a:rPr lang="en" dirty="0">
                 <a:solidFill>
                   <a:srgbClr val="9900FF"/>
                 </a:solidFill>
               </a:rPr>
               <a:t>'City': ['Mumbai', 'Delhi', 'Bengaluru', 'Chennai', 'Kolkata', np.nan, 'Pune', 'Jaipur'],</a:t>
             </a:r>
-            <a:endParaRPr>
+            <a:endParaRPr dirty="0">
               <a:solidFill>
                 <a:srgbClr val="9900FF"/>
               </a:solidFill>
             </a:endParaRPr>
           </a:p>
           <a:p>
-            <a:pPr indent="0" lvl="0" marL="0" rtl="0" algn="l">
-              <a:spcBef>
-                <a:spcPts val="0"/>
-              </a:spcBef>
-              <a:spcAft>
-                <a:spcPts val="0"/>
-              </a:spcAft>
-              <a:buNone/>
-            </a:pPr>
-            <a:r>
-              <a:rPr lang="en">
+            <a:pPr marL="0" lvl="0" indent="0" algn="l" rtl="0">
+              <a:spcBef>
+                <a:spcPts val="0"/>
+              </a:spcBef>
+              <a:spcAft>
+                <a:spcPts val="0"/>
+              </a:spcAft>
+              <a:buNone/>
+            </a:pPr>
+            <a:r>
+              <a:rPr lang="en" dirty="0">
                 <a:solidFill>
                   <a:srgbClr val="9900FF"/>
                 </a:solidFill>
               </a:rPr>
               <a:t>'Subject': ['Math', 'English', 'Science', 'Math', 'History', 'Math', 'Science', 'English'],</a:t>
             </a:r>
-            <a:endParaRPr>
+            <a:endParaRPr dirty="0">
               <a:solidFill>
                 <a:srgbClr val="9900FF"/>
               </a:solidFill>
             </a:endParaRPr>
           </a:p>
           <a:p>
-            <a:pPr indent="0" lvl="0" marL="0" rtl="0" algn="l">
-              <a:spcBef>
-                <a:spcPts val="0"/>
-              </a:spcBef>
-              <a:spcAft>
-                <a:spcPts val="0"/>
-              </a:spcAft>
-              <a:buNone/>
-            </a:pPr>
-            <a:r>
-              <a:rPr lang="en">
+            <a:pPr marL="0" lvl="0" indent="0" algn="l" rtl="0">
+              <a:spcBef>
+                <a:spcPts val="0"/>
+              </a:spcBef>
+              <a:spcAft>
+                <a:spcPts val="0"/>
+              </a:spcAft>
+              <a:buNone/>
+            </a:pPr>
+            <a:r>
+              <a:rPr lang="en" dirty="0">
                 <a:solidFill>
                   <a:srgbClr val="9900FF"/>
                 </a:solidFill>
               </a:rPr>
               <a:t>'Marks': [85, 92, 78, 89, np.nan, 95, 80, 88],</a:t>
             </a:r>
-            <a:endParaRPr>
+            <a:endParaRPr dirty="0">
               <a:solidFill>
                 <a:srgbClr val="9900FF"/>
               </a:solidFill>
             </a:endParaRPr>
           </a:p>
           <a:p>
-            <a:pPr indent="0" lvl="0" marL="0" rtl="0" algn="l">
-              <a:spcBef>
-                <a:spcPts val="0"/>
-              </a:spcBef>
-              <a:spcAft>
-                <a:spcPts val="0"/>
-              </a:spcAft>
-              <a:buNone/>
-            </a:pPr>
-            <a:r>
-              <a:rPr lang="en">
+            <a:pPr marL="0" lvl="0" indent="0" algn="l" rtl="0">
+              <a:spcBef>
+                <a:spcPts val="0"/>
+              </a:spcBef>
+              <a:spcAft>
+                <a:spcPts val="0"/>
+              </a:spcAft>
+              <a:buNone/>
+            </a:pPr>
+            <a:r>
+              <a:rPr lang="en" dirty="0">
                 <a:solidFill>
                   <a:srgbClr val="9900FF"/>
                 </a:solidFill>
               </a:rPr>
               <a:t>'Rank': [2, 1, 4, 3, 8, 1, 5, 3],</a:t>
             </a:r>
-            <a:endParaRPr>
+            <a:endParaRPr dirty="0">
               <a:solidFill>
                 <a:srgbClr val="9900FF"/>
               </a:solidFill>
             </a:endParaRPr>
           </a:p>
           <a:p>
-            <a:pPr indent="0" lvl="0" marL="0" rtl="0" algn="l">
-              <a:spcBef>
-                <a:spcPts val="0"/>
-              </a:spcBef>
-              <a:spcAft>
-                <a:spcPts val="0"/>
-              </a:spcAft>
-              <a:buNone/>
-            </a:pPr>
-            <a:r>
-              <a:rPr lang="en">
+            <a:pPr marL="0" lvl="0" indent="0" algn="l" rtl="0">
+              <a:spcBef>
+                <a:spcPts val="0"/>
+              </a:spcBef>
+              <a:spcAft>
+                <a:spcPts val="0"/>
+              </a:spcAft>
+              <a:buNone/>
+            </a:pPr>
+            <a:r>
+              <a:rPr lang="en" dirty="0">
                 <a:solidFill>
                   <a:srgbClr val="9900FF"/>
                 </a:solidFill>
               </a:rPr>
               <a:t>'Grade': ['B', 'A', 'C', 'B', 'D', 'A', 'C', 'B']</a:t>
             </a:r>
-            <a:endParaRPr>
+            <a:endParaRPr dirty="0">
               <a:solidFill>
                 <a:srgbClr val="9900FF"/>
               </a:solidFill>
             </a:endParaRPr>
           </a:p>
           <a:p>
-            <a:pPr indent="0" lvl="0" marL="0" rtl="0" algn="l">
-              <a:spcBef>
-                <a:spcPts val="0"/>
-              </a:spcBef>
-              <a:spcAft>
-                <a:spcPts val="0"/>
-              </a:spcAft>
-              <a:buNone/>
-            </a:pPr>
-            <a:r>
-              <a:rPr lang="en">
+            <a:pPr marL="0" lvl="0" indent="0" algn="l" rtl="0">
+              <a:spcBef>
+                <a:spcPts val="0"/>
+              </a:spcBef>
+              <a:spcAft>
+                <a:spcPts val="0"/>
+              </a:spcAft>
+              <a:buNone/>
+            </a:pPr>
+            <a:r>
+              <a:rPr lang="en" dirty="0">
                 <a:solidFill>
                   <a:srgbClr val="9900FF"/>
                 </a:solidFill>
               </a:rPr>
               <a:t>}</a:t>
             </a:r>
-            <a:endParaRPr>
+            <a:endParaRPr dirty="0">
               <a:solidFill>
                 <a:srgbClr val="9900FF"/>
               </a:solidFill>
             </a:endParaRPr>
           </a:p>
           <a:p>
-            <a:pPr indent="0" lvl="0" marL="0" rtl="0" algn="l">
-              <a:spcBef>
-                <a:spcPts val="0"/>
-              </a:spcBef>
-              <a:spcAft>
-                <a:spcPts val="0"/>
-              </a:spcAft>
-              <a:buNone/>
-            </a:pPr>
-            <a:r>
-              <a:t/>
-            </a:r>
-            <a:endParaRPr>
+            <a:pPr marL="0" lvl="0" indent="0" algn="l" rtl="0">
+              <a:spcBef>
+                <a:spcPts val="0"/>
+              </a:spcBef>
+              <a:spcAft>
+                <a:spcPts val="0"/>
+              </a:spcAft>
+              <a:buNone/>
+            </a:pPr>
+            <a:endParaRPr dirty="0">
               <a:solidFill>
                 <a:srgbClr val="9900FF"/>
               </a:solidFill>
             </a:endParaRPr>
           </a:p>
           <a:p>
-            <a:pPr indent="0" lvl="0" marL="0" rtl="0" algn="l">
-              <a:spcBef>
-                <a:spcPts val="0"/>
-              </a:spcBef>
-              <a:spcAft>
-                <a:spcPts val="0"/>
-              </a:spcAft>
-              <a:buNone/>
-            </a:pPr>
-            <a:r>
-              <a:rPr lang="en">
+            <a:pPr marL="0" lvl="0" indent="0" algn="l" rtl="0">
+              <a:spcBef>
+                <a:spcPts val="0"/>
+              </a:spcBef>
+              <a:spcAft>
+                <a:spcPts val="0"/>
+              </a:spcAft>
+              <a:buNone/>
+            </a:pPr>
+            <a:r>
+              <a:rPr lang="en" dirty="0">
                 <a:solidFill>
                   <a:srgbClr val="9900FF"/>
                 </a:solidFill>
               </a:rPr>
               <a:t>df = pd.DataFrame(data)</a:t>
             </a:r>
-            <a:endParaRPr>
+            <a:endParaRPr dirty="0">
               <a:solidFill>
                 <a:srgbClr val="9900FF"/>
               </a:solidFill>
             </a:endParaRPr>
           </a:p>
           <a:p>
-            <a:pPr indent="0" lvl="0" marL="0" rtl="0" algn="l">
-              <a:spcBef>
-                <a:spcPts val="0"/>
-              </a:spcBef>
-              <a:spcAft>
-                <a:spcPts val="0"/>
-              </a:spcAft>
-              <a:buNone/>
-            </a:pPr>
-            <a:r>
-              <a:rPr lang="en">
+            <a:pPr marL="0" lvl="0" indent="0" algn="l" rtl="0">
+              <a:spcBef>
+                <a:spcPts val="0"/>
+              </a:spcBef>
+              <a:spcAft>
+                <a:spcPts val="0"/>
+              </a:spcAft>
+              <a:buNone/>
+            </a:pPr>
+            <a:r>
+              <a:rPr lang="en" dirty="0">
                 <a:solidFill>
                   <a:srgbClr val="9900FF"/>
                 </a:solidFill>
               </a:rPr>
               <a:t>print("Sample DataFrame:")</a:t>
             </a:r>
-            <a:endParaRPr>
+            <a:endParaRPr dirty="0">
               <a:solidFill>
                 <a:srgbClr val="9900FF"/>
               </a:solidFill>
             </a:endParaRPr>
           </a:p>
           <a:p>
-            <a:pPr indent="0" lvl="0" marL="0" rtl="0" algn="l">
-              <a:spcBef>
-                <a:spcPts val="0"/>
-              </a:spcBef>
-              <a:spcAft>
-                <a:spcPts val="0"/>
-              </a:spcAft>
-              <a:buNone/>
-            </a:pPr>
-            <a:r>
-              <a:rPr lang="en">
+            <a:pPr marL="0" lvl="0" indent="0" algn="l" rtl="0">
+              <a:spcBef>
+                <a:spcPts val="0"/>
+              </a:spcBef>
+              <a:spcAft>
+                <a:spcPts val="0"/>
+              </a:spcAft>
+              <a:buNone/>
+            </a:pPr>
+            <a:r>
+              <a:rPr lang="en" dirty="0">
                 <a:solidFill>
                   <a:srgbClr val="9900FF"/>
                 </a:solidFill>
               </a:rPr>
               <a:t>print(df)</a:t>
             </a:r>
-            <a:endParaRPr>
+            <a:endParaRPr dirty="0">
               <a:solidFill>
                 <a:srgbClr val="9900FF"/>
               </a:solidFill>
@@ -12608,12 +12816,12 @@
           </a:ln>
         </p:spPr>
         <p:txBody>
-          <a:bodyPr anchorCtr="0" anchor="t" bIns="91425" lIns="91425" spcFirstLastPara="1" rIns="91425" wrap="square" tIns="91425">
+          <a:bodyPr spcFirstLastPara="1" wrap="square" lIns="91425" tIns="91425" rIns="91425" bIns="91425" anchor="t" anchorCtr="0">
             <a:spAutoFit/>
           </a:bodyPr>
           <a:lstStyle/>
           <a:p>
-            <a:pPr indent="0" lvl="0" marL="0" rtl="0" algn="l">
+            <a:pPr marL="0" lvl="0" indent="0" algn="l" rtl="0">
               <a:lnSpc>
                 <a:spcPct val="120000"/>
               </a:lnSpc>
@@ -12626,7 +12834,7 @@
               <a:buNone/>
             </a:pPr>
             <a:r>
-              <a:rPr b="1" lang="en" sz="1350">
+              <a:rPr lang="en" sz="1350" b="1">
                 <a:solidFill>
                   <a:srgbClr val="273239"/>
                 </a:solidFill>
@@ -12640,7 +12848,7 @@
               </a:rPr>
               <a:t>Output -&gt;</a:t>
             </a:r>
-            <a:endParaRPr b="1" sz="1350">
+            <a:endParaRPr sz="1350" b="1">
               <a:solidFill>
                 <a:srgbClr val="273239"/>
               </a:solidFill>
@@ -12654,7 +12862,7 @@
             </a:endParaRPr>
           </a:p>
           <a:p>
-            <a:pPr indent="0" lvl="0" marL="0" rtl="0" algn="l">
+            <a:pPr marL="0" lvl="0" indent="0" algn="l" rtl="0">
               <a:lnSpc>
                 <a:spcPct val="115000"/>
               </a:lnSpc>
@@ -12666,9 +12874,6 @@
               </a:spcAft>
               <a:buNone/>
             </a:pPr>
-            <a:r>
-              <a:t/>
-            </a:r>
             <a:endParaRPr sz="1100">
               <a:solidFill>
                 <a:schemeClr val="dk1"/>
@@ -12682,15 +12887,22 @@
   <p:clrMapOvr>
     <a:masterClrMapping/>
   </p:clrMapOvr>
+  <p:timing>
+    <p:tnLst>
+      <p:par>
+        <p:cTn id="1" dur="indefinite" restart="never" nodeType="tmRoot"/>
+      </p:par>
+    </p:tnLst>
+  </p:timing>
 </p:sld>
 </file>
 
 <file path=ppt/slides/slide8.xml><?xml version="1.0" encoding="utf-8"?>
-<p:sld xmlns:a="http://schemas.openxmlformats.org/drawingml/2006/main" xmlns:r="http://schemas.openxmlformats.org/officeDocument/2006/relationships" xmlns:mc="http://schemas.openxmlformats.org/markup-compatibility/2006" xmlns:mv="urn:schemas-microsoft-com:mac:vml" xmlns:p="http://schemas.openxmlformats.org/presentationml/2006/main" xmlns:c="http://schemas.openxmlformats.org/drawingml/2006/chart" xmlns:dgm="http://schemas.openxmlformats.org/drawingml/2006/diagram" xmlns:o="urn:schemas-microsoft-com:office:office" xmlns:v="urn:schemas-microsoft-com:vml" xmlns:pvml="urn:schemas-microsoft-com:office:powerpoint" xmlns:com="http://schemas.openxmlformats.org/drawingml/2006/compatibility" xmlns:p14="http://schemas.microsoft.com/office/powerpoint/2010/main" xmlns:p15="http://schemas.microsoft.com/office/powerpoint/2012/main" xmlns:ahyp="http://schemas.microsoft.com/office/drawing/2018/hyperlinkcolor">
+<p:sld xmlns:a="http://schemas.openxmlformats.org/drawingml/2006/main" xmlns:r="http://schemas.openxmlformats.org/officeDocument/2006/relationships" xmlns:p="http://schemas.openxmlformats.org/presentationml/2006/main">
   <p:cSld>
     <p:spTree>
       <p:nvGrpSpPr>
-        <p:cNvPr id="92" name="Shape 92"/>
+        <p:cNvPr id="1" name="Shape 92"/>
         <p:cNvGrpSpPr/>
         <p:nvPr/>
       </p:nvGrpSpPr>
@@ -12717,23 +12929,23 @@
             <a:avLst/>
           </a:prstGeom>
           <a:noFill/>
-          <a:ln cap="flat" cmpd="sng" w="19050">
+          <a:ln w="19050" cap="flat" cmpd="sng">
             <a:solidFill>
               <a:schemeClr val="lt1"/>
             </a:solidFill>
             <a:prstDash val="solid"/>
             <a:round/>
-            <a:headEnd len="sm" w="sm" type="none"/>
-            <a:tailEnd len="sm" w="sm" type="none"/>
+            <a:headEnd type="none" w="sm" len="sm"/>
+            <a:tailEnd type="none" w="sm" len="sm"/>
           </a:ln>
         </p:spPr>
         <p:txBody>
-          <a:bodyPr anchorCtr="0" anchor="t" bIns="91425" lIns="91425" spcFirstLastPara="1" rIns="91425" wrap="square" tIns="91425">
+          <a:bodyPr spcFirstLastPara="1" wrap="square" lIns="91425" tIns="91425" rIns="91425" bIns="91425" anchor="t" anchorCtr="0">
             <a:spAutoFit/>
           </a:bodyPr>
           <a:lstStyle/>
           <a:p>
-            <a:pPr indent="0" lvl="0" marL="0" rtl="0" algn="l">
+            <a:pPr marL="0" lvl="0" indent="0" algn="l" rtl="0">
               <a:lnSpc>
                 <a:spcPct val="115000"/>
               </a:lnSpc>
@@ -12746,21 +12958,21 @@
               <a:buNone/>
             </a:pPr>
             <a:r>
-              <a:rPr b="1" lang="en" sz="1300">
+              <a:rPr lang="en" sz="1300" b="1">
                 <a:solidFill>
                   <a:schemeClr val="dk1"/>
                 </a:solidFill>
               </a:rPr>
               <a:t>1. Deleting Rows Containing Missing Values</a:t>
             </a:r>
-            <a:endParaRPr b="1" sz="1300">
+            <a:endParaRPr sz="1300" b="1">
               <a:solidFill>
                 <a:schemeClr val="dk1"/>
               </a:solidFill>
             </a:endParaRPr>
           </a:p>
           <a:p>
-            <a:pPr indent="0" lvl="0" marL="0" rtl="0" algn="l">
+            <a:pPr marL="0" lvl="0" indent="0" algn="l" rtl="0">
               <a:lnSpc>
                 <a:spcPct val="115000"/>
               </a:lnSpc>
@@ -12787,7 +12999,7 @@
             </a:endParaRPr>
           </a:p>
           <a:p>
-            <a:pPr indent="0" lvl="0" marL="0" rtl="0" algn="l">
+            <a:pPr marL="0" lvl="0" indent="0" algn="l" rtl="0">
               <a:lnSpc>
                 <a:spcPct val="115000"/>
               </a:lnSpc>
@@ -12883,30 +13095,30 @@
         </p:nvSpPr>
         <p:spPr>
           <a:xfrm>
-            <a:off x="0" y="1670700"/>
+            <a:off x="41835" y="1764429"/>
             <a:ext cx="9144000" cy="1046700"/>
           </a:xfrm>
           <a:prstGeom prst="rect">
             <a:avLst/>
           </a:prstGeom>
           <a:noFill/>
-          <a:ln cap="flat" cmpd="sng" w="19050">
+          <a:ln w="19050" cap="flat" cmpd="sng">
             <a:solidFill>
               <a:schemeClr val="accent4"/>
             </a:solidFill>
             <a:prstDash val="solid"/>
             <a:round/>
-            <a:headEnd len="sm" w="sm" type="none"/>
-            <a:tailEnd len="sm" w="sm" type="none"/>
+            <a:headEnd type="none" w="sm" len="sm"/>
+            <a:tailEnd type="none" w="sm" len="sm"/>
           </a:ln>
         </p:spPr>
         <p:txBody>
-          <a:bodyPr anchorCtr="0" anchor="t" bIns="91425" lIns="91425" spcFirstLastPara="1" rIns="91425" wrap="square" tIns="91425">
+          <a:bodyPr spcFirstLastPara="1" wrap="square" lIns="91425" tIns="91425" rIns="91425" bIns="91425" anchor="t" anchorCtr="0">
             <a:spAutoFit/>
           </a:bodyPr>
           <a:lstStyle/>
           <a:p>
-            <a:pPr indent="0" lvl="0" marL="0" rtl="0" algn="l">
+            <a:pPr marL="0" lvl="0" indent="0" algn="l" rtl="0">
               <a:spcBef>
                 <a:spcPts val="0"/>
               </a:spcBef>
@@ -12930,18 +13142,15 @@
             </a:endParaRPr>
           </a:p>
           <a:p>
-            <a:pPr indent="0" lvl="0" marL="0" rtl="0" algn="l">
-              <a:spcBef>
-                <a:spcPts val="0"/>
-              </a:spcBef>
-              <a:spcAft>
-                <a:spcPts val="0"/>
-              </a:spcAft>
-              <a:buNone/>
-            </a:pPr>
-            <a:r>
-              <a:t/>
-            </a:r>
+            <a:pPr marL="0" lvl="0" indent="0" algn="l" rtl="0">
+              <a:spcBef>
+                <a:spcPts val="0"/>
+              </a:spcBef>
+              <a:spcAft>
+                <a:spcPts val="0"/>
+              </a:spcAft>
+              <a:buNone/>
+            </a:pPr>
             <a:endParaRPr>
               <a:solidFill>
                 <a:srgbClr val="9900FF"/>
@@ -12949,7 +13158,7 @@
             </a:endParaRPr>
           </a:p>
           <a:p>
-            <a:pPr indent="0" lvl="0" marL="0" rtl="0" algn="l">
+            <a:pPr marL="0" lvl="0" indent="0" algn="l" rtl="0">
               <a:spcBef>
                 <a:spcPts val="0"/>
               </a:spcBef>
@@ -12973,7 +13182,7 @@
             </a:endParaRPr>
           </a:p>
           <a:p>
-            <a:pPr indent="0" lvl="0" marL="0" rtl="0" algn="l">
+            <a:pPr marL="0" lvl="0" indent="0" algn="l" rtl="0">
               <a:spcBef>
                 <a:spcPts val="0"/>
               </a:spcBef>
@@ -13018,22 +13227,22 @@
           </a:ln>
         </p:spPr>
         <p:txBody>
-          <a:bodyPr anchorCtr="0" anchor="t" bIns="91425" lIns="91425" spcFirstLastPara="1" rIns="91425" wrap="square" tIns="91425">
+          <a:bodyPr spcFirstLastPara="1" wrap="square" lIns="91425" tIns="91425" rIns="91425" bIns="91425" anchor="t" anchorCtr="0">
             <a:spAutoFit/>
           </a:bodyPr>
           <a:lstStyle/>
           <a:p>
-            <a:pPr indent="0" lvl="0" marL="0" rtl="0" algn="l">
-              <a:spcBef>
-                <a:spcPts val="0"/>
-              </a:spcBef>
-              <a:spcAft>
-                <a:spcPts val="0"/>
-              </a:spcAft>
-              <a:buNone/>
-            </a:pPr>
-            <a:r>
-              <a:rPr b="1" lang="en" sz="1350">
+            <a:pPr marL="0" lvl="0" indent="0" algn="l" rtl="0">
+              <a:spcBef>
+                <a:spcPts val="0"/>
+              </a:spcBef>
+              <a:spcAft>
+                <a:spcPts val="0"/>
+              </a:spcAft>
+              <a:buNone/>
+            </a:pPr>
+            <a:r>
+              <a:rPr lang="en" sz="1350" b="1">
                 <a:solidFill>
                   <a:srgbClr val="273239"/>
                 </a:solidFill>
@@ -13082,14 +13291,14 @@
             <a:avLst/>
           </a:prstGeom>
           <a:noFill/>
-          <a:ln cap="flat" cmpd="sng" w="9525">
+          <a:ln w="9525" cap="flat" cmpd="sng">
             <a:solidFill>
               <a:schemeClr val="dk1"/>
             </a:solidFill>
             <a:prstDash val="solid"/>
             <a:round/>
-            <a:headEnd len="sm" w="sm" type="none"/>
-            <a:tailEnd len="sm" w="sm" type="none"/>
+            <a:headEnd type="none" w="sm" len="sm"/>
+            <a:tailEnd type="none" w="sm" len="sm"/>
           </a:ln>
         </p:spPr>
       </p:pic>
@@ -13113,12 +13322,12 @@
           </a:ln>
         </p:spPr>
         <p:txBody>
-          <a:bodyPr anchorCtr="0" anchor="t" bIns="91425" lIns="91425" spcFirstLastPara="1" rIns="91425" wrap="square" tIns="91425">
+          <a:bodyPr spcFirstLastPara="1" wrap="square" lIns="91425" tIns="91425" rIns="91425" bIns="91425" anchor="t" anchorCtr="0">
             <a:spAutoFit/>
           </a:bodyPr>
           <a:lstStyle/>
           <a:p>
-            <a:pPr indent="0" lvl="0" marL="0" rtl="0" algn="l">
+            <a:pPr marL="0" lvl="0" indent="0" algn="l" rtl="0">
               <a:lnSpc>
                 <a:spcPct val="115000"/>
               </a:lnSpc>
@@ -13131,7 +13340,7 @@
               <a:buNone/>
             </a:pPr>
             <a:r>
-              <a:rPr b="1" lang="en" sz="1100">
+              <a:rPr lang="en" sz="1100" b="1">
                 <a:solidFill>
                   <a:schemeClr val="dk1"/>
                 </a:solidFill>
@@ -13153,7 +13362,7 @@
             </a:endParaRPr>
           </a:p>
           <a:p>
-            <a:pPr indent="0" lvl="0" marL="0" rtl="0" algn="l">
+            <a:pPr marL="0" lvl="0" indent="0" algn="l" rtl="0">
               <a:lnSpc>
                 <a:spcPct val="115000"/>
               </a:lnSpc>
@@ -13166,7 +13375,7 @@
               <a:buNone/>
             </a:pPr>
             <a:r>
-              <a:rPr b="1" lang="en" sz="1100">
+              <a:rPr lang="en" sz="1100" b="1">
                 <a:solidFill>
                   <a:schemeClr val="dk1"/>
                 </a:solidFill>
@@ -13194,15 +13403,22 @@
   <p:clrMapOvr>
     <a:masterClrMapping/>
   </p:clrMapOvr>
+  <p:timing>
+    <p:tnLst>
+      <p:par>
+        <p:cTn id="1" dur="indefinite" restart="never" nodeType="tmRoot"/>
+      </p:par>
+    </p:tnLst>
+  </p:timing>
 </p:sld>
 </file>
 
 <file path=ppt/slides/slide9.xml><?xml version="1.0" encoding="utf-8"?>
-<p:sld xmlns:a="http://schemas.openxmlformats.org/drawingml/2006/main" xmlns:r="http://schemas.openxmlformats.org/officeDocument/2006/relationships" xmlns:mc="http://schemas.openxmlformats.org/markup-compatibility/2006" xmlns:mv="urn:schemas-microsoft-com:mac:vml" xmlns:p="http://schemas.openxmlformats.org/presentationml/2006/main" xmlns:c="http://schemas.openxmlformats.org/drawingml/2006/chart" xmlns:dgm="http://schemas.openxmlformats.org/drawingml/2006/diagram" xmlns:o="urn:schemas-microsoft-com:office:office" xmlns:v="urn:schemas-microsoft-com:vml" xmlns:pvml="urn:schemas-microsoft-com:office:powerpoint" xmlns:com="http://schemas.openxmlformats.org/drawingml/2006/compatibility" xmlns:p14="http://schemas.microsoft.com/office/powerpoint/2010/main" xmlns:p15="http://schemas.microsoft.com/office/powerpoint/2012/main" xmlns:ahyp="http://schemas.microsoft.com/office/drawing/2018/hyperlinkcolor">
+<p:sld xmlns:a="http://schemas.openxmlformats.org/drawingml/2006/main" xmlns:r="http://schemas.openxmlformats.org/officeDocument/2006/relationships" xmlns:p="http://schemas.openxmlformats.org/presentationml/2006/main">
   <p:cSld>
     <p:spTree>
       <p:nvGrpSpPr>
-        <p:cNvPr id="101" name="Shape 101"/>
+        <p:cNvPr id="1" name="Shape 101"/>
         <p:cNvGrpSpPr/>
         <p:nvPr/>
       </p:nvGrpSpPr>
@@ -13234,12 +13450,12 @@
           </a:ln>
         </p:spPr>
         <p:txBody>
-          <a:bodyPr anchorCtr="0" anchor="t" bIns="91425" lIns="91425" spcFirstLastPara="1" rIns="91425" wrap="square" tIns="91425">
+          <a:bodyPr spcFirstLastPara="1" wrap="square" lIns="91425" tIns="91425" rIns="91425" bIns="91425" anchor="t" anchorCtr="0">
             <a:spAutoFit/>
           </a:bodyPr>
           <a:lstStyle/>
           <a:p>
-            <a:pPr indent="0" lvl="0" marL="0" rtl="0" algn="l">
+            <a:pPr marL="0" lvl="0" indent="0" algn="l" rtl="0">
               <a:lnSpc>
                 <a:spcPct val="115000"/>
               </a:lnSpc>
@@ -13252,21 +13468,21 @@
               <a:buNone/>
             </a:pPr>
             <a:r>
-              <a:rPr b="1" lang="en" sz="1300">
+              <a:rPr lang="en" sz="1300" b="1">
                 <a:solidFill>
                   <a:schemeClr val="dk1"/>
                 </a:solidFill>
               </a:rPr>
               <a:t>2. Imputation Techniques</a:t>
             </a:r>
-            <a:endParaRPr b="1" sz="1300">
+            <a:endParaRPr sz="1300" b="1">
               <a:solidFill>
                 <a:schemeClr val="dk1"/>
               </a:solidFill>
             </a:endParaRPr>
           </a:p>
           <a:p>
-            <a:pPr indent="0" lvl="0" marL="0" rtl="0" algn="l">
+            <a:pPr marL="0" lvl="0" indent="0" algn="l" rtl="0">
               <a:lnSpc>
                 <a:spcPct val="115000"/>
               </a:lnSpc>
@@ -13293,7 +13509,7 @@
             </a:endParaRPr>
           </a:p>
           <a:p>
-            <a:pPr indent="0" lvl="0" marL="0" rtl="0" algn="l">
+            <a:pPr marL="0" lvl="0" indent="0" algn="l" rtl="0">
               <a:lnSpc>
                 <a:spcPct val="115000"/>
               </a:lnSpc>
@@ -13306,7 +13522,7 @@
               <a:buNone/>
             </a:pPr>
             <a:r>
-              <a:rPr b="1" lang="en" sz="1100">
+              <a:rPr lang="en" sz="1100" b="1">
                 <a:solidFill>
                   <a:schemeClr val="dk1"/>
                 </a:solidFill>
@@ -13314,7 +13530,7 @@
               <a:t>1. Mean, Median, and Mode Imputation:</a:t>
             </a:r>
             <a:br>
-              <a:rPr b="1" lang="en" sz="1100">
+              <a:rPr lang="en" sz="1100" b="1">
                 <a:solidFill>
                   <a:schemeClr val="dk1"/>
                 </a:solidFill>
@@ -13344,30 +13560,30 @@
         </p:nvSpPr>
         <p:spPr>
           <a:xfrm>
-            <a:off x="0" y="1735375"/>
+            <a:off x="65741" y="1836975"/>
             <a:ext cx="6144000" cy="2770500"/>
           </a:xfrm>
           <a:prstGeom prst="rect">
             <a:avLst/>
           </a:prstGeom>
           <a:noFill/>
-          <a:ln cap="flat" cmpd="sng" w="19050">
+          <a:ln w="19050" cap="flat" cmpd="sng">
             <a:solidFill>
               <a:srgbClr val="188038"/>
             </a:solidFill>
             <a:prstDash val="solid"/>
             <a:round/>
-            <a:headEnd len="sm" w="sm" type="none"/>
-            <a:tailEnd len="sm" w="sm" type="none"/>
+            <a:headEnd type="none" w="sm" len="sm"/>
+            <a:tailEnd type="none" w="sm" len="sm"/>
           </a:ln>
         </p:spPr>
         <p:txBody>
-          <a:bodyPr anchorCtr="0" anchor="t" bIns="91425" lIns="91425" spcFirstLastPara="1" rIns="91425" wrap="square" tIns="91425">
+          <a:bodyPr spcFirstLastPara="1" wrap="square" lIns="91425" tIns="91425" rIns="91425" bIns="91425" anchor="t" anchorCtr="0">
             <a:spAutoFit/>
           </a:bodyPr>
           <a:lstStyle/>
           <a:p>
-            <a:pPr indent="0" lvl="0" marL="0" rtl="0" algn="l">
+            <a:pPr marL="0" lvl="0" indent="0" algn="l" rtl="0">
               <a:spcBef>
                 <a:spcPts val="0"/>
               </a:spcBef>
@@ -13391,7 +13607,7 @@
             </a:endParaRPr>
           </a:p>
           <a:p>
-            <a:pPr indent="0" lvl="0" marL="0" rtl="0" algn="l">
+            <a:pPr marL="0" lvl="0" indent="0" algn="l" rtl="0">
               <a:spcBef>
                 <a:spcPts val="0"/>
               </a:spcBef>
@@ -13415,7 +13631,7 @@
             </a:endParaRPr>
           </a:p>
           <a:p>
-            <a:pPr indent="0" lvl="0" marL="0" rtl="0" algn="l">
+            <a:pPr marL="0" lvl="0" indent="0" algn="l" rtl="0">
               <a:spcBef>
                 <a:spcPts val="0"/>
               </a:spcBef>
@@ -13439,18 +13655,15 @@
             </a:endParaRPr>
           </a:p>
           <a:p>
-            <a:pPr indent="0" lvl="0" marL="0" rtl="0" algn="l">
-              <a:spcBef>
-                <a:spcPts val="0"/>
-              </a:spcBef>
-              <a:spcAft>
-                <a:spcPts val="0"/>
-              </a:spcAft>
-              <a:buNone/>
-            </a:pPr>
-            <a:r>
-              <a:t/>
-            </a:r>
+            <a:pPr marL="0" lvl="0" indent="0" algn="l" rtl="0">
+              <a:spcBef>
+                <a:spcPts val="0"/>
+              </a:spcBef>
+              <a:spcAft>
+                <a:spcPts val="0"/>
+              </a:spcAft>
+              <a:buNone/>
+            </a:pPr>
             <a:endParaRPr>
               <a:solidFill>
                 <a:srgbClr val="9900FF"/>
@@ -13458,7 +13671,7 @@
             </a:endParaRPr>
           </a:p>
           <a:p>
-            <a:pPr indent="0" lvl="0" marL="0" rtl="0" algn="l">
+            <a:pPr marL="0" lvl="0" indent="0" algn="l" rtl="0">
               <a:spcBef>
                 <a:spcPts val="0"/>
               </a:spcBef>
@@ -13482,7 +13695,7 @@
             </a:endParaRPr>
           </a:p>
           <a:p>
-            <a:pPr indent="0" lvl="0" marL="0" rtl="0" algn="l">
+            <a:pPr marL="0" lvl="0" indent="0" algn="l" rtl="0">
               <a:spcBef>
                 <a:spcPts val="0"/>
               </a:spcBef>
@@ -13506,18 +13719,15 @@
             </a:endParaRPr>
           </a:p>
           <a:p>
-            <a:pPr indent="0" lvl="0" marL="0" rtl="0" algn="l">
-              <a:spcBef>
-                <a:spcPts val="0"/>
-              </a:spcBef>
-              <a:spcAft>
-                <a:spcPts val="0"/>
-              </a:spcAft>
-              <a:buNone/>
-            </a:pPr>
-            <a:r>
-              <a:t/>
-            </a:r>
+            <a:pPr marL="0" lvl="0" indent="0" algn="l" rtl="0">
+              <a:spcBef>
+                <a:spcPts val="0"/>
+              </a:spcBef>
+              <a:spcAft>
+                <a:spcPts val="0"/>
+              </a:spcAft>
+              <a:buNone/>
+            </a:pPr>
             <a:endParaRPr>
               <a:solidFill>
                 <a:srgbClr val="9900FF"/>
@@ -13525,7 +13735,7 @@
             </a:endParaRPr>
           </a:p>
           <a:p>
-            <a:pPr indent="0" lvl="0" marL="0" rtl="0" algn="l">
+            <a:pPr marL="0" lvl="0" indent="0" algn="l" rtl="0">
               <a:spcBef>
                 <a:spcPts val="0"/>
               </a:spcBef>
@@ -13549,7 +13759,7 @@
             </a:endParaRPr>
           </a:p>
           <a:p>
-            <a:pPr indent="0" lvl="0" marL="0" rtl="0" algn="l">
+            <a:pPr marL="0" lvl="0" indent="0" algn="l" rtl="0">
               <a:spcBef>
                 <a:spcPts val="0"/>
               </a:spcBef>
@@ -13573,18 +13783,15 @@
             </a:endParaRPr>
           </a:p>
           <a:p>
-            <a:pPr indent="0" lvl="0" marL="0" rtl="0" algn="l">
-              <a:spcBef>
-                <a:spcPts val="0"/>
-              </a:spcBef>
-              <a:spcAft>
-                <a:spcPts val="0"/>
-              </a:spcAft>
-              <a:buNone/>
-            </a:pPr>
-            <a:r>
-              <a:t/>
-            </a:r>
+            <a:pPr marL="0" lvl="0" indent="0" algn="l" rtl="0">
+              <a:spcBef>
+                <a:spcPts val="0"/>
+              </a:spcBef>
+              <a:spcAft>
+                <a:spcPts val="0"/>
+              </a:spcAft>
+              <a:buNone/>
+            </a:pPr>
             <a:endParaRPr>
               <a:solidFill>
                 <a:srgbClr val="9900FF"/>
@@ -13592,7 +13799,7 @@
             </a:endParaRPr>
           </a:p>
           <a:p>
-            <a:pPr indent="0" lvl="0" marL="0" rtl="0" algn="l">
+            <a:pPr marL="0" lvl="0" indent="0" algn="l" rtl="0">
               <a:spcBef>
                 <a:spcPts val="0"/>
               </a:spcBef>
@@ -13616,7 +13823,7 @@
             </a:endParaRPr>
           </a:p>
           <a:p>
-            <a:pPr indent="0" lvl="0" marL="0" rtl="0" algn="l">
+            <a:pPr marL="0" lvl="0" indent="0" algn="l" rtl="0">
               <a:spcBef>
                 <a:spcPts val="0"/>
               </a:spcBef>
@@ -13664,14 +13871,14 @@
             <a:avLst/>
           </a:prstGeom>
           <a:noFill/>
-          <a:ln cap="flat" cmpd="sng" w="9525">
+          <a:ln w="9525" cap="flat" cmpd="sng">
             <a:solidFill>
               <a:schemeClr val="dk1"/>
             </a:solidFill>
             <a:prstDash val="solid"/>
             <a:round/>
-            <a:headEnd len="sm" w="sm" type="none"/>
-            <a:tailEnd len="sm" w="sm" type="none"/>
+            <a:headEnd type="none" w="sm" len="sm"/>
+            <a:tailEnd type="none" w="sm" len="sm"/>
           </a:ln>
         </p:spPr>
       </p:pic>
@@ -13695,12 +13902,12 @@
           </a:ln>
         </p:spPr>
         <p:txBody>
-          <a:bodyPr anchorCtr="0" anchor="t" bIns="91425" lIns="91425" spcFirstLastPara="1" rIns="91425" wrap="square" tIns="91425">
+          <a:bodyPr spcFirstLastPara="1" wrap="square" lIns="91425" tIns="91425" rIns="91425" bIns="91425" anchor="t" anchorCtr="0">
             <a:spAutoFit/>
           </a:bodyPr>
           <a:lstStyle/>
           <a:p>
-            <a:pPr indent="0" lvl="0" marL="0" rtl="0" algn="l">
+            <a:pPr marL="0" lvl="0" indent="0" algn="l" rtl="0">
               <a:lnSpc>
                 <a:spcPct val="120000"/>
               </a:lnSpc>
@@ -13713,7 +13920,7 @@
               <a:buNone/>
             </a:pPr>
             <a:r>
-              <a:rPr b="1" lang="en" sz="1350">
+              <a:rPr lang="en" sz="1350" b="1">
                 <a:solidFill>
                   <a:srgbClr val="273239"/>
                 </a:solidFill>
@@ -13727,7 +13934,7 @@
               </a:rPr>
               <a:t>Output:</a:t>
             </a:r>
-            <a:endParaRPr b="1" sz="1350">
+            <a:endParaRPr sz="1350" b="1">
               <a:solidFill>
                 <a:srgbClr val="273239"/>
               </a:solidFill>
@@ -13741,7 +13948,7 @@
             </a:endParaRPr>
           </a:p>
           <a:p>
-            <a:pPr indent="0" lvl="0" marL="0" rtl="0" algn="l">
+            <a:pPr marL="0" lvl="0" indent="0" algn="l" rtl="0">
               <a:lnSpc>
                 <a:spcPct val="115000"/>
               </a:lnSpc>
@@ -13753,9 +13960,6 @@
               </a:spcAft>
               <a:buNone/>
             </a:pPr>
-            <a:r>
-              <a:t/>
-            </a:r>
             <a:endParaRPr sz="1100">
               <a:solidFill>
                 <a:schemeClr val="dk1"/>
@@ -13769,11 +13973,299 @@
   <p:clrMapOvr>
     <a:masterClrMapping/>
   </p:clrMapOvr>
+  <p:timing>
+    <p:tnLst>
+      <p:par>
+        <p:cTn id="1" dur="indefinite" restart="never" nodeType="tmRoot"/>
+      </p:par>
+    </p:tnLst>
+  </p:timing>
 </p:sld>
 </file>
 
 <file path=ppt/theme/theme1.xml><?xml version="1.0" encoding="utf-8"?>
-<a:theme xmlns:a="http://schemas.openxmlformats.org/drawingml/2006/main" xmlns:r="http://schemas.openxmlformats.org/officeDocument/2006/relationships">
+<a:theme xmlns:a="http://schemas.openxmlformats.org/drawingml/2006/main" name="Simple Light">
+  <a:themeElements>
+    <a:clrScheme name="Simple Light">
+      <a:dk1>
+        <a:srgbClr val="000000"/>
+      </a:dk1>
+      <a:lt1>
+        <a:srgbClr val="FFFFFF"/>
+      </a:lt1>
+      <a:dk2>
+        <a:srgbClr val="595959"/>
+      </a:dk2>
+      <a:lt2>
+        <a:srgbClr val="EEEEEE"/>
+      </a:lt2>
+      <a:accent1>
+        <a:srgbClr val="4285F4"/>
+      </a:accent1>
+      <a:accent2>
+        <a:srgbClr val="212121"/>
+      </a:accent2>
+      <a:accent3>
+        <a:srgbClr val="78909C"/>
+      </a:accent3>
+      <a:accent4>
+        <a:srgbClr val="FFAB40"/>
+      </a:accent4>
+      <a:accent5>
+        <a:srgbClr val="0097A7"/>
+      </a:accent5>
+      <a:accent6>
+        <a:srgbClr val="EEFF41"/>
+      </a:accent6>
+      <a:hlink>
+        <a:srgbClr val="0097A7"/>
+      </a:hlink>
+      <a:folHlink>
+        <a:srgbClr val="0097A7"/>
+      </a:folHlink>
+    </a:clrScheme>
+    <a:fontScheme name="Office">
+      <a:majorFont>
+        <a:latin typeface="Arial"/>
+        <a:ea typeface=""/>
+        <a:cs typeface=""/>
+        <a:font script="Jpan" typeface="ＭＳ Ｐゴシック"/>
+        <a:font script="Hang" typeface="맑은 고딕"/>
+        <a:font script="Hans" typeface="宋体"/>
+        <a:font script="Hant" typeface="新細明體"/>
+        <a:font script="Arab" typeface="Times New Roman"/>
+        <a:font script="Hebr" typeface="Times New Roman"/>
+        <a:font script="Thai" typeface="Angsana New"/>
+        <a:font script="Ethi" typeface="Nyala"/>
+        <a:font script="Beng" typeface="Vrinda"/>
+        <a:font script="Gujr" typeface="Shruti"/>
+        <a:font script="Khmr" typeface="MoolBoran"/>
+        <a:font script="Knda" typeface="Tunga"/>
+        <a:font script="Guru" typeface="Raavi"/>
+        <a:font script="Cans" typeface="Euphemia"/>
+        <a:font script="Cher" typeface="Plantagenet Cherokee"/>
+        <a:font script="Yiii" typeface="Microsoft Yi Baiti"/>
+        <a:font script="Tibt" typeface="Microsoft Himalaya"/>
+        <a:font script="Thaa" typeface="MV Boli"/>
+        <a:font script="Deva" typeface="Mangal"/>
+        <a:font script="Telu" typeface="Gautami"/>
+        <a:font script="Taml" typeface="Latha"/>
+        <a:font script="Syrc" typeface="Estrangelo Edessa"/>
+        <a:font script="Orya" typeface="Kalinga"/>
+        <a:font script="Mlym" typeface="Kartika"/>
+        <a:font script="Laoo" typeface="DokChampa"/>
+        <a:font script="Sinh" typeface="Iskoola Pota"/>
+        <a:font script="Mong" typeface="Mongolian Baiti"/>
+        <a:font script="Viet" typeface="Times New Roman"/>
+        <a:font script="Uigh" typeface="Microsoft Uighur"/>
+        <a:font script="Geor" typeface="Sylfaen"/>
+      </a:majorFont>
+      <a:minorFont>
+        <a:latin typeface="Arial"/>
+        <a:ea typeface=""/>
+        <a:cs typeface=""/>
+        <a:font script="Jpan" typeface="ＭＳ Ｐゴシック"/>
+        <a:font script="Hang" typeface="맑은 고딕"/>
+        <a:font script="Hans" typeface="宋体"/>
+        <a:font script="Hant" typeface="新細明體"/>
+        <a:font script="Arab" typeface="Arial"/>
+        <a:font script="Hebr" typeface="Arial"/>
+        <a:font script="Thai" typeface="Cordia New"/>
+        <a:font script="Ethi" typeface="Nyala"/>
+        <a:font script="Beng" typeface="Vrinda"/>
+        <a:font script="Gujr" typeface="Shruti"/>
+        <a:font script="Khmr" typeface="DaunPenh"/>
+        <a:font script="Knda" typeface="Tunga"/>
+        <a:font script="Guru" typeface="Raavi"/>
+        <a:font script="Cans" typeface="Euphemia"/>
+        <a:font script="Cher" typeface="Plantagenet Cherokee"/>
+        <a:font script="Yiii" typeface="Microsoft Yi Baiti"/>
+        <a:font script="Tibt" typeface="Microsoft Himalaya"/>
+        <a:font script="Thaa" typeface="MV Boli"/>
+        <a:font script="Deva" typeface="Mangal"/>
+        <a:font script="Telu" typeface="Gautami"/>
+        <a:font script="Taml" typeface="Latha"/>
+        <a:font script="Syrc" typeface="Estrangelo Edessa"/>
+        <a:font script="Orya" typeface="Kalinga"/>
+        <a:font script="Mlym" typeface="Kartika"/>
+        <a:font script="Laoo" typeface="DokChampa"/>
+        <a:font script="Sinh" typeface="Iskoola Pota"/>
+        <a:font script="Mong" typeface="Mongolian Baiti"/>
+        <a:font script="Viet" typeface="Arial"/>
+        <a:font script="Uigh" typeface="Microsoft Uighur"/>
+        <a:font script="Geor" typeface="Sylfaen"/>
+      </a:minorFont>
+    </a:fontScheme>
+    <a:fmtScheme name="Office">
+      <a:fillStyleLst>
+        <a:solidFill>
+          <a:schemeClr val="phClr"/>
+        </a:solidFill>
+        <a:gradFill rotWithShape="1">
+          <a:gsLst>
+            <a:gs pos="0">
+              <a:schemeClr val="phClr">
+                <a:tint val="50000"/>
+                <a:satMod val="300000"/>
+              </a:schemeClr>
+            </a:gs>
+            <a:gs pos="35000">
+              <a:schemeClr val="phClr">
+                <a:tint val="37000"/>
+                <a:satMod val="300000"/>
+              </a:schemeClr>
+            </a:gs>
+            <a:gs pos="100000">
+              <a:schemeClr val="phClr">
+                <a:tint val="15000"/>
+                <a:satMod val="350000"/>
+              </a:schemeClr>
+            </a:gs>
+          </a:gsLst>
+          <a:lin ang="16200000" scaled="1"/>
+        </a:gradFill>
+        <a:gradFill rotWithShape="1">
+          <a:gsLst>
+            <a:gs pos="0">
+              <a:schemeClr val="phClr">
+                <a:tint val="100000"/>
+                <a:shade val="100000"/>
+                <a:satMod val="130000"/>
+              </a:schemeClr>
+            </a:gs>
+            <a:gs pos="100000">
+              <a:schemeClr val="phClr">
+                <a:tint val="50000"/>
+                <a:shade val="100000"/>
+                <a:satMod val="350000"/>
+              </a:schemeClr>
+            </a:gs>
+          </a:gsLst>
+          <a:lin ang="16200000" scaled="0"/>
+        </a:gradFill>
+      </a:fillStyleLst>
+      <a:lnStyleLst>
+        <a:ln w="9525" cap="flat" cmpd="sng" algn="ctr">
+          <a:solidFill>
+            <a:schemeClr val="phClr">
+              <a:shade val="95000"/>
+              <a:satMod val="105000"/>
+            </a:schemeClr>
+          </a:solidFill>
+          <a:prstDash val="solid"/>
+        </a:ln>
+        <a:ln w="25400" cap="flat" cmpd="sng" algn="ctr">
+          <a:solidFill>
+            <a:schemeClr val="phClr"/>
+          </a:solidFill>
+          <a:prstDash val="solid"/>
+        </a:ln>
+        <a:ln w="38100" cap="flat" cmpd="sng" algn="ctr">
+          <a:solidFill>
+            <a:schemeClr val="phClr"/>
+          </a:solidFill>
+          <a:prstDash val="solid"/>
+        </a:ln>
+      </a:lnStyleLst>
+      <a:effectStyleLst>
+        <a:effectStyle>
+          <a:effectLst>
+            <a:outerShdw blurRad="40000" dist="20000" dir="5400000" rotWithShape="0">
+              <a:srgbClr val="000000">
+                <a:alpha val="38000"/>
+              </a:srgbClr>
+            </a:outerShdw>
+          </a:effectLst>
+        </a:effectStyle>
+        <a:effectStyle>
+          <a:effectLst>
+            <a:outerShdw blurRad="40000" dist="23000" dir="5400000" rotWithShape="0">
+              <a:srgbClr val="000000">
+                <a:alpha val="35000"/>
+              </a:srgbClr>
+            </a:outerShdw>
+          </a:effectLst>
+        </a:effectStyle>
+        <a:effectStyle>
+          <a:effectLst>
+            <a:outerShdw blurRad="40000" dist="23000" dir="5400000" rotWithShape="0">
+              <a:srgbClr val="000000">
+                <a:alpha val="35000"/>
+              </a:srgbClr>
+            </a:outerShdw>
+          </a:effectLst>
+          <a:scene3d>
+            <a:camera prst="orthographicFront">
+              <a:rot lat="0" lon="0" rev="0"/>
+            </a:camera>
+            <a:lightRig rig="threePt" dir="t">
+              <a:rot lat="0" lon="0" rev="1200000"/>
+            </a:lightRig>
+          </a:scene3d>
+          <a:sp3d>
+            <a:bevelT w="63500" h="25400"/>
+          </a:sp3d>
+        </a:effectStyle>
+      </a:effectStyleLst>
+      <a:bgFillStyleLst>
+        <a:solidFill>
+          <a:schemeClr val="phClr"/>
+        </a:solidFill>
+        <a:gradFill rotWithShape="1">
+          <a:gsLst>
+            <a:gs pos="0">
+              <a:schemeClr val="phClr">
+                <a:tint val="40000"/>
+                <a:satMod val="350000"/>
+              </a:schemeClr>
+            </a:gs>
+            <a:gs pos="40000">
+              <a:schemeClr val="phClr">
+                <a:tint val="45000"/>
+                <a:shade val="99000"/>
+                <a:satMod val="350000"/>
+              </a:schemeClr>
+            </a:gs>
+            <a:gs pos="100000">
+              <a:schemeClr val="phClr">
+                <a:shade val="20000"/>
+                <a:satMod val="255000"/>
+              </a:schemeClr>
+            </a:gs>
+          </a:gsLst>
+          <a:path path="circle">
+            <a:fillToRect l="50000" t="-80000" r="50000" b="180000"/>
+          </a:path>
+        </a:gradFill>
+        <a:gradFill rotWithShape="1">
+          <a:gsLst>
+            <a:gs pos="0">
+              <a:schemeClr val="phClr">
+                <a:tint val="80000"/>
+                <a:satMod val="300000"/>
+              </a:schemeClr>
+            </a:gs>
+            <a:gs pos="100000">
+              <a:schemeClr val="phClr">
+                <a:shade val="30000"/>
+                <a:satMod val="200000"/>
+              </a:schemeClr>
+            </a:gs>
+          </a:gsLst>
+          <a:path path="circle">
+            <a:fillToRect l="50000" t="50000" r="50000" b="50000"/>
+          </a:path>
+        </a:gradFill>
+      </a:bgFillStyleLst>
+    </a:fmtScheme>
+  </a:themeElements>
+  <a:objectDefaults/>
+  <a:extraClrSchemeLst/>
+</a:theme>
+</file>
+
+<file path=ppt/theme/theme2.xml><?xml version="1.0" encoding="utf-8"?>
+<a:theme xmlns:a="http://schemas.openxmlformats.org/drawingml/2006/main">
   <a:themeElements>
     <a:clrScheme name="Default">
       <a:dk1>
@@ -14048,284 +14540,7 @@
       </a:bgFillStyleLst>
     </a:fmtScheme>
   </a:themeElements>
-</a:theme>
-</file>
-
-<file path=ppt/theme/theme2.xml><?xml version="1.0" encoding="utf-8"?>
-<a:theme xmlns:a="http://schemas.openxmlformats.org/drawingml/2006/main" xmlns:r="http://schemas.openxmlformats.org/officeDocument/2006/relationships" name="Simple Light">
-  <a:themeElements>
-    <a:clrScheme name="Simple Light">
-      <a:dk1>
-        <a:srgbClr val="000000"/>
-      </a:dk1>
-      <a:lt1>
-        <a:srgbClr val="FFFFFF"/>
-      </a:lt1>
-      <a:dk2>
-        <a:srgbClr val="595959"/>
-      </a:dk2>
-      <a:lt2>
-        <a:srgbClr val="EEEEEE"/>
-      </a:lt2>
-      <a:accent1>
-        <a:srgbClr val="4285F4"/>
-      </a:accent1>
-      <a:accent2>
-        <a:srgbClr val="212121"/>
-      </a:accent2>
-      <a:accent3>
-        <a:srgbClr val="78909C"/>
-      </a:accent3>
-      <a:accent4>
-        <a:srgbClr val="FFAB40"/>
-      </a:accent4>
-      <a:accent5>
-        <a:srgbClr val="0097A7"/>
-      </a:accent5>
-      <a:accent6>
-        <a:srgbClr val="EEFF41"/>
-      </a:accent6>
-      <a:hlink>
-        <a:srgbClr val="0097A7"/>
-      </a:hlink>
-      <a:folHlink>
-        <a:srgbClr val="0097A7"/>
-      </a:folHlink>
-    </a:clrScheme>
-    <a:fontScheme name="Office">
-      <a:majorFont>
-        <a:latin typeface="Arial"/>
-        <a:ea typeface=""/>
-        <a:cs typeface=""/>
-        <a:font script="Jpan" typeface="ＭＳ Ｐゴシック"/>
-        <a:font script="Hang" typeface="맑은 고딕"/>
-        <a:font script="Hans" typeface="宋体"/>
-        <a:font script="Hant" typeface="新細明體"/>
-        <a:font script="Arab" typeface="Times New Roman"/>
-        <a:font script="Hebr" typeface="Times New Roman"/>
-        <a:font script="Thai" typeface="Angsana New"/>
-        <a:font script="Ethi" typeface="Nyala"/>
-        <a:font script="Beng" typeface="Vrinda"/>
-        <a:font script="Gujr" typeface="Shruti"/>
-        <a:font script="Khmr" typeface="MoolBoran"/>
-        <a:font script="Knda" typeface="Tunga"/>
-        <a:font script="Guru" typeface="Raavi"/>
-        <a:font script="Cans" typeface="Euphemia"/>
-        <a:font script="Cher" typeface="Plantagenet Cherokee"/>
-        <a:font script="Yiii" typeface="Microsoft Yi Baiti"/>
-        <a:font script="Tibt" typeface="Microsoft Himalaya"/>
-        <a:font script="Thaa" typeface="MV Boli"/>
-        <a:font script="Deva" typeface="Mangal"/>
-        <a:font script="Telu" typeface="Gautami"/>
-        <a:font script="Taml" typeface="Latha"/>
-        <a:font script="Syrc" typeface="Estrangelo Edessa"/>
-        <a:font script="Orya" typeface="Kalinga"/>
-        <a:font script="Mlym" typeface="Kartika"/>
-        <a:font script="Laoo" typeface="DokChampa"/>
-        <a:font script="Sinh" typeface="Iskoola Pota"/>
-        <a:font script="Mong" typeface="Mongolian Baiti"/>
-        <a:font script="Viet" typeface="Times New Roman"/>
-        <a:font script="Uigh" typeface="Microsoft Uighur"/>
-        <a:font script="Geor" typeface="Sylfaen"/>
-      </a:majorFont>
-      <a:minorFont>
-        <a:latin typeface="Arial"/>
-        <a:ea typeface=""/>
-        <a:cs typeface=""/>
-        <a:font script="Jpan" typeface="ＭＳ Ｐゴシック"/>
-        <a:font script="Hang" typeface="맑은 고딕"/>
-        <a:font script="Hans" typeface="宋体"/>
-        <a:font script="Hant" typeface="新細明體"/>
-        <a:font script="Arab" typeface="Arial"/>
-        <a:font script="Hebr" typeface="Arial"/>
-        <a:font script="Thai" typeface="Cordia New"/>
-        <a:font script="Ethi" typeface="Nyala"/>
-        <a:font script="Beng" typeface="Vrinda"/>
-        <a:font script="Gujr" typeface="Shruti"/>
-        <a:font script="Khmr" typeface="DaunPenh"/>
-        <a:font script="Knda" typeface="Tunga"/>
-        <a:font script="Guru" typeface="Raavi"/>
-        <a:font script="Cans" typeface="Euphemia"/>
-        <a:font script="Cher" typeface="Plantagenet Cherokee"/>
-        <a:font script="Yiii" typeface="Microsoft Yi Baiti"/>
-        <a:font script="Tibt" typeface="Microsoft Himalaya"/>
-        <a:font script="Thaa" typeface="MV Boli"/>
-        <a:font script="Deva" typeface="Mangal"/>
-        <a:font script="Telu" typeface="Gautami"/>
-        <a:font script="Taml" typeface="Latha"/>
-        <a:font script="Syrc" typeface="Estrangelo Edessa"/>
-        <a:font script="Orya" typeface="Kalinga"/>
-        <a:font script="Mlym" typeface="Kartika"/>
-        <a:font script="Laoo" typeface="DokChampa"/>
-        <a:font script="Sinh" typeface="Iskoola Pota"/>
-        <a:font script="Mong" typeface="Mongolian Baiti"/>
-        <a:font script="Viet" typeface="Arial"/>
-        <a:font script="Uigh" typeface="Microsoft Uighur"/>
-        <a:font script="Geor" typeface="Sylfaen"/>
-      </a:minorFont>
-    </a:fontScheme>
-    <a:fmtScheme name="Office">
-      <a:fillStyleLst>
-        <a:solidFill>
-          <a:schemeClr val="phClr"/>
-        </a:solidFill>
-        <a:gradFill rotWithShape="1">
-          <a:gsLst>
-            <a:gs pos="0">
-              <a:schemeClr val="phClr">
-                <a:tint val="50000"/>
-                <a:satMod val="300000"/>
-              </a:schemeClr>
-            </a:gs>
-            <a:gs pos="35000">
-              <a:schemeClr val="phClr">
-                <a:tint val="37000"/>
-                <a:satMod val="300000"/>
-              </a:schemeClr>
-            </a:gs>
-            <a:gs pos="100000">
-              <a:schemeClr val="phClr">
-                <a:tint val="15000"/>
-                <a:satMod val="350000"/>
-              </a:schemeClr>
-            </a:gs>
-          </a:gsLst>
-          <a:lin ang="16200000" scaled="1"/>
-        </a:gradFill>
-        <a:gradFill rotWithShape="1">
-          <a:gsLst>
-            <a:gs pos="0">
-              <a:schemeClr val="phClr">
-                <a:tint val="100000"/>
-                <a:shade val="100000"/>
-                <a:satMod val="130000"/>
-              </a:schemeClr>
-            </a:gs>
-            <a:gs pos="100000">
-              <a:schemeClr val="phClr">
-                <a:tint val="50000"/>
-                <a:shade val="100000"/>
-                <a:satMod val="350000"/>
-              </a:schemeClr>
-            </a:gs>
-          </a:gsLst>
-          <a:lin ang="16200000" scaled="0"/>
-        </a:gradFill>
-      </a:fillStyleLst>
-      <a:lnStyleLst>
-        <a:ln w="9525" cap="flat" cmpd="sng" algn="ctr">
-          <a:solidFill>
-            <a:schemeClr val="phClr">
-              <a:shade val="95000"/>
-              <a:satMod val="105000"/>
-            </a:schemeClr>
-          </a:solidFill>
-          <a:prstDash val="solid"/>
-        </a:ln>
-        <a:ln w="25400" cap="flat" cmpd="sng" algn="ctr">
-          <a:solidFill>
-            <a:schemeClr val="phClr"/>
-          </a:solidFill>
-          <a:prstDash val="solid"/>
-        </a:ln>
-        <a:ln w="38100" cap="flat" cmpd="sng" algn="ctr">
-          <a:solidFill>
-            <a:schemeClr val="phClr"/>
-          </a:solidFill>
-          <a:prstDash val="solid"/>
-        </a:ln>
-      </a:lnStyleLst>
-      <a:effectStyleLst>
-        <a:effectStyle>
-          <a:effectLst>
-            <a:outerShdw blurRad="40000" dist="20000" dir="5400000" rotWithShape="0">
-              <a:srgbClr val="000000">
-                <a:alpha val="38000"/>
-              </a:srgbClr>
-            </a:outerShdw>
-          </a:effectLst>
-        </a:effectStyle>
-        <a:effectStyle>
-          <a:effectLst>
-            <a:outerShdw blurRad="40000" dist="23000" dir="5400000" rotWithShape="0">
-              <a:srgbClr val="000000">
-                <a:alpha val="35000"/>
-              </a:srgbClr>
-            </a:outerShdw>
-          </a:effectLst>
-        </a:effectStyle>
-        <a:effectStyle>
-          <a:effectLst>
-            <a:outerShdw blurRad="40000" dist="23000" dir="5400000" rotWithShape="0">
-              <a:srgbClr val="000000">
-                <a:alpha val="35000"/>
-              </a:srgbClr>
-            </a:outerShdw>
-          </a:effectLst>
-          <a:scene3d>
-            <a:camera prst="orthographicFront">
-              <a:rot lat="0" lon="0" rev="0"/>
-            </a:camera>
-            <a:lightRig rig="threePt" dir="t">
-              <a:rot lat="0" lon="0" rev="1200000"/>
-            </a:lightRig>
-          </a:scene3d>
-          <a:sp3d>
-            <a:bevelT w="63500" h="25400"/>
-          </a:sp3d>
-        </a:effectStyle>
-      </a:effectStyleLst>
-      <a:bgFillStyleLst>
-        <a:solidFill>
-          <a:schemeClr val="phClr"/>
-        </a:solidFill>
-        <a:gradFill rotWithShape="1">
-          <a:gsLst>
-            <a:gs pos="0">
-              <a:schemeClr val="phClr">
-                <a:tint val="40000"/>
-                <a:satMod val="350000"/>
-              </a:schemeClr>
-            </a:gs>
-            <a:gs pos="40000">
-              <a:schemeClr val="phClr">
-                <a:tint val="45000"/>
-                <a:shade val="99000"/>
-                <a:satMod val="350000"/>
-              </a:schemeClr>
-            </a:gs>
-            <a:gs pos="100000">
-              <a:schemeClr val="phClr">
-                <a:shade val="20000"/>
-                <a:satMod val="255000"/>
-              </a:schemeClr>
-            </a:gs>
-          </a:gsLst>
-          <a:path path="circle">
-            <a:fillToRect l="50000" t="-80000" r="50000" b="180000"/>
-          </a:path>
-        </a:gradFill>
-        <a:gradFill rotWithShape="1">
-          <a:gsLst>
-            <a:gs pos="0">
-              <a:schemeClr val="phClr">
-                <a:tint val="80000"/>
-                <a:satMod val="300000"/>
-              </a:schemeClr>
-            </a:gs>
-            <a:gs pos="100000">
-              <a:schemeClr val="phClr">
-                <a:shade val="30000"/>
-                <a:satMod val="200000"/>
-              </a:schemeClr>
-            </a:gs>
-          </a:gsLst>
-          <a:path path="circle">
-            <a:fillToRect l="50000" t="50000" r="50000" b="50000"/>
-          </a:path>
-        </a:gradFill>
-      </a:bgFillStyleLst>
-    </a:fmtScheme>
-  </a:themeElements>
+  <a:objectDefaults/>
+  <a:extraClrSchemeLst/>
 </a:theme>
 </file>